--- a/docs/example1_walkthrough.pptx
+++ b/docs/example1_walkthrough.pptx
@@ -7,6 +7,7 @@
   <p:sldIdLst>
     <p:sldId id="256" r:id="rId7"/>
     <p:sldId id="257" r:id="rId8"/>
+    <p:sldId id="258" r:id="rId9"/>
   </p:sldIdLst>
   <p:sldSz cx="9144000" cy="6858000" type="screen4x3"/>
   <p:notesSz cx="6858000" cy="9144000"/>
@@ -3091,14 +3092,102 @@
       <p:grpSpPr/>
       <p:sp>
         <p:nvSpPr>
-          <p:cNvPr id="2" name="TextBox 1"/>
+          <p:cNvPr id="2" name="Rectangle 1"/>
+          <p:cNvSpPr/>
+          <p:nvPr/>
+        </p:nvSpPr>
+        <p:spPr>
+          <a:xfrm>
+            <a:off x="0" y="0"/>
+            <a:ext cx="9144000" cy="6858000"/>
+          </a:xfrm>
+          <a:prstGeom prst="rect">
+            <a:avLst/>
+          </a:prstGeom>
+          <a:solidFill>
+            <a:srgbClr val="000000"/>
+          </a:solidFill>
+          <a:ln>
+            <a:noFill/>
+          </a:ln>
+        </p:spPr>
+        <p:style>
+          <a:lnRef idx="1">
+            <a:schemeClr val="accent1"/>
+          </a:lnRef>
+          <a:fillRef idx="3">
+            <a:schemeClr val="accent1"/>
+          </a:fillRef>
+          <a:effectRef idx="2">
+            <a:schemeClr val="accent1"/>
+          </a:effectRef>
+          <a:fontRef idx="minor">
+            <a:schemeClr val="lt1"/>
+          </a:fontRef>
+        </p:style>
+        <p:txBody>
+          <a:bodyPr rtlCol="0" anchor="ctr"/>
+          <a:lstStyle/>
+          <a:p>
+            <a:pPr algn="ctr"/>
+          </a:p>
+        </p:txBody>
+      </p:sp>
+      <p:sp>
+        <p:nvSpPr>
+          <p:cNvPr id="3" name="Rectangle 2"/>
+          <p:cNvSpPr/>
+          <p:nvPr/>
+        </p:nvSpPr>
+        <p:spPr>
+          <a:xfrm>
+            <a:off x="7909560" y="0"/>
+            <a:ext cx="1234440" cy="6858000"/>
+          </a:xfrm>
+          <a:prstGeom prst="rect">
+            <a:avLst/>
+          </a:prstGeom>
+          <a:solidFill>
+            <a:srgbClr val="FAFAFA"/>
+          </a:solidFill>
+          <a:ln w="9525">
+            <a:solidFill>
+              <a:srgbClr val="DCDCDC"/>
+            </a:solidFill>
+          </a:ln>
+        </p:spPr>
+        <p:style>
+          <a:lnRef idx="1">
+            <a:schemeClr val="accent1"/>
+          </a:lnRef>
+          <a:fillRef idx="3">
+            <a:schemeClr val="accent1"/>
+          </a:fillRef>
+          <a:effectRef idx="2">
+            <a:schemeClr val="accent1"/>
+          </a:effectRef>
+          <a:fontRef idx="minor">
+            <a:schemeClr val="lt1"/>
+          </a:fontRef>
+        </p:style>
+        <p:txBody>
+          <a:bodyPr rtlCol="0" anchor="ctr"/>
+          <a:lstStyle/>
+          <a:p>
+            <a:pPr algn="ctr"/>
+          </a:p>
+        </p:txBody>
+      </p:sp>
+      <p:sp>
+        <p:nvSpPr>
+          <p:cNvPr id="4" name="TextBox 3"/>
           <p:cNvSpPr txBox="1"/>
           <p:nvPr/>
         </p:nvSpPr>
         <p:spPr>
-          <a:xfrm>
-            <a:off x="731520" y="228600"/>
-            <a:ext cx="7680960" cy="685800"/>
+          <a:xfrm rot="16200000">
+            <a:off x="8001000" y="274320"/>
+            <a:ext cx="1051560" cy="6309360"/>
           </a:xfrm>
           <a:prstGeom prst="rect">
             <a:avLst/>
@@ -3106,14 +3195,17 @@
           <a:noFill/>
         </p:spPr>
         <p:txBody>
-          <a:bodyPr wrap="none">
+          <a:bodyPr wrap="none" anchor="ctr">
             <a:spAutoFit/>
           </a:bodyPr>
           <a:lstStyle/>
           <a:p>
             <a:pPr>
-              <a:defRPr sz="4000" b="1">
-                <a:latin typeface="Calibri"/>
+              <a:defRPr sz="2800">
+                <a:solidFill>
+                  <a:srgbClr val="141414"/>
+                </a:solidFill>
+                <a:latin typeface="Aptos"/>
               </a:defRPr>
             </a:pPr>
             <a:r>
@@ -3124,14 +3216,14 @@
       </p:sp>
       <p:sp>
         <p:nvSpPr>
-          <p:cNvPr id="3" name="TextBox 2"/>
+          <p:cNvPr id="5" name="TextBox 4"/>
           <p:cNvSpPr txBox="1"/>
           <p:nvPr/>
         </p:nvSpPr>
         <p:spPr>
           <a:xfrm>
-            <a:off x="731520" y="914400"/>
-            <a:ext cx="7680960" cy="914400"/>
+            <a:off x="731520" y="502920"/>
+            <a:ext cx="6812280" cy="1051560"/>
           </a:xfrm>
           <a:prstGeom prst="rect">
             <a:avLst/>
@@ -3146,40 +3238,98 @@
           <a:p>
             <a:r>
               <a:rPr sz="1600">
-                <a:latin typeface="Calibri"/>
+                <a:solidFill>
+                  <a:srgbClr val="E6E6E6"/>
+                </a:solidFill>
+                <a:latin typeface="Aptos"/>
               </a:rPr>
               <a:t>In our library for sets of integers, we require that all integers have certain functions like </a:t>
             </a:r>
             <a:r>
               <a:rPr sz="1600">
+                <a:solidFill>
+                  <a:srgbClr val="FFFFFF"/>
+                </a:solidFill>
                 <a:latin typeface="Consolas"/>
               </a:rPr>
               <a:t>min_value</a:t>
             </a:r>
             <a:r>
               <a:rPr sz="1600">
-                <a:latin typeface="Calibri"/>
+                <a:solidFill>
+                  <a:srgbClr val="E6E6E6"/>
+                </a:solidFill>
+                <a:latin typeface="Aptos"/>
               </a:rPr>
               <a:t>. We also want all integers to inherit certain other functions such as </a:t>
             </a:r>
             <a:r>
               <a:rPr sz="1600">
+                <a:solidFill>
+                  <a:srgbClr val="FFFFFF"/>
+                </a:solidFill>
                 <a:latin typeface="Consolas"/>
               </a:rPr>
               <a:t>exhausted_range</a:t>
             </a:r>
             <a:r>
               <a:rPr sz="1600">
-                <a:latin typeface="Calibri"/>
+                <a:solidFill>
+                  <a:srgbClr val="E6E6E6"/>
+                </a:solidFill>
+                <a:latin typeface="Aptos"/>
               </a:rPr>
               <a:t>.</a:t>
             </a:r>
+          </a:p>
+        </p:txBody>
+      </p:sp>
+      <p:sp>
+        <p:nvSpPr>
+          <p:cNvPr id="6" name="Rectangle 5"/>
+          <p:cNvSpPr/>
+          <p:nvPr/>
+        </p:nvSpPr>
+        <p:spPr>
+          <a:xfrm>
+            <a:off x="1369304" y="1618488"/>
+            <a:ext cx="5170951" cy="4992624"/>
+          </a:xfrm>
+          <a:prstGeom prst="rect">
+            <a:avLst/>
+          </a:prstGeom>
+          <a:solidFill>
+            <a:srgbClr val="0B0F14"/>
+          </a:solidFill>
+          <a:ln>
+            <a:noFill/>
+          </a:ln>
+        </p:spPr>
+        <p:style>
+          <a:lnRef idx="1">
+            <a:schemeClr val="accent1"/>
+          </a:lnRef>
+          <a:fillRef idx="3">
+            <a:schemeClr val="accent1"/>
+          </a:fillRef>
+          <a:effectRef idx="2">
+            <a:schemeClr val="accent1"/>
+          </a:effectRef>
+          <a:fontRef idx="minor">
+            <a:schemeClr val="lt1"/>
+          </a:fontRef>
+        </p:style>
+        <p:txBody>
+          <a:bodyPr rtlCol="0" anchor="ctr"/>
+          <a:lstStyle/>
+          <a:p>
+            <a:pPr algn="ctr"/>
           </a:p>
         </p:txBody>
       </p:sp>
       <p:pic>
         <p:nvPicPr>
-          <p:cNvPr id="4" name="Picture 3" descr="1_puzzle_diagram.png"/>
+          <p:cNvPr id="7" name="Picture 6" descr="1_puzzle_diagram.png"/>
           <p:cNvPicPr>
             <a:picLocks noChangeAspect="1"/>
           </p:cNvPicPr>
@@ -3193,8 +3343,8 @@
         </p:blipFill>
         <p:spPr>
           <a:xfrm>
-            <a:off x="2154480" y="1874519"/>
-            <a:ext cx="4835038" cy="4663440"/>
+            <a:off x="1442456" y="1691640"/>
+            <a:ext cx="5024647" cy="4846320"/>
           </a:xfrm>
           <a:prstGeom prst="rect">
             <a:avLst/>
@@ -3221,14 +3371,57 @@
       <p:grpSpPr/>
       <p:sp>
         <p:nvSpPr>
-          <p:cNvPr id="2" name="TextBox 1"/>
+          <p:cNvPr id="2" name="Rectangle 1"/>
+          <p:cNvSpPr/>
+          <p:nvPr/>
+        </p:nvSpPr>
+        <p:spPr>
+          <a:xfrm>
+            <a:off x="0" y="0"/>
+            <a:ext cx="9144000" cy="6858000"/>
+          </a:xfrm>
+          <a:prstGeom prst="rect">
+            <a:avLst/>
+          </a:prstGeom>
+          <a:solidFill>
+            <a:srgbClr val="000000"/>
+          </a:solidFill>
+          <a:ln>
+            <a:noFill/>
+          </a:ln>
+        </p:spPr>
+        <p:style>
+          <a:lnRef idx="1">
+            <a:schemeClr val="accent1"/>
+          </a:lnRef>
+          <a:fillRef idx="3">
+            <a:schemeClr val="accent1"/>
+          </a:fillRef>
+          <a:effectRef idx="2">
+            <a:schemeClr val="accent1"/>
+          </a:effectRef>
+          <a:fontRef idx="minor">
+            <a:schemeClr val="lt1"/>
+          </a:fontRef>
+        </p:style>
+        <p:txBody>
+          <a:bodyPr rtlCol="0" anchor="ctr"/>
+          <a:lstStyle/>
+          <a:p>
+            <a:pPr algn="ctr"/>
+          </a:p>
+        </p:txBody>
+      </p:sp>
+      <p:sp>
+        <p:nvSpPr>
+          <p:cNvPr id="3" name="TextBox 2"/>
           <p:cNvSpPr txBox="1"/>
           <p:nvPr/>
         </p:nvSpPr>
         <p:spPr>
           <a:xfrm>
-            <a:off x="731520" y="228600"/>
-            <a:ext cx="7680960" cy="685800"/>
+            <a:off x="164592" y="109728"/>
+            <a:ext cx="8814816" cy="6638544"/>
           </a:xfrm>
           <a:prstGeom prst="rect">
             <a:avLst/>
@@ -3242,13 +3435,1761 @@
           <a:lstStyle/>
           <a:p>
             <a:pPr>
-              <a:defRPr sz="4000" b="1">
-                <a:latin typeface="Calibri"/>
-              </a:defRPr>
+              <a:lnSpc>
+                <a:spcPct val="95000"/>
+              </a:lnSpc>
+              <a:spcBef>
+                <a:spcPts val="0"/>
+              </a:spcBef>
+              <a:spcAft>
+                <a:spcPts val="0"/>
+              </a:spcAft>
             </a:pPr>
             <a:r>
-              <a:t>Rust Solution</a:t>
-            </a:r>
+              <a:rPr sz="1600">
+                <a:solidFill>
+                  <a:srgbClr val="C586C0"/>
+                </a:solidFill>
+                <a:latin typeface="Consolas"/>
+              </a:rPr>
+              <a:t>use</a:t>
+            </a:r>
+            <a:r>
+              <a:rPr sz="1600">
+                <a:solidFill>
+                  <a:srgbClr val="DCDCDC"/>
+                </a:solidFill>
+                <a:latin typeface="Consolas"/>
+              </a:rPr>
+              <a:t> </a:t>
+            </a:r>
+            <a:r>
+              <a:rPr sz="1600">
+                <a:solidFill>
+                  <a:srgbClr val="DCDCDC"/>
+                </a:solidFill>
+                <a:latin typeface="Consolas"/>
+              </a:rPr>
+              <a:t>std</a:t>
+            </a:r>
+            <a:r>
+              <a:rPr sz="1600">
+                <a:solidFill>
+                  <a:srgbClr val="DCDCDC"/>
+                </a:solidFill>
+                <a:latin typeface="Consolas"/>
+              </a:rPr>
+              <a:t>::</a:t>
+            </a:r>
+            <a:r>
+              <a:rPr sz="1600">
+                <a:solidFill>
+                  <a:srgbClr val="DCDCDC"/>
+                </a:solidFill>
+                <a:latin typeface="Consolas"/>
+              </a:rPr>
+              <a:t>ops</a:t>
+            </a:r>
+            <a:r>
+              <a:rPr sz="1600">
+                <a:solidFill>
+                  <a:srgbClr val="DCDCDC"/>
+                </a:solidFill>
+                <a:latin typeface="Consolas"/>
+              </a:rPr>
+              <a:t>::</a:t>
+            </a:r>
+            <a:r>
+              <a:rPr sz="1600">
+                <a:solidFill>
+                  <a:srgbClr val="DCDCDC"/>
+                </a:solidFill>
+                <a:latin typeface="Consolas"/>
+              </a:rPr>
+              <a:t>RangeInclusive</a:t>
+            </a:r>
+            <a:r>
+              <a:rPr sz="1600">
+                <a:solidFill>
+                  <a:srgbClr val="DCDCDC"/>
+                </a:solidFill>
+                <a:latin typeface="Consolas"/>
+              </a:rPr>
+              <a:t>;</a:t>
+            </a:r>
+          </a:p>
+          <a:p>
+            <a:pPr>
+              <a:lnSpc>
+                <a:spcPct val="95000"/>
+              </a:lnSpc>
+              <a:spcBef>
+                <a:spcPts val="0"/>
+              </a:spcBef>
+              <a:spcAft>
+                <a:spcPts val="0"/>
+              </a:spcAft>
+            </a:pPr>
+          </a:p>
+          <a:p>
+            <a:pPr>
+              <a:lnSpc>
+                <a:spcPct val="95000"/>
+              </a:lnSpc>
+              <a:spcBef>
+                <a:spcPts val="0"/>
+              </a:spcBef>
+              <a:spcAft>
+                <a:spcPts val="0"/>
+              </a:spcAft>
+            </a:pPr>
+            <a:r>
+              <a:rPr sz="1600">
+                <a:solidFill>
+                  <a:srgbClr val="6A9955"/>
+                </a:solidFill>
+                <a:latin typeface="Consolas"/>
+              </a:rPr>
+              <a:t>// Mini version of `range-set-blaze`'s Integer pattern.</a:t>
+            </a:r>
+          </a:p>
+          <a:p>
+            <a:pPr>
+              <a:lnSpc>
+                <a:spcPct val="95000"/>
+              </a:lnSpc>
+              <a:spcBef>
+                <a:spcPts val="0"/>
+              </a:spcBef>
+              <a:spcAft>
+                <a:spcPts val="0"/>
+              </a:spcAft>
+            </a:pPr>
+            <a:r>
+              <a:rPr sz="1600">
+                <a:solidFill>
+                  <a:srgbClr val="C586C0"/>
+                </a:solidFill>
+                <a:latin typeface="Consolas"/>
+              </a:rPr>
+              <a:t>trait</a:t>
+            </a:r>
+            <a:r>
+              <a:rPr sz="1600">
+                <a:solidFill>
+                  <a:srgbClr val="DCDCDC"/>
+                </a:solidFill>
+                <a:latin typeface="Consolas"/>
+              </a:rPr>
+              <a:t> </a:t>
+            </a:r>
+            <a:r>
+              <a:rPr sz="1600">
+                <a:solidFill>
+                  <a:srgbClr val="DCDCDC"/>
+                </a:solidFill>
+                <a:latin typeface="Consolas"/>
+              </a:rPr>
+              <a:t>Integer</a:t>
+            </a:r>
+            <a:r>
+              <a:rPr sz="1600">
+                <a:solidFill>
+                  <a:srgbClr val="DCDCDC"/>
+                </a:solidFill>
+                <a:latin typeface="Consolas"/>
+              </a:rPr>
+              <a:t>:</a:t>
+            </a:r>
+            <a:r>
+              <a:rPr sz="1600">
+                <a:solidFill>
+                  <a:srgbClr val="DCDCDC"/>
+                </a:solidFill>
+                <a:latin typeface="Consolas"/>
+              </a:rPr>
+              <a:t> </a:t>
+            </a:r>
+            <a:r>
+              <a:rPr sz="1600">
+                <a:solidFill>
+                  <a:srgbClr val="4EC9B0"/>
+                </a:solidFill>
+                <a:latin typeface="Consolas"/>
+              </a:rPr>
+              <a:t>Copy</a:t>
+            </a:r>
+            <a:r>
+              <a:rPr sz="1600">
+                <a:solidFill>
+                  <a:srgbClr val="DCDCDC"/>
+                </a:solidFill>
+                <a:latin typeface="Consolas"/>
+              </a:rPr>
+              <a:t> </a:t>
+            </a:r>
+            <a:r>
+              <a:rPr sz="1600">
+                <a:solidFill>
+                  <a:srgbClr val="DCDCDC"/>
+                </a:solidFill>
+                <a:latin typeface="Consolas"/>
+              </a:rPr>
+              <a:t>+</a:t>
+            </a:r>
+            <a:r>
+              <a:rPr sz="1600">
+                <a:solidFill>
+                  <a:srgbClr val="DCDCDC"/>
+                </a:solidFill>
+                <a:latin typeface="Consolas"/>
+              </a:rPr>
+              <a:t> </a:t>
+            </a:r>
+            <a:r>
+              <a:rPr sz="1600">
+                <a:solidFill>
+                  <a:srgbClr val="4EC9B0"/>
+                </a:solidFill>
+                <a:latin typeface="Consolas"/>
+              </a:rPr>
+              <a:t>Ord</a:t>
+            </a:r>
+            <a:r>
+              <a:rPr sz="1600">
+                <a:solidFill>
+                  <a:srgbClr val="DCDCDC"/>
+                </a:solidFill>
+                <a:latin typeface="Consolas"/>
+              </a:rPr>
+              <a:t> </a:t>
+            </a:r>
+            <a:r>
+              <a:rPr sz="1600">
+                <a:solidFill>
+                  <a:srgbClr val="DCDCDC"/>
+                </a:solidFill>
+                <a:latin typeface="Consolas"/>
+              </a:rPr>
+              <a:t>{</a:t>
+            </a:r>
+          </a:p>
+          <a:p>
+            <a:pPr>
+              <a:lnSpc>
+                <a:spcPct val="95000"/>
+              </a:lnSpc>
+              <a:spcBef>
+                <a:spcPts val="0"/>
+              </a:spcBef>
+              <a:spcAft>
+                <a:spcPts val="0"/>
+              </a:spcAft>
+            </a:pPr>
+            <a:r>
+              <a:rPr sz="1600">
+                <a:solidFill>
+                  <a:srgbClr val="DCDCDC"/>
+                </a:solidFill>
+                <a:latin typeface="Consolas"/>
+              </a:rPr>
+              <a:t>    </a:t>
+            </a:r>
+            <a:r>
+              <a:rPr sz="1600">
+                <a:solidFill>
+                  <a:srgbClr val="C586C0"/>
+                </a:solidFill>
+                <a:latin typeface="Consolas"/>
+              </a:rPr>
+              <a:t>fn</a:t>
+            </a:r>
+            <a:r>
+              <a:rPr sz="1600">
+                <a:solidFill>
+                  <a:srgbClr val="DCDCDC"/>
+                </a:solidFill>
+                <a:latin typeface="Consolas"/>
+              </a:rPr>
+              <a:t> </a:t>
+            </a:r>
+            <a:r>
+              <a:rPr sz="1600">
+                <a:solidFill>
+                  <a:srgbClr val="DCDCAA"/>
+                </a:solidFill>
+                <a:latin typeface="Consolas"/>
+              </a:rPr>
+              <a:t>min_value</a:t>
+            </a:r>
+            <a:r>
+              <a:rPr sz="1600">
+                <a:solidFill>
+                  <a:srgbClr val="DCDCDC"/>
+                </a:solidFill>
+                <a:latin typeface="Consolas"/>
+              </a:rPr>
+              <a:t>(</a:t>
+            </a:r>
+            <a:r>
+              <a:rPr sz="1600">
+                <a:solidFill>
+                  <a:srgbClr val="DCDCDC"/>
+                </a:solidFill>
+                <a:latin typeface="Consolas"/>
+              </a:rPr>
+              <a:t>)</a:t>
+            </a:r>
+            <a:r>
+              <a:rPr sz="1600">
+                <a:solidFill>
+                  <a:srgbClr val="DCDCDC"/>
+                </a:solidFill>
+                <a:latin typeface="Consolas"/>
+              </a:rPr>
+              <a:t> </a:t>
+            </a:r>
+            <a:r>
+              <a:rPr sz="1600">
+                <a:solidFill>
+                  <a:srgbClr val="DCDCDC"/>
+                </a:solidFill>
+                <a:latin typeface="Consolas"/>
+              </a:rPr>
+              <a:t>-&gt;</a:t>
+            </a:r>
+            <a:r>
+              <a:rPr sz="1600">
+                <a:solidFill>
+                  <a:srgbClr val="DCDCDC"/>
+                </a:solidFill>
+                <a:latin typeface="Consolas"/>
+              </a:rPr>
+              <a:t> </a:t>
+            </a:r>
+            <a:r>
+              <a:rPr sz="1600">
+                <a:solidFill>
+                  <a:srgbClr val="4EC9B0"/>
+                </a:solidFill>
+                <a:latin typeface="Consolas"/>
+              </a:rPr>
+              <a:t>Self</a:t>
+            </a:r>
+            <a:r>
+              <a:rPr sz="1600">
+                <a:solidFill>
+                  <a:srgbClr val="DCDCDC"/>
+                </a:solidFill>
+                <a:latin typeface="Consolas"/>
+              </a:rPr>
+              <a:t>;</a:t>
+            </a:r>
+          </a:p>
+          <a:p>
+            <a:pPr>
+              <a:lnSpc>
+                <a:spcPct val="95000"/>
+              </a:lnSpc>
+              <a:spcBef>
+                <a:spcPts val="0"/>
+              </a:spcBef>
+              <a:spcAft>
+                <a:spcPts val="0"/>
+              </a:spcAft>
+            </a:pPr>
+            <a:r>
+              <a:rPr sz="1600">
+                <a:solidFill>
+                  <a:srgbClr val="DCDCDC"/>
+                </a:solidFill>
+                <a:latin typeface="Consolas"/>
+              </a:rPr>
+              <a:t>    </a:t>
+            </a:r>
+            <a:r>
+              <a:rPr sz="1600">
+                <a:solidFill>
+                  <a:srgbClr val="C586C0"/>
+                </a:solidFill>
+                <a:latin typeface="Consolas"/>
+              </a:rPr>
+              <a:t>fn</a:t>
+            </a:r>
+            <a:r>
+              <a:rPr sz="1600">
+                <a:solidFill>
+                  <a:srgbClr val="DCDCDC"/>
+                </a:solidFill>
+                <a:latin typeface="Consolas"/>
+              </a:rPr>
+              <a:t> </a:t>
+            </a:r>
+            <a:r>
+              <a:rPr sz="1600">
+                <a:solidFill>
+                  <a:srgbClr val="DCDCAA"/>
+                </a:solidFill>
+                <a:latin typeface="Consolas"/>
+              </a:rPr>
+              <a:t>max_value</a:t>
+            </a:r>
+            <a:r>
+              <a:rPr sz="1600">
+                <a:solidFill>
+                  <a:srgbClr val="DCDCDC"/>
+                </a:solidFill>
+                <a:latin typeface="Consolas"/>
+              </a:rPr>
+              <a:t>(</a:t>
+            </a:r>
+            <a:r>
+              <a:rPr sz="1600">
+                <a:solidFill>
+                  <a:srgbClr val="DCDCDC"/>
+                </a:solidFill>
+                <a:latin typeface="Consolas"/>
+              </a:rPr>
+              <a:t>)</a:t>
+            </a:r>
+            <a:r>
+              <a:rPr sz="1600">
+                <a:solidFill>
+                  <a:srgbClr val="DCDCDC"/>
+                </a:solidFill>
+                <a:latin typeface="Consolas"/>
+              </a:rPr>
+              <a:t> </a:t>
+            </a:r>
+            <a:r>
+              <a:rPr sz="1600">
+                <a:solidFill>
+                  <a:srgbClr val="DCDCDC"/>
+                </a:solidFill>
+                <a:latin typeface="Consolas"/>
+              </a:rPr>
+              <a:t>-&gt;</a:t>
+            </a:r>
+            <a:r>
+              <a:rPr sz="1600">
+                <a:solidFill>
+                  <a:srgbClr val="DCDCDC"/>
+                </a:solidFill>
+                <a:latin typeface="Consolas"/>
+              </a:rPr>
+              <a:t> </a:t>
+            </a:r>
+            <a:r>
+              <a:rPr sz="1600">
+                <a:solidFill>
+                  <a:srgbClr val="4EC9B0"/>
+                </a:solidFill>
+                <a:latin typeface="Consolas"/>
+              </a:rPr>
+              <a:t>Self</a:t>
+            </a:r>
+            <a:r>
+              <a:rPr sz="1600">
+                <a:solidFill>
+                  <a:srgbClr val="DCDCDC"/>
+                </a:solidFill>
+                <a:latin typeface="Consolas"/>
+              </a:rPr>
+              <a:t>;</a:t>
+            </a:r>
+          </a:p>
+          <a:p>
+            <a:pPr>
+              <a:lnSpc>
+                <a:spcPct val="95000"/>
+              </a:lnSpc>
+              <a:spcBef>
+                <a:spcPts val="0"/>
+              </a:spcBef>
+              <a:spcAft>
+                <a:spcPts val="0"/>
+              </a:spcAft>
+            </a:pPr>
+          </a:p>
+          <a:p>
+            <a:pPr>
+              <a:lnSpc>
+                <a:spcPct val="95000"/>
+              </a:lnSpc>
+              <a:spcBef>
+                <a:spcPts val="0"/>
+              </a:spcBef>
+              <a:spcAft>
+                <a:spcPts val="0"/>
+              </a:spcAft>
+            </a:pPr>
+            <a:r>
+              <a:rPr sz="1600">
+                <a:solidFill>
+                  <a:srgbClr val="DCDCDC"/>
+                </a:solidFill>
+                <a:latin typeface="Consolas"/>
+              </a:rPr>
+              <a:t>    </a:t>
+            </a:r>
+            <a:r>
+              <a:rPr sz="1600">
+                <a:solidFill>
+                  <a:srgbClr val="CE9178"/>
+                </a:solidFill>
+                <a:latin typeface="Consolas"/>
+              </a:rPr>
+              <a:t>/// Returns an exhausted range, which is a range that starts from the maximum value and ends at the minimum value.</a:t>
+            </a:r>
+          </a:p>
+          <a:p>
+            <a:pPr>
+              <a:lnSpc>
+                <a:spcPct val="95000"/>
+              </a:lnSpc>
+              <a:spcBef>
+                <a:spcPts val="0"/>
+              </a:spcBef>
+              <a:spcAft>
+                <a:spcPts val="0"/>
+              </a:spcAft>
+            </a:pPr>
+            <a:r>
+              <a:rPr sz="1600">
+                <a:solidFill>
+                  <a:srgbClr val="DCDCDC"/>
+                </a:solidFill>
+                <a:latin typeface="Consolas"/>
+              </a:rPr>
+              <a:t>    </a:t>
+            </a:r>
+            <a:r>
+              <a:rPr sz="1600">
+                <a:solidFill>
+                  <a:srgbClr val="CE9178"/>
+                </a:solidFill>
+                <a:latin typeface="Consolas"/>
+              </a:rPr>
+              <a:t>/// This results in an empty range.</a:t>
+            </a:r>
+          </a:p>
+          <a:p>
+            <a:pPr>
+              <a:lnSpc>
+                <a:spcPct val="95000"/>
+              </a:lnSpc>
+              <a:spcBef>
+                <a:spcPts val="0"/>
+              </a:spcBef>
+              <a:spcAft>
+                <a:spcPts val="0"/>
+              </a:spcAft>
+            </a:pPr>
+            <a:r>
+              <a:rPr sz="1600">
+                <a:solidFill>
+                  <a:srgbClr val="DCDCDC"/>
+                </a:solidFill>
+                <a:latin typeface="Consolas"/>
+              </a:rPr>
+              <a:t>    </a:t>
+            </a:r>
+            <a:r>
+              <a:rPr sz="1600">
+                <a:solidFill>
+                  <a:srgbClr val="6A9955"/>
+                </a:solidFill>
+                <a:latin typeface="Consolas"/>
+              </a:rPr>
+              <a:t>//</a:t>
+            </a:r>
+          </a:p>
+          <a:p>
+            <a:pPr>
+              <a:lnSpc>
+                <a:spcPct val="95000"/>
+              </a:lnSpc>
+              <a:spcBef>
+                <a:spcPts val="0"/>
+              </a:spcBef>
+              <a:spcAft>
+                <a:spcPts val="0"/>
+              </a:spcAft>
+            </a:pPr>
+            <a:r>
+              <a:rPr sz="1600">
+                <a:solidFill>
+                  <a:srgbClr val="DCDCDC"/>
+                </a:solidFill>
+                <a:latin typeface="Consolas"/>
+              </a:rPr>
+              <a:t>    </a:t>
+            </a:r>
+            <a:r>
+              <a:rPr sz="1600">
+                <a:solidFill>
+                  <a:srgbClr val="6A9955"/>
+                </a:solidFill>
+                <a:latin typeface="Consolas"/>
+              </a:rPr>
+              <a:t>// Default behavior inherited by implementors.</a:t>
+            </a:r>
+          </a:p>
+          <a:p>
+            <a:pPr>
+              <a:lnSpc>
+                <a:spcPct val="95000"/>
+              </a:lnSpc>
+              <a:spcBef>
+                <a:spcPts val="0"/>
+              </a:spcBef>
+              <a:spcAft>
+                <a:spcPts val="0"/>
+              </a:spcAft>
+            </a:pPr>
+            <a:r>
+              <a:rPr sz="1600">
+                <a:solidFill>
+                  <a:srgbClr val="DCDCDC"/>
+                </a:solidFill>
+                <a:latin typeface="Consolas"/>
+              </a:rPr>
+              <a:t>    </a:t>
+            </a:r>
+            <a:r>
+              <a:rPr sz="1600">
+                <a:solidFill>
+                  <a:srgbClr val="6A9955"/>
+                </a:solidFill>
+                <a:latin typeface="Consolas"/>
+              </a:rPr>
+              <a:t>// Any impl can override this method if it needs specialized behavior.</a:t>
+            </a:r>
+          </a:p>
+          <a:p>
+            <a:pPr>
+              <a:lnSpc>
+                <a:spcPct val="95000"/>
+              </a:lnSpc>
+              <a:spcBef>
+                <a:spcPts val="0"/>
+              </a:spcBef>
+              <a:spcAft>
+                <a:spcPts val="0"/>
+              </a:spcAft>
+            </a:pPr>
+            <a:r>
+              <a:rPr sz="1600">
+                <a:solidFill>
+                  <a:srgbClr val="DCDCDC"/>
+                </a:solidFill>
+                <a:latin typeface="Consolas"/>
+              </a:rPr>
+              <a:t>    </a:t>
+            </a:r>
+            <a:r>
+              <a:rPr sz="1600">
+                <a:solidFill>
+                  <a:srgbClr val="C586C0"/>
+                </a:solidFill>
+                <a:latin typeface="Consolas"/>
+              </a:rPr>
+              <a:t>fn</a:t>
+            </a:r>
+            <a:r>
+              <a:rPr sz="1600">
+                <a:solidFill>
+                  <a:srgbClr val="DCDCDC"/>
+                </a:solidFill>
+                <a:latin typeface="Consolas"/>
+              </a:rPr>
+              <a:t> </a:t>
+            </a:r>
+            <a:r>
+              <a:rPr sz="1600">
+                <a:solidFill>
+                  <a:srgbClr val="DCDCAA"/>
+                </a:solidFill>
+                <a:latin typeface="Consolas"/>
+              </a:rPr>
+              <a:t>exhausted_range</a:t>
+            </a:r>
+            <a:r>
+              <a:rPr sz="1600">
+                <a:solidFill>
+                  <a:srgbClr val="DCDCDC"/>
+                </a:solidFill>
+                <a:latin typeface="Consolas"/>
+              </a:rPr>
+              <a:t>(</a:t>
+            </a:r>
+            <a:r>
+              <a:rPr sz="1600">
+                <a:solidFill>
+                  <a:srgbClr val="DCDCDC"/>
+                </a:solidFill>
+                <a:latin typeface="Consolas"/>
+              </a:rPr>
+              <a:t>)</a:t>
+            </a:r>
+            <a:r>
+              <a:rPr sz="1600">
+                <a:solidFill>
+                  <a:srgbClr val="DCDCDC"/>
+                </a:solidFill>
+                <a:latin typeface="Consolas"/>
+              </a:rPr>
+              <a:t> </a:t>
+            </a:r>
+            <a:r>
+              <a:rPr sz="1600">
+                <a:solidFill>
+                  <a:srgbClr val="DCDCDC"/>
+                </a:solidFill>
+                <a:latin typeface="Consolas"/>
+              </a:rPr>
+              <a:t>-&gt;</a:t>
+            </a:r>
+            <a:r>
+              <a:rPr sz="1600">
+                <a:solidFill>
+                  <a:srgbClr val="DCDCDC"/>
+                </a:solidFill>
+                <a:latin typeface="Consolas"/>
+              </a:rPr>
+              <a:t> </a:t>
+            </a:r>
+            <a:r>
+              <a:rPr sz="1600">
+                <a:solidFill>
+                  <a:srgbClr val="4EC9B0"/>
+                </a:solidFill>
+                <a:latin typeface="Consolas"/>
+              </a:rPr>
+              <a:t>RangeInclusive</a:t>
+            </a:r>
+            <a:r>
+              <a:rPr sz="1600">
+                <a:solidFill>
+                  <a:srgbClr val="DCDCDC"/>
+                </a:solidFill>
+                <a:latin typeface="Consolas"/>
+              </a:rPr>
+              <a:t>&lt;</a:t>
+            </a:r>
+            <a:r>
+              <a:rPr sz="1600">
+                <a:solidFill>
+                  <a:srgbClr val="4EC9B0"/>
+                </a:solidFill>
+                <a:latin typeface="Consolas"/>
+              </a:rPr>
+              <a:t>Self</a:t>
+            </a:r>
+            <a:r>
+              <a:rPr sz="1600">
+                <a:solidFill>
+                  <a:srgbClr val="DCDCDC"/>
+                </a:solidFill>
+                <a:latin typeface="Consolas"/>
+              </a:rPr>
+              <a:t>&gt;</a:t>
+            </a:r>
+            <a:r>
+              <a:rPr sz="1600">
+                <a:solidFill>
+                  <a:srgbClr val="DCDCDC"/>
+                </a:solidFill>
+                <a:latin typeface="Consolas"/>
+              </a:rPr>
+              <a:t> </a:t>
+            </a:r>
+            <a:r>
+              <a:rPr sz="1600">
+                <a:solidFill>
+                  <a:srgbClr val="DCDCDC"/>
+                </a:solidFill>
+                <a:latin typeface="Consolas"/>
+              </a:rPr>
+              <a:t>{</a:t>
+            </a:r>
+          </a:p>
+          <a:p>
+            <a:pPr>
+              <a:lnSpc>
+                <a:spcPct val="95000"/>
+              </a:lnSpc>
+              <a:spcBef>
+                <a:spcPts val="0"/>
+              </a:spcBef>
+              <a:spcAft>
+                <a:spcPts val="0"/>
+              </a:spcAft>
+            </a:pPr>
+            <a:r>
+              <a:rPr sz="1600">
+                <a:solidFill>
+                  <a:srgbClr val="DCDCDC"/>
+                </a:solidFill>
+                <a:latin typeface="Consolas"/>
+              </a:rPr>
+              <a:t>        </a:t>
+            </a:r>
+            <a:r>
+              <a:rPr sz="1600">
+                <a:solidFill>
+                  <a:srgbClr val="DCDCAA"/>
+                </a:solidFill>
+                <a:latin typeface="Consolas"/>
+              </a:rPr>
+              <a:t>debug_assert!</a:t>
+            </a:r>
+            <a:r>
+              <a:rPr sz="1600">
+                <a:solidFill>
+                  <a:srgbClr val="DCDCDC"/>
+                </a:solidFill>
+                <a:latin typeface="Consolas"/>
+              </a:rPr>
+              <a:t>(</a:t>
+            </a:r>
+            <a:r>
+              <a:rPr sz="1600">
+                <a:solidFill>
+                  <a:srgbClr val="4EC9B0"/>
+                </a:solidFill>
+                <a:latin typeface="Consolas"/>
+              </a:rPr>
+              <a:t>Self</a:t>
+            </a:r>
+            <a:r>
+              <a:rPr sz="1600">
+                <a:solidFill>
+                  <a:srgbClr val="DCDCDC"/>
+                </a:solidFill>
+                <a:latin typeface="Consolas"/>
+              </a:rPr>
+              <a:t>::</a:t>
+            </a:r>
+            <a:r>
+              <a:rPr sz="1600">
+                <a:solidFill>
+                  <a:srgbClr val="DCDCDC"/>
+                </a:solidFill>
+                <a:latin typeface="Consolas"/>
+              </a:rPr>
+              <a:t>min_value</a:t>
+            </a:r>
+            <a:r>
+              <a:rPr sz="1600">
+                <a:solidFill>
+                  <a:srgbClr val="DCDCDC"/>
+                </a:solidFill>
+                <a:latin typeface="Consolas"/>
+              </a:rPr>
+              <a:t>(</a:t>
+            </a:r>
+            <a:r>
+              <a:rPr sz="1600">
+                <a:solidFill>
+                  <a:srgbClr val="DCDCDC"/>
+                </a:solidFill>
+                <a:latin typeface="Consolas"/>
+              </a:rPr>
+              <a:t>)</a:t>
+            </a:r>
+            <a:r>
+              <a:rPr sz="1600">
+                <a:solidFill>
+                  <a:srgbClr val="DCDCDC"/>
+                </a:solidFill>
+                <a:latin typeface="Consolas"/>
+              </a:rPr>
+              <a:t> </a:t>
+            </a:r>
+            <a:r>
+              <a:rPr sz="1600">
+                <a:solidFill>
+                  <a:srgbClr val="DCDCDC"/>
+                </a:solidFill>
+                <a:latin typeface="Consolas"/>
+              </a:rPr>
+              <a:t>&lt;</a:t>
+            </a:r>
+            <a:r>
+              <a:rPr sz="1600">
+                <a:solidFill>
+                  <a:srgbClr val="DCDCDC"/>
+                </a:solidFill>
+                <a:latin typeface="Consolas"/>
+              </a:rPr>
+              <a:t> </a:t>
+            </a:r>
+            <a:r>
+              <a:rPr sz="1600">
+                <a:solidFill>
+                  <a:srgbClr val="4EC9B0"/>
+                </a:solidFill>
+                <a:latin typeface="Consolas"/>
+              </a:rPr>
+              <a:t>Self</a:t>
+            </a:r>
+            <a:r>
+              <a:rPr sz="1600">
+                <a:solidFill>
+                  <a:srgbClr val="DCDCDC"/>
+                </a:solidFill>
+                <a:latin typeface="Consolas"/>
+              </a:rPr>
+              <a:t>::</a:t>
+            </a:r>
+            <a:r>
+              <a:rPr sz="1600">
+                <a:solidFill>
+                  <a:srgbClr val="DCDCDC"/>
+                </a:solidFill>
+                <a:latin typeface="Consolas"/>
+              </a:rPr>
+              <a:t>max_value</a:t>
+            </a:r>
+            <a:r>
+              <a:rPr sz="1600">
+                <a:solidFill>
+                  <a:srgbClr val="DCDCDC"/>
+                </a:solidFill>
+                <a:latin typeface="Consolas"/>
+              </a:rPr>
+              <a:t>(</a:t>
+            </a:r>
+            <a:r>
+              <a:rPr sz="1600">
+                <a:solidFill>
+                  <a:srgbClr val="DCDCDC"/>
+                </a:solidFill>
+                <a:latin typeface="Consolas"/>
+              </a:rPr>
+              <a:t>)</a:t>
+            </a:r>
+            <a:r>
+              <a:rPr sz="1600">
+                <a:solidFill>
+                  <a:srgbClr val="DCDCDC"/>
+                </a:solidFill>
+                <a:latin typeface="Consolas"/>
+              </a:rPr>
+              <a:t>,</a:t>
+            </a:r>
+            <a:r>
+              <a:rPr sz="1600">
+                <a:solidFill>
+                  <a:srgbClr val="DCDCDC"/>
+                </a:solidFill>
+                <a:latin typeface="Consolas"/>
+              </a:rPr>
+              <a:t> </a:t>
+            </a:r>
+            <a:r>
+              <a:rPr sz="1600">
+                <a:solidFill>
+                  <a:srgbClr val="CE9178"/>
+                </a:solidFill>
+                <a:latin typeface="Consolas"/>
+              </a:rPr>
+              <a:t>"</a:t>
+            </a:r>
+            <a:r>
+              <a:rPr sz="1600">
+                <a:solidFill>
+                  <a:srgbClr val="CE9178"/>
+                </a:solidFill>
+                <a:latin typeface="Consolas"/>
+              </a:rPr>
+              <a:t>Precondition violated: min_value must be less than max_value</a:t>
+            </a:r>
+            <a:r>
+              <a:rPr sz="1600">
+                <a:solidFill>
+                  <a:srgbClr val="CE9178"/>
+                </a:solidFill>
+                <a:latin typeface="Consolas"/>
+              </a:rPr>
+              <a:t>"</a:t>
+            </a:r>
+            <a:r>
+              <a:rPr sz="1600">
+                <a:solidFill>
+                  <a:srgbClr val="DCDCDC"/>
+                </a:solidFill>
+                <a:latin typeface="Consolas"/>
+              </a:rPr>
+              <a:t>)</a:t>
+            </a:r>
+            <a:r>
+              <a:rPr sz="1600">
+                <a:solidFill>
+                  <a:srgbClr val="DCDCDC"/>
+                </a:solidFill>
+                <a:latin typeface="Consolas"/>
+              </a:rPr>
+              <a:t>;</a:t>
+            </a:r>
+          </a:p>
+          <a:p>
+            <a:pPr>
+              <a:lnSpc>
+                <a:spcPct val="95000"/>
+              </a:lnSpc>
+              <a:spcBef>
+                <a:spcPts val="0"/>
+              </a:spcBef>
+              <a:spcAft>
+                <a:spcPts val="0"/>
+              </a:spcAft>
+            </a:pPr>
+            <a:r>
+              <a:rPr sz="1600">
+                <a:solidFill>
+                  <a:srgbClr val="DCDCDC"/>
+                </a:solidFill>
+                <a:latin typeface="Consolas"/>
+              </a:rPr>
+              <a:t>        </a:t>
+            </a:r>
+            <a:r>
+              <a:rPr sz="1600">
+                <a:solidFill>
+                  <a:srgbClr val="4EC9B0"/>
+                </a:solidFill>
+                <a:latin typeface="Consolas"/>
+              </a:rPr>
+              <a:t>Self</a:t>
+            </a:r>
+            <a:r>
+              <a:rPr sz="1600">
+                <a:solidFill>
+                  <a:srgbClr val="DCDCDC"/>
+                </a:solidFill>
+                <a:latin typeface="Consolas"/>
+              </a:rPr>
+              <a:t>::</a:t>
+            </a:r>
+            <a:r>
+              <a:rPr sz="1600">
+                <a:solidFill>
+                  <a:srgbClr val="DCDCDC"/>
+                </a:solidFill>
+                <a:latin typeface="Consolas"/>
+              </a:rPr>
+              <a:t>max_value</a:t>
+            </a:r>
+            <a:r>
+              <a:rPr sz="1600">
+                <a:solidFill>
+                  <a:srgbClr val="DCDCDC"/>
+                </a:solidFill>
+                <a:latin typeface="Consolas"/>
+              </a:rPr>
+              <a:t>(</a:t>
+            </a:r>
+            <a:r>
+              <a:rPr sz="1600">
+                <a:solidFill>
+                  <a:srgbClr val="DCDCDC"/>
+                </a:solidFill>
+                <a:latin typeface="Consolas"/>
+              </a:rPr>
+              <a:t>)</a:t>
+            </a:r>
+            <a:r>
+              <a:rPr sz="1600">
+                <a:solidFill>
+                  <a:srgbClr val="DCDCDC"/>
+                </a:solidFill>
+                <a:latin typeface="Consolas"/>
+              </a:rPr>
+              <a:t>..=</a:t>
+            </a:r>
+            <a:r>
+              <a:rPr sz="1600">
+                <a:solidFill>
+                  <a:srgbClr val="4EC9B0"/>
+                </a:solidFill>
+                <a:latin typeface="Consolas"/>
+              </a:rPr>
+              <a:t>Self</a:t>
+            </a:r>
+            <a:r>
+              <a:rPr sz="1600">
+                <a:solidFill>
+                  <a:srgbClr val="DCDCDC"/>
+                </a:solidFill>
+                <a:latin typeface="Consolas"/>
+              </a:rPr>
+              <a:t>::</a:t>
+            </a:r>
+            <a:r>
+              <a:rPr sz="1600">
+                <a:solidFill>
+                  <a:srgbClr val="DCDCDC"/>
+                </a:solidFill>
+                <a:latin typeface="Consolas"/>
+              </a:rPr>
+              <a:t>min_value</a:t>
+            </a:r>
+            <a:r>
+              <a:rPr sz="1600">
+                <a:solidFill>
+                  <a:srgbClr val="DCDCDC"/>
+                </a:solidFill>
+                <a:latin typeface="Consolas"/>
+              </a:rPr>
+              <a:t>(</a:t>
+            </a:r>
+            <a:r>
+              <a:rPr sz="1600">
+                <a:solidFill>
+                  <a:srgbClr val="DCDCDC"/>
+                </a:solidFill>
+                <a:latin typeface="Consolas"/>
+              </a:rPr>
+              <a:t>)</a:t>
+            </a:r>
+          </a:p>
+          <a:p>
+            <a:pPr>
+              <a:lnSpc>
+                <a:spcPct val="95000"/>
+              </a:lnSpc>
+              <a:spcBef>
+                <a:spcPts val="0"/>
+              </a:spcBef>
+              <a:spcAft>
+                <a:spcPts val="0"/>
+              </a:spcAft>
+            </a:pPr>
+            <a:r>
+              <a:rPr sz="1600">
+                <a:solidFill>
+                  <a:srgbClr val="DCDCDC"/>
+                </a:solidFill>
+                <a:latin typeface="Consolas"/>
+              </a:rPr>
+              <a:t>    </a:t>
+            </a:r>
+            <a:r>
+              <a:rPr sz="1600">
+                <a:solidFill>
+                  <a:srgbClr val="DCDCDC"/>
+                </a:solidFill>
+                <a:latin typeface="Consolas"/>
+              </a:rPr>
+              <a:t>}</a:t>
+            </a:r>
+          </a:p>
+          <a:p>
+            <a:pPr>
+              <a:lnSpc>
+                <a:spcPct val="95000"/>
+              </a:lnSpc>
+              <a:spcBef>
+                <a:spcPts val="0"/>
+              </a:spcBef>
+              <a:spcAft>
+                <a:spcPts val="0"/>
+              </a:spcAft>
+            </a:pPr>
+            <a:r>
+              <a:rPr sz="1600">
+                <a:solidFill>
+                  <a:srgbClr val="DCDCDC"/>
+                </a:solidFill>
+                <a:latin typeface="Consolas"/>
+              </a:rPr>
+              <a:t>}</a:t>
+            </a:r>
+          </a:p>
+          <a:p>
+            <a:pPr>
+              <a:lnSpc>
+                <a:spcPct val="95000"/>
+              </a:lnSpc>
+              <a:spcBef>
+                <a:spcPts val="0"/>
+              </a:spcBef>
+              <a:spcAft>
+                <a:spcPts val="0"/>
+              </a:spcAft>
+            </a:pPr>
+          </a:p>
+          <a:p>
+            <a:pPr>
+              <a:lnSpc>
+                <a:spcPct val="95000"/>
+              </a:lnSpc>
+              <a:spcBef>
+                <a:spcPts val="0"/>
+              </a:spcBef>
+              <a:spcAft>
+                <a:spcPts val="0"/>
+              </a:spcAft>
+            </a:pPr>
+            <a:r>
+              <a:rPr sz="1600">
+                <a:solidFill>
+                  <a:srgbClr val="C586C0"/>
+                </a:solidFill>
+                <a:latin typeface="Consolas"/>
+              </a:rPr>
+              <a:t>impl</a:t>
+            </a:r>
+            <a:r>
+              <a:rPr sz="1600">
+                <a:solidFill>
+                  <a:srgbClr val="DCDCDC"/>
+                </a:solidFill>
+                <a:latin typeface="Consolas"/>
+              </a:rPr>
+              <a:t> </a:t>
+            </a:r>
+            <a:r>
+              <a:rPr sz="1600">
+                <a:solidFill>
+                  <a:srgbClr val="DCDCDC"/>
+                </a:solidFill>
+                <a:latin typeface="Consolas"/>
+              </a:rPr>
+              <a:t>Integer</a:t>
+            </a:r>
+            <a:r>
+              <a:rPr sz="1600">
+                <a:solidFill>
+                  <a:srgbClr val="DCDCDC"/>
+                </a:solidFill>
+                <a:latin typeface="Consolas"/>
+              </a:rPr>
+              <a:t> </a:t>
+            </a:r>
+            <a:r>
+              <a:rPr sz="1600">
+                <a:solidFill>
+                  <a:srgbClr val="C586C0"/>
+                </a:solidFill>
+                <a:latin typeface="Consolas"/>
+              </a:rPr>
+              <a:t>for</a:t>
+            </a:r>
+            <a:r>
+              <a:rPr sz="1600">
+                <a:solidFill>
+                  <a:srgbClr val="DCDCDC"/>
+                </a:solidFill>
+                <a:latin typeface="Consolas"/>
+              </a:rPr>
+              <a:t> </a:t>
+            </a:r>
+            <a:r>
+              <a:rPr sz="1600">
+                <a:solidFill>
+                  <a:srgbClr val="C586C0"/>
+                </a:solidFill>
+                <a:latin typeface="Consolas"/>
+              </a:rPr>
+              <a:t>u8</a:t>
+            </a:r>
+            <a:r>
+              <a:rPr sz="1600">
+                <a:solidFill>
+                  <a:srgbClr val="DCDCDC"/>
+                </a:solidFill>
+                <a:latin typeface="Consolas"/>
+              </a:rPr>
+              <a:t> </a:t>
+            </a:r>
+            <a:r>
+              <a:rPr sz="1600">
+                <a:solidFill>
+                  <a:srgbClr val="DCDCDC"/>
+                </a:solidFill>
+                <a:latin typeface="Consolas"/>
+              </a:rPr>
+              <a:t>{</a:t>
+            </a:r>
+          </a:p>
+          <a:p>
+            <a:pPr>
+              <a:lnSpc>
+                <a:spcPct val="95000"/>
+              </a:lnSpc>
+              <a:spcBef>
+                <a:spcPts val="0"/>
+              </a:spcBef>
+              <a:spcAft>
+                <a:spcPts val="0"/>
+              </a:spcAft>
+            </a:pPr>
+            <a:r>
+              <a:rPr sz="1600">
+                <a:solidFill>
+                  <a:srgbClr val="DCDCDC"/>
+                </a:solidFill>
+                <a:latin typeface="Consolas"/>
+              </a:rPr>
+              <a:t>    </a:t>
+            </a:r>
+            <a:r>
+              <a:rPr sz="1600">
+                <a:solidFill>
+                  <a:srgbClr val="C586C0"/>
+                </a:solidFill>
+                <a:latin typeface="Consolas"/>
+              </a:rPr>
+              <a:t>fn</a:t>
+            </a:r>
+            <a:r>
+              <a:rPr sz="1600">
+                <a:solidFill>
+                  <a:srgbClr val="DCDCDC"/>
+                </a:solidFill>
+                <a:latin typeface="Consolas"/>
+              </a:rPr>
+              <a:t> </a:t>
+            </a:r>
+            <a:r>
+              <a:rPr sz="1600">
+                <a:solidFill>
+                  <a:srgbClr val="DCDCAA"/>
+                </a:solidFill>
+                <a:latin typeface="Consolas"/>
+              </a:rPr>
+              <a:t>min_value</a:t>
+            </a:r>
+            <a:r>
+              <a:rPr sz="1600">
+                <a:solidFill>
+                  <a:srgbClr val="DCDCDC"/>
+                </a:solidFill>
+                <a:latin typeface="Consolas"/>
+              </a:rPr>
+              <a:t>(</a:t>
+            </a:r>
+            <a:r>
+              <a:rPr sz="1600">
+                <a:solidFill>
+                  <a:srgbClr val="DCDCDC"/>
+                </a:solidFill>
+                <a:latin typeface="Consolas"/>
+              </a:rPr>
+              <a:t>)</a:t>
+            </a:r>
+            <a:r>
+              <a:rPr sz="1600">
+                <a:solidFill>
+                  <a:srgbClr val="DCDCDC"/>
+                </a:solidFill>
+                <a:latin typeface="Consolas"/>
+              </a:rPr>
+              <a:t> </a:t>
+            </a:r>
+            <a:r>
+              <a:rPr sz="1600">
+                <a:solidFill>
+                  <a:srgbClr val="DCDCDC"/>
+                </a:solidFill>
+                <a:latin typeface="Consolas"/>
+              </a:rPr>
+              <a:t>-&gt;</a:t>
+            </a:r>
+            <a:r>
+              <a:rPr sz="1600">
+                <a:solidFill>
+                  <a:srgbClr val="DCDCDC"/>
+                </a:solidFill>
+                <a:latin typeface="Consolas"/>
+              </a:rPr>
+              <a:t> </a:t>
+            </a:r>
+            <a:r>
+              <a:rPr sz="1600">
+                <a:solidFill>
+                  <a:srgbClr val="4EC9B0"/>
+                </a:solidFill>
+                <a:latin typeface="Consolas"/>
+              </a:rPr>
+              <a:t>Self</a:t>
+            </a:r>
+            <a:r>
+              <a:rPr sz="1600">
+                <a:solidFill>
+                  <a:srgbClr val="DCDCDC"/>
+                </a:solidFill>
+                <a:latin typeface="Consolas"/>
+              </a:rPr>
+              <a:t> </a:t>
+            </a:r>
+            <a:r>
+              <a:rPr sz="1600">
+                <a:solidFill>
+                  <a:srgbClr val="DCDCDC"/>
+                </a:solidFill>
+                <a:latin typeface="Consolas"/>
+              </a:rPr>
+              <a:t>{</a:t>
+            </a:r>
+          </a:p>
+          <a:p>
+            <a:pPr>
+              <a:lnSpc>
+                <a:spcPct val="95000"/>
+              </a:lnSpc>
+              <a:spcBef>
+                <a:spcPts val="0"/>
+              </a:spcBef>
+              <a:spcAft>
+                <a:spcPts val="0"/>
+              </a:spcAft>
+            </a:pPr>
+            <a:r>
+              <a:rPr sz="1600">
+                <a:solidFill>
+                  <a:srgbClr val="DCDCDC"/>
+                </a:solidFill>
+                <a:latin typeface="Consolas"/>
+              </a:rPr>
+              <a:t>        </a:t>
+            </a:r>
+            <a:r>
+              <a:rPr sz="1600">
+                <a:solidFill>
+                  <a:srgbClr val="C586C0"/>
+                </a:solidFill>
+                <a:latin typeface="Consolas"/>
+              </a:rPr>
+              <a:t>u8</a:t>
+            </a:r>
+            <a:r>
+              <a:rPr sz="1600">
+                <a:solidFill>
+                  <a:srgbClr val="DCDCDC"/>
+                </a:solidFill>
+                <a:latin typeface="Consolas"/>
+              </a:rPr>
+              <a:t>::</a:t>
+            </a:r>
+            <a:r>
+              <a:rPr sz="1600">
+                <a:solidFill>
+                  <a:srgbClr val="DCDCDC"/>
+                </a:solidFill>
+                <a:latin typeface="Consolas"/>
+              </a:rPr>
+              <a:t>MIN</a:t>
+            </a:r>
+          </a:p>
+          <a:p>
+            <a:pPr>
+              <a:lnSpc>
+                <a:spcPct val="95000"/>
+              </a:lnSpc>
+              <a:spcBef>
+                <a:spcPts val="0"/>
+              </a:spcBef>
+              <a:spcAft>
+                <a:spcPts val="0"/>
+              </a:spcAft>
+            </a:pPr>
+            <a:r>
+              <a:rPr sz="1600">
+                <a:solidFill>
+                  <a:srgbClr val="DCDCDC"/>
+                </a:solidFill>
+                <a:latin typeface="Consolas"/>
+              </a:rPr>
+              <a:t>    </a:t>
+            </a:r>
+            <a:r>
+              <a:rPr sz="1600">
+                <a:solidFill>
+                  <a:srgbClr val="DCDCDC"/>
+                </a:solidFill>
+                <a:latin typeface="Consolas"/>
+              </a:rPr>
+              <a:t>}</a:t>
+            </a:r>
+          </a:p>
+          <a:p>
+            <a:pPr>
+              <a:lnSpc>
+                <a:spcPct val="95000"/>
+              </a:lnSpc>
+              <a:spcBef>
+                <a:spcPts val="0"/>
+              </a:spcBef>
+              <a:spcAft>
+                <a:spcPts val="0"/>
+              </a:spcAft>
+            </a:pPr>
+          </a:p>
+          <a:p>
+            <a:pPr>
+              <a:lnSpc>
+                <a:spcPct val="95000"/>
+              </a:lnSpc>
+              <a:spcBef>
+                <a:spcPts val="0"/>
+              </a:spcBef>
+              <a:spcAft>
+                <a:spcPts val="0"/>
+              </a:spcAft>
+            </a:pPr>
+            <a:r>
+              <a:rPr sz="1600">
+                <a:solidFill>
+                  <a:srgbClr val="DCDCDC"/>
+                </a:solidFill>
+                <a:latin typeface="Consolas"/>
+              </a:rPr>
+              <a:t>    </a:t>
+            </a:r>
+            <a:r>
+              <a:rPr sz="1600">
+                <a:solidFill>
+                  <a:srgbClr val="C586C0"/>
+                </a:solidFill>
+                <a:latin typeface="Consolas"/>
+              </a:rPr>
+              <a:t>fn</a:t>
+            </a:r>
+            <a:r>
+              <a:rPr sz="1600">
+                <a:solidFill>
+                  <a:srgbClr val="DCDCDC"/>
+                </a:solidFill>
+                <a:latin typeface="Consolas"/>
+              </a:rPr>
+              <a:t> </a:t>
+            </a:r>
+            <a:r>
+              <a:rPr sz="1600">
+                <a:solidFill>
+                  <a:srgbClr val="DCDCAA"/>
+                </a:solidFill>
+                <a:latin typeface="Consolas"/>
+              </a:rPr>
+              <a:t>max_value</a:t>
+            </a:r>
+            <a:r>
+              <a:rPr sz="1600">
+                <a:solidFill>
+                  <a:srgbClr val="DCDCDC"/>
+                </a:solidFill>
+                <a:latin typeface="Consolas"/>
+              </a:rPr>
+              <a:t>(</a:t>
+            </a:r>
+            <a:r>
+              <a:rPr sz="1600">
+                <a:solidFill>
+                  <a:srgbClr val="DCDCDC"/>
+                </a:solidFill>
+                <a:latin typeface="Consolas"/>
+              </a:rPr>
+              <a:t>)</a:t>
+            </a:r>
+            <a:r>
+              <a:rPr sz="1600">
+                <a:solidFill>
+                  <a:srgbClr val="DCDCDC"/>
+                </a:solidFill>
+                <a:latin typeface="Consolas"/>
+              </a:rPr>
+              <a:t> </a:t>
+            </a:r>
+            <a:r>
+              <a:rPr sz="1600">
+                <a:solidFill>
+                  <a:srgbClr val="DCDCDC"/>
+                </a:solidFill>
+                <a:latin typeface="Consolas"/>
+              </a:rPr>
+              <a:t>-&gt;</a:t>
+            </a:r>
+            <a:r>
+              <a:rPr sz="1600">
+                <a:solidFill>
+                  <a:srgbClr val="DCDCDC"/>
+                </a:solidFill>
+                <a:latin typeface="Consolas"/>
+              </a:rPr>
+              <a:t> </a:t>
+            </a:r>
+            <a:r>
+              <a:rPr sz="1600">
+                <a:solidFill>
+                  <a:srgbClr val="4EC9B0"/>
+                </a:solidFill>
+                <a:latin typeface="Consolas"/>
+              </a:rPr>
+              <a:t>Self</a:t>
+            </a:r>
+            <a:r>
+              <a:rPr sz="1600">
+                <a:solidFill>
+                  <a:srgbClr val="DCDCDC"/>
+                </a:solidFill>
+                <a:latin typeface="Consolas"/>
+              </a:rPr>
+              <a:t> </a:t>
+            </a:r>
+            <a:r>
+              <a:rPr sz="1600">
+                <a:solidFill>
+                  <a:srgbClr val="DCDCDC"/>
+                </a:solidFill>
+                <a:latin typeface="Consolas"/>
+              </a:rPr>
+              <a:t>{</a:t>
+            </a:r>
+          </a:p>
+          <a:p>
+            <a:pPr>
+              <a:lnSpc>
+                <a:spcPct val="95000"/>
+              </a:lnSpc>
+              <a:spcBef>
+                <a:spcPts val="0"/>
+              </a:spcBef>
+              <a:spcAft>
+                <a:spcPts val="0"/>
+              </a:spcAft>
+            </a:pPr>
+            <a:r>
+              <a:rPr sz="1600">
+                <a:solidFill>
+                  <a:srgbClr val="DCDCDC"/>
+                </a:solidFill>
+                <a:latin typeface="Consolas"/>
+              </a:rPr>
+              <a:t>        </a:t>
+            </a:r>
+            <a:r>
+              <a:rPr sz="1600">
+                <a:solidFill>
+                  <a:srgbClr val="C586C0"/>
+                </a:solidFill>
+                <a:latin typeface="Consolas"/>
+              </a:rPr>
+              <a:t>u8</a:t>
+            </a:r>
+            <a:r>
+              <a:rPr sz="1600">
+                <a:solidFill>
+                  <a:srgbClr val="DCDCDC"/>
+                </a:solidFill>
+                <a:latin typeface="Consolas"/>
+              </a:rPr>
+              <a:t>::</a:t>
+            </a:r>
+            <a:r>
+              <a:rPr sz="1600">
+                <a:solidFill>
+                  <a:srgbClr val="DCDCDC"/>
+                </a:solidFill>
+                <a:latin typeface="Consolas"/>
+              </a:rPr>
+              <a:t>MAX</a:t>
+            </a:r>
+          </a:p>
+          <a:p>
+            <a:pPr>
+              <a:lnSpc>
+                <a:spcPct val="95000"/>
+              </a:lnSpc>
+              <a:spcBef>
+                <a:spcPts val="0"/>
+              </a:spcBef>
+              <a:spcAft>
+                <a:spcPts val="0"/>
+              </a:spcAft>
+            </a:pPr>
+            <a:r>
+              <a:rPr sz="1600">
+                <a:solidFill>
+                  <a:srgbClr val="DCDCDC"/>
+                </a:solidFill>
+                <a:latin typeface="Consolas"/>
+              </a:rPr>
+              <a:t>    </a:t>
+            </a:r>
+            <a:r>
+              <a:rPr sz="1600">
+                <a:solidFill>
+                  <a:srgbClr val="DCDCDC"/>
+                </a:solidFill>
+                <a:latin typeface="Consolas"/>
+              </a:rPr>
+              <a:t>}</a:t>
+            </a:r>
+          </a:p>
+        </p:txBody>
+      </p:sp>
+    </p:spTree>
+  </p:cSld>
+  <p:clrMapOvr>
+    <a:masterClrMapping/>
+  </p:clrMapOvr>
+</p:sld>
+</file>
+
+<file path=ppt/slides/slide3.xml><?xml version="1.0" encoding="utf-8"?>
+<p:sld xmlns:a="http://schemas.openxmlformats.org/drawingml/2006/main" xmlns:p="http://schemas.openxmlformats.org/presentationml/2006/main" xmlns:r="http://schemas.openxmlformats.org/officeDocument/2006/relationships">
+  <p:cSld>
+    <p:spTree>
+      <p:nvGrpSpPr>
+        <p:cNvPr id="1" name=""/>
+        <p:cNvGrpSpPr/>
+        <p:nvPr/>
+      </p:nvGrpSpPr>
+      <p:grpSpPr/>
+      <p:sp>
+        <p:nvSpPr>
+          <p:cNvPr id="2" name="Rectangle 1"/>
+          <p:cNvSpPr/>
+          <p:nvPr/>
+        </p:nvSpPr>
+        <p:spPr>
+          <a:xfrm>
+            <a:off x="0" y="0"/>
+            <a:ext cx="9144000" cy="6858000"/>
+          </a:xfrm>
+          <a:prstGeom prst="rect">
+            <a:avLst/>
+          </a:prstGeom>
+          <a:solidFill>
+            <a:srgbClr val="000000"/>
+          </a:solidFill>
+          <a:ln>
+            <a:noFill/>
+          </a:ln>
+        </p:spPr>
+        <p:style>
+          <a:lnRef idx="1">
+            <a:schemeClr val="accent1"/>
+          </a:lnRef>
+          <a:fillRef idx="3">
+            <a:schemeClr val="accent1"/>
+          </a:fillRef>
+          <a:effectRef idx="2">
+            <a:schemeClr val="accent1"/>
+          </a:effectRef>
+          <a:fontRef idx="minor">
+            <a:schemeClr val="lt1"/>
+          </a:fontRef>
+        </p:style>
+        <p:txBody>
+          <a:bodyPr rtlCol="0" anchor="ctr"/>
+          <a:lstStyle/>
+          <a:p>
+            <a:pPr algn="ctr"/>
           </a:p>
         </p:txBody>
       </p:sp>
@@ -3260,8 +5201,8 @@
         </p:nvSpPr>
         <p:spPr>
           <a:xfrm>
-            <a:off x="548640" y="1051560"/>
-            <a:ext cx="8046720" cy="5486400"/>
+            <a:off x="164592" y="109728"/>
+            <a:ext cx="8814816" cy="6638544"/>
           </a:xfrm>
           <a:prstGeom prst="rect">
             <a:avLst/>
@@ -3276,7 +5217,7 @@
           <a:p>
             <a:pPr>
               <a:lnSpc>
-                <a:spcPct val="100000"/>
+                <a:spcPct val="95000"/>
               </a:lnSpc>
               <a:spcBef>
                 <a:spcPts val="0"/>
@@ -3286,82 +5227,19 @@
               </a:spcAft>
             </a:pPr>
             <a:r>
-              <a:rPr sz="1000">
-                <a:solidFill>
-                  <a:srgbClr val="C586C0"/>
-                </a:solidFill>
-                <a:latin typeface="Consolas"/>
-              </a:rPr>
-              <a:t>use</a:t>
-            </a:r>
-            <a:r>
-              <a:rPr sz="1000">
-                <a:solidFill>
-                  <a:srgbClr val="DCDCDC"/>
-                </a:solidFill>
-                <a:latin typeface="Consolas"/>
-              </a:rPr>
-              <a:t> </a:t>
-            </a:r>
-            <a:r>
-              <a:rPr sz="1000">
-                <a:solidFill>
-                  <a:srgbClr val="DCDCDC"/>
-                </a:solidFill>
-                <a:latin typeface="Consolas"/>
-              </a:rPr>
-              <a:t>std</a:t>
-            </a:r>
-            <a:r>
-              <a:rPr sz="1000">
-                <a:solidFill>
-                  <a:srgbClr val="DCDCDC"/>
-                </a:solidFill>
-                <a:latin typeface="Consolas"/>
-              </a:rPr>
-              <a:t>::</a:t>
-            </a:r>
-            <a:r>
-              <a:rPr sz="1000">
-                <a:solidFill>
-                  <a:srgbClr val="DCDCDC"/>
-                </a:solidFill>
-                <a:latin typeface="Consolas"/>
-              </a:rPr>
-              <a:t>ops</a:t>
-            </a:r>
-            <a:r>
-              <a:rPr sz="1000">
-                <a:solidFill>
-                  <a:srgbClr val="DCDCDC"/>
-                </a:solidFill>
-                <a:latin typeface="Consolas"/>
-              </a:rPr>
-              <a:t>::</a:t>
-            </a:r>
-            <a:r>
-              <a:rPr sz="1000">
-                <a:solidFill>
-                  <a:srgbClr val="DCDCDC"/>
-                </a:solidFill>
-                <a:latin typeface="Consolas"/>
-              </a:rPr>
-              <a:t>RangeInclusive</a:t>
-            </a:r>
-            <a:r>
-              <a:rPr sz="1000">
-                <a:solidFill>
-                  <a:srgbClr val="DCDCDC"/>
-                </a:solidFill>
-                <a:latin typeface="Consolas"/>
-              </a:rPr>
-              <a:t>;</a:t>
+              <a:rPr sz="1600">
+                <a:solidFill>
+                  <a:srgbClr val="DCDCDC"/>
+                </a:solidFill>
+                <a:latin typeface="Consolas"/>
+              </a:rPr>
+              <a:t>}</a:t>
             </a:r>
           </a:p>
           <a:p>
             <a:pPr>
               <a:lnSpc>
-                <a:spcPct val="100000"/>
+                <a:spcPct val="95000"/>
               </a:lnSpc>
               <a:spcBef>
                 <a:spcPts val="0"/>
@@ -3374,7 +5252,7 @@
           <a:p>
             <a:pPr>
               <a:lnSpc>
-                <a:spcPct val="100000"/>
+                <a:spcPct val="95000"/>
               </a:lnSpc>
               <a:spcBef>
                 <a:spcPts val="0"/>
@@ -3384,19 +5262,91 @@
               </a:spcAft>
             </a:pPr>
             <a:r>
-              <a:rPr sz="1000">
-                <a:solidFill>
-                  <a:srgbClr val="6A9955"/>
-                </a:solidFill>
-                <a:latin typeface="Consolas"/>
-              </a:rPr>
-              <a:t>// Mini version of `range-set-blaze`'s Integer pattern.</a:t>
+              <a:rPr sz="1600">
+                <a:solidFill>
+                  <a:srgbClr val="C586C0"/>
+                </a:solidFill>
+                <a:latin typeface="Consolas"/>
+              </a:rPr>
+              <a:t>impl</a:t>
+            </a:r>
+            <a:r>
+              <a:rPr sz="1600">
+                <a:solidFill>
+                  <a:srgbClr val="DCDCDC"/>
+                </a:solidFill>
+                <a:latin typeface="Consolas"/>
+              </a:rPr>
+              <a:t> </a:t>
+            </a:r>
+            <a:r>
+              <a:rPr sz="1600">
+                <a:solidFill>
+                  <a:srgbClr val="DCDCDC"/>
+                </a:solidFill>
+                <a:latin typeface="Consolas"/>
+              </a:rPr>
+              <a:t>Integer</a:t>
+            </a:r>
+            <a:r>
+              <a:rPr sz="1600">
+                <a:solidFill>
+                  <a:srgbClr val="DCDCDC"/>
+                </a:solidFill>
+                <a:latin typeface="Consolas"/>
+              </a:rPr>
+              <a:t> </a:t>
+            </a:r>
+            <a:r>
+              <a:rPr sz="1600">
+                <a:solidFill>
+                  <a:srgbClr val="C586C0"/>
+                </a:solidFill>
+                <a:latin typeface="Consolas"/>
+              </a:rPr>
+              <a:t>for</a:t>
+            </a:r>
+            <a:r>
+              <a:rPr sz="1600">
+                <a:solidFill>
+                  <a:srgbClr val="DCDCDC"/>
+                </a:solidFill>
+                <a:latin typeface="Consolas"/>
+              </a:rPr>
+              <a:t> </a:t>
+            </a:r>
+            <a:r>
+              <a:rPr sz="1600">
+                <a:solidFill>
+                  <a:srgbClr val="C586C0"/>
+                </a:solidFill>
+                <a:latin typeface="Consolas"/>
+              </a:rPr>
+              <a:t>i16</a:t>
+            </a:r>
+            <a:r>
+              <a:rPr sz="1600">
+                <a:solidFill>
+                  <a:srgbClr val="DCDCDC"/>
+                </a:solidFill>
+                <a:latin typeface="Consolas"/>
+              </a:rPr>
+              <a:t> </a:t>
+            </a:r>
+            <a:r>
+              <a:rPr sz="1600">
+                <a:solidFill>
+                  <a:srgbClr val="DCDCDC"/>
+                </a:solidFill>
+                <a:latin typeface="Consolas"/>
+              </a:rPr>
+              <a:t>{</a:t>
             </a:r>
           </a:p>
           <a:p>
             <a:pPr>
               <a:lnSpc>
-                <a:spcPct val="100000"/>
+                <a:spcPct val="95000"/>
               </a:lnSpc>
               <a:spcBef>
                 <a:spcPts val="0"/>
@@ -3406,16 +5356,25 @@
               </a:spcAft>
             </a:pPr>
             <a:r>
-              <a:rPr sz="1000">
+              <a:rPr sz="1600">
+                <a:solidFill>
+                  <a:srgbClr val="DCDCDC"/>
+                </a:solidFill>
+                <a:latin typeface="Consolas"/>
+              </a:rPr>
+              <a:t>    </a:t>
+            </a:r>
+            <a:r>
+              <a:rPr sz="1600">
                 <a:solidFill>
                   <a:srgbClr val="C586C0"/>
                 </a:solidFill>
                 <a:latin typeface="Consolas"/>
               </a:rPr>
-              <a:t>trait</a:t>
-            </a:r>
-            <a:r>
-              <a:rPr sz="1000">
+              <a:t>fn</a:t>
+            </a:r>
+            <a:r>
+              <a:rPr sz="1600">
                 <a:solidFill>
                   <a:srgbClr val="DCDCDC"/>
                 </a:solidFill>
@@ -3424,25 +5383,34 @@
               <a:t> </a:t>
             </a:r>
             <a:r>
-              <a:rPr sz="1000">
-                <a:solidFill>
-                  <a:srgbClr val="DCDCDC"/>
-                </a:solidFill>
-                <a:latin typeface="Consolas"/>
-              </a:rPr>
-              <a:t>Integer</a:t>
-            </a:r>
-            <a:r>
-              <a:rPr sz="1000">
-                <a:solidFill>
-                  <a:srgbClr val="DCDCDC"/>
-                </a:solidFill>
-                <a:latin typeface="Consolas"/>
-              </a:rPr>
-              <a:t>:</a:t>
-            </a:r>
-            <a:r>
-              <a:rPr sz="1000">
+              <a:rPr sz="1600">
+                <a:solidFill>
+                  <a:srgbClr val="DCDCAA"/>
+                </a:solidFill>
+                <a:latin typeface="Consolas"/>
+              </a:rPr>
+              <a:t>min_value</a:t>
+            </a:r>
+            <a:r>
+              <a:rPr sz="1600">
+                <a:solidFill>
+                  <a:srgbClr val="DCDCDC"/>
+                </a:solidFill>
+                <a:latin typeface="Consolas"/>
+              </a:rPr>
+              <a:t>(</a:t>
+            </a:r>
+            <a:r>
+              <a:rPr sz="1600">
+                <a:solidFill>
+                  <a:srgbClr val="DCDCDC"/>
+                </a:solidFill>
+                <a:latin typeface="Consolas"/>
+              </a:rPr>
+              <a:t>)</a:t>
+            </a:r>
+            <a:r>
+              <a:rPr sz="1600">
                 <a:solidFill>
                   <a:srgbClr val="DCDCDC"/>
                 </a:solidFill>
@@ -3451,16 +5419,34 @@
               <a:t> </a:t>
             </a:r>
             <a:r>
-              <a:rPr sz="1000">
+              <a:rPr sz="1600">
+                <a:solidFill>
+                  <a:srgbClr val="DCDCDC"/>
+                </a:solidFill>
+                <a:latin typeface="Consolas"/>
+              </a:rPr>
+              <a:t>-&gt;</a:t>
+            </a:r>
+            <a:r>
+              <a:rPr sz="1600">
+                <a:solidFill>
+                  <a:srgbClr val="DCDCDC"/>
+                </a:solidFill>
+                <a:latin typeface="Consolas"/>
+              </a:rPr>
+              <a:t> </a:t>
+            </a:r>
+            <a:r>
+              <a:rPr sz="1600">
                 <a:solidFill>
                   <a:srgbClr val="4EC9B0"/>
                 </a:solidFill>
                 <a:latin typeface="Consolas"/>
               </a:rPr>
-              <a:t>Copy</a:t>
-            </a:r>
-            <a:r>
-              <a:rPr sz="1000">
+              <a:t>Self</a:t>
+            </a:r>
+            <a:r>
+              <a:rPr sz="1600">
                 <a:solidFill>
                   <a:srgbClr val="DCDCDC"/>
                 </a:solidFill>
@@ -3469,43 +5455,7 @@
               <a:t> </a:t>
             </a:r>
             <a:r>
-              <a:rPr sz="1000">
-                <a:solidFill>
-                  <a:srgbClr val="DCDCDC"/>
-                </a:solidFill>
-                <a:latin typeface="Consolas"/>
-              </a:rPr>
-              <a:t>+</a:t>
-            </a:r>
-            <a:r>
-              <a:rPr sz="1000">
-                <a:solidFill>
-                  <a:srgbClr val="DCDCDC"/>
-                </a:solidFill>
-                <a:latin typeface="Consolas"/>
-              </a:rPr>
-              <a:t> </a:t>
-            </a:r>
-            <a:r>
-              <a:rPr sz="1000">
-                <a:solidFill>
-                  <a:srgbClr val="4EC9B0"/>
-                </a:solidFill>
-                <a:latin typeface="Consolas"/>
-              </a:rPr>
-              <a:t>Ord</a:t>
-            </a:r>
-            <a:r>
-              <a:rPr sz="1000">
-                <a:solidFill>
-                  <a:srgbClr val="DCDCDC"/>
-                </a:solidFill>
-                <a:latin typeface="Consolas"/>
-              </a:rPr>
-              <a:t> </a:t>
-            </a:r>
-            <a:r>
-              <a:rPr sz="1000">
+              <a:rPr sz="1600">
                 <a:solidFill>
                   <a:srgbClr val="DCDCDC"/>
                 </a:solidFill>
@@ -3517,7 +5467,7 @@
           <a:p>
             <a:pPr>
               <a:lnSpc>
-                <a:spcPct val="100000"/>
+                <a:spcPct val="95000"/>
               </a:lnSpc>
               <a:spcBef>
                 <a:spcPts val="0"/>
@@ -3527,109 +5477,46 @@
               </a:spcAft>
             </a:pPr>
             <a:r>
-              <a:rPr sz="1000">
-                <a:solidFill>
-                  <a:srgbClr val="DCDCDC"/>
-                </a:solidFill>
-                <a:latin typeface="Consolas"/>
-              </a:rPr>
-              <a:t>    </a:t>
-            </a:r>
-            <a:r>
-              <a:rPr sz="1000">
+              <a:rPr sz="1600">
+                <a:solidFill>
+                  <a:srgbClr val="DCDCDC"/>
+                </a:solidFill>
+                <a:latin typeface="Consolas"/>
+              </a:rPr>
+              <a:t>        </a:t>
+            </a:r>
+            <a:r>
+              <a:rPr sz="1600">
                 <a:solidFill>
                   <a:srgbClr val="C586C0"/>
                 </a:solidFill>
                 <a:latin typeface="Consolas"/>
               </a:rPr>
-              <a:t>fn</a:t>
-            </a:r>
-            <a:r>
-              <a:rPr sz="1000">
-                <a:solidFill>
-                  <a:srgbClr val="DCDCDC"/>
-                </a:solidFill>
-                <a:latin typeface="Consolas"/>
-              </a:rPr>
-              <a:t> </a:t>
-            </a:r>
-            <a:r>
-              <a:rPr sz="1000">
-                <a:solidFill>
-                  <a:srgbClr val="DCDCAA"/>
-                </a:solidFill>
-                <a:latin typeface="Consolas"/>
-              </a:rPr>
-              <a:t>min_value</a:t>
-            </a:r>
-            <a:r>
-              <a:rPr sz="1000">
-                <a:solidFill>
-                  <a:srgbClr val="DCDCDC"/>
-                </a:solidFill>
-                <a:latin typeface="Consolas"/>
-              </a:rPr>
-              <a:t>(</a:t>
-            </a:r>
-            <a:r>
-              <a:rPr sz="1000">
-                <a:solidFill>
-                  <a:srgbClr val="DCDCDC"/>
-                </a:solidFill>
-                <a:latin typeface="Consolas"/>
-              </a:rPr>
-              <a:t>)</a:t>
-            </a:r>
-            <a:r>
-              <a:rPr sz="1000">
-                <a:solidFill>
-                  <a:srgbClr val="DCDCDC"/>
-                </a:solidFill>
-                <a:latin typeface="Consolas"/>
-              </a:rPr>
-              <a:t> </a:t>
-            </a:r>
-            <a:r>
-              <a:rPr sz="1000">
-                <a:solidFill>
-                  <a:srgbClr val="DCDCDC"/>
-                </a:solidFill>
-                <a:latin typeface="Consolas"/>
-              </a:rPr>
-              <a:t>-&gt;</a:t>
-            </a:r>
-            <a:r>
-              <a:rPr sz="1000">
-                <a:solidFill>
-                  <a:srgbClr val="DCDCDC"/>
-                </a:solidFill>
-                <a:latin typeface="Consolas"/>
-              </a:rPr>
-              <a:t> </a:t>
-            </a:r>
-            <a:r>
-              <a:rPr sz="1000">
-                <a:solidFill>
-                  <a:srgbClr val="4EC9B0"/>
-                </a:solidFill>
-                <a:latin typeface="Consolas"/>
-              </a:rPr>
-              <a:t>Self</a:t>
-            </a:r>
-            <a:r>
-              <a:rPr sz="1000">
-                <a:solidFill>
-                  <a:srgbClr val="DCDCDC"/>
-                </a:solidFill>
-                <a:latin typeface="Consolas"/>
-              </a:rPr>
-              <a:t>;</a:t>
+              <a:t>i16</a:t>
+            </a:r>
+            <a:r>
+              <a:rPr sz="1600">
+                <a:solidFill>
+                  <a:srgbClr val="DCDCDC"/>
+                </a:solidFill>
+                <a:latin typeface="Consolas"/>
+              </a:rPr>
+              <a:t>::</a:t>
+            </a:r>
+            <a:r>
+              <a:rPr sz="1600">
+                <a:solidFill>
+                  <a:srgbClr val="DCDCDC"/>
+                </a:solidFill>
+                <a:latin typeface="Consolas"/>
+              </a:rPr>
+              <a:t>MIN</a:t>
             </a:r>
           </a:p>
           <a:p>
             <a:pPr>
               <a:lnSpc>
-                <a:spcPct val="100000"/>
+                <a:spcPct val="95000"/>
               </a:lnSpc>
               <a:spcBef>
                 <a:spcPts val="0"/>
@@ -3639,7 +5526,7 @@
               </a:spcAft>
             </a:pPr>
             <a:r>
-              <a:rPr sz="1000">
+              <a:rPr sz="1600">
                 <a:solidFill>
                   <a:srgbClr val="DCDCDC"/>
                 </a:solidFill>
@@ -3648,100 +5535,19 @@
               <a:t>    </a:t>
             </a:r>
             <a:r>
-              <a:rPr sz="1000">
-                <a:solidFill>
-                  <a:srgbClr val="C586C0"/>
-                </a:solidFill>
-                <a:latin typeface="Consolas"/>
-              </a:rPr>
-              <a:t>fn</a:t>
-            </a:r>
-            <a:r>
-              <a:rPr sz="1000">
-                <a:solidFill>
-                  <a:srgbClr val="DCDCDC"/>
-                </a:solidFill>
-                <a:latin typeface="Consolas"/>
-              </a:rPr>
-              <a:t> </a:t>
-            </a:r>
-            <a:r>
-              <a:rPr sz="1000">
-                <a:solidFill>
-                  <a:srgbClr val="DCDCAA"/>
-                </a:solidFill>
-                <a:latin typeface="Consolas"/>
-              </a:rPr>
-              <a:t>max_value</a:t>
-            </a:r>
-            <a:r>
-              <a:rPr sz="1000">
-                <a:solidFill>
-                  <a:srgbClr val="DCDCDC"/>
-                </a:solidFill>
-                <a:latin typeface="Consolas"/>
-              </a:rPr>
-              <a:t>(</a:t>
-            </a:r>
-            <a:r>
-              <a:rPr sz="1000">
-                <a:solidFill>
-                  <a:srgbClr val="DCDCDC"/>
-                </a:solidFill>
-                <a:latin typeface="Consolas"/>
-              </a:rPr>
-              <a:t>)</a:t>
-            </a:r>
-            <a:r>
-              <a:rPr sz="1000">
-                <a:solidFill>
-                  <a:srgbClr val="DCDCDC"/>
-                </a:solidFill>
-                <a:latin typeface="Consolas"/>
-              </a:rPr>
-              <a:t> </a:t>
-            </a:r>
-            <a:r>
-              <a:rPr sz="1000">
-                <a:solidFill>
-                  <a:srgbClr val="DCDCDC"/>
-                </a:solidFill>
-                <a:latin typeface="Consolas"/>
-              </a:rPr>
-              <a:t>-&gt;</a:t>
-            </a:r>
-            <a:r>
-              <a:rPr sz="1000">
-                <a:solidFill>
-                  <a:srgbClr val="DCDCDC"/>
-                </a:solidFill>
-                <a:latin typeface="Consolas"/>
-              </a:rPr>
-              <a:t> </a:t>
-            </a:r>
-            <a:r>
-              <a:rPr sz="1000">
-                <a:solidFill>
-                  <a:srgbClr val="4EC9B0"/>
-                </a:solidFill>
-                <a:latin typeface="Consolas"/>
-              </a:rPr>
-              <a:t>Self</a:t>
-            </a:r>
-            <a:r>
-              <a:rPr sz="1000">
-                <a:solidFill>
-                  <a:srgbClr val="DCDCDC"/>
-                </a:solidFill>
-                <a:latin typeface="Consolas"/>
-              </a:rPr>
-              <a:t>;</a:t>
+              <a:rPr sz="1600">
+                <a:solidFill>
+                  <a:srgbClr val="DCDCDC"/>
+                </a:solidFill>
+                <a:latin typeface="Consolas"/>
+              </a:rPr>
+              <a:t>}</a:t>
             </a:r>
           </a:p>
           <a:p>
             <a:pPr>
               <a:lnSpc>
-                <a:spcPct val="100000"/>
+                <a:spcPct val="95000"/>
               </a:lnSpc>
               <a:spcBef>
                 <a:spcPts val="0"/>
@@ -3754,7 +5560,7 @@
           <a:p>
             <a:pPr>
               <a:lnSpc>
-                <a:spcPct val="100000"/>
+                <a:spcPct val="95000"/>
               </a:lnSpc>
               <a:spcBef>
                 <a:spcPts val="0"/>
@@ -3764,7 +5570,7 @@
               </a:spcAft>
             </a:pPr>
             <a:r>
-              <a:rPr sz="1000">
+              <a:rPr sz="1600">
                 <a:solidFill>
                   <a:srgbClr val="DCDCDC"/>
                 </a:solidFill>
@@ -3773,19 +5579,109 @@
               <a:t>    </a:t>
             </a:r>
             <a:r>
-              <a:rPr sz="1000">
-                <a:solidFill>
-                  <a:srgbClr val="CE9178"/>
-                </a:solidFill>
-                <a:latin typeface="Consolas"/>
-              </a:rPr>
-              <a:t>/// Returns an exhausted range, which is a range that starts from the maximum value and ends at the minimum value.</a:t>
+              <a:rPr sz="1600">
+                <a:solidFill>
+                  <a:srgbClr val="C586C0"/>
+                </a:solidFill>
+                <a:latin typeface="Consolas"/>
+              </a:rPr>
+              <a:t>fn</a:t>
+            </a:r>
+            <a:r>
+              <a:rPr sz="1600">
+                <a:solidFill>
+                  <a:srgbClr val="DCDCDC"/>
+                </a:solidFill>
+                <a:latin typeface="Consolas"/>
+              </a:rPr>
+              <a:t> </a:t>
+            </a:r>
+            <a:r>
+              <a:rPr sz="1600">
+                <a:solidFill>
+                  <a:srgbClr val="DCDCAA"/>
+                </a:solidFill>
+                <a:latin typeface="Consolas"/>
+              </a:rPr>
+              <a:t>max_value</a:t>
+            </a:r>
+            <a:r>
+              <a:rPr sz="1600">
+                <a:solidFill>
+                  <a:srgbClr val="DCDCDC"/>
+                </a:solidFill>
+                <a:latin typeface="Consolas"/>
+              </a:rPr>
+              <a:t>(</a:t>
+            </a:r>
+            <a:r>
+              <a:rPr sz="1600">
+                <a:solidFill>
+                  <a:srgbClr val="DCDCDC"/>
+                </a:solidFill>
+                <a:latin typeface="Consolas"/>
+              </a:rPr>
+              <a:t>)</a:t>
+            </a:r>
+            <a:r>
+              <a:rPr sz="1600">
+                <a:solidFill>
+                  <a:srgbClr val="DCDCDC"/>
+                </a:solidFill>
+                <a:latin typeface="Consolas"/>
+              </a:rPr>
+              <a:t> </a:t>
+            </a:r>
+            <a:r>
+              <a:rPr sz="1600">
+                <a:solidFill>
+                  <a:srgbClr val="DCDCDC"/>
+                </a:solidFill>
+                <a:latin typeface="Consolas"/>
+              </a:rPr>
+              <a:t>-&gt;</a:t>
+            </a:r>
+            <a:r>
+              <a:rPr sz="1600">
+                <a:solidFill>
+                  <a:srgbClr val="DCDCDC"/>
+                </a:solidFill>
+                <a:latin typeface="Consolas"/>
+              </a:rPr>
+              <a:t> </a:t>
+            </a:r>
+            <a:r>
+              <a:rPr sz="1600">
+                <a:solidFill>
+                  <a:srgbClr val="4EC9B0"/>
+                </a:solidFill>
+                <a:latin typeface="Consolas"/>
+              </a:rPr>
+              <a:t>Self</a:t>
+            </a:r>
+            <a:r>
+              <a:rPr sz="1600">
+                <a:solidFill>
+                  <a:srgbClr val="DCDCDC"/>
+                </a:solidFill>
+                <a:latin typeface="Consolas"/>
+              </a:rPr>
+              <a:t> </a:t>
+            </a:r>
+            <a:r>
+              <a:rPr sz="1600">
+                <a:solidFill>
+                  <a:srgbClr val="DCDCDC"/>
+                </a:solidFill>
+                <a:latin typeface="Consolas"/>
+              </a:rPr>
+              <a:t>{</a:t>
             </a:r>
           </a:p>
           <a:p>
             <a:pPr>
               <a:lnSpc>
-                <a:spcPct val="100000"/>
+                <a:spcPct val="95000"/>
               </a:lnSpc>
               <a:spcBef>
                 <a:spcPts val="0"/>
@@ -3795,28 +5691,46 @@
               </a:spcAft>
             </a:pPr>
             <a:r>
-              <a:rPr sz="1000">
-                <a:solidFill>
-                  <a:srgbClr val="DCDCDC"/>
-                </a:solidFill>
-                <a:latin typeface="Consolas"/>
-              </a:rPr>
-              <a:t>    </a:t>
-            </a:r>
-            <a:r>
-              <a:rPr sz="1000">
-                <a:solidFill>
-                  <a:srgbClr val="CE9178"/>
-                </a:solidFill>
-                <a:latin typeface="Consolas"/>
-              </a:rPr>
-              <a:t>/// This results in an empty range.</a:t>
+              <a:rPr sz="1600">
+                <a:solidFill>
+                  <a:srgbClr val="DCDCDC"/>
+                </a:solidFill>
+                <a:latin typeface="Consolas"/>
+              </a:rPr>
+              <a:t>        </a:t>
+            </a:r>
+            <a:r>
+              <a:rPr sz="1600">
+                <a:solidFill>
+                  <a:srgbClr val="C586C0"/>
+                </a:solidFill>
+                <a:latin typeface="Consolas"/>
+              </a:rPr>
+              <a:t>i16</a:t>
+            </a:r>
+            <a:r>
+              <a:rPr sz="1600">
+                <a:solidFill>
+                  <a:srgbClr val="DCDCDC"/>
+                </a:solidFill>
+                <a:latin typeface="Consolas"/>
+              </a:rPr>
+              <a:t>::</a:t>
+            </a:r>
+            <a:r>
+              <a:rPr sz="1600">
+                <a:solidFill>
+                  <a:srgbClr val="DCDCDC"/>
+                </a:solidFill>
+                <a:latin typeface="Consolas"/>
+              </a:rPr>
+              <a:t>MAX</a:t>
             </a:r>
           </a:p>
           <a:p>
             <a:pPr>
               <a:lnSpc>
-                <a:spcPct val="100000"/>
+                <a:spcPct val="95000"/>
               </a:lnSpc>
               <a:spcBef>
                 <a:spcPts val="0"/>
@@ -3826,7 +5740,7 @@
               </a:spcAft>
             </a:pPr>
             <a:r>
-              <a:rPr sz="1000">
+              <a:rPr sz="1600">
                 <a:solidFill>
                   <a:srgbClr val="DCDCDC"/>
                 </a:solidFill>
@@ -3835,19 +5749,19 @@
               <a:t>    </a:t>
             </a:r>
             <a:r>
-              <a:rPr sz="1000">
-                <a:solidFill>
-                  <a:srgbClr val="6A9955"/>
-                </a:solidFill>
-                <a:latin typeface="Consolas"/>
-              </a:rPr>
-              <a:t>//</a:t>
+              <a:rPr sz="1600">
+                <a:solidFill>
+                  <a:srgbClr val="DCDCDC"/>
+                </a:solidFill>
+                <a:latin typeface="Consolas"/>
+              </a:rPr>
+              <a:t>}</a:t>
             </a:r>
           </a:p>
           <a:p>
             <a:pPr>
               <a:lnSpc>
-                <a:spcPct val="100000"/>
+                <a:spcPct val="95000"/>
               </a:lnSpc>
               <a:spcBef>
                 <a:spcPts val="0"/>
@@ -3857,28 +5771,19 @@
               </a:spcAft>
             </a:pPr>
             <a:r>
-              <a:rPr sz="1000">
-                <a:solidFill>
-                  <a:srgbClr val="DCDCDC"/>
-                </a:solidFill>
-                <a:latin typeface="Consolas"/>
-              </a:rPr>
-              <a:t>    </a:t>
-            </a:r>
-            <a:r>
-              <a:rPr sz="1000">
-                <a:solidFill>
-                  <a:srgbClr val="6A9955"/>
-                </a:solidFill>
-                <a:latin typeface="Consolas"/>
-              </a:rPr>
-              <a:t>// Default behavior inherited by implementors.</a:t>
+              <a:rPr sz="1600">
+                <a:solidFill>
+                  <a:srgbClr val="DCDCDC"/>
+                </a:solidFill>
+                <a:latin typeface="Consolas"/>
+              </a:rPr>
+              <a:t>}</a:t>
             </a:r>
           </a:p>
           <a:p>
             <a:pPr>
               <a:lnSpc>
-                <a:spcPct val="100000"/>
+                <a:spcPct val="95000"/>
               </a:lnSpc>
               <a:spcBef>
                 <a:spcPts val="0"/>
@@ -3887,29 +5792,11 @@
                 <a:spcPts val="0"/>
               </a:spcAft>
             </a:pPr>
-            <a:r>
-              <a:rPr sz="1000">
-                <a:solidFill>
-                  <a:srgbClr val="DCDCDC"/>
-                </a:solidFill>
-                <a:latin typeface="Consolas"/>
-              </a:rPr>
-              <a:t>    </a:t>
-            </a:r>
-            <a:r>
-              <a:rPr sz="1000">
-                <a:solidFill>
-                  <a:srgbClr val="6A9955"/>
-                </a:solidFill>
-                <a:latin typeface="Consolas"/>
-              </a:rPr>
-              <a:t>// Any impl can override this method if it needs specialized behavior.</a:t>
-            </a:r>
           </a:p>
           <a:p>
             <a:pPr>
               <a:lnSpc>
-                <a:spcPct val="100000"/>
+                <a:spcPct val="95000"/>
               </a:lnSpc>
               <a:spcBef>
                 <a:spcPts val="0"/>
@@ -3919,16 +5806,7 @@
               </a:spcAft>
             </a:pPr>
             <a:r>
-              <a:rPr sz="1000">
-                <a:solidFill>
-                  <a:srgbClr val="DCDCDC"/>
-                </a:solidFill>
-                <a:latin typeface="Consolas"/>
-              </a:rPr>
-              <a:t>    </a:t>
-            </a:r>
-            <a:r>
-              <a:rPr sz="1000">
+              <a:rPr sz="1600">
                 <a:solidFill>
                   <a:srgbClr val="C586C0"/>
                 </a:solidFill>
@@ -3937,7 +5815,7 @@
               <a:t>fn</a:t>
             </a:r>
             <a:r>
-              <a:rPr sz="1000">
+              <a:rPr sz="1600">
                 <a:solidFill>
                   <a:srgbClr val="DCDCDC"/>
                 </a:solidFill>
@@ -3946,16 +5824,16 @@
               <a:t> </a:t>
             </a:r>
             <a:r>
-              <a:rPr sz="1000">
+              <a:rPr sz="1600">
                 <a:solidFill>
                   <a:srgbClr val="DCDCAA"/>
                 </a:solidFill>
                 <a:latin typeface="Consolas"/>
               </a:rPr>
-              <a:t>exhausted_range</a:t>
-            </a:r>
-            <a:r>
-              <a:rPr sz="1000">
+              <a:t>main</a:t>
+            </a:r>
+            <a:r>
+              <a:rPr sz="1600">
                 <a:solidFill>
                   <a:srgbClr val="DCDCDC"/>
                 </a:solidFill>
@@ -3964,7 +5842,7 @@
               <a:t>(</a:t>
             </a:r>
             <a:r>
-              <a:rPr sz="1000">
+              <a:rPr sz="1600">
                 <a:solidFill>
                   <a:srgbClr val="DCDCDC"/>
                 </a:solidFill>
@@ -3973,7 +5851,7 @@
               <a:t>)</a:t>
             </a:r>
             <a:r>
-              <a:rPr sz="1000">
+              <a:rPr sz="1600">
                 <a:solidFill>
                   <a:srgbClr val="DCDCDC"/>
                 </a:solidFill>
@@ -3982,70 +5860,7 @@
               <a:t> </a:t>
             </a:r>
             <a:r>
-              <a:rPr sz="1000">
-                <a:solidFill>
-                  <a:srgbClr val="DCDCDC"/>
-                </a:solidFill>
-                <a:latin typeface="Consolas"/>
-              </a:rPr>
-              <a:t>-&gt;</a:t>
-            </a:r>
-            <a:r>
-              <a:rPr sz="1000">
-                <a:solidFill>
-                  <a:srgbClr val="DCDCDC"/>
-                </a:solidFill>
-                <a:latin typeface="Consolas"/>
-              </a:rPr>
-              <a:t> </a:t>
-            </a:r>
-            <a:r>
-              <a:rPr sz="1000">
-                <a:solidFill>
-                  <a:srgbClr val="4EC9B0"/>
-                </a:solidFill>
-                <a:latin typeface="Consolas"/>
-              </a:rPr>
-              <a:t>RangeInclusive</a:t>
-            </a:r>
-            <a:r>
-              <a:rPr sz="1000">
-                <a:solidFill>
-                  <a:srgbClr val="DCDCDC"/>
-                </a:solidFill>
-                <a:latin typeface="Consolas"/>
-              </a:rPr>
-              <a:t>&lt;</a:t>
-            </a:r>
-            <a:r>
-              <a:rPr sz="1000">
-                <a:solidFill>
-                  <a:srgbClr val="4EC9B0"/>
-                </a:solidFill>
-                <a:latin typeface="Consolas"/>
-              </a:rPr>
-              <a:t>Self</a:t>
-            </a:r>
-            <a:r>
-              <a:rPr sz="1000">
-                <a:solidFill>
-                  <a:srgbClr val="DCDCDC"/>
-                </a:solidFill>
-                <a:latin typeface="Consolas"/>
-              </a:rPr>
-              <a:t>&gt;</a:t>
-            </a:r>
-            <a:r>
-              <a:rPr sz="1000">
-                <a:solidFill>
-                  <a:srgbClr val="DCDCDC"/>
-                </a:solidFill>
-                <a:latin typeface="Consolas"/>
-              </a:rPr>
-              <a:t> </a:t>
-            </a:r>
-            <a:r>
-              <a:rPr sz="1000">
+              <a:rPr sz="1600">
                 <a:solidFill>
                   <a:srgbClr val="DCDCDC"/>
                 </a:solidFill>
@@ -4057,7 +5872,7 @@
           <a:p>
             <a:pPr>
               <a:lnSpc>
-                <a:spcPct val="100000"/>
+                <a:spcPct val="95000"/>
               </a:lnSpc>
               <a:spcBef>
                 <a:spcPts val="0"/>
@@ -4067,25 +5882,97 @@
               </a:spcAft>
             </a:pPr>
             <a:r>
-              <a:rPr sz="1000">
-                <a:solidFill>
-                  <a:srgbClr val="DCDCDC"/>
-                </a:solidFill>
-                <a:latin typeface="Consolas"/>
-              </a:rPr>
-              <a:t>        </a:t>
-            </a:r>
-            <a:r>
-              <a:rPr sz="1000">
-                <a:solidFill>
-                  <a:srgbClr val="DCDCAA"/>
-                </a:solidFill>
-                <a:latin typeface="Consolas"/>
-              </a:rPr>
-              <a:t>debug_assert!</a:t>
-            </a:r>
-            <a:r>
-              <a:rPr sz="1000">
+              <a:rPr sz="1600">
+                <a:solidFill>
+                  <a:srgbClr val="DCDCDC"/>
+                </a:solidFill>
+                <a:latin typeface="Consolas"/>
+              </a:rPr>
+              <a:t>    </a:t>
+            </a:r>
+            <a:r>
+              <a:rPr sz="1600">
+                <a:solidFill>
+                  <a:srgbClr val="C586C0"/>
+                </a:solidFill>
+                <a:latin typeface="Consolas"/>
+              </a:rPr>
+              <a:t>let</a:t>
+            </a:r>
+            <a:r>
+              <a:rPr sz="1600">
+                <a:solidFill>
+                  <a:srgbClr val="DCDCDC"/>
+                </a:solidFill>
+                <a:latin typeface="Consolas"/>
+              </a:rPr>
+              <a:t> </a:t>
+            </a:r>
+            <a:r>
+              <a:rPr sz="1600">
+                <a:solidFill>
+                  <a:srgbClr val="DCDCDC"/>
+                </a:solidFill>
+                <a:latin typeface="Consolas"/>
+              </a:rPr>
+              <a:t>r1</a:t>
+            </a:r>
+            <a:r>
+              <a:rPr sz="1600">
+                <a:solidFill>
+                  <a:srgbClr val="DCDCDC"/>
+                </a:solidFill>
+                <a:latin typeface="Consolas"/>
+              </a:rPr>
+              <a:t> </a:t>
+            </a:r>
+            <a:r>
+              <a:rPr sz="1600">
+                <a:solidFill>
+                  <a:srgbClr val="DCDCDC"/>
+                </a:solidFill>
+                <a:latin typeface="Consolas"/>
+              </a:rPr>
+              <a:t>=</a:t>
+            </a:r>
+            <a:r>
+              <a:rPr sz="1600">
+                <a:solidFill>
+                  <a:srgbClr val="DCDCDC"/>
+                </a:solidFill>
+                <a:latin typeface="Consolas"/>
+              </a:rPr>
+              <a:t> </a:t>
+            </a:r>
+            <a:r>
+              <a:rPr sz="1600">
+                <a:solidFill>
+                  <a:srgbClr val="C586C0"/>
+                </a:solidFill>
+                <a:latin typeface="Consolas"/>
+              </a:rPr>
+              <a:t>u8</a:t>
+            </a:r>
+            <a:r>
+              <a:rPr sz="1600">
+                <a:solidFill>
+                  <a:srgbClr val="DCDCDC"/>
+                </a:solidFill>
+                <a:latin typeface="Consolas"/>
+              </a:rPr>
+              <a:t>::</a:t>
+            </a:r>
+            <a:r>
+              <a:rPr sz="1600">
+                <a:solidFill>
+                  <a:srgbClr val="DCDCDC"/>
+                </a:solidFill>
+                <a:latin typeface="Consolas"/>
+              </a:rPr>
+              <a:t>exhausted_range</a:t>
+            </a:r>
+            <a:r>
+              <a:rPr sz="1600">
                 <a:solidFill>
                   <a:srgbClr val="DCDCDC"/>
                 </a:solidFill>
@@ -4094,43 +5981,7 @@
               <a:t>(</a:t>
             </a:r>
             <a:r>
-              <a:rPr sz="1000">
-                <a:solidFill>
-                  <a:srgbClr val="4EC9B0"/>
-                </a:solidFill>
-                <a:latin typeface="Consolas"/>
-              </a:rPr>
-              <a:t>Self</a:t>
-            </a:r>
-            <a:r>
-              <a:rPr sz="1000">
-                <a:solidFill>
-                  <a:srgbClr val="DCDCDC"/>
-                </a:solidFill>
-                <a:latin typeface="Consolas"/>
-              </a:rPr>
-              <a:t>::</a:t>
-            </a:r>
-            <a:r>
-              <a:rPr sz="1000">
-                <a:solidFill>
-                  <a:srgbClr val="DCDCDC"/>
-                </a:solidFill>
-                <a:latin typeface="Consolas"/>
-              </a:rPr>
-              <a:t>min_value</a:t>
-            </a:r>
-            <a:r>
-              <a:rPr sz="1000">
-                <a:solidFill>
-                  <a:srgbClr val="DCDCDC"/>
-                </a:solidFill>
-                <a:latin typeface="Consolas"/>
-              </a:rPr>
-              <a:t>(</a:t>
-            </a:r>
-            <a:r>
-              <a:rPr sz="1000">
+              <a:rPr sz="1600">
                 <a:solidFill>
                   <a:srgbClr val="DCDCDC"/>
                 </a:solidFill>
@@ -4139,133 +5990,7 @@
               <a:t>)</a:t>
             </a:r>
             <a:r>
-              <a:rPr sz="1000">
-                <a:solidFill>
-                  <a:srgbClr val="DCDCDC"/>
-                </a:solidFill>
-                <a:latin typeface="Consolas"/>
-              </a:rPr>
-              <a:t> </a:t>
-            </a:r>
-            <a:r>
-              <a:rPr sz="1000">
-                <a:solidFill>
-                  <a:srgbClr val="DCDCDC"/>
-                </a:solidFill>
-                <a:latin typeface="Consolas"/>
-              </a:rPr>
-              <a:t>&lt;</a:t>
-            </a:r>
-            <a:r>
-              <a:rPr sz="1000">
-                <a:solidFill>
-                  <a:srgbClr val="DCDCDC"/>
-                </a:solidFill>
-                <a:latin typeface="Consolas"/>
-              </a:rPr>
-              <a:t> </a:t>
-            </a:r>
-            <a:r>
-              <a:rPr sz="1000">
-                <a:solidFill>
-                  <a:srgbClr val="4EC9B0"/>
-                </a:solidFill>
-                <a:latin typeface="Consolas"/>
-              </a:rPr>
-              <a:t>Self</a:t>
-            </a:r>
-            <a:r>
-              <a:rPr sz="1000">
-                <a:solidFill>
-                  <a:srgbClr val="DCDCDC"/>
-                </a:solidFill>
-                <a:latin typeface="Consolas"/>
-              </a:rPr>
-              <a:t>::</a:t>
-            </a:r>
-            <a:r>
-              <a:rPr sz="1000">
-                <a:solidFill>
-                  <a:srgbClr val="DCDCDC"/>
-                </a:solidFill>
-                <a:latin typeface="Consolas"/>
-              </a:rPr>
-              <a:t>max_value</a:t>
-            </a:r>
-            <a:r>
-              <a:rPr sz="1000">
-                <a:solidFill>
-                  <a:srgbClr val="DCDCDC"/>
-                </a:solidFill>
-                <a:latin typeface="Consolas"/>
-              </a:rPr>
-              <a:t>(</a:t>
-            </a:r>
-            <a:r>
-              <a:rPr sz="1000">
-                <a:solidFill>
-                  <a:srgbClr val="DCDCDC"/>
-                </a:solidFill>
-                <a:latin typeface="Consolas"/>
-              </a:rPr>
-              <a:t>)</a:t>
-            </a:r>
-            <a:r>
-              <a:rPr sz="1000">
-                <a:solidFill>
-                  <a:srgbClr val="DCDCDC"/>
-                </a:solidFill>
-                <a:latin typeface="Consolas"/>
-              </a:rPr>
-              <a:t>,</a:t>
-            </a:r>
-            <a:r>
-              <a:rPr sz="1000">
-                <a:solidFill>
-                  <a:srgbClr val="DCDCDC"/>
-                </a:solidFill>
-                <a:latin typeface="Consolas"/>
-              </a:rPr>
-              <a:t> </a:t>
-            </a:r>
-            <a:r>
-              <a:rPr sz="1000">
-                <a:solidFill>
-                  <a:srgbClr val="CE9178"/>
-                </a:solidFill>
-                <a:latin typeface="Consolas"/>
-              </a:rPr>
-              <a:t>"</a:t>
-            </a:r>
-            <a:r>
-              <a:rPr sz="1000">
-                <a:solidFill>
-                  <a:srgbClr val="CE9178"/>
-                </a:solidFill>
-                <a:latin typeface="Consolas"/>
-              </a:rPr>
-              <a:t>Precondition violated: min_value must be less than max_value</a:t>
-            </a:r>
-            <a:r>
-              <a:rPr sz="1000">
-                <a:solidFill>
-                  <a:srgbClr val="CE9178"/>
-                </a:solidFill>
-                <a:latin typeface="Consolas"/>
-              </a:rPr>
-              <a:t>"</a:t>
-            </a:r>
-            <a:r>
-              <a:rPr sz="1000">
-                <a:solidFill>
-                  <a:srgbClr val="DCDCDC"/>
-                </a:solidFill>
-                <a:latin typeface="Consolas"/>
-              </a:rPr>
-              <a:t>)</a:t>
-            </a:r>
-            <a:r>
-              <a:rPr sz="1000">
+              <a:rPr sz="1600">
                 <a:solidFill>
                   <a:srgbClr val="DCDCDC"/>
                 </a:solidFill>
@@ -4277,7 +6002,7 @@
           <a:p>
             <a:pPr>
               <a:lnSpc>
-                <a:spcPct val="100000"/>
+                <a:spcPct val="95000"/>
               </a:lnSpc>
               <a:spcBef>
                 <a:spcPts val="0"/>
@@ -4287,25 +6012,79 @@
               </a:spcAft>
             </a:pPr>
             <a:r>
-              <a:rPr sz="1000">
-                <a:solidFill>
-                  <a:srgbClr val="DCDCDC"/>
-                </a:solidFill>
-                <a:latin typeface="Consolas"/>
-              </a:rPr>
-              <a:t>        </a:t>
-            </a:r>
-            <a:r>
-              <a:rPr sz="1000">
-                <a:solidFill>
-                  <a:srgbClr val="4EC9B0"/>
-                </a:solidFill>
-                <a:latin typeface="Consolas"/>
-              </a:rPr>
-              <a:t>Self</a:t>
-            </a:r>
-            <a:r>
-              <a:rPr sz="1000">
+              <a:rPr sz="1600">
+                <a:solidFill>
+                  <a:srgbClr val="DCDCDC"/>
+                </a:solidFill>
+                <a:latin typeface="Consolas"/>
+              </a:rPr>
+              <a:t>    </a:t>
+            </a:r>
+            <a:r>
+              <a:rPr sz="1600">
+                <a:solidFill>
+                  <a:srgbClr val="C586C0"/>
+                </a:solidFill>
+                <a:latin typeface="Consolas"/>
+              </a:rPr>
+              <a:t>let</a:t>
+            </a:r>
+            <a:r>
+              <a:rPr sz="1600">
+                <a:solidFill>
+                  <a:srgbClr val="DCDCDC"/>
+                </a:solidFill>
+                <a:latin typeface="Consolas"/>
+              </a:rPr>
+              <a:t> </a:t>
+            </a:r>
+            <a:r>
+              <a:rPr sz="1600">
+                <a:solidFill>
+                  <a:srgbClr val="DCDCDC"/>
+                </a:solidFill>
+                <a:latin typeface="Consolas"/>
+              </a:rPr>
+              <a:t>r2</a:t>
+            </a:r>
+            <a:r>
+              <a:rPr sz="1600">
+                <a:solidFill>
+                  <a:srgbClr val="DCDCDC"/>
+                </a:solidFill>
+                <a:latin typeface="Consolas"/>
+              </a:rPr>
+              <a:t> </a:t>
+            </a:r>
+            <a:r>
+              <a:rPr sz="1600">
+                <a:solidFill>
+                  <a:srgbClr val="DCDCDC"/>
+                </a:solidFill>
+                <a:latin typeface="Consolas"/>
+              </a:rPr>
+              <a:t>=</a:t>
+            </a:r>
+            <a:r>
+              <a:rPr sz="1600">
+                <a:solidFill>
+                  <a:srgbClr val="DCDCDC"/>
+                </a:solidFill>
+                <a:latin typeface="Consolas"/>
+              </a:rPr>
+              <a:t> </a:t>
+            </a:r>
+            <a:r>
+              <a:rPr sz="1600">
+                <a:solidFill>
+                  <a:srgbClr val="C586C0"/>
+                </a:solidFill>
+                <a:latin typeface="Consolas"/>
+              </a:rPr>
+              <a:t>i16</a:t>
+            </a:r>
+            <a:r>
+              <a:rPr sz="1600">
                 <a:solidFill>
                   <a:srgbClr val="DCDCDC"/>
                 </a:solidFill>
@@ -4314,16 +6093,16 @@
               <a:t>::</a:t>
             </a:r>
             <a:r>
-              <a:rPr sz="1000">
-                <a:solidFill>
-                  <a:srgbClr val="DCDCDC"/>
-                </a:solidFill>
-                <a:latin typeface="Consolas"/>
-              </a:rPr>
-              <a:t>max_value</a:t>
-            </a:r>
-            <a:r>
-              <a:rPr sz="1000">
+              <a:rPr sz="1600">
+                <a:solidFill>
+                  <a:srgbClr val="DCDCDC"/>
+                </a:solidFill>
+                <a:latin typeface="Consolas"/>
+              </a:rPr>
+              <a:t>exhausted_range</a:t>
+            </a:r>
+            <a:r>
+              <a:rPr sz="1600">
                 <a:solidFill>
                   <a:srgbClr val="DCDCDC"/>
                 </a:solidFill>
@@ -4332,7 +6111,7 @@
               <a:t>(</a:t>
             </a:r>
             <a:r>
-              <a:rPr sz="1000">
+              <a:rPr sz="1600">
                 <a:solidFill>
                   <a:srgbClr val="DCDCDC"/>
                 </a:solidFill>
@@ -4341,64 +6120,19 @@
               <a:t>)</a:t>
             </a:r>
             <a:r>
-              <a:rPr sz="1000">
-                <a:solidFill>
-                  <a:srgbClr val="DCDCDC"/>
-                </a:solidFill>
-                <a:latin typeface="Consolas"/>
-              </a:rPr>
-              <a:t>..=</a:t>
-            </a:r>
-            <a:r>
-              <a:rPr sz="1000">
-                <a:solidFill>
-                  <a:srgbClr val="4EC9B0"/>
-                </a:solidFill>
-                <a:latin typeface="Consolas"/>
-              </a:rPr>
-              <a:t>Self</a:t>
-            </a:r>
-            <a:r>
-              <a:rPr sz="1000">
-                <a:solidFill>
-                  <a:srgbClr val="DCDCDC"/>
-                </a:solidFill>
-                <a:latin typeface="Consolas"/>
-              </a:rPr>
-              <a:t>::</a:t>
-            </a:r>
-            <a:r>
-              <a:rPr sz="1000">
-                <a:solidFill>
-                  <a:srgbClr val="DCDCDC"/>
-                </a:solidFill>
-                <a:latin typeface="Consolas"/>
-              </a:rPr>
-              <a:t>min_value</a:t>
-            </a:r>
-            <a:r>
-              <a:rPr sz="1000">
-                <a:solidFill>
-                  <a:srgbClr val="DCDCDC"/>
-                </a:solidFill>
-                <a:latin typeface="Consolas"/>
-              </a:rPr>
-              <a:t>(</a:t>
-            </a:r>
-            <a:r>
-              <a:rPr sz="1000">
-                <a:solidFill>
-                  <a:srgbClr val="DCDCDC"/>
-                </a:solidFill>
-                <a:latin typeface="Consolas"/>
-              </a:rPr>
-              <a:t>)</a:t>
+              <a:rPr sz="1600">
+                <a:solidFill>
+                  <a:srgbClr val="DCDCDC"/>
+                </a:solidFill>
+                <a:latin typeface="Consolas"/>
+              </a:rPr>
+              <a:t>;</a:t>
             </a:r>
           </a:p>
           <a:p>
             <a:pPr>
               <a:lnSpc>
-                <a:spcPct val="100000"/>
+                <a:spcPct val="95000"/>
               </a:lnSpc>
               <a:spcBef>
                 <a:spcPts val="0"/>
@@ -4407,29 +6141,11 @@
                 <a:spcPts val="0"/>
               </a:spcAft>
             </a:pPr>
-            <a:r>
-              <a:rPr sz="1000">
-                <a:solidFill>
-                  <a:srgbClr val="DCDCDC"/>
-                </a:solidFill>
-                <a:latin typeface="Consolas"/>
-              </a:rPr>
-              <a:t>    </a:t>
-            </a:r>
-            <a:r>
-              <a:rPr sz="1000">
-                <a:solidFill>
-                  <a:srgbClr val="DCDCDC"/>
-                </a:solidFill>
-                <a:latin typeface="Consolas"/>
-              </a:rPr>
-              <a:t>}</a:t>
-            </a:r>
           </a:p>
           <a:p>
             <a:pPr>
               <a:lnSpc>
-                <a:spcPct val="100000"/>
+                <a:spcPct val="95000"/>
               </a:lnSpc>
               <a:spcBef>
                 <a:spcPts val="0"/>
@@ -4439,19 +6155,145 @@
               </a:spcAft>
             </a:pPr>
             <a:r>
-              <a:rPr sz="1000">
-                <a:solidFill>
-                  <a:srgbClr val="DCDCDC"/>
-                </a:solidFill>
-                <a:latin typeface="Consolas"/>
-              </a:rPr>
-              <a:t>}</a:t>
+              <a:rPr sz="1600">
+                <a:solidFill>
+                  <a:srgbClr val="DCDCDC"/>
+                </a:solidFill>
+                <a:latin typeface="Consolas"/>
+              </a:rPr>
+              <a:t>    </a:t>
+            </a:r>
+            <a:r>
+              <a:rPr sz="1600">
+                <a:solidFill>
+                  <a:srgbClr val="DCDCAA"/>
+                </a:solidFill>
+                <a:latin typeface="Consolas"/>
+              </a:rPr>
+              <a:t>println!</a:t>
+            </a:r>
+            <a:r>
+              <a:rPr sz="1600">
+                <a:solidFill>
+                  <a:srgbClr val="DCDCDC"/>
+                </a:solidFill>
+                <a:latin typeface="Consolas"/>
+              </a:rPr>
+              <a:t>(</a:t>
+            </a:r>
+            <a:r>
+              <a:rPr sz="1600">
+                <a:solidFill>
+                  <a:srgbClr val="CE9178"/>
+                </a:solidFill>
+                <a:latin typeface="Consolas"/>
+              </a:rPr>
+              <a:t>"</a:t>
+            </a:r>
+            <a:r>
+              <a:rPr sz="1600">
+                <a:solidFill>
+                  <a:srgbClr val="CE9178"/>
+                </a:solidFill>
+                <a:latin typeface="Consolas"/>
+              </a:rPr>
+              <a:t>u8 exhausted range is empty: {}</a:t>
+            </a:r>
+            <a:r>
+              <a:rPr sz="1600">
+                <a:solidFill>
+                  <a:srgbClr val="CE9178"/>
+                </a:solidFill>
+                <a:latin typeface="Consolas"/>
+              </a:rPr>
+              <a:t>"</a:t>
+            </a:r>
+            <a:r>
+              <a:rPr sz="1600">
+                <a:solidFill>
+                  <a:srgbClr val="DCDCDC"/>
+                </a:solidFill>
+                <a:latin typeface="Consolas"/>
+              </a:rPr>
+              <a:t>,</a:t>
+            </a:r>
+            <a:r>
+              <a:rPr sz="1600">
+                <a:solidFill>
+                  <a:srgbClr val="DCDCDC"/>
+                </a:solidFill>
+                <a:latin typeface="Consolas"/>
+              </a:rPr>
+              <a:t> </a:t>
+            </a:r>
+            <a:r>
+              <a:rPr sz="1600">
+                <a:solidFill>
+                  <a:srgbClr val="DCDCDC"/>
+                </a:solidFill>
+                <a:latin typeface="Consolas"/>
+              </a:rPr>
+              <a:t>r1</a:t>
+            </a:r>
+            <a:r>
+              <a:rPr sz="1600">
+                <a:solidFill>
+                  <a:srgbClr val="DCDCDC"/>
+                </a:solidFill>
+                <a:latin typeface="Consolas"/>
+              </a:rPr>
+              <a:t>.</a:t>
+            </a:r>
+            <a:r>
+              <a:rPr sz="1600">
+                <a:solidFill>
+                  <a:srgbClr val="DCDCDC"/>
+                </a:solidFill>
+                <a:latin typeface="Consolas"/>
+              </a:rPr>
+              <a:t>is_empty</a:t>
+            </a:r>
+            <a:r>
+              <a:rPr sz="1600">
+                <a:solidFill>
+                  <a:srgbClr val="DCDCDC"/>
+                </a:solidFill>
+                <a:latin typeface="Consolas"/>
+              </a:rPr>
+              <a:t>(</a:t>
+            </a:r>
+            <a:r>
+              <a:rPr sz="1600">
+                <a:solidFill>
+                  <a:srgbClr val="DCDCDC"/>
+                </a:solidFill>
+                <a:latin typeface="Consolas"/>
+              </a:rPr>
+              <a:t>)</a:t>
+            </a:r>
+            <a:r>
+              <a:rPr sz="1600">
+                <a:solidFill>
+                  <a:srgbClr val="DCDCDC"/>
+                </a:solidFill>
+                <a:latin typeface="Consolas"/>
+              </a:rPr>
+              <a:t>)</a:t>
+            </a:r>
+            <a:r>
+              <a:rPr sz="1600">
+                <a:solidFill>
+                  <a:srgbClr val="DCDCDC"/>
+                </a:solidFill>
+                <a:latin typeface="Consolas"/>
+              </a:rPr>
+              <a:t>;</a:t>
             </a:r>
           </a:p>
           <a:p>
             <a:pPr>
               <a:lnSpc>
-                <a:spcPct val="100000"/>
+                <a:spcPct val="95000"/>
               </a:lnSpc>
               <a:spcBef>
                 <a:spcPts val="0"/>
@@ -4460,11 +6302,146 @@
                 <a:spcPts val="0"/>
               </a:spcAft>
             </a:pPr>
+            <a:r>
+              <a:rPr sz="1600">
+                <a:solidFill>
+                  <a:srgbClr val="DCDCDC"/>
+                </a:solidFill>
+                <a:latin typeface="Consolas"/>
+              </a:rPr>
+              <a:t>    </a:t>
+            </a:r>
+            <a:r>
+              <a:rPr sz="1600">
+                <a:solidFill>
+                  <a:srgbClr val="DCDCAA"/>
+                </a:solidFill>
+                <a:latin typeface="Consolas"/>
+              </a:rPr>
+              <a:t>println!</a:t>
+            </a:r>
+            <a:r>
+              <a:rPr sz="1600">
+                <a:solidFill>
+                  <a:srgbClr val="DCDCDC"/>
+                </a:solidFill>
+                <a:latin typeface="Consolas"/>
+              </a:rPr>
+              <a:t>(</a:t>
+            </a:r>
+            <a:r>
+              <a:rPr sz="1600">
+                <a:solidFill>
+                  <a:srgbClr val="CE9178"/>
+                </a:solidFill>
+                <a:latin typeface="Consolas"/>
+              </a:rPr>
+              <a:t>"</a:t>
+            </a:r>
+            <a:r>
+              <a:rPr sz="1600">
+                <a:solidFill>
+                  <a:srgbClr val="CE9178"/>
+                </a:solidFill>
+                <a:latin typeface="Consolas"/>
+              </a:rPr>
+              <a:t>i16 exhausted range is empty: {}</a:t>
+            </a:r>
+            <a:r>
+              <a:rPr sz="1600">
+                <a:solidFill>
+                  <a:srgbClr val="CE9178"/>
+                </a:solidFill>
+                <a:latin typeface="Consolas"/>
+              </a:rPr>
+              <a:t>"</a:t>
+            </a:r>
+            <a:r>
+              <a:rPr sz="1600">
+                <a:solidFill>
+                  <a:srgbClr val="DCDCDC"/>
+                </a:solidFill>
+                <a:latin typeface="Consolas"/>
+              </a:rPr>
+              <a:t>,</a:t>
+            </a:r>
+            <a:r>
+              <a:rPr sz="1600">
+                <a:solidFill>
+                  <a:srgbClr val="DCDCDC"/>
+                </a:solidFill>
+                <a:latin typeface="Consolas"/>
+              </a:rPr>
+              <a:t> </a:t>
+            </a:r>
+            <a:r>
+              <a:rPr sz="1600">
+                <a:solidFill>
+                  <a:srgbClr val="DCDCDC"/>
+                </a:solidFill>
+                <a:latin typeface="Consolas"/>
+              </a:rPr>
+              <a:t>r2</a:t>
+            </a:r>
+            <a:r>
+              <a:rPr sz="1600">
+                <a:solidFill>
+                  <a:srgbClr val="DCDCDC"/>
+                </a:solidFill>
+                <a:latin typeface="Consolas"/>
+              </a:rPr>
+              <a:t>.</a:t>
+            </a:r>
+            <a:r>
+              <a:rPr sz="1600">
+                <a:solidFill>
+                  <a:srgbClr val="DCDCDC"/>
+                </a:solidFill>
+                <a:latin typeface="Consolas"/>
+              </a:rPr>
+              <a:t>is_empty</a:t>
+            </a:r>
+            <a:r>
+              <a:rPr sz="1600">
+                <a:solidFill>
+                  <a:srgbClr val="DCDCDC"/>
+                </a:solidFill>
+                <a:latin typeface="Consolas"/>
+              </a:rPr>
+              <a:t>(</a:t>
+            </a:r>
+            <a:r>
+              <a:rPr sz="1600">
+                <a:solidFill>
+                  <a:srgbClr val="DCDCDC"/>
+                </a:solidFill>
+                <a:latin typeface="Consolas"/>
+              </a:rPr>
+              <a:t>)</a:t>
+            </a:r>
+            <a:r>
+              <a:rPr sz="1600">
+                <a:solidFill>
+                  <a:srgbClr val="DCDCDC"/>
+                </a:solidFill>
+                <a:latin typeface="Consolas"/>
+              </a:rPr>
+              <a:t>)</a:t>
+            </a:r>
+            <a:r>
+              <a:rPr sz="1600">
+                <a:solidFill>
+                  <a:srgbClr val="DCDCDC"/>
+                </a:solidFill>
+                <a:latin typeface="Consolas"/>
+              </a:rPr>
+              <a:t>;</a:t>
+            </a:r>
           </a:p>
           <a:p>
             <a:pPr>
               <a:lnSpc>
-                <a:spcPct val="100000"/>
+                <a:spcPct val="95000"/>
               </a:lnSpc>
               <a:spcBef>
                 <a:spcPts val="0"/>
@@ -4474,1740 +6451,7 @@
               </a:spcAft>
             </a:pPr>
             <a:r>
-              <a:rPr sz="1000">
-                <a:solidFill>
-                  <a:srgbClr val="C586C0"/>
-                </a:solidFill>
-                <a:latin typeface="Consolas"/>
-              </a:rPr>
-              <a:t>impl</a:t>
-            </a:r>
-            <a:r>
-              <a:rPr sz="1000">
-                <a:solidFill>
-                  <a:srgbClr val="DCDCDC"/>
-                </a:solidFill>
-                <a:latin typeface="Consolas"/>
-              </a:rPr>
-              <a:t> </a:t>
-            </a:r>
-            <a:r>
-              <a:rPr sz="1000">
-                <a:solidFill>
-                  <a:srgbClr val="DCDCDC"/>
-                </a:solidFill>
-                <a:latin typeface="Consolas"/>
-              </a:rPr>
-              <a:t>Integer</a:t>
-            </a:r>
-            <a:r>
-              <a:rPr sz="1000">
-                <a:solidFill>
-                  <a:srgbClr val="DCDCDC"/>
-                </a:solidFill>
-                <a:latin typeface="Consolas"/>
-              </a:rPr>
-              <a:t> </a:t>
-            </a:r>
-            <a:r>
-              <a:rPr sz="1000">
-                <a:solidFill>
-                  <a:srgbClr val="C586C0"/>
-                </a:solidFill>
-                <a:latin typeface="Consolas"/>
-              </a:rPr>
-              <a:t>for</a:t>
-            </a:r>
-            <a:r>
-              <a:rPr sz="1000">
-                <a:solidFill>
-                  <a:srgbClr val="DCDCDC"/>
-                </a:solidFill>
-                <a:latin typeface="Consolas"/>
-              </a:rPr>
-              <a:t> </a:t>
-            </a:r>
-            <a:r>
-              <a:rPr sz="1000">
-                <a:solidFill>
-                  <a:srgbClr val="C586C0"/>
-                </a:solidFill>
-                <a:latin typeface="Consolas"/>
-              </a:rPr>
-              <a:t>u8</a:t>
-            </a:r>
-            <a:r>
-              <a:rPr sz="1000">
-                <a:solidFill>
-                  <a:srgbClr val="DCDCDC"/>
-                </a:solidFill>
-                <a:latin typeface="Consolas"/>
-              </a:rPr>
-              <a:t> </a:t>
-            </a:r>
-            <a:r>
-              <a:rPr sz="1000">
-                <a:solidFill>
-                  <a:srgbClr val="DCDCDC"/>
-                </a:solidFill>
-                <a:latin typeface="Consolas"/>
-              </a:rPr>
-              <a:t>{</a:t>
-            </a:r>
-          </a:p>
-          <a:p>
-            <a:pPr>
-              <a:lnSpc>
-                <a:spcPct val="100000"/>
-              </a:lnSpc>
-              <a:spcBef>
-                <a:spcPts val="0"/>
-              </a:spcBef>
-              <a:spcAft>
-                <a:spcPts val="0"/>
-              </a:spcAft>
-            </a:pPr>
-            <a:r>
-              <a:rPr sz="1000">
-                <a:solidFill>
-                  <a:srgbClr val="DCDCDC"/>
-                </a:solidFill>
-                <a:latin typeface="Consolas"/>
-              </a:rPr>
-              <a:t>    </a:t>
-            </a:r>
-            <a:r>
-              <a:rPr sz="1000">
-                <a:solidFill>
-                  <a:srgbClr val="C586C0"/>
-                </a:solidFill>
-                <a:latin typeface="Consolas"/>
-              </a:rPr>
-              <a:t>fn</a:t>
-            </a:r>
-            <a:r>
-              <a:rPr sz="1000">
-                <a:solidFill>
-                  <a:srgbClr val="DCDCDC"/>
-                </a:solidFill>
-                <a:latin typeface="Consolas"/>
-              </a:rPr>
-              <a:t> </a:t>
-            </a:r>
-            <a:r>
-              <a:rPr sz="1000">
-                <a:solidFill>
-                  <a:srgbClr val="DCDCAA"/>
-                </a:solidFill>
-                <a:latin typeface="Consolas"/>
-              </a:rPr>
-              <a:t>min_value</a:t>
-            </a:r>
-            <a:r>
-              <a:rPr sz="1000">
-                <a:solidFill>
-                  <a:srgbClr val="DCDCDC"/>
-                </a:solidFill>
-                <a:latin typeface="Consolas"/>
-              </a:rPr>
-              <a:t>(</a:t>
-            </a:r>
-            <a:r>
-              <a:rPr sz="1000">
-                <a:solidFill>
-                  <a:srgbClr val="DCDCDC"/>
-                </a:solidFill>
-                <a:latin typeface="Consolas"/>
-              </a:rPr>
-              <a:t>)</a:t>
-            </a:r>
-            <a:r>
-              <a:rPr sz="1000">
-                <a:solidFill>
-                  <a:srgbClr val="DCDCDC"/>
-                </a:solidFill>
-                <a:latin typeface="Consolas"/>
-              </a:rPr>
-              <a:t> </a:t>
-            </a:r>
-            <a:r>
-              <a:rPr sz="1000">
-                <a:solidFill>
-                  <a:srgbClr val="DCDCDC"/>
-                </a:solidFill>
-                <a:latin typeface="Consolas"/>
-              </a:rPr>
-              <a:t>-&gt;</a:t>
-            </a:r>
-            <a:r>
-              <a:rPr sz="1000">
-                <a:solidFill>
-                  <a:srgbClr val="DCDCDC"/>
-                </a:solidFill>
-                <a:latin typeface="Consolas"/>
-              </a:rPr>
-              <a:t> </a:t>
-            </a:r>
-            <a:r>
-              <a:rPr sz="1000">
-                <a:solidFill>
-                  <a:srgbClr val="4EC9B0"/>
-                </a:solidFill>
-                <a:latin typeface="Consolas"/>
-              </a:rPr>
-              <a:t>Self</a:t>
-            </a:r>
-            <a:r>
-              <a:rPr sz="1000">
-                <a:solidFill>
-                  <a:srgbClr val="DCDCDC"/>
-                </a:solidFill>
-                <a:latin typeface="Consolas"/>
-              </a:rPr>
-              <a:t> </a:t>
-            </a:r>
-            <a:r>
-              <a:rPr sz="1000">
-                <a:solidFill>
-                  <a:srgbClr val="DCDCDC"/>
-                </a:solidFill>
-                <a:latin typeface="Consolas"/>
-              </a:rPr>
-              <a:t>{</a:t>
-            </a:r>
-          </a:p>
-          <a:p>
-            <a:pPr>
-              <a:lnSpc>
-                <a:spcPct val="100000"/>
-              </a:lnSpc>
-              <a:spcBef>
-                <a:spcPts val="0"/>
-              </a:spcBef>
-              <a:spcAft>
-                <a:spcPts val="0"/>
-              </a:spcAft>
-            </a:pPr>
-            <a:r>
-              <a:rPr sz="1000">
-                <a:solidFill>
-                  <a:srgbClr val="DCDCDC"/>
-                </a:solidFill>
-                <a:latin typeface="Consolas"/>
-              </a:rPr>
-              <a:t>        </a:t>
-            </a:r>
-            <a:r>
-              <a:rPr sz="1000">
-                <a:solidFill>
-                  <a:srgbClr val="C586C0"/>
-                </a:solidFill>
-                <a:latin typeface="Consolas"/>
-              </a:rPr>
-              <a:t>u8</a:t>
-            </a:r>
-            <a:r>
-              <a:rPr sz="1000">
-                <a:solidFill>
-                  <a:srgbClr val="DCDCDC"/>
-                </a:solidFill>
-                <a:latin typeface="Consolas"/>
-              </a:rPr>
-              <a:t>::</a:t>
-            </a:r>
-            <a:r>
-              <a:rPr sz="1000">
-                <a:solidFill>
-                  <a:srgbClr val="DCDCDC"/>
-                </a:solidFill>
-                <a:latin typeface="Consolas"/>
-              </a:rPr>
-              <a:t>MIN</a:t>
-            </a:r>
-          </a:p>
-          <a:p>
-            <a:pPr>
-              <a:lnSpc>
-                <a:spcPct val="100000"/>
-              </a:lnSpc>
-              <a:spcBef>
-                <a:spcPts val="0"/>
-              </a:spcBef>
-              <a:spcAft>
-                <a:spcPts val="0"/>
-              </a:spcAft>
-            </a:pPr>
-            <a:r>
-              <a:rPr sz="1000">
-                <a:solidFill>
-                  <a:srgbClr val="DCDCDC"/>
-                </a:solidFill>
-                <a:latin typeface="Consolas"/>
-              </a:rPr>
-              <a:t>    </a:t>
-            </a:r>
-            <a:r>
-              <a:rPr sz="1000">
-                <a:solidFill>
-                  <a:srgbClr val="DCDCDC"/>
-                </a:solidFill>
-                <a:latin typeface="Consolas"/>
-              </a:rPr>
-              <a:t>}</a:t>
-            </a:r>
-          </a:p>
-          <a:p>
-            <a:pPr>
-              <a:lnSpc>
-                <a:spcPct val="100000"/>
-              </a:lnSpc>
-              <a:spcBef>
-                <a:spcPts val="0"/>
-              </a:spcBef>
-              <a:spcAft>
-                <a:spcPts val="0"/>
-              </a:spcAft>
-            </a:pPr>
-          </a:p>
-          <a:p>
-            <a:pPr>
-              <a:lnSpc>
-                <a:spcPct val="100000"/>
-              </a:lnSpc>
-              <a:spcBef>
-                <a:spcPts val="0"/>
-              </a:spcBef>
-              <a:spcAft>
-                <a:spcPts val="0"/>
-              </a:spcAft>
-            </a:pPr>
-            <a:r>
-              <a:rPr sz="1000">
-                <a:solidFill>
-                  <a:srgbClr val="DCDCDC"/>
-                </a:solidFill>
-                <a:latin typeface="Consolas"/>
-              </a:rPr>
-              <a:t>    </a:t>
-            </a:r>
-            <a:r>
-              <a:rPr sz="1000">
-                <a:solidFill>
-                  <a:srgbClr val="C586C0"/>
-                </a:solidFill>
-                <a:latin typeface="Consolas"/>
-              </a:rPr>
-              <a:t>fn</a:t>
-            </a:r>
-            <a:r>
-              <a:rPr sz="1000">
-                <a:solidFill>
-                  <a:srgbClr val="DCDCDC"/>
-                </a:solidFill>
-                <a:latin typeface="Consolas"/>
-              </a:rPr>
-              <a:t> </a:t>
-            </a:r>
-            <a:r>
-              <a:rPr sz="1000">
-                <a:solidFill>
-                  <a:srgbClr val="DCDCAA"/>
-                </a:solidFill>
-                <a:latin typeface="Consolas"/>
-              </a:rPr>
-              <a:t>max_value</a:t>
-            </a:r>
-            <a:r>
-              <a:rPr sz="1000">
-                <a:solidFill>
-                  <a:srgbClr val="DCDCDC"/>
-                </a:solidFill>
-                <a:latin typeface="Consolas"/>
-              </a:rPr>
-              <a:t>(</a:t>
-            </a:r>
-            <a:r>
-              <a:rPr sz="1000">
-                <a:solidFill>
-                  <a:srgbClr val="DCDCDC"/>
-                </a:solidFill>
-                <a:latin typeface="Consolas"/>
-              </a:rPr>
-              <a:t>)</a:t>
-            </a:r>
-            <a:r>
-              <a:rPr sz="1000">
-                <a:solidFill>
-                  <a:srgbClr val="DCDCDC"/>
-                </a:solidFill>
-                <a:latin typeface="Consolas"/>
-              </a:rPr>
-              <a:t> </a:t>
-            </a:r>
-            <a:r>
-              <a:rPr sz="1000">
-                <a:solidFill>
-                  <a:srgbClr val="DCDCDC"/>
-                </a:solidFill>
-                <a:latin typeface="Consolas"/>
-              </a:rPr>
-              <a:t>-&gt;</a:t>
-            </a:r>
-            <a:r>
-              <a:rPr sz="1000">
-                <a:solidFill>
-                  <a:srgbClr val="DCDCDC"/>
-                </a:solidFill>
-                <a:latin typeface="Consolas"/>
-              </a:rPr>
-              <a:t> </a:t>
-            </a:r>
-            <a:r>
-              <a:rPr sz="1000">
-                <a:solidFill>
-                  <a:srgbClr val="4EC9B0"/>
-                </a:solidFill>
-                <a:latin typeface="Consolas"/>
-              </a:rPr>
-              <a:t>Self</a:t>
-            </a:r>
-            <a:r>
-              <a:rPr sz="1000">
-                <a:solidFill>
-                  <a:srgbClr val="DCDCDC"/>
-                </a:solidFill>
-                <a:latin typeface="Consolas"/>
-              </a:rPr>
-              <a:t> </a:t>
-            </a:r>
-            <a:r>
-              <a:rPr sz="1000">
-                <a:solidFill>
-                  <a:srgbClr val="DCDCDC"/>
-                </a:solidFill>
-                <a:latin typeface="Consolas"/>
-              </a:rPr>
-              <a:t>{</a:t>
-            </a:r>
-          </a:p>
-          <a:p>
-            <a:pPr>
-              <a:lnSpc>
-                <a:spcPct val="100000"/>
-              </a:lnSpc>
-              <a:spcBef>
-                <a:spcPts val="0"/>
-              </a:spcBef>
-              <a:spcAft>
-                <a:spcPts val="0"/>
-              </a:spcAft>
-            </a:pPr>
-            <a:r>
-              <a:rPr sz="1000">
-                <a:solidFill>
-                  <a:srgbClr val="DCDCDC"/>
-                </a:solidFill>
-                <a:latin typeface="Consolas"/>
-              </a:rPr>
-              <a:t>        </a:t>
-            </a:r>
-            <a:r>
-              <a:rPr sz="1000">
-                <a:solidFill>
-                  <a:srgbClr val="C586C0"/>
-                </a:solidFill>
-                <a:latin typeface="Consolas"/>
-              </a:rPr>
-              <a:t>u8</a:t>
-            </a:r>
-            <a:r>
-              <a:rPr sz="1000">
-                <a:solidFill>
-                  <a:srgbClr val="DCDCDC"/>
-                </a:solidFill>
-                <a:latin typeface="Consolas"/>
-              </a:rPr>
-              <a:t>::</a:t>
-            </a:r>
-            <a:r>
-              <a:rPr sz="1000">
-                <a:solidFill>
-                  <a:srgbClr val="DCDCDC"/>
-                </a:solidFill>
-                <a:latin typeface="Consolas"/>
-              </a:rPr>
-              <a:t>MAX</a:t>
-            </a:r>
-          </a:p>
-          <a:p>
-            <a:pPr>
-              <a:lnSpc>
-                <a:spcPct val="100000"/>
-              </a:lnSpc>
-              <a:spcBef>
-                <a:spcPts val="0"/>
-              </a:spcBef>
-              <a:spcAft>
-                <a:spcPts val="0"/>
-              </a:spcAft>
-            </a:pPr>
-            <a:r>
-              <a:rPr sz="1000">
-                <a:solidFill>
-                  <a:srgbClr val="DCDCDC"/>
-                </a:solidFill>
-                <a:latin typeface="Consolas"/>
-              </a:rPr>
-              <a:t>    </a:t>
-            </a:r>
-            <a:r>
-              <a:rPr sz="1000">
-                <a:solidFill>
-                  <a:srgbClr val="DCDCDC"/>
-                </a:solidFill>
-                <a:latin typeface="Consolas"/>
-              </a:rPr>
-              <a:t>}</a:t>
-            </a:r>
-          </a:p>
-          <a:p>
-            <a:pPr>
-              <a:lnSpc>
-                <a:spcPct val="100000"/>
-              </a:lnSpc>
-              <a:spcBef>
-                <a:spcPts val="0"/>
-              </a:spcBef>
-              <a:spcAft>
-                <a:spcPts val="0"/>
-              </a:spcAft>
-            </a:pPr>
-            <a:r>
-              <a:rPr sz="1000">
-                <a:solidFill>
-                  <a:srgbClr val="DCDCDC"/>
-                </a:solidFill>
-                <a:latin typeface="Consolas"/>
-              </a:rPr>
-              <a:t>}</a:t>
-            </a:r>
-          </a:p>
-          <a:p>
-            <a:pPr>
-              <a:lnSpc>
-                <a:spcPct val="100000"/>
-              </a:lnSpc>
-              <a:spcBef>
-                <a:spcPts val="0"/>
-              </a:spcBef>
-              <a:spcAft>
-                <a:spcPts val="0"/>
-              </a:spcAft>
-            </a:pPr>
-          </a:p>
-          <a:p>
-            <a:pPr>
-              <a:lnSpc>
-                <a:spcPct val="100000"/>
-              </a:lnSpc>
-              <a:spcBef>
-                <a:spcPts val="0"/>
-              </a:spcBef>
-              <a:spcAft>
-                <a:spcPts val="0"/>
-              </a:spcAft>
-            </a:pPr>
-            <a:r>
-              <a:rPr sz="1000">
-                <a:solidFill>
-                  <a:srgbClr val="C586C0"/>
-                </a:solidFill>
-                <a:latin typeface="Consolas"/>
-              </a:rPr>
-              <a:t>impl</a:t>
-            </a:r>
-            <a:r>
-              <a:rPr sz="1000">
-                <a:solidFill>
-                  <a:srgbClr val="DCDCDC"/>
-                </a:solidFill>
-                <a:latin typeface="Consolas"/>
-              </a:rPr>
-              <a:t> </a:t>
-            </a:r>
-            <a:r>
-              <a:rPr sz="1000">
-                <a:solidFill>
-                  <a:srgbClr val="DCDCDC"/>
-                </a:solidFill>
-                <a:latin typeface="Consolas"/>
-              </a:rPr>
-              <a:t>Integer</a:t>
-            </a:r>
-            <a:r>
-              <a:rPr sz="1000">
-                <a:solidFill>
-                  <a:srgbClr val="DCDCDC"/>
-                </a:solidFill>
-                <a:latin typeface="Consolas"/>
-              </a:rPr>
-              <a:t> </a:t>
-            </a:r>
-            <a:r>
-              <a:rPr sz="1000">
-                <a:solidFill>
-                  <a:srgbClr val="C586C0"/>
-                </a:solidFill>
-                <a:latin typeface="Consolas"/>
-              </a:rPr>
-              <a:t>for</a:t>
-            </a:r>
-            <a:r>
-              <a:rPr sz="1000">
-                <a:solidFill>
-                  <a:srgbClr val="DCDCDC"/>
-                </a:solidFill>
-                <a:latin typeface="Consolas"/>
-              </a:rPr>
-              <a:t> </a:t>
-            </a:r>
-            <a:r>
-              <a:rPr sz="1000">
-                <a:solidFill>
-                  <a:srgbClr val="C586C0"/>
-                </a:solidFill>
-                <a:latin typeface="Consolas"/>
-              </a:rPr>
-              <a:t>i16</a:t>
-            </a:r>
-            <a:r>
-              <a:rPr sz="1000">
-                <a:solidFill>
-                  <a:srgbClr val="DCDCDC"/>
-                </a:solidFill>
-                <a:latin typeface="Consolas"/>
-              </a:rPr>
-              <a:t> </a:t>
-            </a:r>
-            <a:r>
-              <a:rPr sz="1000">
-                <a:solidFill>
-                  <a:srgbClr val="DCDCDC"/>
-                </a:solidFill>
-                <a:latin typeface="Consolas"/>
-              </a:rPr>
-              <a:t>{</a:t>
-            </a:r>
-          </a:p>
-          <a:p>
-            <a:pPr>
-              <a:lnSpc>
-                <a:spcPct val="100000"/>
-              </a:lnSpc>
-              <a:spcBef>
-                <a:spcPts val="0"/>
-              </a:spcBef>
-              <a:spcAft>
-                <a:spcPts val="0"/>
-              </a:spcAft>
-            </a:pPr>
-            <a:r>
-              <a:rPr sz="1000">
-                <a:solidFill>
-                  <a:srgbClr val="DCDCDC"/>
-                </a:solidFill>
-                <a:latin typeface="Consolas"/>
-              </a:rPr>
-              <a:t>    </a:t>
-            </a:r>
-            <a:r>
-              <a:rPr sz="1000">
-                <a:solidFill>
-                  <a:srgbClr val="C586C0"/>
-                </a:solidFill>
-                <a:latin typeface="Consolas"/>
-              </a:rPr>
-              <a:t>fn</a:t>
-            </a:r>
-            <a:r>
-              <a:rPr sz="1000">
-                <a:solidFill>
-                  <a:srgbClr val="DCDCDC"/>
-                </a:solidFill>
-                <a:latin typeface="Consolas"/>
-              </a:rPr>
-              <a:t> </a:t>
-            </a:r>
-            <a:r>
-              <a:rPr sz="1000">
-                <a:solidFill>
-                  <a:srgbClr val="DCDCAA"/>
-                </a:solidFill>
-                <a:latin typeface="Consolas"/>
-              </a:rPr>
-              <a:t>min_value</a:t>
-            </a:r>
-            <a:r>
-              <a:rPr sz="1000">
-                <a:solidFill>
-                  <a:srgbClr val="DCDCDC"/>
-                </a:solidFill>
-                <a:latin typeface="Consolas"/>
-              </a:rPr>
-              <a:t>(</a:t>
-            </a:r>
-            <a:r>
-              <a:rPr sz="1000">
-                <a:solidFill>
-                  <a:srgbClr val="DCDCDC"/>
-                </a:solidFill>
-                <a:latin typeface="Consolas"/>
-              </a:rPr>
-              <a:t>)</a:t>
-            </a:r>
-            <a:r>
-              <a:rPr sz="1000">
-                <a:solidFill>
-                  <a:srgbClr val="DCDCDC"/>
-                </a:solidFill>
-                <a:latin typeface="Consolas"/>
-              </a:rPr>
-              <a:t> </a:t>
-            </a:r>
-            <a:r>
-              <a:rPr sz="1000">
-                <a:solidFill>
-                  <a:srgbClr val="DCDCDC"/>
-                </a:solidFill>
-                <a:latin typeface="Consolas"/>
-              </a:rPr>
-              <a:t>-&gt;</a:t>
-            </a:r>
-            <a:r>
-              <a:rPr sz="1000">
-                <a:solidFill>
-                  <a:srgbClr val="DCDCDC"/>
-                </a:solidFill>
-                <a:latin typeface="Consolas"/>
-              </a:rPr>
-              <a:t> </a:t>
-            </a:r>
-            <a:r>
-              <a:rPr sz="1000">
-                <a:solidFill>
-                  <a:srgbClr val="4EC9B0"/>
-                </a:solidFill>
-                <a:latin typeface="Consolas"/>
-              </a:rPr>
-              <a:t>Self</a:t>
-            </a:r>
-            <a:r>
-              <a:rPr sz="1000">
-                <a:solidFill>
-                  <a:srgbClr val="DCDCDC"/>
-                </a:solidFill>
-                <a:latin typeface="Consolas"/>
-              </a:rPr>
-              <a:t> </a:t>
-            </a:r>
-            <a:r>
-              <a:rPr sz="1000">
-                <a:solidFill>
-                  <a:srgbClr val="DCDCDC"/>
-                </a:solidFill>
-                <a:latin typeface="Consolas"/>
-              </a:rPr>
-              <a:t>{</a:t>
-            </a:r>
-          </a:p>
-          <a:p>
-            <a:pPr>
-              <a:lnSpc>
-                <a:spcPct val="100000"/>
-              </a:lnSpc>
-              <a:spcBef>
-                <a:spcPts val="0"/>
-              </a:spcBef>
-              <a:spcAft>
-                <a:spcPts val="0"/>
-              </a:spcAft>
-            </a:pPr>
-            <a:r>
-              <a:rPr sz="1000">
-                <a:solidFill>
-                  <a:srgbClr val="DCDCDC"/>
-                </a:solidFill>
-                <a:latin typeface="Consolas"/>
-              </a:rPr>
-              <a:t>        </a:t>
-            </a:r>
-            <a:r>
-              <a:rPr sz="1000">
-                <a:solidFill>
-                  <a:srgbClr val="C586C0"/>
-                </a:solidFill>
-                <a:latin typeface="Consolas"/>
-              </a:rPr>
-              <a:t>i16</a:t>
-            </a:r>
-            <a:r>
-              <a:rPr sz="1000">
-                <a:solidFill>
-                  <a:srgbClr val="DCDCDC"/>
-                </a:solidFill>
-                <a:latin typeface="Consolas"/>
-              </a:rPr>
-              <a:t>::</a:t>
-            </a:r>
-            <a:r>
-              <a:rPr sz="1000">
-                <a:solidFill>
-                  <a:srgbClr val="DCDCDC"/>
-                </a:solidFill>
-                <a:latin typeface="Consolas"/>
-              </a:rPr>
-              <a:t>MIN</a:t>
-            </a:r>
-          </a:p>
-          <a:p>
-            <a:pPr>
-              <a:lnSpc>
-                <a:spcPct val="100000"/>
-              </a:lnSpc>
-              <a:spcBef>
-                <a:spcPts val="0"/>
-              </a:spcBef>
-              <a:spcAft>
-                <a:spcPts val="0"/>
-              </a:spcAft>
-            </a:pPr>
-            <a:r>
-              <a:rPr sz="1000">
-                <a:solidFill>
-                  <a:srgbClr val="DCDCDC"/>
-                </a:solidFill>
-                <a:latin typeface="Consolas"/>
-              </a:rPr>
-              <a:t>    </a:t>
-            </a:r>
-            <a:r>
-              <a:rPr sz="1000">
-                <a:solidFill>
-                  <a:srgbClr val="DCDCDC"/>
-                </a:solidFill>
-                <a:latin typeface="Consolas"/>
-              </a:rPr>
-              <a:t>}</a:t>
-            </a:r>
-          </a:p>
-          <a:p>
-            <a:pPr>
-              <a:lnSpc>
-                <a:spcPct val="100000"/>
-              </a:lnSpc>
-              <a:spcBef>
-                <a:spcPts val="0"/>
-              </a:spcBef>
-              <a:spcAft>
-                <a:spcPts val="0"/>
-              </a:spcAft>
-            </a:pPr>
-          </a:p>
-          <a:p>
-            <a:pPr>
-              <a:lnSpc>
-                <a:spcPct val="100000"/>
-              </a:lnSpc>
-              <a:spcBef>
-                <a:spcPts val="0"/>
-              </a:spcBef>
-              <a:spcAft>
-                <a:spcPts val="0"/>
-              </a:spcAft>
-            </a:pPr>
-            <a:r>
-              <a:rPr sz="1000">
-                <a:solidFill>
-                  <a:srgbClr val="DCDCDC"/>
-                </a:solidFill>
-                <a:latin typeface="Consolas"/>
-              </a:rPr>
-              <a:t>    </a:t>
-            </a:r>
-            <a:r>
-              <a:rPr sz="1000">
-                <a:solidFill>
-                  <a:srgbClr val="C586C0"/>
-                </a:solidFill>
-                <a:latin typeface="Consolas"/>
-              </a:rPr>
-              <a:t>fn</a:t>
-            </a:r>
-            <a:r>
-              <a:rPr sz="1000">
-                <a:solidFill>
-                  <a:srgbClr val="DCDCDC"/>
-                </a:solidFill>
-                <a:latin typeface="Consolas"/>
-              </a:rPr>
-              <a:t> </a:t>
-            </a:r>
-            <a:r>
-              <a:rPr sz="1000">
-                <a:solidFill>
-                  <a:srgbClr val="DCDCAA"/>
-                </a:solidFill>
-                <a:latin typeface="Consolas"/>
-              </a:rPr>
-              <a:t>max_value</a:t>
-            </a:r>
-            <a:r>
-              <a:rPr sz="1000">
-                <a:solidFill>
-                  <a:srgbClr val="DCDCDC"/>
-                </a:solidFill>
-                <a:latin typeface="Consolas"/>
-              </a:rPr>
-              <a:t>(</a:t>
-            </a:r>
-            <a:r>
-              <a:rPr sz="1000">
-                <a:solidFill>
-                  <a:srgbClr val="DCDCDC"/>
-                </a:solidFill>
-                <a:latin typeface="Consolas"/>
-              </a:rPr>
-              <a:t>)</a:t>
-            </a:r>
-            <a:r>
-              <a:rPr sz="1000">
-                <a:solidFill>
-                  <a:srgbClr val="DCDCDC"/>
-                </a:solidFill>
-                <a:latin typeface="Consolas"/>
-              </a:rPr>
-              <a:t> </a:t>
-            </a:r>
-            <a:r>
-              <a:rPr sz="1000">
-                <a:solidFill>
-                  <a:srgbClr val="DCDCDC"/>
-                </a:solidFill>
-                <a:latin typeface="Consolas"/>
-              </a:rPr>
-              <a:t>-&gt;</a:t>
-            </a:r>
-            <a:r>
-              <a:rPr sz="1000">
-                <a:solidFill>
-                  <a:srgbClr val="DCDCDC"/>
-                </a:solidFill>
-                <a:latin typeface="Consolas"/>
-              </a:rPr>
-              <a:t> </a:t>
-            </a:r>
-            <a:r>
-              <a:rPr sz="1000">
-                <a:solidFill>
-                  <a:srgbClr val="4EC9B0"/>
-                </a:solidFill>
-                <a:latin typeface="Consolas"/>
-              </a:rPr>
-              <a:t>Self</a:t>
-            </a:r>
-            <a:r>
-              <a:rPr sz="1000">
-                <a:solidFill>
-                  <a:srgbClr val="DCDCDC"/>
-                </a:solidFill>
-                <a:latin typeface="Consolas"/>
-              </a:rPr>
-              <a:t> </a:t>
-            </a:r>
-            <a:r>
-              <a:rPr sz="1000">
-                <a:solidFill>
-                  <a:srgbClr val="DCDCDC"/>
-                </a:solidFill>
-                <a:latin typeface="Consolas"/>
-              </a:rPr>
-              <a:t>{</a:t>
-            </a:r>
-          </a:p>
-          <a:p>
-            <a:pPr>
-              <a:lnSpc>
-                <a:spcPct val="100000"/>
-              </a:lnSpc>
-              <a:spcBef>
-                <a:spcPts val="0"/>
-              </a:spcBef>
-              <a:spcAft>
-                <a:spcPts val="0"/>
-              </a:spcAft>
-            </a:pPr>
-            <a:r>
-              <a:rPr sz="1000">
-                <a:solidFill>
-                  <a:srgbClr val="DCDCDC"/>
-                </a:solidFill>
-                <a:latin typeface="Consolas"/>
-              </a:rPr>
-              <a:t>        </a:t>
-            </a:r>
-            <a:r>
-              <a:rPr sz="1000">
-                <a:solidFill>
-                  <a:srgbClr val="C586C0"/>
-                </a:solidFill>
-                <a:latin typeface="Consolas"/>
-              </a:rPr>
-              <a:t>i16</a:t>
-            </a:r>
-            <a:r>
-              <a:rPr sz="1000">
-                <a:solidFill>
-                  <a:srgbClr val="DCDCDC"/>
-                </a:solidFill>
-                <a:latin typeface="Consolas"/>
-              </a:rPr>
-              <a:t>::</a:t>
-            </a:r>
-            <a:r>
-              <a:rPr sz="1000">
-                <a:solidFill>
-                  <a:srgbClr val="DCDCDC"/>
-                </a:solidFill>
-                <a:latin typeface="Consolas"/>
-              </a:rPr>
-              <a:t>MAX</a:t>
-            </a:r>
-          </a:p>
-          <a:p>
-            <a:pPr>
-              <a:lnSpc>
-                <a:spcPct val="100000"/>
-              </a:lnSpc>
-              <a:spcBef>
-                <a:spcPts val="0"/>
-              </a:spcBef>
-              <a:spcAft>
-                <a:spcPts val="0"/>
-              </a:spcAft>
-            </a:pPr>
-            <a:r>
-              <a:rPr sz="1000">
-                <a:solidFill>
-                  <a:srgbClr val="DCDCDC"/>
-                </a:solidFill>
-                <a:latin typeface="Consolas"/>
-              </a:rPr>
-              <a:t>    </a:t>
-            </a:r>
-            <a:r>
-              <a:rPr sz="1000">
-                <a:solidFill>
-                  <a:srgbClr val="DCDCDC"/>
-                </a:solidFill>
-                <a:latin typeface="Consolas"/>
-              </a:rPr>
-              <a:t>}</a:t>
-            </a:r>
-          </a:p>
-          <a:p>
-            <a:pPr>
-              <a:lnSpc>
-                <a:spcPct val="100000"/>
-              </a:lnSpc>
-              <a:spcBef>
-                <a:spcPts val="0"/>
-              </a:spcBef>
-              <a:spcAft>
-                <a:spcPts val="0"/>
-              </a:spcAft>
-            </a:pPr>
-            <a:r>
-              <a:rPr sz="1000">
-                <a:solidFill>
-                  <a:srgbClr val="DCDCDC"/>
-                </a:solidFill>
-                <a:latin typeface="Consolas"/>
-              </a:rPr>
-              <a:t>}</a:t>
-            </a:r>
-          </a:p>
-          <a:p>
-            <a:pPr>
-              <a:lnSpc>
-                <a:spcPct val="100000"/>
-              </a:lnSpc>
-              <a:spcBef>
-                <a:spcPts val="0"/>
-              </a:spcBef>
-              <a:spcAft>
-                <a:spcPts val="0"/>
-              </a:spcAft>
-            </a:pPr>
-          </a:p>
-          <a:p>
-            <a:pPr>
-              <a:lnSpc>
-                <a:spcPct val="100000"/>
-              </a:lnSpc>
-              <a:spcBef>
-                <a:spcPts val="0"/>
-              </a:spcBef>
-              <a:spcAft>
-                <a:spcPts val="0"/>
-              </a:spcAft>
-            </a:pPr>
-            <a:r>
-              <a:rPr sz="1000">
-                <a:solidFill>
-                  <a:srgbClr val="C586C0"/>
-                </a:solidFill>
-                <a:latin typeface="Consolas"/>
-              </a:rPr>
-              <a:t>fn</a:t>
-            </a:r>
-            <a:r>
-              <a:rPr sz="1000">
-                <a:solidFill>
-                  <a:srgbClr val="DCDCDC"/>
-                </a:solidFill>
-                <a:latin typeface="Consolas"/>
-              </a:rPr>
-              <a:t> </a:t>
-            </a:r>
-            <a:r>
-              <a:rPr sz="1000">
-                <a:solidFill>
-                  <a:srgbClr val="DCDCAA"/>
-                </a:solidFill>
-                <a:latin typeface="Consolas"/>
-              </a:rPr>
-              <a:t>main</a:t>
-            </a:r>
-            <a:r>
-              <a:rPr sz="1000">
-                <a:solidFill>
-                  <a:srgbClr val="DCDCDC"/>
-                </a:solidFill>
-                <a:latin typeface="Consolas"/>
-              </a:rPr>
-              <a:t>(</a:t>
-            </a:r>
-            <a:r>
-              <a:rPr sz="1000">
-                <a:solidFill>
-                  <a:srgbClr val="DCDCDC"/>
-                </a:solidFill>
-                <a:latin typeface="Consolas"/>
-              </a:rPr>
-              <a:t>)</a:t>
-            </a:r>
-            <a:r>
-              <a:rPr sz="1000">
-                <a:solidFill>
-                  <a:srgbClr val="DCDCDC"/>
-                </a:solidFill>
-                <a:latin typeface="Consolas"/>
-              </a:rPr>
-              <a:t> </a:t>
-            </a:r>
-            <a:r>
-              <a:rPr sz="1000">
-                <a:solidFill>
-                  <a:srgbClr val="DCDCDC"/>
-                </a:solidFill>
-                <a:latin typeface="Consolas"/>
-              </a:rPr>
-              <a:t>{</a:t>
-            </a:r>
-          </a:p>
-          <a:p>
-            <a:pPr>
-              <a:lnSpc>
-                <a:spcPct val="100000"/>
-              </a:lnSpc>
-              <a:spcBef>
-                <a:spcPts val="0"/>
-              </a:spcBef>
-              <a:spcAft>
-                <a:spcPts val="0"/>
-              </a:spcAft>
-            </a:pPr>
-            <a:r>
-              <a:rPr sz="1000">
-                <a:solidFill>
-                  <a:srgbClr val="DCDCDC"/>
-                </a:solidFill>
-                <a:latin typeface="Consolas"/>
-              </a:rPr>
-              <a:t>    </a:t>
-            </a:r>
-            <a:r>
-              <a:rPr sz="1000">
-                <a:solidFill>
-                  <a:srgbClr val="C586C0"/>
-                </a:solidFill>
-                <a:latin typeface="Consolas"/>
-              </a:rPr>
-              <a:t>let</a:t>
-            </a:r>
-            <a:r>
-              <a:rPr sz="1000">
-                <a:solidFill>
-                  <a:srgbClr val="DCDCDC"/>
-                </a:solidFill>
-                <a:latin typeface="Consolas"/>
-              </a:rPr>
-              <a:t> </a:t>
-            </a:r>
-            <a:r>
-              <a:rPr sz="1000">
-                <a:solidFill>
-                  <a:srgbClr val="DCDCDC"/>
-                </a:solidFill>
-                <a:latin typeface="Consolas"/>
-              </a:rPr>
-              <a:t>r1</a:t>
-            </a:r>
-            <a:r>
-              <a:rPr sz="1000">
-                <a:solidFill>
-                  <a:srgbClr val="DCDCDC"/>
-                </a:solidFill>
-                <a:latin typeface="Consolas"/>
-              </a:rPr>
-              <a:t> </a:t>
-            </a:r>
-            <a:r>
-              <a:rPr sz="1000">
-                <a:solidFill>
-                  <a:srgbClr val="DCDCDC"/>
-                </a:solidFill>
-                <a:latin typeface="Consolas"/>
-              </a:rPr>
-              <a:t>=</a:t>
-            </a:r>
-            <a:r>
-              <a:rPr sz="1000">
-                <a:solidFill>
-                  <a:srgbClr val="DCDCDC"/>
-                </a:solidFill>
-                <a:latin typeface="Consolas"/>
-              </a:rPr>
-              <a:t> </a:t>
-            </a:r>
-            <a:r>
-              <a:rPr sz="1000">
-                <a:solidFill>
-                  <a:srgbClr val="C586C0"/>
-                </a:solidFill>
-                <a:latin typeface="Consolas"/>
-              </a:rPr>
-              <a:t>u8</a:t>
-            </a:r>
-            <a:r>
-              <a:rPr sz="1000">
-                <a:solidFill>
-                  <a:srgbClr val="DCDCDC"/>
-                </a:solidFill>
-                <a:latin typeface="Consolas"/>
-              </a:rPr>
-              <a:t>::</a:t>
-            </a:r>
-            <a:r>
-              <a:rPr sz="1000">
-                <a:solidFill>
-                  <a:srgbClr val="DCDCDC"/>
-                </a:solidFill>
-                <a:latin typeface="Consolas"/>
-              </a:rPr>
-              <a:t>exhausted_range</a:t>
-            </a:r>
-            <a:r>
-              <a:rPr sz="1000">
-                <a:solidFill>
-                  <a:srgbClr val="DCDCDC"/>
-                </a:solidFill>
-                <a:latin typeface="Consolas"/>
-              </a:rPr>
-              <a:t>(</a:t>
-            </a:r>
-            <a:r>
-              <a:rPr sz="1000">
-                <a:solidFill>
-                  <a:srgbClr val="DCDCDC"/>
-                </a:solidFill>
-                <a:latin typeface="Consolas"/>
-              </a:rPr>
-              <a:t>)</a:t>
-            </a:r>
-            <a:r>
-              <a:rPr sz="1000">
-                <a:solidFill>
-                  <a:srgbClr val="DCDCDC"/>
-                </a:solidFill>
-                <a:latin typeface="Consolas"/>
-              </a:rPr>
-              <a:t>;</a:t>
-            </a:r>
-          </a:p>
-          <a:p>
-            <a:pPr>
-              <a:lnSpc>
-                <a:spcPct val="100000"/>
-              </a:lnSpc>
-              <a:spcBef>
-                <a:spcPts val="0"/>
-              </a:spcBef>
-              <a:spcAft>
-                <a:spcPts val="0"/>
-              </a:spcAft>
-            </a:pPr>
-            <a:r>
-              <a:rPr sz="1000">
-                <a:solidFill>
-                  <a:srgbClr val="DCDCDC"/>
-                </a:solidFill>
-                <a:latin typeface="Consolas"/>
-              </a:rPr>
-              <a:t>    </a:t>
-            </a:r>
-            <a:r>
-              <a:rPr sz="1000">
-                <a:solidFill>
-                  <a:srgbClr val="C586C0"/>
-                </a:solidFill>
-                <a:latin typeface="Consolas"/>
-              </a:rPr>
-              <a:t>let</a:t>
-            </a:r>
-            <a:r>
-              <a:rPr sz="1000">
-                <a:solidFill>
-                  <a:srgbClr val="DCDCDC"/>
-                </a:solidFill>
-                <a:latin typeface="Consolas"/>
-              </a:rPr>
-              <a:t> </a:t>
-            </a:r>
-            <a:r>
-              <a:rPr sz="1000">
-                <a:solidFill>
-                  <a:srgbClr val="DCDCDC"/>
-                </a:solidFill>
-                <a:latin typeface="Consolas"/>
-              </a:rPr>
-              <a:t>r2</a:t>
-            </a:r>
-            <a:r>
-              <a:rPr sz="1000">
-                <a:solidFill>
-                  <a:srgbClr val="DCDCDC"/>
-                </a:solidFill>
-                <a:latin typeface="Consolas"/>
-              </a:rPr>
-              <a:t> </a:t>
-            </a:r>
-            <a:r>
-              <a:rPr sz="1000">
-                <a:solidFill>
-                  <a:srgbClr val="DCDCDC"/>
-                </a:solidFill>
-                <a:latin typeface="Consolas"/>
-              </a:rPr>
-              <a:t>=</a:t>
-            </a:r>
-            <a:r>
-              <a:rPr sz="1000">
-                <a:solidFill>
-                  <a:srgbClr val="DCDCDC"/>
-                </a:solidFill>
-                <a:latin typeface="Consolas"/>
-              </a:rPr>
-              <a:t> </a:t>
-            </a:r>
-            <a:r>
-              <a:rPr sz="1000">
-                <a:solidFill>
-                  <a:srgbClr val="C586C0"/>
-                </a:solidFill>
-                <a:latin typeface="Consolas"/>
-              </a:rPr>
-              <a:t>i16</a:t>
-            </a:r>
-            <a:r>
-              <a:rPr sz="1000">
-                <a:solidFill>
-                  <a:srgbClr val="DCDCDC"/>
-                </a:solidFill>
-                <a:latin typeface="Consolas"/>
-              </a:rPr>
-              <a:t>::</a:t>
-            </a:r>
-            <a:r>
-              <a:rPr sz="1000">
-                <a:solidFill>
-                  <a:srgbClr val="DCDCDC"/>
-                </a:solidFill>
-                <a:latin typeface="Consolas"/>
-              </a:rPr>
-              <a:t>exhausted_range</a:t>
-            </a:r>
-            <a:r>
-              <a:rPr sz="1000">
-                <a:solidFill>
-                  <a:srgbClr val="DCDCDC"/>
-                </a:solidFill>
-                <a:latin typeface="Consolas"/>
-              </a:rPr>
-              <a:t>(</a:t>
-            </a:r>
-            <a:r>
-              <a:rPr sz="1000">
-                <a:solidFill>
-                  <a:srgbClr val="DCDCDC"/>
-                </a:solidFill>
-                <a:latin typeface="Consolas"/>
-              </a:rPr>
-              <a:t>)</a:t>
-            </a:r>
-            <a:r>
-              <a:rPr sz="1000">
-                <a:solidFill>
-                  <a:srgbClr val="DCDCDC"/>
-                </a:solidFill>
-                <a:latin typeface="Consolas"/>
-              </a:rPr>
-              <a:t>;</a:t>
-            </a:r>
-          </a:p>
-          <a:p>
-            <a:pPr>
-              <a:lnSpc>
-                <a:spcPct val="100000"/>
-              </a:lnSpc>
-              <a:spcBef>
-                <a:spcPts val="0"/>
-              </a:spcBef>
-              <a:spcAft>
-                <a:spcPts val="0"/>
-              </a:spcAft>
-            </a:pPr>
-          </a:p>
-          <a:p>
-            <a:pPr>
-              <a:lnSpc>
-                <a:spcPct val="100000"/>
-              </a:lnSpc>
-              <a:spcBef>
-                <a:spcPts val="0"/>
-              </a:spcBef>
-              <a:spcAft>
-                <a:spcPts val="0"/>
-              </a:spcAft>
-            </a:pPr>
-            <a:r>
-              <a:rPr sz="1000">
-                <a:solidFill>
-                  <a:srgbClr val="DCDCDC"/>
-                </a:solidFill>
-                <a:latin typeface="Consolas"/>
-              </a:rPr>
-              <a:t>    </a:t>
-            </a:r>
-            <a:r>
-              <a:rPr sz="1000">
-                <a:solidFill>
-                  <a:srgbClr val="DCDCAA"/>
-                </a:solidFill>
-                <a:latin typeface="Consolas"/>
-              </a:rPr>
-              <a:t>println!</a:t>
-            </a:r>
-            <a:r>
-              <a:rPr sz="1000">
-                <a:solidFill>
-                  <a:srgbClr val="DCDCDC"/>
-                </a:solidFill>
-                <a:latin typeface="Consolas"/>
-              </a:rPr>
-              <a:t>(</a:t>
-            </a:r>
-            <a:r>
-              <a:rPr sz="1000">
-                <a:solidFill>
-                  <a:srgbClr val="CE9178"/>
-                </a:solidFill>
-                <a:latin typeface="Consolas"/>
-              </a:rPr>
-              <a:t>"</a:t>
-            </a:r>
-            <a:r>
-              <a:rPr sz="1000">
-                <a:solidFill>
-                  <a:srgbClr val="CE9178"/>
-                </a:solidFill>
-                <a:latin typeface="Consolas"/>
-              </a:rPr>
-              <a:t>u8 exhausted range is empty: {}</a:t>
-            </a:r>
-            <a:r>
-              <a:rPr sz="1000">
-                <a:solidFill>
-                  <a:srgbClr val="CE9178"/>
-                </a:solidFill>
-                <a:latin typeface="Consolas"/>
-              </a:rPr>
-              <a:t>"</a:t>
-            </a:r>
-            <a:r>
-              <a:rPr sz="1000">
-                <a:solidFill>
-                  <a:srgbClr val="DCDCDC"/>
-                </a:solidFill>
-                <a:latin typeface="Consolas"/>
-              </a:rPr>
-              <a:t>,</a:t>
-            </a:r>
-            <a:r>
-              <a:rPr sz="1000">
-                <a:solidFill>
-                  <a:srgbClr val="DCDCDC"/>
-                </a:solidFill>
-                <a:latin typeface="Consolas"/>
-              </a:rPr>
-              <a:t> </a:t>
-            </a:r>
-            <a:r>
-              <a:rPr sz="1000">
-                <a:solidFill>
-                  <a:srgbClr val="DCDCDC"/>
-                </a:solidFill>
-                <a:latin typeface="Consolas"/>
-              </a:rPr>
-              <a:t>r1</a:t>
-            </a:r>
-            <a:r>
-              <a:rPr sz="1000">
-                <a:solidFill>
-                  <a:srgbClr val="DCDCDC"/>
-                </a:solidFill>
-                <a:latin typeface="Consolas"/>
-              </a:rPr>
-              <a:t>.</a:t>
-            </a:r>
-            <a:r>
-              <a:rPr sz="1000">
-                <a:solidFill>
-                  <a:srgbClr val="DCDCDC"/>
-                </a:solidFill>
-                <a:latin typeface="Consolas"/>
-              </a:rPr>
-              <a:t>is_empty</a:t>
-            </a:r>
-            <a:r>
-              <a:rPr sz="1000">
-                <a:solidFill>
-                  <a:srgbClr val="DCDCDC"/>
-                </a:solidFill>
-                <a:latin typeface="Consolas"/>
-              </a:rPr>
-              <a:t>(</a:t>
-            </a:r>
-            <a:r>
-              <a:rPr sz="1000">
-                <a:solidFill>
-                  <a:srgbClr val="DCDCDC"/>
-                </a:solidFill>
-                <a:latin typeface="Consolas"/>
-              </a:rPr>
-              <a:t>)</a:t>
-            </a:r>
-            <a:r>
-              <a:rPr sz="1000">
-                <a:solidFill>
-                  <a:srgbClr val="DCDCDC"/>
-                </a:solidFill>
-                <a:latin typeface="Consolas"/>
-              </a:rPr>
-              <a:t>)</a:t>
-            </a:r>
-            <a:r>
-              <a:rPr sz="1000">
-                <a:solidFill>
-                  <a:srgbClr val="DCDCDC"/>
-                </a:solidFill>
-                <a:latin typeface="Consolas"/>
-              </a:rPr>
-              <a:t>;</a:t>
-            </a:r>
-          </a:p>
-          <a:p>
-            <a:pPr>
-              <a:lnSpc>
-                <a:spcPct val="100000"/>
-              </a:lnSpc>
-              <a:spcBef>
-                <a:spcPts val="0"/>
-              </a:spcBef>
-              <a:spcAft>
-                <a:spcPts val="0"/>
-              </a:spcAft>
-            </a:pPr>
-            <a:r>
-              <a:rPr sz="1000">
-                <a:solidFill>
-                  <a:srgbClr val="DCDCDC"/>
-                </a:solidFill>
-                <a:latin typeface="Consolas"/>
-              </a:rPr>
-              <a:t>    </a:t>
-            </a:r>
-            <a:r>
-              <a:rPr sz="1000">
-                <a:solidFill>
-                  <a:srgbClr val="DCDCAA"/>
-                </a:solidFill>
-                <a:latin typeface="Consolas"/>
-              </a:rPr>
-              <a:t>println!</a:t>
-            </a:r>
-            <a:r>
-              <a:rPr sz="1000">
-                <a:solidFill>
-                  <a:srgbClr val="DCDCDC"/>
-                </a:solidFill>
-                <a:latin typeface="Consolas"/>
-              </a:rPr>
-              <a:t>(</a:t>
-            </a:r>
-            <a:r>
-              <a:rPr sz="1000">
-                <a:solidFill>
-                  <a:srgbClr val="CE9178"/>
-                </a:solidFill>
-                <a:latin typeface="Consolas"/>
-              </a:rPr>
-              <a:t>"</a:t>
-            </a:r>
-            <a:r>
-              <a:rPr sz="1000">
-                <a:solidFill>
-                  <a:srgbClr val="CE9178"/>
-                </a:solidFill>
-                <a:latin typeface="Consolas"/>
-              </a:rPr>
-              <a:t>i16 exhausted range is empty: {}</a:t>
-            </a:r>
-            <a:r>
-              <a:rPr sz="1000">
-                <a:solidFill>
-                  <a:srgbClr val="CE9178"/>
-                </a:solidFill>
-                <a:latin typeface="Consolas"/>
-              </a:rPr>
-              <a:t>"</a:t>
-            </a:r>
-            <a:r>
-              <a:rPr sz="1000">
-                <a:solidFill>
-                  <a:srgbClr val="DCDCDC"/>
-                </a:solidFill>
-                <a:latin typeface="Consolas"/>
-              </a:rPr>
-              <a:t>,</a:t>
-            </a:r>
-            <a:r>
-              <a:rPr sz="1000">
-                <a:solidFill>
-                  <a:srgbClr val="DCDCDC"/>
-                </a:solidFill>
-                <a:latin typeface="Consolas"/>
-              </a:rPr>
-              <a:t> </a:t>
-            </a:r>
-            <a:r>
-              <a:rPr sz="1000">
-                <a:solidFill>
-                  <a:srgbClr val="DCDCDC"/>
-                </a:solidFill>
-                <a:latin typeface="Consolas"/>
-              </a:rPr>
-              <a:t>r2</a:t>
-            </a:r>
-            <a:r>
-              <a:rPr sz="1000">
-                <a:solidFill>
-                  <a:srgbClr val="DCDCDC"/>
-                </a:solidFill>
-                <a:latin typeface="Consolas"/>
-              </a:rPr>
-              <a:t>.</a:t>
-            </a:r>
-            <a:r>
-              <a:rPr sz="1000">
-                <a:solidFill>
-                  <a:srgbClr val="DCDCDC"/>
-                </a:solidFill>
-                <a:latin typeface="Consolas"/>
-              </a:rPr>
-              <a:t>is_empty</a:t>
-            </a:r>
-            <a:r>
-              <a:rPr sz="1000">
-                <a:solidFill>
-                  <a:srgbClr val="DCDCDC"/>
-                </a:solidFill>
-                <a:latin typeface="Consolas"/>
-              </a:rPr>
-              <a:t>(</a:t>
-            </a:r>
-            <a:r>
-              <a:rPr sz="1000">
-                <a:solidFill>
-                  <a:srgbClr val="DCDCDC"/>
-                </a:solidFill>
-                <a:latin typeface="Consolas"/>
-              </a:rPr>
-              <a:t>)</a:t>
-            </a:r>
-            <a:r>
-              <a:rPr sz="1000">
-                <a:solidFill>
-                  <a:srgbClr val="DCDCDC"/>
-                </a:solidFill>
-                <a:latin typeface="Consolas"/>
-              </a:rPr>
-              <a:t>)</a:t>
-            </a:r>
-            <a:r>
-              <a:rPr sz="1000">
-                <a:solidFill>
-                  <a:srgbClr val="DCDCDC"/>
-                </a:solidFill>
-                <a:latin typeface="Consolas"/>
-              </a:rPr>
-              <a:t>;</a:t>
-            </a:r>
-          </a:p>
-          <a:p>
-            <a:pPr>
-              <a:lnSpc>
-                <a:spcPct val="100000"/>
-              </a:lnSpc>
-              <a:spcBef>
-                <a:spcPts val="0"/>
-              </a:spcBef>
-              <a:spcAft>
-                <a:spcPts val="0"/>
-              </a:spcAft>
-            </a:pPr>
-            <a:r>
-              <a:rPr sz="1000">
+              <a:rPr sz="1600">
                 <a:solidFill>
                   <a:srgbClr val="DCDCDC"/>
                 </a:solidFill>

--- a/docs/example1_walkthrough.pptx
+++ b/docs/example1_walkthrough.pptx
@@ -3243,7 +3243,43 @@
                 </a:solidFill>
                 <a:latin typeface="Aptos"/>
               </a:rPr>
-              <a:t>In our library for sets of integers, we require that all integers have certain functions like </a:t>
+              <a:t>We store sets of integers, </a:t>
+            </a:r>
+            <a:r>
+              <a:rPr sz="1600">
+                <a:solidFill>
+                  <a:srgbClr val="FFFFFF"/>
+                </a:solidFill>
+                <a:latin typeface="Consolas"/>
+              </a:rPr>
+              <a:t>u8</a:t>
+            </a:r>
+            <a:r>
+              <a:rPr sz="1600">
+                <a:solidFill>
+                  <a:srgbClr val="E6E6E6"/>
+                </a:solidFill>
+                <a:latin typeface="Aptos"/>
+              </a:rPr>
+              <a:t>, </a:t>
+            </a:r>
+            <a:r>
+              <a:rPr sz="1600">
+                <a:solidFill>
+                  <a:srgbClr val="FFFFFF"/>
+                </a:solidFill>
+                <a:latin typeface="Consolas"/>
+              </a:rPr>
+              <a:t>i16</a:t>
+            </a:r>
+            <a:r>
+              <a:rPr sz="1600">
+                <a:solidFill>
+                  <a:srgbClr val="E6E6E6"/>
+                </a:solidFill>
+                <a:latin typeface="Aptos"/>
+              </a:rPr>
+              <a:t>, etc.. Every integer type must have functions like </a:t>
             </a:r>
             <a:r>
               <a:rPr sz="1600">
@@ -3550,7 +3586,7 @@
                 </a:solidFill>
                 <a:latin typeface="Consolas"/>
               </a:rPr>
-              <a:t>// Mini version of `range-set-blaze`'s Integer pattern.</a:t>
+              <a:t>// Mini `range-set-blaze` Integer</a:t>
             </a:r>
           </a:p>
           <a:p>
@@ -3935,11 +3971,11 @@
             <a:r>
               <a:rPr sz="1600">
                 <a:solidFill>
-                  <a:srgbClr val="CE9178"/>
-                </a:solidFill>
-                <a:latin typeface="Consolas"/>
-              </a:rPr>
-              <a:t>/// Returns an exhausted range, which is a range that starts from the maximum value and ends at the minimum value.</a:t>
+                  <a:srgbClr val="6A9955"/>
+                </a:solidFill>
+                <a:latin typeface="Consolas"/>
+              </a:rPr>
+              <a:t>// Default behavior inherited by implementors.</a:t>
             </a:r>
           </a:p>
           <a:p>
@@ -3966,11 +4002,11 @@
             <a:r>
               <a:rPr sz="1600">
                 <a:solidFill>
-                  <a:srgbClr val="CE9178"/>
-                </a:solidFill>
-                <a:latin typeface="Consolas"/>
-              </a:rPr>
-              <a:t>/// This results in an empty range.</a:t>
+                  <a:srgbClr val="6A9955"/>
+                </a:solidFill>
+                <a:latin typeface="Consolas"/>
+              </a:rPr>
+              <a:t>// Any impl can override this method.</a:t>
             </a:r>
           </a:p>
           <a:p>
@@ -3985,24 +4021,6 @@
                 <a:spcPts val="0"/>
               </a:spcAft>
             </a:pPr>
-            <a:r>
-              <a:rPr sz="1600">
-                <a:solidFill>
-                  <a:srgbClr val="DCDCDC"/>
-                </a:solidFill>
-                <a:latin typeface="Consolas"/>
-              </a:rPr>
-              <a:t>    </a:t>
-            </a:r>
-            <a:r>
-              <a:rPr sz="1600">
-                <a:solidFill>
-                  <a:srgbClr val="6A9955"/>
-                </a:solidFill>
-                <a:latin typeface="Consolas"/>
-              </a:rPr>
-              <a:t>//</a:t>
-            </a:r>
           </a:p>
           <a:p>
             <a:pPr>
@@ -4028,11 +4046,11 @@
             <a:r>
               <a:rPr sz="1600">
                 <a:solidFill>
-                  <a:srgbClr val="6A9955"/>
-                </a:solidFill>
-                <a:latin typeface="Consolas"/>
-              </a:rPr>
-              <a:t>// Default behavior inherited by implementors.</a:t>
+                  <a:srgbClr val="CE9178"/>
+                </a:solidFill>
+                <a:latin typeface="Consolas"/>
+              </a:rPr>
+              <a:t>/// Returns an exhausted (empty) range`.</a:t>
             </a:r>
           </a:p>
           <a:p>
@@ -4059,11 +4077,128 @@
             <a:r>
               <a:rPr sz="1600">
                 <a:solidFill>
-                  <a:srgbClr val="6A9955"/>
-                </a:solidFill>
-                <a:latin typeface="Consolas"/>
-              </a:rPr>
-              <a:t>// Any impl can override this method if it needs specialized behavior.</a:t>
+                  <a:srgbClr val="C586C0"/>
+                </a:solidFill>
+                <a:latin typeface="Consolas"/>
+              </a:rPr>
+              <a:t>fn</a:t>
+            </a:r>
+            <a:r>
+              <a:rPr sz="1600">
+                <a:solidFill>
+                  <a:srgbClr val="DCDCDC"/>
+                </a:solidFill>
+                <a:latin typeface="Consolas"/>
+              </a:rPr>
+              <a:t> </a:t>
+            </a:r>
+            <a:r>
+              <a:rPr sz="1600">
+                <a:solidFill>
+                  <a:srgbClr val="DCDCAA"/>
+                </a:solidFill>
+                <a:latin typeface="Consolas"/>
+              </a:rPr>
+              <a:t>exhausted_range</a:t>
+            </a:r>
+            <a:r>
+              <a:rPr sz="1600">
+                <a:solidFill>
+                  <a:srgbClr val="DCDCDC"/>
+                </a:solidFill>
+                <a:latin typeface="Consolas"/>
+              </a:rPr>
+              <a:t>(</a:t>
+            </a:r>
+            <a:r>
+              <a:rPr sz="1600">
+                <a:solidFill>
+                  <a:srgbClr val="DCDCDC"/>
+                </a:solidFill>
+                <a:latin typeface="Consolas"/>
+              </a:rPr>
+              <a:t>)</a:t>
+            </a:r>
+            <a:r>
+              <a:rPr sz="1600">
+                <a:solidFill>
+                  <a:srgbClr val="DCDCDC"/>
+                </a:solidFill>
+                <a:latin typeface="Consolas"/>
+              </a:rPr>
+              <a:t> </a:t>
+            </a:r>
+            <a:r>
+              <a:rPr sz="1600">
+                <a:solidFill>
+                  <a:srgbClr val="DCDCDC"/>
+                </a:solidFill>
+                <a:latin typeface="Consolas"/>
+              </a:rPr>
+              <a:t>-&gt;</a:t>
+            </a:r>
+            <a:r>
+              <a:rPr sz="1600">
+                <a:solidFill>
+                  <a:srgbClr val="DCDCDC"/>
+                </a:solidFill>
+                <a:latin typeface="Consolas"/>
+              </a:rPr>
+              <a:t> </a:t>
+            </a:r>
+            <a:r>
+              <a:rPr sz="1600">
+                <a:solidFill>
+                  <a:srgbClr val="4EC9B0"/>
+                </a:solidFill>
+                <a:latin typeface="Consolas"/>
+              </a:rPr>
+              <a:t>RangeInclusive</a:t>
+            </a:r>
+            <a:r>
+              <a:rPr sz="1600">
+                <a:solidFill>
+                  <a:srgbClr val="DCDCDC"/>
+                </a:solidFill>
+                <a:latin typeface="Consolas"/>
+              </a:rPr>
+              <a:t>&lt;</a:t>
+            </a:r>
+            <a:r>
+              <a:rPr sz="1600">
+                <a:solidFill>
+                  <a:srgbClr val="4EC9B0"/>
+                </a:solidFill>
+                <a:latin typeface="Consolas"/>
+              </a:rPr>
+              <a:t>Self</a:t>
+            </a:r>
+            <a:r>
+              <a:rPr sz="1600">
+                <a:solidFill>
+                  <a:srgbClr val="DCDCDC"/>
+                </a:solidFill>
+                <a:latin typeface="Consolas"/>
+              </a:rPr>
+              <a:t>&gt;</a:t>
+            </a:r>
+            <a:r>
+              <a:rPr sz="1600">
+                <a:solidFill>
+                  <a:srgbClr val="DCDCDC"/>
+                </a:solidFill>
+                <a:latin typeface="Consolas"/>
+              </a:rPr>
+              <a:t> </a:t>
+            </a:r>
+            <a:r>
+              <a:rPr sz="1600">
+                <a:solidFill>
+                  <a:srgbClr val="DCDCDC"/>
+                </a:solidFill>
+                <a:latin typeface="Consolas"/>
+              </a:rPr>
+              <a:t>{</a:t>
             </a:r>
           </a:p>
           <a:p>
@@ -4085,16 +4220,70 @@
                 </a:solidFill>
                 <a:latin typeface="Consolas"/>
               </a:rPr>
-              <a:t>    </a:t>
-            </a:r>
-            <a:r>
-              <a:rPr sz="1600">
-                <a:solidFill>
-                  <a:srgbClr val="C586C0"/>
-                </a:solidFill>
-                <a:latin typeface="Consolas"/>
-              </a:rPr>
-              <a:t>fn</a:t>
+              <a:t>        </a:t>
+            </a:r>
+            <a:r>
+              <a:rPr sz="1600">
+                <a:solidFill>
+                  <a:srgbClr val="DCDCAA"/>
+                </a:solidFill>
+                <a:latin typeface="Consolas"/>
+              </a:rPr>
+              <a:t>debug_assert!</a:t>
+            </a:r>
+            <a:r>
+              <a:rPr sz="1600">
+                <a:solidFill>
+                  <a:srgbClr val="DCDCDC"/>
+                </a:solidFill>
+                <a:latin typeface="Consolas"/>
+              </a:rPr>
+              <a:t>(</a:t>
+            </a:r>
+            <a:r>
+              <a:rPr sz="1600">
+                <a:solidFill>
+                  <a:srgbClr val="4EC9B0"/>
+                </a:solidFill>
+                <a:latin typeface="Consolas"/>
+              </a:rPr>
+              <a:t>Self</a:t>
+            </a:r>
+            <a:r>
+              <a:rPr sz="1600">
+                <a:solidFill>
+                  <a:srgbClr val="DCDCDC"/>
+                </a:solidFill>
+                <a:latin typeface="Consolas"/>
+              </a:rPr>
+              <a:t>::</a:t>
+            </a:r>
+            <a:r>
+              <a:rPr sz="1600">
+                <a:solidFill>
+                  <a:srgbClr val="DCDCDC"/>
+                </a:solidFill>
+                <a:latin typeface="Consolas"/>
+              </a:rPr>
+              <a:t>min_value</a:t>
+            </a:r>
+            <a:r>
+              <a:rPr sz="1600">
+                <a:solidFill>
+                  <a:srgbClr val="DCDCDC"/>
+                </a:solidFill>
+                <a:latin typeface="Consolas"/>
+              </a:rPr>
+              <a:t>(</a:t>
+            </a:r>
+            <a:r>
+              <a:rPr sz="1600">
+                <a:solidFill>
+                  <a:srgbClr val="DCDCDC"/>
+                </a:solidFill>
+                <a:latin typeface="Consolas"/>
+              </a:rPr>
+              <a:t>)</a:t>
             </a:r>
             <a:r>
               <a:rPr sz="1600">
@@ -4108,11 +4297,47 @@
             <a:r>
               <a:rPr sz="1600">
                 <a:solidFill>
-                  <a:srgbClr val="DCDCAA"/>
-                </a:solidFill>
-                <a:latin typeface="Consolas"/>
-              </a:rPr>
-              <a:t>exhausted_range</a:t>
+                  <a:srgbClr val="DCDCDC"/>
+                </a:solidFill>
+                <a:latin typeface="Consolas"/>
+              </a:rPr>
+              <a:t>&lt;</a:t>
+            </a:r>
+            <a:r>
+              <a:rPr sz="1600">
+                <a:solidFill>
+                  <a:srgbClr val="DCDCDC"/>
+                </a:solidFill>
+                <a:latin typeface="Consolas"/>
+              </a:rPr>
+              <a:t> </a:t>
+            </a:r>
+            <a:r>
+              <a:rPr sz="1600">
+                <a:solidFill>
+                  <a:srgbClr val="4EC9B0"/>
+                </a:solidFill>
+                <a:latin typeface="Consolas"/>
+              </a:rPr>
+              <a:t>Self</a:t>
+            </a:r>
+            <a:r>
+              <a:rPr sz="1600">
+                <a:solidFill>
+                  <a:srgbClr val="DCDCDC"/>
+                </a:solidFill>
+                <a:latin typeface="Consolas"/>
+              </a:rPr>
+              <a:t>::</a:t>
+            </a:r>
+            <a:r>
+              <a:rPr sz="1600">
+                <a:solidFill>
+                  <a:srgbClr val="DCDCDC"/>
+                </a:solidFill>
+                <a:latin typeface="Consolas"/>
+              </a:rPr>
+              <a:t>max_value</a:t>
             </a:r>
             <a:r>
               <a:rPr sz="1600">
@@ -4139,79 +4364,61 @@
                 </a:solidFill>
                 <a:latin typeface="Consolas"/>
               </a:rPr>
+              <a:t>,</a:t>
+            </a:r>
+            <a:r>
+              <a:rPr sz="1600">
+                <a:solidFill>
+                  <a:srgbClr val="DCDCDC"/>
+                </a:solidFill>
+                <a:latin typeface="Consolas"/>
+              </a:rPr>
               <a:t> </a:t>
             </a:r>
             <a:r>
               <a:rPr sz="1600">
                 <a:solidFill>
-                  <a:srgbClr val="DCDCDC"/>
-                </a:solidFill>
-                <a:latin typeface="Consolas"/>
-              </a:rPr>
-              <a:t>-&gt;</a:t>
-            </a:r>
-            <a:r>
-              <a:rPr sz="1600">
-                <a:solidFill>
-                  <a:srgbClr val="DCDCDC"/>
-                </a:solidFill>
-                <a:latin typeface="Consolas"/>
-              </a:rPr>
-              <a:t> </a:t>
-            </a:r>
-            <a:r>
-              <a:rPr sz="1600">
-                <a:solidFill>
-                  <a:srgbClr val="4EC9B0"/>
-                </a:solidFill>
-                <a:latin typeface="Consolas"/>
-              </a:rPr>
-              <a:t>RangeInclusive</a:t>
-            </a:r>
-            <a:r>
-              <a:rPr sz="1600">
-                <a:solidFill>
-                  <a:srgbClr val="DCDCDC"/>
-                </a:solidFill>
-                <a:latin typeface="Consolas"/>
-              </a:rPr>
-              <a:t>&lt;</a:t>
-            </a:r>
-            <a:r>
-              <a:rPr sz="1600">
-                <a:solidFill>
-                  <a:srgbClr val="4EC9B0"/>
-                </a:solidFill>
-                <a:latin typeface="Consolas"/>
-              </a:rPr>
-              <a:t>Self</a:t>
-            </a:r>
-            <a:r>
-              <a:rPr sz="1600">
-                <a:solidFill>
-                  <a:srgbClr val="DCDCDC"/>
-                </a:solidFill>
-                <a:latin typeface="Consolas"/>
-              </a:rPr>
-              <a:t>&gt;</a:t>
-            </a:r>
-            <a:r>
-              <a:rPr sz="1600">
-                <a:solidFill>
-                  <a:srgbClr val="DCDCDC"/>
-                </a:solidFill>
-                <a:latin typeface="Consolas"/>
-              </a:rPr>
-              <a:t> </a:t>
-            </a:r>
-            <a:r>
-              <a:rPr sz="1600">
-                <a:solidFill>
-                  <a:srgbClr val="DCDCDC"/>
-                </a:solidFill>
-                <a:latin typeface="Consolas"/>
-              </a:rPr>
-              <a:t>{</a:t>
+                  <a:srgbClr val="CE9178"/>
+                </a:solidFill>
+                <a:latin typeface="Consolas"/>
+              </a:rPr>
+              <a:t>"</a:t>
+            </a:r>
+            <a:r>
+              <a:rPr sz="1600">
+                <a:solidFill>
+                  <a:srgbClr val="CE9178"/>
+                </a:solidFill>
+                <a:latin typeface="Consolas"/>
+              </a:rPr>
+              <a:t>Precondition</a:t>
+            </a:r>
+            <a:r>
+              <a:rPr sz="1600">
+                <a:solidFill>
+                  <a:srgbClr val="CE9178"/>
+                </a:solidFill>
+                <a:latin typeface="Consolas"/>
+              </a:rPr>
+              <a:t>"</a:t>
+            </a:r>
+            <a:r>
+              <a:rPr sz="1600">
+                <a:solidFill>
+                  <a:srgbClr val="DCDCDC"/>
+                </a:solidFill>
+                <a:latin typeface="Consolas"/>
+              </a:rPr>
+              <a:t>)</a:t>
+            </a:r>
+            <a:r>
+              <a:rPr sz="1600">
+                <a:solidFill>
+                  <a:srgbClr val="DCDCDC"/>
+                </a:solidFill>
+                <a:latin typeface="Consolas"/>
+              </a:rPr>
+              <a:t>;</a:t>
             </a:r>
           </a:p>
           <a:p>
@@ -4238,11 +4445,29 @@
             <a:r>
               <a:rPr sz="1600">
                 <a:solidFill>
-                  <a:srgbClr val="DCDCAA"/>
-                </a:solidFill>
-                <a:latin typeface="Consolas"/>
-              </a:rPr>
-              <a:t>debug_assert!</a:t>
+                  <a:srgbClr val="4EC9B0"/>
+                </a:solidFill>
+                <a:latin typeface="Consolas"/>
+              </a:rPr>
+              <a:t>Self</a:t>
+            </a:r>
+            <a:r>
+              <a:rPr sz="1600">
+                <a:solidFill>
+                  <a:srgbClr val="DCDCDC"/>
+                </a:solidFill>
+                <a:latin typeface="Consolas"/>
+              </a:rPr>
+              <a:t>::</a:t>
+            </a:r>
+            <a:r>
+              <a:rPr sz="1600">
+                <a:solidFill>
+                  <a:srgbClr val="DCDCDC"/>
+                </a:solidFill>
+                <a:latin typeface="Consolas"/>
+              </a:rPr>
+              <a:t>max_value</a:t>
             </a:r>
             <a:r>
               <a:rPr sz="1600">
@@ -4256,6 +4481,24 @@
             <a:r>
               <a:rPr sz="1600">
                 <a:solidFill>
+                  <a:srgbClr val="DCDCDC"/>
+                </a:solidFill>
+                <a:latin typeface="Consolas"/>
+              </a:rPr>
+              <a:t>)</a:t>
+            </a:r>
+            <a:r>
+              <a:rPr sz="1600">
+                <a:solidFill>
+                  <a:srgbClr val="DCDCDC"/>
+                </a:solidFill>
+                <a:latin typeface="Consolas"/>
+              </a:rPr>
+              <a:t>..=</a:t>
+            </a:r>
+            <a:r>
+              <a:rPr sz="1600">
+                <a:solidFill>
                   <a:srgbClr val="4EC9B0"/>
                 </a:solidFill>
                 <a:latin typeface="Consolas"/>
@@ -4297,141 +4540,6 @@
                 <a:latin typeface="Consolas"/>
               </a:rPr>
               <a:t>)</a:t>
-            </a:r>
-            <a:r>
-              <a:rPr sz="1600">
-                <a:solidFill>
-                  <a:srgbClr val="DCDCDC"/>
-                </a:solidFill>
-                <a:latin typeface="Consolas"/>
-              </a:rPr>
-              <a:t> </a:t>
-            </a:r>
-            <a:r>
-              <a:rPr sz="1600">
-                <a:solidFill>
-                  <a:srgbClr val="DCDCDC"/>
-                </a:solidFill>
-                <a:latin typeface="Consolas"/>
-              </a:rPr>
-              <a:t>&lt;</a:t>
-            </a:r>
-            <a:r>
-              <a:rPr sz="1600">
-                <a:solidFill>
-                  <a:srgbClr val="DCDCDC"/>
-                </a:solidFill>
-                <a:latin typeface="Consolas"/>
-              </a:rPr>
-              <a:t> </a:t>
-            </a:r>
-            <a:r>
-              <a:rPr sz="1600">
-                <a:solidFill>
-                  <a:srgbClr val="4EC9B0"/>
-                </a:solidFill>
-                <a:latin typeface="Consolas"/>
-              </a:rPr>
-              <a:t>Self</a:t>
-            </a:r>
-            <a:r>
-              <a:rPr sz="1600">
-                <a:solidFill>
-                  <a:srgbClr val="DCDCDC"/>
-                </a:solidFill>
-                <a:latin typeface="Consolas"/>
-              </a:rPr>
-              <a:t>::</a:t>
-            </a:r>
-            <a:r>
-              <a:rPr sz="1600">
-                <a:solidFill>
-                  <a:srgbClr val="DCDCDC"/>
-                </a:solidFill>
-                <a:latin typeface="Consolas"/>
-              </a:rPr>
-              <a:t>max_value</a:t>
-            </a:r>
-            <a:r>
-              <a:rPr sz="1600">
-                <a:solidFill>
-                  <a:srgbClr val="DCDCDC"/>
-                </a:solidFill>
-                <a:latin typeface="Consolas"/>
-              </a:rPr>
-              <a:t>(</a:t>
-            </a:r>
-            <a:r>
-              <a:rPr sz="1600">
-                <a:solidFill>
-                  <a:srgbClr val="DCDCDC"/>
-                </a:solidFill>
-                <a:latin typeface="Consolas"/>
-              </a:rPr>
-              <a:t>)</a:t>
-            </a:r>
-            <a:r>
-              <a:rPr sz="1600">
-                <a:solidFill>
-                  <a:srgbClr val="DCDCDC"/>
-                </a:solidFill>
-                <a:latin typeface="Consolas"/>
-              </a:rPr>
-              <a:t>,</a:t>
-            </a:r>
-            <a:r>
-              <a:rPr sz="1600">
-                <a:solidFill>
-                  <a:srgbClr val="DCDCDC"/>
-                </a:solidFill>
-                <a:latin typeface="Consolas"/>
-              </a:rPr>
-              <a:t> </a:t>
-            </a:r>
-            <a:r>
-              <a:rPr sz="1600">
-                <a:solidFill>
-                  <a:srgbClr val="CE9178"/>
-                </a:solidFill>
-                <a:latin typeface="Consolas"/>
-              </a:rPr>
-              <a:t>"</a:t>
-            </a:r>
-            <a:r>
-              <a:rPr sz="1600">
-                <a:solidFill>
-                  <a:srgbClr val="CE9178"/>
-                </a:solidFill>
-                <a:latin typeface="Consolas"/>
-              </a:rPr>
-              <a:t>Precondition violated: min_value must be less than max_value</a:t>
-            </a:r>
-            <a:r>
-              <a:rPr sz="1600">
-                <a:solidFill>
-                  <a:srgbClr val="CE9178"/>
-                </a:solidFill>
-                <a:latin typeface="Consolas"/>
-              </a:rPr>
-              <a:t>"</a:t>
-            </a:r>
-            <a:r>
-              <a:rPr sz="1600">
-                <a:solidFill>
-                  <a:srgbClr val="DCDCDC"/>
-                </a:solidFill>
-                <a:latin typeface="Consolas"/>
-              </a:rPr>
-              <a:t>)</a:t>
-            </a:r>
-            <a:r>
-              <a:rPr sz="1600">
-                <a:solidFill>
-                  <a:srgbClr val="DCDCDC"/>
-                </a:solidFill>
-                <a:latin typeface="Consolas"/>
-              </a:rPr>
-              <a:t>;</a:t>
             </a:r>
           </a:p>
           <a:p>
@@ -4453,106 +4561,16 @@
                 </a:solidFill>
                 <a:latin typeface="Consolas"/>
               </a:rPr>
-              <a:t>        </a:t>
-            </a:r>
-            <a:r>
-              <a:rPr sz="1600">
-                <a:solidFill>
-                  <a:srgbClr val="4EC9B0"/>
-                </a:solidFill>
-                <a:latin typeface="Consolas"/>
-              </a:rPr>
-              <a:t>Self</a:t>
-            </a:r>
-            <a:r>
-              <a:rPr sz="1600">
-                <a:solidFill>
-                  <a:srgbClr val="DCDCDC"/>
-                </a:solidFill>
-                <a:latin typeface="Consolas"/>
-              </a:rPr>
-              <a:t>::</a:t>
-            </a:r>
-            <a:r>
-              <a:rPr sz="1600">
-                <a:solidFill>
-                  <a:srgbClr val="DCDCDC"/>
-                </a:solidFill>
-                <a:latin typeface="Consolas"/>
-              </a:rPr>
-              <a:t>max_value</a:t>
-            </a:r>
-            <a:r>
-              <a:rPr sz="1600">
-                <a:solidFill>
-                  <a:srgbClr val="DCDCDC"/>
-                </a:solidFill>
-                <a:latin typeface="Consolas"/>
-              </a:rPr>
-              <a:t>(</a:t>
-            </a:r>
-            <a:r>
-              <a:rPr sz="1600">
-                <a:solidFill>
-                  <a:srgbClr val="DCDCDC"/>
-                </a:solidFill>
-                <a:latin typeface="Consolas"/>
-              </a:rPr>
-              <a:t>)</a:t>
-            </a:r>
-            <a:r>
-              <a:rPr sz="1600">
-                <a:solidFill>
-                  <a:srgbClr val="DCDCDC"/>
-                </a:solidFill>
-                <a:latin typeface="Consolas"/>
-              </a:rPr>
-              <a:t>..=</a:t>
-            </a:r>
-            <a:r>
-              <a:rPr sz="1600">
-                <a:solidFill>
-                  <a:srgbClr val="4EC9B0"/>
-                </a:solidFill>
-                <a:latin typeface="Consolas"/>
-              </a:rPr>
-              <a:t>Self</a:t>
-            </a:r>
-            <a:r>
-              <a:rPr sz="1600">
-                <a:solidFill>
-                  <a:srgbClr val="DCDCDC"/>
-                </a:solidFill>
-                <a:latin typeface="Consolas"/>
-              </a:rPr>
-              <a:t>::</a:t>
-            </a:r>
-            <a:r>
-              <a:rPr sz="1600">
-                <a:solidFill>
-                  <a:srgbClr val="DCDCDC"/>
-                </a:solidFill>
-                <a:latin typeface="Consolas"/>
-              </a:rPr>
-              <a:t>min_value</a:t>
-            </a:r>
-            <a:r>
-              <a:rPr sz="1600">
-                <a:solidFill>
-                  <a:srgbClr val="DCDCDC"/>
-                </a:solidFill>
-                <a:latin typeface="Consolas"/>
-              </a:rPr>
-              <a:t>(</a:t>
-            </a:r>
-            <a:r>
-              <a:rPr sz="1600">
-                <a:solidFill>
-                  <a:srgbClr val="DCDCDC"/>
-                </a:solidFill>
-                <a:latin typeface="Consolas"/>
-              </a:rPr>
-              <a:t>)</a:t>
+              <a:t>    </a:t>
+            </a:r>
+            <a:r>
+              <a:rPr sz="1600">
+                <a:solidFill>
+                  <a:srgbClr val="DCDCDC"/>
+                </a:solidFill>
+                <a:latin typeface="Consolas"/>
+              </a:rPr>
+              <a:t>}</a:t>
             </a:r>
           </a:p>
           <a:p>
@@ -4574,15 +4592,6 @@
                 </a:solidFill>
                 <a:latin typeface="Consolas"/>
               </a:rPr>
-              <a:t>    </a:t>
-            </a:r>
-            <a:r>
-              <a:rPr sz="1600">
-                <a:solidFill>
-                  <a:srgbClr val="DCDCDC"/>
-                </a:solidFill>
-                <a:latin typeface="Consolas"/>
-              </a:rPr>
               <a:t>}</a:t>
             </a:r>
           </a:p>
@@ -4598,15 +4607,6 @@
                 <a:spcPts val="0"/>
               </a:spcAft>
             </a:pPr>
-            <a:r>
-              <a:rPr sz="1600">
-                <a:solidFill>
-                  <a:srgbClr val="DCDCDC"/>
-                </a:solidFill>
-                <a:latin typeface="Consolas"/>
-              </a:rPr>
-              <a:t>}</a:t>
-            </a:r>
           </a:p>
           <a:p>
             <a:pPr>
@@ -4620,6 +4620,87 @@
                 <a:spcPts val="0"/>
               </a:spcAft>
             </a:pPr>
+            <a:r>
+              <a:rPr sz="1600">
+                <a:solidFill>
+                  <a:srgbClr val="C586C0"/>
+                </a:solidFill>
+                <a:latin typeface="Consolas"/>
+              </a:rPr>
+              <a:t>impl</a:t>
+            </a:r>
+            <a:r>
+              <a:rPr sz="1600">
+                <a:solidFill>
+                  <a:srgbClr val="DCDCDC"/>
+                </a:solidFill>
+                <a:latin typeface="Consolas"/>
+              </a:rPr>
+              <a:t> </a:t>
+            </a:r>
+            <a:r>
+              <a:rPr sz="1600">
+                <a:solidFill>
+                  <a:srgbClr val="DCDCDC"/>
+                </a:solidFill>
+                <a:latin typeface="Consolas"/>
+              </a:rPr>
+              <a:t>Integer</a:t>
+            </a:r>
+            <a:r>
+              <a:rPr sz="1600">
+                <a:solidFill>
+                  <a:srgbClr val="DCDCDC"/>
+                </a:solidFill>
+                <a:latin typeface="Consolas"/>
+              </a:rPr>
+              <a:t> </a:t>
+            </a:r>
+            <a:r>
+              <a:rPr sz="1600">
+                <a:solidFill>
+                  <a:srgbClr val="C586C0"/>
+                </a:solidFill>
+                <a:latin typeface="Consolas"/>
+              </a:rPr>
+              <a:t>for</a:t>
+            </a:r>
+            <a:r>
+              <a:rPr sz="1600">
+                <a:solidFill>
+                  <a:srgbClr val="DCDCDC"/>
+                </a:solidFill>
+                <a:latin typeface="Consolas"/>
+              </a:rPr>
+              <a:t> </a:t>
+            </a:r>
+            <a:r>
+              <a:rPr sz="1600">
+                <a:solidFill>
+                  <a:srgbClr val="C586C0"/>
+                </a:solidFill>
+                <a:latin typeface="Consolas"/>
+              </a:rPr>
+              <a:t>u8</a:t>
+            </a:r>
+            <a:r>
+              <a:rPr sz="1600">
+                <a:solidFill>
+                  <a:srgbClr val="DCDCDC"/>
+                </a:solidFill>
+                <a:latin typeface="Consolas"/>
+              </a:rPr>
+              <a:t> </a:t>
+            </a:r>
+            <a:r>
+              <a:rPr sz="1600">
+                <a:solidFill>
+                  <a:srgbClr val="DCDCDC"/>
+                </a:solidFill>
+                <a:latin typeface="Consolas"/>
+              </a:rPr>
+              <a:t>{</a:t>
+            </a:r>
           </a:p>
           <a:p>
             <a:pPr>
@@ -4636,11 +4717,20 @@
             <a:r>
               <a:rPr sz="1600">
                 <a:solidFill>
+                  <a:srgbClr val="DCDCDC"/>
+                </a:solidFill>
+                <a:latin typeface="Consolas"/>
+              </a:rPr>
+              <a:t>    </a:t>
+            </a:r>
+            <a:r>
+              <a:rPr sz="1600">
+                <a:solidFill>
                   <a:srgbClr val="C586C0"/>
                 </a:solidFill>
                 <a:latin typeface="Consolas"/>
               </a:rPr>
-              <a:t>impl</a:t>
+              <a:t>fn</a:t>
             </a:r>
             <a:r>
               <a:rPr sz="1600">
@@ -4654,11 +4744,29 @@
             <a:r>
               <a:rPr sz="1600">
                 <a:solidFill>
-                  <a:srgbClr val="DCDCDC"/>
-                </a:solidFill>
-                <a:latin typeface="Consolas"/>
-              </a:rPr>
-              <a:t>Integer</a:t>
+                  <a:srgbClr val="DCDCAA"/>
+                </a:solidFill>
+                <a:latin typeface="Consolas"/>
+              </a:rPr>
+              <a:t>min_value</a:t>
+            </a:r>
+            <a:r>
+              <a:rPr sz="1600">
+                <a:solidFill>
+                  <a:srgbClr val="DCDCDC"/>
+                </a:solidFill>
+                <a:latin typeface="Consolas"/>
+              </a:rPr>
+              <a:t>(</a:t>
+            </a:r>
+            <a:r>
+              <a:rPr sz="1600">
+                <a:solidFill>
+                  <a:srgbClr val="DCDCDC"/>
+                </a:solidFill>
+                <a:latin typeface="Consolas"/>
+              </a:rPr>
+              <a:t>)</a:t>
             </a:r>
             <a:r>
               <a:rPr sz="1600">
@@ -4672,11 +4780,11 @@
             <a:r>
               <a:rPr sz="1600">
                 <a:solidFill>
-                  <a:srgbClr val="C586C0"/>
-                </a:solidFill>
-                <a:latin typeface="Consolas"/>
-              </a:rPr>
-              <a:t>for</a:t>
+                  <a:srgbClr val="DCDCDC"/>
+                </a:solidFill>
+                <a:latin typeface="Consolas"/>
+              </a:rPr>
+              <a:t>-&gt;</a:t>
             </a:r>
             <a:r>
               <a:rPr sz="1600">
@@ -4690,11 +4798,11 @@
             <a:r>
               <a:rPr sz="1600">
                 <a:solidFill>
-                  <a:srgbClr val="C586C0"/>
-                </a:solidFill>
-                <a:latin typeface="Consolas"/>
-              </a:rPr>
-              <a:t>u8</a:t>
+                  <a:srgbClr val="4EC9B0"/>
+                </a:solidFill>
+                <a:latin typeface="Consolas"/>
+              </a:rPr>
+              <a:t>Self</a:t>
             </a:r>
             <a:r>
               <a:rPr sz="1600">
@@ -4734,7 +4842,7 @@
                 </a:solidFill>
                 <a:latin typeface="Consolas"/>
               </a:rPr>
-              <a:t>    </a:t>
+              <a:t>        </a:t>
             </a:r>
             <a:r>
               <a:rPr sz="1600">
@@ -4743,97 +4851,25 @@
                 </a:solidFill>
                 <a:latin typeface="Consolas"/>
               </a:rPr>
-              <a:t>fn</a:t>
-            </a:r>
-            <a:r>
-              <a:rPr sz="1600">
-                <a:solidFill>
-                  <a:srgbClr val="DCDCDC"/>
-                </a:solidFill>
-                <a:latin typeface="Consolas"/>
-              </a:rPr>
-              <a:t> </a:t>
-            </a:r>
-            <a:r>
-              <a:rPr sz="1600">
-                <a:solidFill>
-                  <a:srgbClr val="DCDCAA"/>
-                </a:solidFill>
-                <a:latin typeface="Consolas"/>
-              </a:rPr>
-              <a:t>min_value</a:t>
-            </a:r>
-            <a:r>
-              <a:rPr sz="1600">
-                <a:solidFill>
-                  <a:srgbClr val="DCDCDC"/>
-                </a:solidFill>
-                <a:latin typeface="Consolas"/>
-              </a:rPr>
-              <a:t>(</a:t>
-            </a:r>
-            <a:r>
-              <a:rPr sz="1600">
-                <a:solidFill>
-                  <a:srgbClr val="DCDCDC"/>
-                </a:solidFill>
-                <a:latin typeface="Consolas"/>
-              </a:rPr>
-              <a:t>)</a:t>
-            </a:r>
-            <a:r>
-              <a:rPr sz="1600">
-                <a:solidFill>
-                  <a:srgbClr val="DCDCDC"/>
-                </a:solidFill>
-                <a:latin typeface="Consolas"/>
-              </a:rPr>
-              <a:t> </a:t>
-            </a:r>
-            <a:r>
-              <a:rPr sz="1600">
-                <a:solidFill>
-                  <a:srgbClr val="DCDCDC"/>
-                </a:solidFill>
-                <a:latin typeface="Consolas"/>
-              </a:rPr>
-              <a:t>-&gt;</a:t>
-            </a:r>
-            <a:r>
-              <a:rPr sz="1600">
-                <a:solidFill>
-                  <a:srgbClr val="DCDCDC"/>
-                </a:solidFill>
-                <a:latin typeface="Consolas"/>
-              </a:rPr>
-              <a:t> </a:t>
-            </a:r>
-            <a:r>
-              <a:rPr sz="1600">
-                <a:solidFill>
-                  <a:srgbClr val="4EC9B0"/>
-                </a:solidFill>
-                <a:latin typeface="Consolas"/>
-              </a:rPr>
-              <a:t>Self</a:t>
-            </a:r>
-            <a:r>
-              <a:rPr sz="1600">
-                <a:solidFill>
-                  <a:srgbClr val="DCDCDC"/>
-                </a:solidFill>
-                <a:latin typeface="Consolas"/>
-              </a:rPr>
-              <a:t> </a:t>
-            </a:r>
-            <a:r>
-              <a:rPr sz="1600">
-                <a:solidFill>
-                  <a:srgbClr val="DCDCDC"/>
-                </a:solidFill>
-                <a:latin typeface="Consolas"/>
-              </a:rPr>
-              <a:t>{</a:t>
+              <a:t>u8</a:t>
+            </a:r>
+            <a:r>
+              <a:rPr sz="1600">
+                <a:solidFill>
+                  <a:srgbClr val="DCDCDC"/>
+                </a:solidFill>
+                <a:latin typeface="Consolas"/>
+              </a:rPr>
+              <a:t>::</a:t>
+            </a:r>
+            <a:r>
+              <a:rPr sz="1600">
+                <a:solidFill>
+                  <a:srgbClr val="DCDCDC"/>
+                </a:solidFill>
+                <a:latin typeface="Consolas"/>
+              </a:rPr>
+              <a:t>MIN</a:t>
             </a:r>
           </a:p>
           <a:p>
@@ -4855,34 +4891,16 @@
                 </a:solidFill>
                 <a:latin typeface="Consolas"/>
               </a:rPr>
-              <a:t>        </a:t>
-            </a:r>
-            <a:r>
-              <a:rPr sz="1600">
-                <a:solidFill>
-                  <a:srgbClr val="C586C0"/>
-                </a:solidFill>
-                <a:latin typeface="Consolas"/>
-              </a:rPr>
-              <a:t>u8</a:t>
-            </a:r>
-            <a:r>
-              <a:rPr sz="1600">
-                <a:solidFill>
-                  <a:srgbClr val="DCDCDC"/>
-                </a:solidFill>
-                <a:latin typeface="Consolas"/>
-              </a:rPr>
-              <a:t>::</a:t>
-            </a:r>
-            <a:r>
-              <a:rPr sz="1600">
-                <a:solidFill>
-                  <a:srgbClr val="DCDCDC"/>
-                </a:solidFill>
-                <a:latin typeface="Consolas"/>
-              </a:rPr>
-              <a:t>MIN</a:t>
+              <a:t>    </a:t>
+            </a:r>
+            <a:r>
+              <a:rPr sz="1600">
+                <a:solidFill>
+                  <a:srgbClr val="DCDCDC"/>
+                </a:solidFill>
+                <a:latin typeface="Consolas"/>
+              </a:rPr>
+              <a:t>}</a:t>
             </a:r>
           </a:p>
           <a:p>
@@ -4897,24 +4915,6 @@
                 <a:spcPts val="0"/>
               </a:spcAft>
             </a:pPr>
-            <a:r>
-              <a:rPr sz="1600">
-                <a:solidFill>
-                  <a:srgbClr val="DCDCDC"/>
-                </a:solidFill>
-                <a:latin typeface="Consolas"/>
-              </a:rPr>
-              <a:t>    </a:t>
-            </a:r>
-            <a:r>
-              <a:rPr sz="1600">
-                <a:solidFill>
-                  <a:srgbClr val="DCDCDC"/>
-                </a:solidFill>
-                <a:latin typeface="Consolas"/>
-              </a:rPr>
-              <a:t>}</a:t>
-            </a:r>
           </a:p>
           <a:p>
             <a:pPr>
@@ -4928,6 +4928,114 @@
                 <a:spcPts val="0"/>
               </a:spcAft>
             </a:pPr>
+            <a:r>
+              <a:rPr sz="1600">
+                <a:solidFill>
+                  <a:srgbClr val="DCDCDC"/>
+                </a:solidFill>
+                <a:latin typeface="Consolas"/>
+              </a:rPr>
+              <a:t>    </a:t>
+            </a:r>
+            <a:r>
+              <a:rPr sz="1600">
+                <a:solidFill>
+                  <a:srgbClr val="C586C0"/>
+                </a:solidFill>
+                <a:latin typeface="Consolas"/>
+              </a:rPr>
+              <a:t>fn</a:t>
+            </a:r>
+            <a:r>
+              <a:rPr sz="1600">
+                <a:solidFill>
+                  <a:srgbClr val="DCDCDC"/>
+                </a:solidFill>
+                <a:latin typeface="Consolas"/>
+              </a:rPr>
+              <a:t> </a:t>
+            </a:r>
+            <a:r>
+              <a:rPr sz="1600">
+                <a:solidFill>
+                  <a:srgbClr val="DCDCAA"/>
+                </a:solidFill>
+                <a:latin typeface="Consolas"/>
+              </a:rPr>
+              <a:t>max_value</a:t>
+            </a:r>
+            <a:r>
+              <a:rPr sz="1600">
+                <a:solidFill>
+                  <a:srgbClr val="DCDCDC"/>
+                </a:solidFill>
+                <a:latin typeface="Consolas"/>
+              </a:rPr>
+              <a:t>(</a:t>
+            </a:r>
+            <a:r>
+              <a:rPr sz="1600">
+                <a:solidFill>
+                  <a:srgbClr val="DCDCDC"/>
+                </a:solidFill>
+                <a:latin typeface="Consolas"/>
+              </a:rPr>
+              <a:t>)</a:t>
+            </a:r>
+            <a:r>
+              <a:rPr sz="1600">
+                <a:solidFill>
+                  <a:srgbClr val="DCDCDC"/>
+                </a:solidFill>
+                <a:latin typeface="Consolas"/>
+              </a:rPr>
+              <a:t> </a:t>
+            </a:r>
+            <a:r>
+              <a:rPr sz="1600">
+                <a:solidFill>
+                  <a:srgbClr val="DCDCDC"/>
+                </a:solidFill>
+                <a:latin typeface="Consolas"/>
+              </a:rPr>
+              <a:t>-&gt;</a:t>
+            </a:r>
+            <a:r>
+              <a:rPr sz="1600">
+                <a:solidFill>
+                  <a:srgbClr val="DCDCDC"/>
+                </a:solidFill>
+                <a:latin typeface="Consolas"/>
+              </a:rPr>
+              <a:t> </a:t>
+            </a:r>
+            <a:r>
+              <a:rPr sz="1600">
+                <a:solidFill>
+                  <a:srgbClr val="4EC9B0"/>
+                </a:solidFill>
+                <a:latin typeface="Consolas"/>
+              </a:rPr>
+              <a:t>Self</a:t>
+            </a:r>
+            <a:r>
+              <a:rPr sz="1600">
+                <a:solidFill>
+                  <a:srgbClr val="DCDCDC"/>
+                </a:solidFill>
+                <a:latin typeface="Consolas"/>
+              </a:rPr>
+              <a:t> </a:t>
+            </a:r>
+            <a:r>
+              <a:rPr sz="1600">
+                <a:solidFill>
+                  <a:srgbClr val="DCDCDC"/>
+                </a:solidFill>
+                <a:latin typeface="Consolas"/>
+              </a:rPr>
+              <a:t>{</a:t>
+            </a:r>
           </a:p>
           <a:p>
             <a:pPr>
@@ -4948,7 +5056,7 @@
                 </a:solidFill>
                 <a:latin typeface="Consolas"/>
               </a:rPr>
-              <a:t>    </a:t>
+              <a:t>        </a:t>
             </a:r>
             <a:r>
               <a:rPr sz="1600">
@@ -4957,97 +5065,25 @@
                 </a:solidFill>
                 <a:latin typeface="Consolas"/>
               </a:rPr>
-              <a:t>fn</a:t>
-            </a:r>
-            <a:r>
-              <a:rPr sz="1600">
-                <a:solidFill>
-                  <a:srgbClr val="DCDCDC"/>
-                </a:solidFill>
-                <a:latin typeface="Consolas"/>
-              </a:rPr>
-              <a:t> </a:t>
-            </a:r>
-            <a:r>
-              <a:rPr sz="1600">
-                <a:solidFill>
-                  <a:srgbClr val="DCDCAA"/>
-                </a:solidFill>
-                <a:latin typeface="Consolas"/>
-              </a:rPr>
-              <a:t>max_value</a:t>
-            </a:r>
-            <a:r>
-              <a:rPr sz="1600">
-                <a:solidFill>
-                  <a:srgbClr val="DCDCDC"/>
-                </a:solidFill>
-                <a:latin typeface="Consolas"/>
-              </a:rPr>
-              <a:t>(</a:t>
-            </a:r>
-            <a:r>
-              <a:rPr sz="1600">
-                <a:solidFill>
-                  <a:srgbClr val="DCDCDC"/>
-                </a:solidFill>
-                <a:latin typeface="Consolas"/>
-              </a:rPr>
-              <a:t>)</a:t>
-            </a:r>
-            <a:r>
-              <a:rPr sz="1600">
-                <a:solidFill>
-                  <a:srgbClr val="DCDCDC"/>
-                </a:solidFill>
-                <a:latin typeface="Consolas"/>
-              </a:rPr>
-              <a:t> </a:t>
-            </a:r>
-            <a:r>
-              <a:rPr sz="1600">
-                <a:solidFill>
-                  <a:srgbClr val="DCDCDC"/>
-                </a:solidFill>
-                <a:latin typeface="Consolas"/>
-              </a:rPr>
-              <a:t>-&gt;</a:t>
-            </a:r>
-            <a:r>
-              <a:rPr sz="1600">
-                <a:solidFill>
-                  <a:srgbClr val="DCDCDC"/>
-                </a:solidFill>
-                <a:latin typeface="Consolas"/>
-              </a:rPr>
-              <a:t> </a:t>
-            </a:r>
-            <a:r>
-              <a:rPr sz="1600">
-                <a:solidFill>
-                  <a:srgbClr val="4EC9B0"/>
-                </a:solidFill>
-                <a:latin typeface="Consolas"/>
-              </a:rPr>
-              <a:t>Self</a:t>
-            </a:r>
-            <a:r>
-              <a:rPr sz="1600">
-                <a:solidFill>
-                  <a:srgbClr val="DCDCDC"/>
-                </a:solidFill>
-                <a:latin typeface="Consolas"/>
-              </a:rPr>
-              <a:t> </a:t>
-            </a:r>
-            <a:r>
-              <a:rPr sz="1600">
-                <a:solidFill>
-                  <a:srgbClr val="DCDCDC"/>
-                </a:solidFill>
-                <a:latin typeface="Consolas"/>
-              </a:rPr>
-              <a:t>{</a:t>
+              <a:t>u8</a:t>
+            </a:r>
+            <a:r>
+              <a:rPr sz="1600">
+                <a:solidFill>
+                  <a:srgbClr val="DCDCDC"/>
+                </a:solidFill>
+                <a:latin typeface="Consolas"/>
+              </a:rPr>
+              <a:t>::</a:t>
+            </a:r>
+            <a:r>
+              <a:rPr sz="1600">
+                <a:solidFill>
+                  <a:srgbClr val="DCDCDC"/>
+                </a:solidFill>
+                <a:latin typeface="Consolas"/>
+              </a:rPr>
+              <a:t>MAX</a:t>
             </a:r>
           </a:p>
           <a:p>
@@ -5069,34 +5105,16 @@
                 </a:solidFill>
                 <a:latin typeface="Consolas"/>
               </a:rPr>
-              <a:t>        </a:t>
-            </a:r>
-            <a:r>
-              <a:rPr sz="1600">
-                <a:solidFill>
-                  <a:srgbClr val="C586C0"/>
-                </a:solidFill>
-                <a:latin typeface="Consolas"/>
-              </a:rPr>
-              <a:t>u8</a:t>
-            </a:r>
-            <a:r>
-              <a:rPr sz="1600">
-                <a:solidFill>
-                  <a:srgbClr val="DCDCDC"/>
-                </a:solidFill>
-                <a:latin typeface="Consolas"/>
-              </a:rPr>
-              <a:t>::</a:t>
-            </a:r>
-            <a:r>
-              <a:rPr sz="1600">
-                <a:solidFill>
-                  <a:srgbClr val="DCDCDC"/>
-                </a:solidFill>
-                <a:latin typeface="Consolas"/>
-              </a:rPr>
-              <a:t>MAX</a:t>
+              <a:t>    </a:t>
+            </a:r>
+            <a:r>
+              <a:rPr sz="1600">
+                <a:solidFill>
+                  <a:srgbClr val="DCDCDC"/>
+                </a:solidFill>
+                <a:latin typeface="Consolas"/>
+              </a:rPr>
+              <a:t>}</a:t>
             </a:r>
           </a:p>
           <a:p>
@@ -5111,15 +5129,6 @@
                 <a:spcPts val="0"/>
               </a:spcAft>
             </a:pPr>
-            <a:r>
-              <a:rPr sz="1600">
-                <a:solidFill>
-                  <a:srgbClr val="DCDCDC"/>
-                </a:solidFill>
-                <a:latin typeface="Consolas"/>
-              </a:rPr>
-              <a:t>    </a:t>
-            </a:r>
             <a:r>
               <a:rPr sz="1600">
                 <a:solidFill>
@@ -5226,15 +5235,6 @@
                 <a:spcPts val="0"/>
               </a:spcAft>
             </a:pPr>
-            <a:r>
-              <a:rPr sz="1600">
-                <a:solidFill>
-                  <a:srgbClr val="DCDCDC"/>
-                </a:solidFill>
-                <a:latin typeface="Consolas"/>
-              </a:rPr>
-              <a:t>}</a:t>
-            </a:r>
           </a:p>
           <a:p>
             <a:pPr>
@@ -5248,6 +5248,87 @@
                 <a:spcPts val="0"/>
               </a:spcAft>
             </a:pPr>
+            <a:r>
+              <a:rPr sz="1600">
+                <a:solidFill>
+                  <a:srgbClr val="C586C0"/>
+                </a:solidFill>
+                <a:latin typeface="Consolas"/>
+              </a:rPr>
+              <a:t>impl</a:t>
+            </a:r>
+            <a:r>
+              <a:rPr sz="1600">
+                <a:solidFill>
+                  <a:srgbClr val="DCDCDC"/>
+                </a:solidFill>
+                <a:latin typeface="Consolas"/>
+              </a:rPr>
+              <a:t> </a:t>
+            </a:r>
+            <a:r>
+              <a:rPr sz="1600">
+                <a:solidFill>
+                  <a:srgbClr val="DCDCDC"/>
+                </a:solidFill>
+                <a:latin typeface="Consolas"/>
+              </a:rPr>
+              <a:t>Integer</a:t>
+            </a:r>
+            <a:r>
+              <a:rPr sz="1600">
+                <a:solidFill>
+                  <a:srgbClr val="DCDCDC"/>
+                </a:solidFill>
+                <a:latin typeface="Consolas"/>
+              </a:rPr>
+              <a:t> </a:t>
+            </a:r>
+            <a:r>
+              <a:rPr sz="1600">
+                <a:solidFill>
+                  <a:srgbClr val="C586C0"/>
+                </a:solidFill>
+                <a:latin typeface="Consolas"/>
+              </a:rPr>
+              <a:t>for</a:t>
+            </a:r>
+            <a:r>
+              <a:rPr sz="1600">
+                <a:solidFill>
+                  <a:srgbClr val="DCDCDC"/>
+                </a:solidFill>
+                <a:latin typeface="Consolas"/>
+              </a:rPr>
+              <a:t> </a:t>
+            </a:r>
+            <a:r>
+              <a:rPr sz="1600">
+                <a:solidFill>
+                  <a:srgbClr val="C586C0"/>
+                </a:solidFill>
+                <a:latin typeface="Consolas"/>
+              </a:rPr>
+              <a:t>i16</a:t>
+            </a:r>
+            <a:r>
+              <a:rPr sz="1600">
+                <a:solidFill>
+                  <a:srgbClr val="DCDCDC"/>
+                </a:solidFill>
+                <a:latin typeface="Consolas"/>
+              </a:rPr>
+              <a:t> </a:t>
+            </a:r>
+            <a:r>
+              <a:rPr sz="1600">
+                <a:solidFill>
+                  <a:srgbClr val="DCDCDC"/>
+                </a:solidFill>
+                <a:latin typeface="Consolas"/>
+              </a:rPr>
+              <a:t>{</a:t>
+            </a:r>
           </a:p>
           <a:p>
             <a:pPr>
@@ -5264,11 +5345,20 @@
             <a:r>
               <a:rPr sz="1600">
                 <a:solidFill>
+                  <a:srgbClr val="DCDCDC"/>
+                </a:solidFill>
+                <a:latin typeface="Consolas"/>
+              </a:rPr>
+              <a:t>    </a:t>
+            </a:r>
+            <a:r>
+              <a:rPr sz="1600">
+                <a:solidFill>
                   <a:srgbClr val="C586C0"/>
                 </a:solidFill>
                 <a:latin typeface="Consolas"/>
               </a:rPr>
-              <a:t>impl</a:t>
+              <a:t>fn</a:t>
             </a:r>
             <a:r>
               <a:rPr sz="1600">
@@ -5282,11 +5372,29 @@
             <a:r>
               <a:rPr sz="1600">
                 <a:solidFill>
-                  <a:srgbClr val="DCDCDC"/>
-                </a:solidFill>
-                <a:latin typeface="Consolas"/>
-              </a:rPr>
-              <a:t>Integer</a:t>
+                  <a:srgbClr val="DCDCAA"/>
+                </a:solidFill>
+                <a:latin typeface="Consolas"/>
+              </a:rPr>
+              <a:t>min_value</a:t>
+            </a:r>
+            <a:r>
+              <a:rPr sz="1600">
+                <a:solidFill>
+                  <a:srgbClr val="DCDCDC"/>
+                </a:solidFill>
+                <a:latin typeface="Consolas"/>
+              </a:rPr>
+              <a:t>(</a:t>
+            </a:r>
+            <a:r>
+              <a:rPr sz="1600">
+                <a:solidFill>
+                  <a:srgbClr val="DCDCDC"/>
+                </a:solidFill>
+                <a:latin typeface="Consolas"/>
+              </a:rPr>
+              <a:t>)</a:t>
             </a:r>
             <a:r>
               <a:rPr sz="1600">
@@ -5300,11 +5408,11 @@
             <a:r>
               <a:rPr sz="1600">
                 <a:solidFill>
-                  <a:srgbClr val="C586C0"/>
-                </a:solidFill>
-                <a:latin typeface="Consolas"/>
-              </a:rPr>
-              <a:t>for</a:t>
+                  <a:srgbClr val="DCDCDC"/>
+                </a:solidFill>
+                <a:latin typeface="Consolas"/>
+              </a:rPr>
+              <a:t>-&gt;</a:t>
             </a:r>
             <a:r>
               <a:rPr sz="1600">
@@ -5318,11 +5426,11 @@
             <a:r>
               <a:rPr sz="1600">
                 <a:solidFill>
-                  <a:srgbClr val="C586C0"/>
-                </a:solidFill>
-                <a:latin typeface="Consolas"/>
-              </a:rPr>
-              <a:t>i16</a:t>
+                  <a:srgbClr val="4EC9B0"/>
+                </a:solidFill>
+                <a:latin typeface="Consolas"/>
+              </a:rPr>
+              <a:t>Self</a:t>
             </a:r>
             <a:r>
               <a:rPr sz="1600">
@@ -5362,7 +5470,7 @@
                 </a:solidFill>
                 <a:latin typeface="Consolas"/>
               </a:rPr>
-              <a:t>    </a:t>
+              <a:t>        </a:t>
             </a:r>
             <a:r>
               <a:rPr sz="1600">
@@ -5371,97 +5479,25 @@
                 </a:solidFill>
                 <a:latin typeface="Consolas"/>
               </a:rPr>
-              <a:t>fn</a:t>
-            </a:r>
-            <a:r>
-              <a:rPr sz="1600">
-                <a:solidFill>
-                  <a:srgbClr val="DCDCDC"/>
-                </a:solidFill>
-                <a:latin typeface="Consolas"/>
-              </a:rPr>
-              <a:t> </a:t>
-            </a:r>
-            <a:r>
-              <a:rPr sz="1600">
-                <a:solidFill>
-                  <a:srgbClr val="DCDCAA"/>
-                </a:solidFill>
-                <a:latin typeface="Consolas"/>
-              </a:rPr>
-              <a:t>min_value</a:t>
-            </a:r>
-            <a:r>
-              <a:rPr sz="1600">
-                <a:solidFill>
-                  <a:srgbClr val="DCDCDC"/>
-                </a:solidFill>
-                <a:latin typeface="Consolas"/>
-              </a:rPr>
-              <a:t>(</a:t>
-            </a:r>
-            <a:r>
-              <a:rPr sz="1600">
-                <a:solidFill>
-                  <a:srgbClr val="DCDCDC"/>
-                </a:solidFill>
-                <a:latin typeface="Consolas"/>
-              </a:rPr>
-              <a:t>)</a:t>
-            </a:r>
-            <a:r>
-              <a:rPr sz="1600">
-                <a:solidFill>
-                  <a:srgbClr val="DCDCDC"/>
-                </a:solidFill>
-                <a:latin typeface="Consolas"/>
-              </a:rPr>
-              <a:t> </a:t>
-            </a:r>
-            <a:r>
-              <a:rPr sz="1600">
-                <a:solidFill>
-                  <a:srgbClr val="DCDCDC"/>
-                </a:solidFill>
-                <a:latin typeface="Consolas"/>
-              </a:rPr>
-              <a:t>-&gt;</a:t>
-            </a:r>
-            <a:r>
-              <a:rPr sz="1600">
-                <a:solidFill>
-                  <a:srgbClr val="DCDCDC"/>
-                </a:solidFill>
-                <a:latin typeface="Consolas"/>
-              </a:rPr>
-              <a:t> </a:t>
-            </a:r>
-            <a:r>
-              <a:rPr sz="1600">
-                <a:solidFill>
-                  <a:srgbClr val="4EC9B0"/>
-                </a:solidFill>
-                <a:latin typeface="Consolas"/>
-              </a:rPr>
-              <a:t>Self</a:t>
-            </a:r>
-            <a:r>
-              <a:rPr sz="1600">
-                <a:solidFill>
-                  <a:srgbClr val="DCDCDC"/>
-                </a:solidFill>
-                <a:latin typeface="Consolas"/>
-              </a:rPr>
-              <a:t> </a:t>
-            </a:r>
-            <a:r>
-              <a:rPr sz="1600">
-                <a:solidFill>
-                  <a:srgbClr val="DCDCDC"/>
-                </a:solidFill>
-                <a:latin typeface="Consolas"/>
-              </a:rPr>
-              <a:t>{</a:t>
+              <a:t>i16</a:t>
+            </a:r>
+            <a:r>
+              <a:rPr sz="1600">
+                <a:solidFill>
+                  <a:srgbClr val="DCDCDC"/>
+                </a:solidFill>
+                <a:latin typeface="Consolas"/>
+              </a:rPr>
+              <a:t>::</a:t>
+            </a:r>
+            <a:r>
+              <a:rPr sz="1600">
+                <a:solidFill>
+                  <a:srgbClr val="DCDCDC"/>
+                </a:solidFill>
+                <a:latin typeface="Consolas"/>
+              </a:rPr>
+              <a:t>MIN</a:t>
             </a:r>
           </a:p>
           <a:p>
@@ -5483,34 +5519,16 @@
                 </a:solidFill>
                 <a:latin typeface="Consolas"/>
               </a:rPr>
-              <a:t>        </a:t>
-            </a:r>
-            <a:r>
-              <a:rPr sz="1600">
-                <a:solidFill>
-                  <a:srgbClr val="C586C0"/>
-                </a:solidFill>
-                <a:latin typeface="Consolas"/>
-              </a:rPr>
-              <a:t>i16</a:t>
-            </a:r>
-            <a:r>
-              <a:rPr sz="1600">
-                <a:solidFill>
-                  <a:srgbClr val="DCDCDC"/>
-                </a:solidFill>
-                <a:latin typeface="Consolas"/>
-              </a:rPr>
-              <a:t>::</a:t>
-            </a:r>
-            <a:r>
-              <a:rPr sz="1600">
-                <a:solidFill>
-                  <a:srgbClr val="DCDCDC"/>
-                </a:solidFill>
-                <a:latin typeface="Consolas"/>
-              </a:rPr>
-              <a:t>MIN</a:t>
+              <a:t>    </a:t>
+            </a:r>
+            <a:r>
+              <a:rPr sz="1600">
+                <a:solidFill>
+                  <a:srgbClr val="DCDCDC"/>
+                </a:solidFill>
+                <a:latin typeface="Consolas"/>
+              </a:rPr>
+              <a:t>}</a:t>
             </a:r>
           </a:p>
           <a:p>
@@ -5525,24 +5543,6 @@
                 <a:spcPts val="0"/>
               </a:spcAft>
             </a:pPr>
-            <a:r>
-              <a:rPr sz="1600">
-                <a:solidFill>
-                  <a:srgbClr val="DCDCDC"/>
-                </a:solidFill>
-                <a:latin typeface="Consolas"/>
-              </a:rPr>
-              <a:t>    </a:t>
-            </a:r>
-            <a:r>
-              <a:rPr sz="1600">
-                <a:solidFill>
-                  <a:srgbClr val="DCDCDC"/>
-                </a:solidFill>
-                <a:latin typeface="Consolas"/>
-              </a:rPr>
-              <a:t>}</a:t>
-            </a:r>
           </a:p>
           <a:p>
             <a:pPr>
@@ -5556,6 +5556,114 @@
                 <a:spcPts val="0"/>
               </a:spcAft>
             </a:pPr>
+            <a:r>
+              <a:rPr sz="1600">
+                <a:solidFill>
+                  <a:srgbClr val="DCDCDC"/>
+                </a:solidFill>
+                <a:latin typeface="Consolas"/>
+              </a:rPr>
+              <a:t>    </a:t>
+            </a:r>
+            <a:r>
+              <a:rPr sz="1600">
+                <a:solidFill>
+                  <a:srgbClr val="C586C0"/>
+                </a:solidFill>
+                <a:latin typeface="Consolas"/>
+              </a:rPr>
+              <a:t>fn</a:t>
+            </a:r>
+            <a:r>
+              <a:rPr sz="1600">
+                <a:solidFill>
+                  <a:srgbClr val="DCDCDC"/>
+                </a:solidFill>
+                <a:latin typeface="Consolas"/>
+              </a:rPr>
+              <a:t> </a:t>
+            </a:r>
+            <a:r>
+              <a:rPr sz="1600">
+                <a:solidFill>
+                  <a:srgbClr val="DCDCAA"/>
+                </a:solidFill>
+                <a:latin typeface="Consolas"/>
+              </a:rPr>
+              <a:t>max_value</a:t>
+            </a:r>
+            <a:r>
+              <a:rPr sz="1600">
+                <a:solidFill>
+                  <a:srgbClr val="DCDCDC"/>
+                </a:solidFill>
+                <a:latin typeface="Consolas"/>
+              </a:rPr>
+              <a:t>(</a:t>
+            </a:r>
+            <a:r>
+              <a:rPr sz="1600">
+                <a:solidFill>
+                  <a:srgbClr val="DCDCDC"/>
+                </a:solidFill>
+                <a:latin typeface="Consolas"/>
+              </a:rPr>
+              <a:t>)</a:t>
+            </a:r>
+            <a:r>
+              <a:rPr sz="1600">
+                <a:solidFill>
+                  <a:srgbClr val="DCDCDC"/>
+                </a:solidFill>
+                <a:latin typeface="Consolas"/>
+              </a:rPr>
+              <a:t> </a:t>
+            </a:r>
+            <a:r>
+              <a:rPr sz="1600">
+                <a:solidFill>
+                  <a:srgbClr val="DCDCDC"/>
+                </a:solidFill>
+                <a:latin typeface="Consolas"/>
+              </a:rPr>
+              <a:t>-&gt;</a:t>
+            </a:r>
+            <a:r>
+              <a:rPr sz="1600">
+                <a:solidFill>
+                  <a:srgbClr val="DCDCDC"/>
+                </a:solidFill>
+                <a:latin typeface="Consolas"/>
+              </a:rPr>
+              <a:t> </a:t>
+            </a:r>
+            <a:r>
+              <a:rPr sz="1600">
+                <a:solidFill>
+                  <a:srgbClr val="4EC9B0"/>
+                </a:solidFill>
+                <a:latin typeface="Consolas"/>
+              </a:rPr>
+              <a:t>Self</a:t>
+            </a:r>
+            <a:r>
+              <a:rPr sz="1600">
+                <a:solidFill>
+                  <a:srgbClr val="DCDCDC"/>
+                </a:solidFill>
+                <a:latin typeface="Consolas"/>
+              </a:rPr>
+              <a:t> </a:t>
+            </a:r>
+            <a:r>
+              <a:rPr sz="1600">
+                <a:solidFill>
+                  <a:srgbClr val="DCDCDC"/>
+                </a:solidFill>
+                <a:latin typeface="Consolas"/>
+              </a:rPr>
+              <a:t>{</a:t>
+            </a:r>
           </a:p>
           <a:p>
             <a:pPr>
@@ -5576,7 +5684,7 @@
                 </a:solidFill>
                 <a:latin typeface="Consolas"/>
               </a:rPr>
-              <a:t>    </a:t>
+              <a:t>        </a:t>
             </a:r>
             <a:r>
               <a:rPr sz="1600">
@@ -5585,97 +5693,25 @@
                 </a:solidFill>
                 <a:latin typeface="Consolas"/>
               </a:rPr>
-              <a:t>fn</a:t>
-            </a:r>
-            <a:r>
-              <a:rPr sz="1600">
-                <a:solidFill>
-                  <a:srgbClr val="DCDCDC"/>
-                </a:solidFill>
-                <a:latin typeface="Consolas"/>
-              </a:rPr>
-              <a:t> </a:t>
-            </a:r>
-            <a:r>
-              <a:rPr sz="1600">
-                <a:solidFill>
-                  <a:srgbClr val="DCDCAA"/>
-                </a:solidFill>
-                <a:latin typeface="Consolas"/>
-              </a:rPr>
-              <a:t>max_value</a:t>
-            </a:r>
-            <a:r>
-              <a:rPr sz="1600">
-                <a:solidFill>
-                  <a:srgbClr val="DCDCDC"/>
-                </a:solidFill>
-                <a:latin typeface="Consolas"/>
-              </a:rPr>
-              <a:t>(</a:t>
-            </a:r>
-            <a:r>
-              <a:rPr sz="1600">
-                <a:solidFill>
-                  <a:srgbClr val="DCDCDC"/>
-                </a:solidFill>
-                <a:latin typeface="Consolas"/>
-              </a:rPr>
-              <a:t>)</a:t>
-            </a:r>
-            <a:r>
-              <a:rPr sz="1600">
-                <a:solidFill>
-                  <a:srgbClr val="DCDCDC"/>
-                </a:solidFill>
-                <a:latin typeface="Consolas"/>
-              </a:rPr>
-              <a:t> </a:t>
-            </a:r>
-            <a:r>
-              <a:rPr sz="1600">
-                <a:solidFill>
-                  <a:srgbClr val="DCDCDC"/>
-                </a:solidFill>
-                <a:latin typeface="Consolas"/>
-              </a:rPr>
-              <a:t>-&gt;</a:t>
-            </a:r>
-            <a:r>
-              <a:rPr sz="1600">
-                <a:solidFill>
-                  <a:srgbClr val="DCDCDC"/>
-                </a:solidFill>
-                <a:latin typeface="Consolas"/>
-              </a:rPr>
-              <a:t> </a:t>
-            </a:r>
-            <a:r>
-              <a:rPr sz="1600">
-                <a:solidFill>
-                  <a:srgbClr val="4EC9B0"/>
-                </a:solidFill>
-                <a:latin typeface="Consolas"/>
-              </a:rPr>
-              <a:t>Self</a:t>
-            </a:r>
-            <a:r>
-              <a:rPr sz="1600">
-                <a:solidFill>
-                  <a:srgbClr val="DCDCDC"/>
-                </a:solidFill>
-                <a:latin typeface="Consolas"/>
-              </a:rPr>
-              <a:t> </a:t>
-            </a:r>
-            <a:r>
-              <a:rPr sz="1600">
-                <a:solidFill>
-                  <a:srgbClr val="DCDCDC"/>
-                </a:solidFill>
-                <a:latin typeface="Consolas"/>
-              </a:rPr>
-              <a:t>{</a:t>
+              <a:t>i16</a:t>
+            </a:r>
+            <a:r>
+              <a:rPr sz="1600">
+                <a:solidFill>
+                  <a:srgbClr val="DCDCDC"/>
+                </a:solidFill>
+                <a:latin typeface="Consolas"/>
+              </a:rPr>
+              <a:t>::</a:t>
+            </a:r>
+            <a:r>
+              <a:rPr sz="1600">
+                <a:solidFill>
+                  <a:srgbClr val="DCDCDC"/>
+                </a:solidFill>
+                <a:latin typeface="Consolas"/>
+              </a:rPr>
+              <a:t>MAX</a:t>
             </a:r>
           </a:p>
           <a:p>
@@ -5697,34 +5733,16 @@
                 </a:solidFill>
                 <a:latin typeface="Consolas"/>
               </a:rPr>
-              <a:t>        </a:t>
-            </a:r>
-            <a:r>
-              <a:rPr sz="1600">
-                <a:solidFill>
-                  <a:srgbClr val="C586C0"/>
-                </a:solidFill>
-                <a:latin typeface="Consolas"/>
-              </a:rPr>
-              <a:t>i16</a:t>
-            </a:r>
-            <a:r>
-              <a:rPr sz="1600">
-                <a:solidFill>
-                  <a:srgbClr val="DCDCDC"/>
-                </a:solidFill>
-                <a:latin typeface="Consolas"/>
-              </a:rPr>
-              <a:t>::</a:t>
-            </a:r>
-            <a:r>
-              <a:rPr sz="1600">
-                <a:solidFill>
-                  <a:srgbClr val="DCDCDC"/>
-                </a:solidFill>
-                <a:latin typeface="Consolas"/>
-              </a:rPr>
-              <a:t>MAX</a:t>
+              <a:t>    </a:t>
+            </a:r>
+            <a:r>
+              <a:rPr sz="1600">
+                <a:solidFill>
+                  <a:srgbClr val="DCDCDC"/>
+                </a:solidFill>
+                <a:latin typeface="Consolas"/>
+              </a:rPr>
+              <a:t>}</a:t>
             </a:r>
           </a:p>
           <a:p>
@@ -5746,15 +5764,6 @@
                 </a:solidFill>
                 <a:latin typeface="Consolas"/>
               </a:rPr>
-              <a:t>    </a:t>
-            </a:r>
-            <a:r>
-              <a:rPr sz="1600">
-                <a:solidFill>
-                  <a:srgbClr val="DCDCDC"/>
-                </a:solidFill>
-                <a:latin typeface="Consolas"/>
-              </a:rPr>
               <a:t>}</a:t>
             </a:r>
           </a:p>
@@ -5770,15 +5779,6 @@
                 <a:spcPts val="0"/>
               </a:spcAft>
             </a:pPr>
-            <a:r>
-              <a:rPr sz="1600">
-                <a:solidFill>
-                  <a:srgbClr val="DCDCDC"/>
-                </a:solidFill>
-                <a:latin typeface="Consolas"/>
-              </a:rPr>
-              <a:t>}</a:t>
-            </a:r>
           </a:p>
           <a:p>
             <a:pPr>
@@ -5792,6 +5792,69 @@
                 <a:spcPts val="0"/>
               </a:spcAft>
             </a:pPr>
+            <a:r>
+              <a:rPr sz="1600">
+                <a:solidFill>
+                  <a:srgbClr val="C586C0"/>
+                </a:solidFill>
+                <a:latin typeface="Consolas"/>
+              </a:rPr>
+              <a:t>fn</a:t>
+            </a:r>
+            <a:r>
+              <a:rPr sz="1600">
+                <a:solidFill>
+                  <a:srgbClr val="DCDCDC"/>
+                </a:solidFill>
+                <a:latin typeface="Consolas"/>
+              </a:rPr>
+              <a:t> </a:t>
+            </a:r>
+            <a:r>
+              <a:rPr sz="1600">
+                <a:solidFill>
+                  <a:srgbClr val="DCDCAA"/>
+                </a:solidFill>
+                <a:latin typeface="Consolas"/>
+              </a:rPr>
+              <a:t>main</a:t>
+            </a:r>
+            <a:r>
+              <a:rPr sz="1600">
+                <a:solidFill>
+                  <a:srgbClr val="DCDCDC"/>
+                </a:solidFill>
+                <a:latin typeface="Consolas"/>
+              </a:rPr>
+              <a:t>(</a:t>
+            </a:r>
+            <a:r>
+              <a:rPr sz="1600">
+                <a:solidFill>
+                  <a:srgbClr val="DCDCDC"/>
+                </a:solidFill>
+                <a:latin typeface="Consolas"/>
+              </a:rPr>
+              <a:t>)</a:t>
+            </a:r>
+            <a:r>
+              <a:rPr sz="1600">
+                <a:solidFill>
+                  <a:srgbClr val="DCDCDC"/>
+                </a:solidFill>
+                <a:latin typeface="Consolas"/>
+              </a:rPr>
+              <a:t> </a:t>
+            </a:r>
+            <a:r>
+              <a:rPr sz="1600">
+                <a:solidFill>
+                  <a:srgbClr val="DCDCDC"/>
+                </a:solidFill>
+                <a:latin typeface="Consolas"/>
+              </a:rPr>
+              <a:t>{</a:t>
+            </a:r>
           </a:p>
           <a:p>
             <a:pPr>
@@ -5808,11 +5871,20 @@
             <a:r>
               <a:rPr sz="1600">
                 <a:solidFill>
+                  <a:srgbClr val="DCDCDC"/>
+                </a:solidFill>
+                <a:latin typeface="Consolas"/>
+              </a:rPr>
+              <a:t>    </a:t>
+            </a:r>
+            <a:r>
+              <a:rPr sz="1600">
+                <a:solidFill>
                   <a:srgbClr val="C586C0"/>
                 </a:solidFill>
                 <a:latin typeface="Consolas"/>
               </a:rPr>
-              <a:t>fn</a:t>
+              <a:t>let</a:t>
             </a:r>
             <a:r>
               <a:rPr sz="1600">
@@ -5826,11 +5898,65 @@
             <a:r>
               <a:rPr sz="1600">
                 <a:solidFill>
-                  <a:srgbClr val="DCDCAA"/>
-                </a:solidFill>
-                <a:latin typeface="Consolas"/>
-              </a:rPr>
-              <a:t>main</a:t>
+                  <a:srgbClr val="DCDCDC"/>
+                </a:solidFill>
+                <a:latin typeface="Consolas"/>
+              </a:rPr>
+              <a:t>r1</a:t>
+            </a:r>
+            <a:r>
+              <a:rPr sz="1600">
+                <a:solidFill>
+                  <a:srgbClr val="DCDCDC"/>
+                </a:solidFill>
+                <a:latin typeface="Consolas"/>
+              </a:rPr>
+              <a:t> </a:t>
+            </a:r>
+            <a:r>
+              <a:rPr sz="1600">
+                <a:solidFill>
+                  <a:srgbClr val="DCDCDC"/>
+                </a:solidFill>
+                <a:latin typeface="Consolas"/>
+              </a:rPr>
+              <a:t>=</a:t>
+            </a:r>
+            <a:r>
+              <a:rPr sz="1600">
+                <a:solidFill>
+                  <a:srgbClr val="DCDCDC"/>
+                </a:solidFill>
+                <a:latin typeface="Consolas"/>
+              </a:rPr>
+              <a:t> </a:t>
+            </a:r>
+            <a:r>
+              <a:rPr sz="1600">
+                <a:solidFill>
+                  <a:srgbClr val="C586C0"/>
+                </a:solidFill>
+                <a:latin typeface="Consolas"/>
+              </a:rPr>
+              <a:t>u8</a:t>
+            </a:r>
+            <a:r>
+              <a:rPr sz="1600">
+                <a:solidFill>
+                  <a:srgbClr val="DCDCDC"/>
+                </a:solidFill>
+                <a:latin typeface="Consolas"/>
+              </a:rPr>
+              <a:t>::</a:t>
+            </a:r>
+            <a:r>
+              <a:rPr sz="1600">
+                <a:solidFill>
+                  <a:srgbClr val="DCDCDC"/>
+                </a:solidFill>
+                <a:latin typeface="Consolas"/>
+              </a:rPr>
+              <a:t>exhausted_range</a:t>
             </a:r>
             <a:r>
               <a:rPr sz="1600">
@@ -5857,16 +5983,7 @@
                 </a:solidFill>
                 <a:latin typeface="Consolas"/>
               </a:rPr>
-              <a:t> </a:t>
-            </a:r>
-            <a:r>
-              <a:rPr sz="1600">
-                <a:solidFill>
-                  <a:srgbClr val="DCDCDC"/>
-                </a:solidFill>
-                <a:latin typeface="Consolas"/>
-              </a:rPr>
-              <a:t>{</a:t>
+              <a:t>;</a:t>
             </a:r>
           </a:p>
           <a:p>
@@ -5915,7 +6032,7 @@
                 </a:solidFill>
                 <a:latin typeface="Consolas"/>
               </a:rPr>
-              <a:t>r1</a:t>
+              <a:t>r2</a:t>
             </a:r>
             <a:r>
               <a:rPr sz="1600">
@@ -5951,7 +6068,7 @@
                 </a:solidFill>
                 <a:latin typeface="Consolas"/>
               </a:rPr>
-              <a:t>u8</a:t>
+              <a:t>i16</a:t>
             </a:r>
             <a:r>
               <a:rPr sz="1600">
@@ -6011,123 +6128,6 @@
                 <a:spcPts val="0"/>
               </a:spcAft>
             </a:pPr>
-            <a:r>
-              <a:rPr sz="1600">
-                <a:solidFill>
-                  <a:srgbClr val="DCDCDC"/>
-                </a:solidFill>
-                <a:latin typeface="Consolas"/>
-              </a:rPr>
-              <a:t>    </a:t>
-            </a:r>
-            <a:r>
-              <a:rPr sz="1600">
-                <a:solidFill>
-                  <a:srgbClr val="C586C0"/>
-                </a:solidFill>
-                <a:latin typeface="Consolas"/>
-              </a:rPr>
-              <a:t>let</a:t>
-            </a:r>
-            <a:r>
-              <a:rPr sz="1600">
-                <a:solidFill>
-                  <a:srgbClr val="DCDCDC"/>
-                </a:solidFill>
-                <a:latin typeface="Consolas"/>
-              </a:rPr>
-              <a:t> </a:t>
-            </a:r>
-            <a:r>
-              <a:rPr sz="1600">
-                <a:solidFill>
-                  <a:srgbClr val="DCDCDC"/>
-                </a:solidFill>
-                <a:latin typeface="Consolas"/>
-              </a:rPr>
-              <a:t>r2</a:t>
-            </a:r>
-            <a:r>
-              <a:rPr sz="1600">
-                <a:solidFill>
-                  <a:srgbClr val="DCDCDC"/>
-                </a:solidFill>
-                <a:latin typeface="Consolas"/>
-              </a:rPr>
-              <a:t> </a:t>
-            </a:r>
-            <a:r>
-              <a:rPr sz="1600">
-                <a:solidFill>
-                  <a:srgbClr val="DCDCDC"/>
-                </a:solidFill>
-                <a:latin typeface="Consolas"/>
-              </a:rPr>
-              <a:t>=</a:t>
-            </a:r>
-            <a:r>
-              <a:rPr sz="1600">
-                <a:solidFill>
-                  <a:srgbClr val="DCDCDC"/>
-                </a:solidFill>
-                <a:latin typeface="Consolas"/>
-              </a:rPr>
-              <a:t> </a:t>
-            </a:r>
-            <a:r>
-              <a:rPr sz="1600">
-                <a:solidFill>
-                  <a:srgbClr val="C586C0"/>
-                </a:solidFill>
-                <a:latin typeface="Consolas"/>
-              </a:rPr>
-              <a:t>i16</a:t>
-            </a:r>
-            <a:r>
-              <a:rPr sz="1600">
-                <a:solidFill>
-                  <a:srgbClr val="DCDCDC"/>
-                </a:solidFill>
-                <a:latin typeface="Consolas"/>
-              </a:rPr>
-              <a:t>::</a:t>
-            </a:r>
-            <a:r>
-              <a:rPr sz="1600">
-                <a:solidFill>
-                  <a:srgbClr val="DCDCDC"/>
-                </a:solidFill>
-                <a:latin typeface="Consolas"/>
-              </a:rPr>
-              <a:t>exhausted_range</a:t>
-            </a:r>
-            <a:r>
-              <a:rPr sz="1600">
-                <a:solidFill>
-                  <a:srgbClr val="DCDCDC"/>
-                </a:solidFill>
-                <a:latin typeface="Consolas"/>
-              </a:rPr>
-              <a:t>(</a:t>
-            </a:r>
-            <a:r>
-              <a:rPr sz="1600">
-                <a:solidFill>
-                  <a:srgbClr val="DCDCDC"/>
-                </a:solidFill>
-                <a:latin typeface="Consolas"/>
-              </a:rPr>
-              <a:t>)</a:t>
-            </a:r>
-            <a:r>
-              <a:rPr sz="1600">
-                <a:solidFill>
-                  <a:srgbClr val="DCDCDC"/>
-                </a:solidFill>
-                <a:latin typeface="Consolas"/>
-              </a:rPr>
-              <a:t>;</a:t>
-            </a:r>
           </a:p>
           <a:p>
             <a:pPr>
@@ -6141,6 +6141,96 @@
                 <a:spcPts val="0"/>
               </a:spcAft>
             </a:pPr>
+            <a:r>
+              <a:rPr sz="1600">
+                <a:solidFill>
+                  <a:srgbClr val="DCDCDC"/>
+                </a:solidFill>
+                <a:latin typeface="Consolas"/>
+              </a:rPr>
+              <a:t>    </a:t>
+            </a:r>
+            <a:r>
+              <a:rPr sz="1600">
+                <a:solidFill>
+                  <a:srgbClr val="DCDCAA"/>
+                </a:solidFill>
+                <a:latin typeface="Consolas"/>
+              </a:rPr>
+              <a:t>assert!</a:t>
+            </a:r>
+            <a:r>
+              <a:rPr sz="1600">
+                <a:solidFill>
+                  <a:srgbClr val="DCDCDC"/>
+                </a:solidFill>
+                <a:latin typeface="Consolas"/>
+              </a:rPr>
+              <a:t>(</a:t>
+            </a:r>
+            <a:r>
+              <a:rPr sz="1600">
+                <a:solidFill>
+                  <a:srgbClr val="DCDCDC"/>
+                </a:solidFill>
+                <a:latin typeface="Consolas"/>
+              </a:rPr>
+              <a:t>r1</a:t>
+            </a:r>
+            <a:r>
+              <a:rPr sz="1600">
+                <a:solidFill>
+                  <a:srgbClr val="DCDCDC"/>
+                </a:solidFill>
+                <a:latin typeface="Consolas"/>
+              </a:rPr>
+              <a:t>.</a:t>
+            </a:r>
+            <a:r>
+              <a:rPr sz="1600">
+                <a:solidFill>
+                  <a:srgbClr val="DCDCDC"/>
+                </a:solidFill>
+                <a:latin typeface="Consolas"/>
+              </a:rPr>
+              <a:t>is_empty</a:t>
+            </a:r>
+            <a:r>
+              <a:rPr sz="1600">
+                <a:solidFill>
+                  <a:srgbClr val="DCDCDC"/>
+                </a:solidFill>
+                <a:latin typeface="Consolas"/>
+              </a:rPr>
+              <a:t>(</a:t>
+            </a:r>
+            <a:r>
+              <a:rPr sz="1600">
+                <a:solidFill>
+                  <a:srgbClr val="DCDCDC"/>
+                </a:solidFill>
+                <a:latin typeface="Consolas"/>
+              </a:rPr>
+              <a:t>)</a:t>
+            </a:r>
+            <a:r>
+              <a:rPr sz="1600">
+                <a:solidFill>
+                  <a:srgbClr val="DCDCDC"/>
+                </a:solidFill>
+                <a:latin typeface="Consolas"/>
+              </a:rPr>
+              <a:t>)</a:t>
+            </a:r>
+            <a:r>
+              <a:rPr sz="1600">
+                <a:solidFill>
+                  <a:srgbClr val="DCDCDC"/>
+                </a:solidFill>
+                <a:latin typeface="Consolas"/>
+              </a:rPr>
+              <a:t>;</a:t>
+            </a:r>
           </a:p>
           <a:p>
             <a:pPr>
@@ -6170,7 +6260,7 @@
                 </a:solidFill>
                 <a:latin typeface="Consolas"/>
               </a:rPr>
-              <a:t>println!</a:t>
+              <a:t>assert!</a:t>
             </a:r>
             <a:r>
               <a:rPr sz="1600">
@@ -6180,199 +6270,6 @@
                 <a:latin typeface="Consolas"/>
               </a:rPr>
               <a:t>(</a:t>
-            </a:r>
-            <a:r>
-              <a:rPr sz="1600">
-                <a:solidFill>
-                  <a:srgbClr val="CE9178"/>
-                </a:solidFill>
-                <a:latin typeface="Consolas"/>
-              </a:rPr>
-              <a:t>"</a:t>
-            </a:r>
-            <a:r>
-              <a:rPr sz="1600">
-                <a:solidFill>
-                  <a:srgbClr val="CE9178"/>
-                </a:solidFill>
-                <a:latin typeface="Consolas"/>
-              </a:rPr>
-              <a:t>u8 exhausted range is empty: {}</a:t>
-            </a:r>
-            <a:r>
-              <a:rPr sz="1600">
-                <a:solidFill>
-                  <a:srgbClr val="CE9178"/>
-                </a:solidFill>
-                <a:latin typeface="Consolas"/>
-              </a:rPr>
-              <a:t>"</a:t>
-            </a:r>
-            <a:r>
-              <a:rPr sz="1600">
-                <a:solidFill>
-                  <a:srgbClr val="DCDCDC"/>
-                </a:solidFill>
-                <a:latin typeface="Consolas"/>
-              </a:rPr>
-              <a:t>,</a:t>
-            </a:r>
-            <a:r>
-              <a:rPr sz="1600">
-                <a:solidFill>
-                  <a:srgbClr val="DCDCDC"/>
-                </a:solidFill>
-                <a:latin typeface="Consolas"/>
-              </a:rPr>
-              <a:t> </a:t>
-            </a:r>
-            <a:r>
-              <a:rPr sz="1600">
-                <a:solidFill>
-                  <a:srgbClr val="DCDCDC"/>
-                </a:solidFill>
-                <a:latin typeface="Consolas"/>
-              </a:rPr>
-              <a:t>r1</a:t>
-            </a:r>
-            <a:r>
-              <a:rPr sz="1600">
-                <a:solidFill>
-                  <a:srgbClr val="DCDCDC"/>
-                </a:solidFill>
-                <a:latin typeface="Consolas"/>
-              </a:rPr>
-              <a:t>.</a:t>
-            </a:r>
-            <a:r>
-              <a:rPr sz="1600">
-                <a:solidFill>
-                  <a:srgbClr val="DCDCDC"/>
-                </a:solidFill>
-                <a:latin typeface="Consolas"/>
-              </a:rPr>
-              <a:t>is_empty</a:t>
-            </a:r>
-            <a:r>
-              <a:rPr sz="1600">
-                <a:solidFill>
-                  <a:srgbClr val="DCDCDC"/>
-                </a:solidFill>
-                <a:latin typeface="Consolas"/>
-              </a:rPr>
-              <a:t>(</a:t>
-            </a:r>
-            <a:r>
-              <a:rPr sz="1600">
-                <a:solidFill>
-                  <a:srgbClr val="DCDCDC"/>
-                </a:solidFill>
-                <a:latin typeface="Consolas"/>
-              </a:rPr>
-              <a:t>)</a:t>
-            </a:r>
-            <a:r>
-              <a:rPr sz="1600">
-                <a:solidFill>
-                  <a:srgbClr val="DCDCDC"/>
-                </a:solidFill>
-                <a:latin typeface="Consolas"/>
-              </a:rPr>
-              <a:t>)</a:t>
-            </a:r>
-            <a:r>
-              <a:rPr sz="1600">
-                <a:solidFill>
-                  <a:srgbClr val="DCDCDC"/>
-                </a:solidFill>
-                <a:latin typeface="Consolas"/>
-              </a:rPr>
-              <a:t>;</a:t>
-            </a:r>
-          </a:p>
-          <a:p>
-            <a:pPr>
-              <a:lnSpc>
-                <a:spcPct val="95000"/>
-              </a:lnSpc>
-              <a:spcBef>
-                <a:spcPts val="0"/>
-              </a:spcBef>
-              <a:spcAft>
-                <a:spcPts val="0"/>
-              </a:spcAft>
-            </a:pPr>
-            <a:r>
-              <a:rPr sz="1600">
-                <a:solidFill>
-                  <a:srgbClr val="DCDCDC"/>
-                </a:solidFill>
-                <a:latin typeface="Consolas"/>
-              </a:rPr>
-              <a:t>    </a:t>
-            </a:r>
-            <a:r>
-              <a:rPr sz="1600">
-                <a:solidFill>
-                  <a:srgbClr val="DCDCAA"/>
-                </a:solidFill>
-                <a:latin typeface="Consolas"/>
-              </a:rPr>
-              <a:t>println!</a:t>
-            </a:r>
-            <a:r>
-              <a:rPr sz="1600">
-                <a:solidFill>
-                  <a:srgbClr val="DCDCDC"/>
-                </a:solidFill>
-                <a:latin typeface="Consolas"/>
-              </a:rPr>
-              <a:t>(</a:t>
-            </a:r>
-            <a:r>
-              <a:rPr sz="1600">
-                <a:solidFill>
-                  <a:srgbClr val="CE9178"/>
-                </a:solidFill>
-                <a:latin typeface="Consolas"/>
-              </a:rPr>
-              <a:t>"</a:t>
-            </a:r>
-            <a:r>
-              <a:rPr sz="1600">
-                <a:solidFill>
-                  <a:srgbClr val="CE9178"/>
-                </a:solidFill>
-                <a:latin typeface="Consolas"/>
-              </a:rPr>
-              <a:t>i16 exhausted range is empty: {}</a:t>
-            </a:r>
-            <a:r>
-              <a:rPr sz="1600">
-                <a:solidFill>
-                  <a:srgbClr val="CE9178"/>
-                </a:solidFill>
-                <a:latin typeface="Consolas"/>
-              </a:rPr>
-              <a:t>"</a:t>
-            </a:r>
-            <a:r>
-              <a:rPr sz="1600">
-                <a:solidFill>
-                  <a:srgbClr val="DCDCDC"/>
-                </a:solidFill>
-                <a:latin typeface="Consolas"/>
-              </a:rPr>
-              <a:t>,</a:t>
-            </a:r>
-            <a:r>
-              <a:rPr sz="1600">
-                <a:solidFill>
-                  <a:srgbClr val="DCDCDC"/>
-                </a:solidFill>
-                <a:latin typeface="Consolas"/>
-              </a:rPr>
-              <a:t> </a:t>
             </a:r>
             <a:r>
               <a:rPr sz="1600">

--- a/docs/example1_walkthrough.pptx
+++ b/docs/example1_walkthrough.pptx
@@ -3320,52 +3320,9 @@
           </a:p>
         </p:txBody>
       </p:sp>
-      <p:sp>
-        <p:nvSpPr>
-          <p:cNvPr id="6" name="Rectangle 5"/>
-          <p:cNvSpPr/>
-          <p:nvPr/>
-        </p:nvSpPr>
-        <p:spPr>
-          <a:xfrm>
-            <a:off x="1369304" y="1618488"/>
-            <a:ext cx="5170951" cy="4992624"/>
-          </a:xfrm>
-          <a:prstGeom prst="rect">
-            <a:avLst/>
-          </a:prstGeom>
-          <a:solidFill>
-            <a:srgbClr val="0B0F14"/>
-          </a:solidFill>
-          <a:ln>
-            <a:noFill/>
-          </a:ln>
-        </p:spPr>
-        <p:style>
-          <a:lnRef idx="1">
-            <a:schemeClr val="accent1"/>
-          </a:lnRef>
-          <a:fillRef idx="3">
-            <a:schemeClr val="accent1"/>
-          </a:fillRef>
-          <a:effectRef idx="2">
-            <a:schemeClr val="accent1"/>
-          </a:effectRef>
-          <a:fontRef idx="minor">
-            <a:schemeClr val="lt1"/>
-          </a:fontRef>
-        </p:style>
-        <p:txBody>
-          <a:bodyPr rtlCol="0" anchor="ctr"/>
-          <a:lstStyle/>
-          <a:p>
-            <a:pPr algn="ctr"/>
-          </a:p>
-        </p:txBody>
-      </p:sp>
       <p:pic>
         <p:nvPicPr>
-          <p:cNvPr id="7" name="Picture 6" descr="1_puzzle_diagram.png"/>
+          <p:cNvPr id="6" name="Picture 5" descr="1_puzzle_diagram.png"/>
           <p:cNvPicPr>
             <a:picLocks noChangeAspect="1"/>
           </p:cNvPicPr>

--- a/docs/example1_walkthrough.pptx
+++ b/docs/example1_walkthrough.pptx
@@ -3141,8 +3141,8 @@
         </p:nvSpPr>
         <p:spPr>
           <a:xfrm>
-            <a:off x="7909560" y="0"/>
-            <a:ext cx="1234440" cy="6858000"/>
+            <a:off x="7543800" y="0"/>
+            <a:ext cx="1600200" cy="6858000"/>
           </a:xfrm>
           <a:prstGeom prst="rect">
             <a:avLst/>
@@ -3186,8 +3186,8 @@
         </p:nvSpPr>
         <p:spPr>
           <a:xfrm rot="16200000">
-            <a:off x="8001000" y="274320"/>
-            <a:ext cx="1051560" cy="6309360"/>
+            <a:off x="7616952" y="274320"/>
+            <a:ext cx="1453896" cy="6309360"/>
           </a:xfrm>
           <a:prstGeom prst="rect">
             <a:avLst/>
@@ -3195,13 +3195,13 @@
           <a:noFill/>
         </p:spPr>
         <p:txBody>
-          <a:bodyPr wrap="none" anchor="ctr">
+          <a:bodyPr wrap="square" anchor="ctr">
             <a:spAutoFit/>
           </a:bodyPr>
           <a:lstStyle/>
           <a:p>
             <a:pPr>
-              <a:defRPr sz="2800">
+              <a:defRPr sz="2600">
                 <a:solidFill>
                   <a:srgbClr val="141414"/>
                 </a:solidFill>
@@ -3223,7 +3223,7 @@
         <p:spPr>
           <a:xfrm>
             <a:off x="731520" y="502920"/>
-            <a:ext cx="6812280" cy="1051560"/>
+            <a:ext cx="6446520" cy="1051560"/>
           </a:xfrm>
           <a:prstGeom prst="rect">
             <a:avLst/>
@@ -3336,7 +3336,7 @@
         </p:blipFill>
         <p:spPr>
           <a:xfrm>
-            <a:off x="1442456" y="1691640"/>
+            <a:off x="1259576" y="1691640"/>
             <a:ext cx="5024647" cy="4846320"/>
           </a:xfrm>
           <a:prstGeom prst="rect">
@@ -3422,8 +3422,8 @@
           <a:noFill/>
         </p:spPr>
         <p:txBody>
-          <a:bodyPr wrap="none">
-            <a:spAutoFit/>
+          <a:bodyPr wrap="square">
+            <a:noAutofit/>
           </a:bodyPr>
           <a:lstStyle/>
           <a:p>
@@ -3441,7 +3441,7 @@
             <a:r>
               <a:rPr sz="1600">
                 <a:solidFill>
-                  <a:srgbClr val="C586C0"/>
+                  <a:srgbClr val="C792EA"/>
                 </a:solidFill>
                 <a:latin typeface="Consolas"/>
               </a:rPr>
@@ -3450,7 +3450,7 @@
             <a:r>
               <a:rPr sz="1600">
                 <a:solidFill>
-                  <a:srgbClr val="DCDCDC"/>
+                  <a:srgbClr val="EEFFFF"/>
                 </a:solidFill>
                 <a:latin typeface="Consolas"/>
               </a:rPr>
@@ -3459,7 +3459,7 @@
             <a:r>
               <a:rPr sz="1600">
                 <a:solidFill>
-                  <a:srgbClr val="DCDCDC"/>
+                  <a:srgbClr val="EEFFFF"/>
                 </a:solidFill>
                 <a:latin typeface="Consolas"/>
               </a:rPr>
@@ -3468,7 +3468,7 @@
             <a:r>
               <a:rPr sz="1600">
                 <a:solidFill>
-                  <a:srgbClr val="DCDCDC"/>
+                  <a:srgbClr val="BAC2DE"/>
                 </a:solidFill>
                 <a:latin typeface="Consolas"/>
               </a:rPr>
@@ -3477,7 +3477,7 @@
             <a:r>
               <a:rPr sz="1600">
                 <a:solidFill>
-                  <a:srgbClr val="DCDCDC"/>
+                  <a:srgbClr val="EEFFFF"/>
                 </a:solidFill>
                 <a:latin typeface="Consolas"/>
               </a:rPr>
@@ -3486,7 +3486,7 @@
             <a:r>
               <a:rPr sz="1600">
                 <a:solidFill>
-                  <a:srgbClr val="DCDCDC"/>
+                  <a:srgbClr val="BAC2DE"/>
                 </a:solidFill>
                 <a:latin typeface="Consolas"/>
               </a:rPr>
@@ -3495,7 +3495,7 @@
             <a:r>
               <a:rPr sz="1600">
                 <a:solidFill>
-                  <a:srgbClr val="DCDCDC"/>
+                  <a:srgbClr val="EEFFFF"/>
                 </a:solidFill>
                 <a:latin typeface="Consolas"/>
               </a:rPr>
@@ -3504,7 +3504,7 @@
             <a:r>
               <a:rPr sz="1600">
                 <a:solidFill>
-                  <a:srgbClr val="DCDCDC"/>
+                  <a:srgbClr val="BAC2DE"/>
                 </a:solidFill>
                 <a:latin typeface="Consolas"/>
               </a:rPr>
@@ -3561,110 +3561,11 @@
             <a:r>
               <a:rPr sz="1600">
                 <a:solidFill>
-                  <a:srgbClr val="C586C0"/>
-                </a:solidFill>
-                <a:latin typeface="Consolas"/>
-              </a:rPr>
-              <a:t>trait</a:t>
-            </a:r>
-            <a:r>
-              <a:rPr sz="1600">
-                <a:solidFill>
-                  <a:srgbClr val="DCDCDC"/>
-                </a:solidFill>
-                <a:latin typeface="Consolas"/>
-              </a:rPr>
-              <a:t> </a:t>
-            </a:r>
-            <a:r>
-              <a:rPr sz="1600">
-                <a:solidFill>
-                  <a:srgbClr val="DCDCDC"/>
-                </a:solidFill>
-                <a:latin typeface="Consolas"/>
-              </a:rPr>
-              <a:t>Integer</a:t>
-            </a:r>
-            <a:r>
-              <a:rPr sz="1600">
-                <a:solidFill>
-                  <a:srgbClr val="DCDCDC"/>
-                </a:solidFill>
-                <a:latin typeface="Consolas"/>
-              </a:rPr>
-              <a:t>:</a:t>
-            </a:r>
-            <a:r>
-              <a:rPr sz="1600">
-                <a:solidFill>
-                  <a:srgbClr val="DCDCDC"/>
-                </a:solidFill>
-                <a:latin typeface="Consolas"/>
-              </a:rPr>
-              <a:t> </a:t>
-            </a:r>
-            <a:r>
-              <a:rPr sz="1600">
-                <a:solidFill>
-                  <a:srgbClr val="4EC9B0"/>
-                </a:solidFill>
-                <a:latin typeface="Consolas"/>
-              </a:rPr>
-              <a:t>Copy</a:t>
-            </a:r>
-            <a:r>
-              <a:rPr sz="1600">
-                <a:solidFill>
-                  <a:srgbClr val="DCDCDC"/>
-                </a:solidFill>
-                <a:latin typeface="Consolas"/>
-              </a:rPr>
-              <a:t> </a:t>
-            </a:r>
-            <a:r>
-              <a:rPr sz="1600">
-                <a:solidFill>
-                  <a:srgbClr val="DCDCDC"/>
-                </a:solidFill>
-                <a:latin typeface="Consolas"/>
-              </a:rPr>
-              <a:t>+</a:t>
-            </a:r>
-            <a:r>
-              <a:rPr sz="1600">
-                <a:solidFill>
-                  <a:srgbClr val="DCDCDC"/>
-                </a:solidFill>
-                <a:latin typeface="Consolas"/>
-              </a:rPr>
-              <a:t> </a:t>
-            </a:r>
-            <a:r>
-              <a:rPr sz="1600">
-                <a:solidFill>
-                  <a:srgbClr val="4EC9B0"/>
-                </a:solidFill>
-                <a:latin typeface="Consolas"/>
-              </a:rPr>
-              <a:t>Ord</a:t>
-            </a:r>
-            <a:r>
-              <a:rPr sz="1600">
-                <a:solidFill>
-                  <a:srgbClr val="DCDCDC"/>
-                </a:solidFill>
-                <a:latin typeface="Consolas"/>
-              </a:rPr>
-              <a:t> </a:t>
-            </a:r>
-            <a:r>
-              <a:rPr sz="1600">
-                <a:solidFill>
-                  <a:srgbClr val="DCDCDC"/>
-                </a:solidFill>
-                <a:latin typeface="Consolas"/>
-              </a:rPr>
-              <a:t>{</a:t>
+                  <a:srgbClr val="6A9955"/>
+                </a:solidFill>
+                <a:latin typeface="Consolas"/>
+              </a:rPr>
+              <a:t>// TECHNIQUE NAME: Trait Default Methods.</a:t>
             </a:r>
           </a:p>
           <a:p>
@@ -3682,25 +3583,16 @@
             <a:r>
               <a:rPr sz="1600">
                 <a:solidFill>
-                  <a:srgbClr val="DCDCDC"/>
-                </a:solidFill>
-                <a:latin typeface="Consolas"/>
-              </a:rPr>
-              <a:t>    </a:t>
-            </a:r>
-            <a:r>
-              <a:rPr sz="1600">
-                <a:solidFill>
-                  <a:srgbClr val="C586C0"/>
-                </a:solidFill>
-                <a:latin typeface="Consolas"/>
-              </a:rPr>
-              <a:t>fn</a:t>
-            </a:r>
-            <a:r>
-              <a:rPr sz="1600">
-                <a:solidFill>
-                  <a:srgbClr val="DCDCDC"/>
+                  <a:srgbClr val="C792EA"/>
+                </a:solidFill>
+                <a:latin typeface="Consolas"/>
+              </a:rPr>
+              <a:t>trait</a:t>
+            </a:r>
+            <a:r>
+              <a:rPr sz="1600">
+                <a:solidFill>
+                  <a:srgbClr val="EEFFFF"/>
                 </a:solidFill>
                 <a:latin typeface="Consolas"/>
               </a:rPr>
@@ -3709,34 +3601,25 @@
             <a:r>
               <a:rPr sz="1600">
                 <a:solidFill>
-                  <a:srgbClr val="DCDCAA"/>
-                </a:solidFill>
-                <a:latin typeface="Consolas"/>
-              </a:rPr>
-              <a:t>min_value</a:t>
-            </a:r>
-            <a:r>
-              <a:rPr sz="1600">
-                <a:solidFill>
-                  <a:srgbClr val="DCDCDC"/>
-                </a:solidFill>
-                <a:latin typeface="Consolas"/>
-              </a:rPr>
-              <a:t>(</a:t>
-            </a:r>
-            <a:r>
-              <a:rPr sz="1600">
-                <a:solidFill>
-                  <a:srgbClr val="DCDCDC"/>
-                </a:solidFill>
-                <a:latin typeface="Consolas"/>
-              </a:rPr>
-              <a:t>)</a:t>
-            </a:r>
-            <a:r>
-              <a:rPr sz="1600">
-                <a:solidFill>
-                  <a:srgbClr val="DCDCDC"/>
+                  <a:srgbClr val="EEFFFF"/>
+                </a:solidFill>
+                <a:latin typeface="Consolas"/>
+              </a:rPr>
+              <a:t>Integer</a:t>
+            </a:r>
+            <a:r>
+              <a:rPr sz="1600">
+                <a:solidFill>
+                  <a:srgbClr val="BAC2DE"/>
+                </a:solidFill>
+                <a:latin typeface="Consolas"/>
+              </a:rPr>
+              <a:t>:</a:t>
+            </a:r>
+            <a:r>
+              <a:rPr sz="1600">
+                <a:solidFill>
+                  <a:srgbClr val="EEFFFF"/>
                 </a:solidFill>
                 <a:latin typeface="Consolas"/>
               </a:rPr>
@@ -3745,16 +3628,16 @@
             <a:r>
               <a:rPr sz="1600">
                 <a:solidFill>
-                  <a:srgbClr val="DCDCDC"/>
-                </a:solidFill>
-                <a:latin typeface="Consolas"/>
-              </a:rPr>
-              <a:t>-&gt;</a:t>
-            </a:r>
-            <a:r>
-              <a:rPr sz="1600">
-                <a:solidFill>
-                  <a:srgbClr val="DCDCDC"/>
+                  <a:srgbClr val="89DDFF"/>
+                </a:solidFill>
+                <a:latin typeface="Consolas"/>
+              </a:rPr>
+              <a:t>Copy</a:t>
+            </a:r>
+            <a:r>
+              <a:rPr sz="1600">
+                <a:solidFill>
+                  <a:srgbClr val="EEFFFF"/>
                 </a:solidFill>
                 <a:latin typeface="Consolas"/>
               </a:rPr>
@@ -3763,20 +3646,47 @@
             <a:r>
               <a:rPr sz="1600">
                 <a:solidFill>
-                  <a:srgbClr val="4EC9B0"/>
-                </a:solidFill>
-                <a:latin typeface="Consolas"/>
-              </a:rPr>
-              <a:t>Self</a:t>
-            </a:r>
-            <a:r>
-              <a:rPr sz="1600">
-                <a:solidFill>
-                  <a:srgbClr val="DCDCDC"/>
-                </a:solidFill>
-                <a:latin typeface="Consolas"/>
-              </a:rPr>
-              <a:t>;</a:t>
+                  <a:srgbClr val="89DDFF"/>
+                </a:solidFill>
+                <a:latin typeface="Consolas"/>
+              </a:rPr>
+              <a:t>+</a:t>
+            </a:r>
+            <a:r>
+              <a:rPr sz="1600">
+                <a:solidFill>
+                  <a:srgbClr val="EEFFFF"/>
+                </a:solidFill>
+                <a:latin typeface="Consolas"/>
+              </a:rPr>
+              <a:t> </a:t>
+            </a:r>
+            <a:r>
+              <a:rPr sz="1600">
+                <a:solidFill>
+                  <a:srgbClr val="89DDFF"/>
+                </a:solidFill>
+                <a:latin typeface="Consolas"/>
+              </a:rPr>
+              <a:t>Ord</a:t>
+            </a:r>
+            <a:r>
+              <a:rPr sz="1600">
+                <a:solidFill>
+                  <a:srgbClr val="EEFFFF"/>
+                </a:solidFill>
+                <a:latin typeface="Consolas"/>
+              </a:rPr>
+              <a:t> </a:t>
+            </a:r>
+            <a:r>
+              <a:rPr sz="1600">
+                <a:solidFill>
+                  <a:srgbClr val="BAC2DE"/>
+                </a:solidFill>
+                <a:latin typeface="Consolas"/>
+              </a:rPr>
+              <a:t>{</a:t>
             </a:r>
           </a:p>
           <a:p>
@@ -3794,7 +3704,7 @@
             <a:r>
               <a:rPr sz="1600">
                 <a:solidFill>
-                  <a:srgbClr val="DCDCDC"/>
+                  <a:srgbClr val="EEFFFF"/>
                 </a:solidFill>
                 <a:latin typeface="Consolas"/>
               </a:rPr>
@@ -3803,7 +3713,7 @@
             <a:r>
               <a:rPr sz="1600">
                 <a:solidFill>
-                  <a:srgbClr val="C586C0"/>
+                  <a:srgbClr val="C792EA"/>
                 </a:solidFill>
                 <a:latin typeface="Consolas"/>
               </a:rPr>
@@ -3812,7 +3722,7 @@
             <a:r>
               <a:rPr sz="1600">
                 <a:solidFill>
-                  <a:srgbClr val="DCDCDC"/>
+                  <a:srgbClr val="EEFFFF"/>
                 </a:solidFill>
                 <a:latin typeface="Consolas"/>
               </a:rPr>
@@ -3821,16 +3731,16 @@
             <a:r>
               <a:rPr sz="1600">
                 <a:solidFill>
-                  <a:srgbClr val="DCDCAA"/>
-                </a:solidFill>
-                <a:latin typeface="Consolas"/>
-              </a:rPr>
-              <a:t>max_value</a:t>
-            </a:r>
-            <a:r>
-              <a:rPr sz="1600">
-                <a:solidFill>
-                  <a:srgbClr val="DCDCDC"/>
+                  <a:srgbClr val="82AAFF"/>
+                </a:solidFill>
+                <a:latin typeface="Consolas"/>
+              </a:rPr>
+              <a:t>min_value</a:t>
+            </a:r>
+            <a:r>
+              <a:rPr sz="1600">
+                <a:solidFill>
+                  <a:srgbClr val="BAC2DE"/>
                 </a:solidFill>
                 <a:latin typeface="Consolas"/>
               </a:rPr>
@@ -3839,7 +3749,7 @@
             <a:r>
               <a:rPr sz="1600">
                 <a:solidFill>
-                  <a:srgbClr val="DCDCDC"/>
+                  <a:srgbClr val="BAC2DE"/>
                 </a:solidFill>
                 <a:latin typeface="Consolas"/>
               </a:rPr>
@@ -3848,7 +3758,7 @@
             <a:r>
               <a:rPr sz="1600">
                 <a:solidFill>
-                  <a:srgbClr val="DCDCDC"/>
+                  <a:srgbClr val="EEFFFF"/>
                 </a:solidFill>
                 <a:latin typeface="Consolas"/>
               </a:rPr>
@@ -3857,7 +3767,7 @@
             <a:r>
               <a:rPr sz="1600">
                 <a:solidFill>
-                  <a:srgbClr val="DCDCDC"/>
+                  <a:srgbClr val="BAC2DE"/>
                 </a:solidFill>
                 <a:latin typeface="Consolas"/>
               </a:rPr>
@@ -3866,7 +3776,7 @@
             <a:r>
               <a:rPr sz="1600">
                 <a:solidFill>
-                  <a:srgbClr val="DCDCDC"/>
+                  <a:srgbClr val="EEFFFF"/>
                 </a:solidFill>
                 <a:latin typeface="Consolas"/>
               </a:rPr>
@@ -3875,7 +3785,7 @@
             <a:r>
               <a:rPr sz="1600">
                 <a:solidFill>
-                  <a:srgbClr val="4EC9B0"/>
+                  <a:srgbClr val="FFCB6B"/>
                 </a:solidFill>
                 <a:latin typeface="Consolas"/>
               </a:rPr>
@@ -3884,7 +3794,7 @@
             <a:r>
               <a:rPr sz="1600">
                 <a:solidFill>
-                  <a:srgbClr val="DCDCDC"/>
+                  <a:srgbClr val="BAC2DE"/>
                 </a:solidFill>
                 <a:latin typeface="Consolas"/>
               </a:rPr>
@@ -3903,6 +3813,105 @@
                 <a:spcPts val="0"/>
               </a:spcAft>
             </a:pPr>
+            <a:r>
+              <a:rPr sz="1600">
+                <a:solidFill>
+                  <a:srgbClr val="EEFFFF"/>
+                </a:solidFill>
+                <a:latin typeface="Consolas"/>
+              </a:rPr>
+              <a:t>    </a:t>
+            </a:r>
+            <a:r>
+              <a:rPr sz="1600">
+                <a:solidFill>
+                  <a:srgbClr val="C792EA"/>
+                </a:solidFill>
+                <a:latin typeface="Consolas"/>
+              </a:rPr>
+              <a:t>fn</a:t>
+            </a:r>
+            <a:r>
+              <a:rPr sz="1600">
+                <a:solidFill>
+                  <a:srgbClr val="EEFFFF"/>
+                </a:solidFill>
+                <a:latin typeface="Consolas"/>
+              </a:rPr>
+              <a:t> </a:t>
+            </a:r>
+            <a:r>
+              <a:rPr sz="1600">
+                <a:solidFill>
+                  <a:srgbClr val="82AAFF"/>
+                </a:solidFill>
+                <a:latin typeface="Consolas"/>
+              </a:rPr>
+              <a:t>max_value</a:t>
+            </a:r>
+            <a:r>
+              <a:rPr sz="1600">
+                <a:solidFill>
+                  <a:srgbClr val="BAC2DE"/>
+                </a:solidFill>
+                <a:latin typeface="Consolas"/>
+              </a:rPr>
+              <a:t>(</a:t>
+            </a:r>
+            <a:r>
+              <a:rPr sz="1600">
+                <a:solidFill>
+                  <a:srgbClr val="BAC2DE"/>
+                </a:solidFill>
+                <a:latin typeface="Consolas"/>
+              </a:rPr>
+              <a:t>)</a:t>
+            </a:r>
+            <a:r>
+              <a:rPr sz="1600">
+                <a:solidFill>
+                  <a:srgbClr val="EEFFFF"/>
+                </a:solidFill>
+                <a:latin typeface="Consolas"/>
+              </a:rPr>
+              <a:t> </a:t>
+            </a:r>
+            <a:r>
+              <a:rPr sz="1600">
+                <a:solidFill>
+                  <a:srgbClr val="BAC2DE"/>
+                </a:solidFill>
+                <a:latin typeface="Consolas"/>
+              </a:rPr>
+              <a:t>-&gt;</a:t>
+            </a:r>
+            <a:r>
+              <a:rPr sz="1600">
+                <a:solidFill>
+                  <a:srgbClr val="EEFFFF"/>
+                </a:solidFill>
+                <a:latin typeface="Consolas"/>
+              </a:rPr>
+              <a:t> </a:t>
+            </a:r>
+            <a:r>
+              <a:rPr sz="1600">
+                <a:solidFill>
+                  <a:srgbClr val="FFCB6B"/>
+                </a:solidFill>
+                <a:latin typeface="Consolas"/>
+              </a:rPr>
+              <a:t>Self</a:t>
+            </a:r>
+            <a:r>
+              <a:rPr sz="1600">
+                <a:solidFill>
+                  <a:srgbClr val="BAC2DE"/>
+                </a:solidFill>
+                <a:latin typeface="Consolas"/>
+              </a:rPr>
+              <a:t>;</a:t>
+            </a:r>
           </a:p>
           <a:p>
             <a:pPr>
@@ -3916,24 +3925,6 @@
                 <a:spcPts val="0"/>
               </a:spcAft>
             </a:pPr>
-            <a:r>
-              <a:rPr sz="1600">
-                <a:solidFill>
-                  <a:srgbClr val="DCDCDC"/>
-                </a:solidFill>
-                <a:latin typeface="Consolas"/>
-              </a:rPr>
-              <a:t>    </a:t>
-            </a:r>
-            <a:r>
-              <a:rPr sz="1600">
-                <a:solidFill>
-                  <a:srgbClr val="6A9955"/>
-                </a:solidFill>
-                <a:latin typeface="Consolas"/>
-              </a:rPr>
-              <a:t>// Default behavior inherited by implementors.</a:t>
-            </a:r>
           </a:p>
           <a:p>
             <a:pPr>
@@ -3950,7 +3941,7 @@
             <a:r>
               <a:rPr sz="1600">
                 <a:solidFill>
-                  <a:srgbClr val="DCDCDC"/>
+                  <a:srgbClr val="EEFFFF"/>
                 </a:solidFill>
                 <a:latin typeface="Consolas"/>
               </a:rPr>
@@ -3963,7 +3954,7 @@
                 </a:solidFill>
                 <a:latin typeface="Consolas"/>
               </a:rPr>
-              <a:t>// Any impl can override this method.</a:t>
+              <a:t>// Default behavior inherited by implementors.</a:t>
             </a:r>
           </a:p>
           <a:p>
@@ -3978,6 +3969,24 @@
                 <a:spcPts val="0"/>
               </a:spcAft>
             </a:pPr>
+            <a:r>
+              <a:rPr sz="1600">
+                <a:solidFill>
+                  <a:srgbClr val="EEFFFF"/>
+                </a:solidFill>
+                <a:latin typeface="Consolas"/>
+              </a:rPr>
+              <a:t>    </a:t>
+            </a:r>
+            <a:r>
+              <a:rPr sz="1600">
+                <a:solidFill>
+                  <a:srgbClr val="6A9955"/>
+                </a:solidFill>
+                <a:latin typeface="Consolas"/>
+              </a:rPr>
+              <a:t>// Any impl can override this method.</a:t>
+            </a:r>
           </a:p>
           <a:p>
             <a:pPr>
@@ -3991,24 +4000,6 @@
                 <a:spcPts val="0"/>
               </a:spcAft>
             </a:pPr>
-            <a:r>
-              <a:rPr sz="1600">
-                <a:solidFill>
-                  <a:srgbClr val="DCDCDC"/>
-                </a:solidFill>
-                <a:latin typeface="Consolas"/>
-              </a:rPr>
-              <a:t>    </a:t>
-            </a:r>
-            <a:r>
-              <a:rPr sz="1600">
-                <a:solidFill>
-                  <a:srgbClr val="CE9178"/>
-                </a:solidFill>
-                <a:latin typeface="Consolas"/>
-              </a:rPr>
-              <a:t>/// Returns an exhausted (empty) range`.</a:t>
-            </a:r>
           </a:p>
           <a:p>
             <a:pPr>
@@ -4025,7 +4016,7 @@
             <a:r>
               <a:rPr sz="1600">
                 <a:solidFill>
-                  <a:srgbClr val="DCDCDC"/>
+                  <a:srgbClr val="EEFFFF"/>
                 </a:solidFill>
                 <a:latin typeface="Consolas"/>
               </a:rPr>
@@ -4034,128 +4025,11 @@
             <a:r>
               <a:rPr sz="1600">
                 <a:solidFill>
-                  <a:srgbClr val="C586C0"/>
-                </a:solidFill>
-                <a:latin typeface="Consolas"/>
-              </a:rPr>
-              <a:t>fn</a:t>
-            </a:r>
-            <a:r>
-              <a:rPr sz="1600">
-                <a:solidFill>
-                  <a:srgbClr val="DCDCDC"/>
-                </a:solidFill>
-                <a:latin typeface="Consolas"/>
-              </a:rPr>
-              <a:t> </a:t>
-            </a:r>
-            <a:r>
-              <a:rPr sz="1600">
-                <a:solidFill>
-                  <a:srgbClr val="DCDCAA"/>
-                </a:solidFill>
-                <a:latin typeface="Consolas"/>
-              </a:rPr>
-              <a:t>exhausted_range</a:t>
-            </a:r>
-            <a:r>
-              <a:rPr sz="1600">
-                <a:solidFill>
-                  <a:srgbClr val="DCDCDC"/>
-                </a:solidFill>
-                <a:latin typeface="Consolas"/>
-              </a:rPr>
-              <a:t>(</a:t>
-            </a:r>
-            <a:r>
-              <a:rPr sz="1600">
-                <a:solidFill>
-                  <a:srgbClr val="DCDCDC"/>
-                </a:solidFill>
-                <a:latin typeface="Consolas"/>
-              </a:rPr>
-              <a:t>)</a:t>
-            </a:r>
-            <a:r>
-              <a:rPr sz="1600">
-                <a:solidFill>
-                  <a:srgbClr val="DCDCDC"/>
-                </a:solidFill>
-                <a:latin typeface="Consolas"/>
-              </a:rPr>
-              <a:t> </a:t>
-            </a:r>
-            <a:r>
-              <a:rPr sz="1600">
-                <a:solidFill>
-                  <a:srgbClr val="DCDCDC"/>
-                </a:solidFill>
-                <a:latin typeface="Consolas"/>
-              </a:rPr>
-              <a:t>-&gt;</a:t>
-            </a:r>
-            <a:r>
-              <a:rPr sz="1600">
-                <a:solidFill>
-                  <a:srgbClr val="DCDCDC"/>
-                </a:solidFill>
-                <a:latin typeface="Consolas"/>
-              </a:rPr>
-              <a:t> </a:t>
-            </a:r>
-            <a:r>
-              <a:rPr sz="1600">
-                <a:solidFill>
-                  <a:srgbClr val="4EC9B0"/>
-                </a:solidFill>
-                <a:latin typeface="Consolas"/>
-              </a:rPr>
-              <a:t>RangeInclusive</a:t>
-            </a:r>
-            <a:r>
-              <a:rPr sz="1600">
-                <a:solidFill>
-                  <a:srgbClr val="DCDCDC"/>
-                </a:solidFill>
-                <a:latin typeface="Consolas"/>
-              </a:rPr>
-              <a:t>&lt;</a:t>
-            </a:r>
-            <a:r>
-              <a:rPr sz="1600">
-                <a:solidFill>
-                  <a:srgbClr val="4EC9B0"/>
-                </a:solidFill>
-                <a:latin typeface="Consolas"/>
-              </a:rPr>
-              <a:t>Self</a:t>
-            </a:r>
-            <a:r>
-              <a:rPr sz="1600">
-                <a:solidFill>
-                  <a:srgbClr val="DCDCDC"/>
-                </a:solidFill>
-                <a:latin typeface="Consolas"/>
-              </a:rPr>
-              <a:t>&gt;</a:t>
-            </a:r>
-            <a:r>
-              <a:rPr sz="1600">
-                <a:solidFill>
-                  <a:srgbClr val="DCDCDC"/>
-                </a:solidFill>
-                <a:latin typeface="Consolas"/>
-              </a:rPr>
-              <a:t> </a:t>
-            </a:r>
-            <a:r>
-              <a:rPr sz="1600">
-                <a:solidFill>
-                  <a:srgbClr val="DCDCDC"/>
-                </a:solidFill>
-                <a:latin typeface="Consolas"/>
-              </a:rPr>
-              <a:t>{</a:t>
+                  <a:srgbClr val="C3E88D"/>
+                </a:solidFill>
+                <a:latin typeface="Consolas"/>
+              </a:rPr>
+              <a:t>/// Returns an exhausted (empty) range`.</a:t>
             </a:r>
           </a:p>
           <a:p>
@@ -4173,25 +4047,43 @@
             <a:r>
               <a:rPr sz="1600">
                 <a:solidFill>
-                  <a:srgbClr val="DCDCDC"/>
-                </a:solidFill>
-                <a:latin typeface="Consolas"/>
-              </a:rPr>
-              <a:t>        </a:t>
-            </a:r>
-            <a:r>
-              <a:rPr sz="1600">
-                <a:solidFill>
-                  <a:srgbClr val="DCDCAA"/>
-                </a:solidFill>
-                <a:latin typeface="Consolas"/>
-              </a:rPr>
-              <a:t>debug_assert!</a:t>
-            </a:r>
-            <a:r>
-              <a:rPr sz="1600">
-                <a:solidFill>
-                  <a:srgbClr val="DCDCDC"/>
+                  <a:srgbClr val="EEFFFF"/>
+                </a:solidFill>
+                <a:latin typeface="Consolas"/>
+              </a:rPr>
+              <a:t>    </a:t>
+            </a:r>
+            <a:r>
+              <a:rPr sz="1600">
+                <a:solidFill>
+                  <a:srgbClr val="C792EA"/>
+                </a:solidFill>
+                <a:latin typeface="Consolas"/>
+              </a:rPr>
+              <a:t>fn</a:t>
+            </a:r>
+            <a:r>
+              <a:rPr sz="1600">
+                <a:solidFill>
+                  <a:srgbClr val="EEFFFF"/>
+                </a:solidFill>
+                <a:latin typeface="Consolas"/>
+              </a:rPr>
+              <a:t> </a:t>
+            </a:r>
+            <a:r>
+              <a:rPr sz="1600">
+                <a:solidFill>
+                  <a:srgbClr val="82AAFF"/>
+                </a:solidFill>
+                <a:latin typeface="Consolas"/>
+              </a:rPr>
+              <a:t>exhausted_range</a:t>
+            </a:r>
+            <a:r>
+              <a:rPr sz="1600">
+                <a:solidFill>
+                  <a:srgbClr val="BAC2DE"/>
                 </a:solidFill>
                 <a:latin typeface="Consolas"/>
               </a:rPr>
@@ -4200,7 +4092,61 @@
             <a:r>
               <a:rPr sz="1600">
                 <a:solidFill>
-                  <a:srgbClr val="4EC9B0"/>
+                  <a:srgbClr val="BAC2DE"/>
+                </a:solidFill>
+                <a:latin typeface="Consolas"/>
+              </a:rPr>
+              <a:t>)</a:t>
+            </a:r>
+            <a:r>
+              <a:rPr sz="1600">
+                <a:solidFill>
+                  <a:srgbClr val="EEFFFF"/>
+                </a:solidFill>
+                <a:latin typeface="Consolas"/>
+              </a:rPr>
+              <a:t> </a:t>
+            </a:r>
+            <a:r>
+              <a:rPr sz="1600">
+                <a:solidFill>
+                  <a:srgbClr val="BAC2DE"/>
+                </a:solidFill>
+                <a:latin typeface="Consolas"/>
+              </a:rPr>
+              <a:t>-&gt;</a:t>
+            </a:r>
+            <a:r>
+              <a:rPr sz="1600">
+                <a:solidFill>
+                  <a:srgbClr val="EEFFFF"/>
+                </a:solidFill>
+                <a:latin typeface="Consolas"/>
+              </a:rPr>
+              <a:t> </a:t>
+            </a:r>
+            <a:r>
+              <a:rPr sz="1600">
+                <a:solidFill>
+                  <a:srgbClr val="FFCB6B"/>
+                </a:solidFill>
+                <a:latin typeface="Consolas"/>
+              </a:rPr>
+              <a:t>RangeInclusive</a:t>
+            </a:r>
+            <a:r>
+              <a:rPr sz="1600">
+                <a:solidFill>
+                  <a:srgbClr val="89DDFF"/>
+                </a:solidFill>
+                <a:latin typeface="Consolas"/>
+              </a:rPr>
+              <a:t>&lt;</a:t>
+            </a:r>
+            <a:r>
+              <a:rPr sz="1600">
+                <a:solidFill>
+                  <a:srgbClr val="89DDFF"/>
                 </a:solidFill>
                 <a:latin typeface="Consolas"/>
               </a:rPr>
@@ -4209,43 +4155,16 @@
             <a:r>
               <a:rPr sz="1600">
                 <a:solidFill>
-                  <a:srgbClr val="DCDCDC"/>
-                </a:solidFill>
-                <a:latin typeface="Consolas"/>
-              </a:rPr>
-              <a:t>::</a:t>
-            </a:r>
-            <a:r>
-              <a:rPr sz="1600">
-                <a:solidFill>
-                  <a:srgbClr val="DCDCDC"/>
-                </a:solidFill>
-                <a:latin typeface="Consolas"/>
-              </a:rPr>
-              <a:t>min_value</a:t>
-            </a:r>
-            <a:r>
-              <a:rPr sz="1600">
-                <a:solidFill>
-                  <a:srgbClr val="DCDCDC"/>
-                </a:solidFill>
-                <a:latin typeface="Consolas"/>
-              </a:rPr>
-              <a:t>(</a:t>
-            </a:r>
-            <a:r>
-              <a:rPr sz="1600">
-                <a:solidFill>
-                  <a:srgbClr val="DCDCDC"/>
-                </a:solidFill>
-                <a:latin typeface="Consolas"/>
-              </a:rPr>
-              <a:t>)</a:t>
-            </a:r>
-            <a:r>
-              <a:rPr sz="1600">
-                <a:solidFill>
-                  <a:srgbClr val="DCDCDC"/>
+                  <a:srgbClr val="89DDFF"/>
+                </a:solidFill>
+                <a:latin typeface="Consolas"/>
+              </a:rPr>
+              <a:t>&gt;</a:t>
+            </a:r>
+            <a:r>
+              <a:rPr sz="1600">
+                <a:solidFill>
+                  <a:srgbClr val="EEFFFF"/>
                 </a:solidFill>
                 <a:latin typeface="Consolas"/>
               </a:rPr>
@@ -4254,128 +4173,11 @@
             <a:r>
               <a:rPr sz="1600">
                 <a:solidFill>
-                  <a:srgbClr val="DCDCDC"/>
-                </a:solidFill>
-                <a:latin typeface="Consolas"/>
-              </a:rPr>
-              <a:t>&lt;</a:t>
-            </a:r>
-            <a:r>
-              <a:rPr sz="1600">
-                <a:solidFill>
-                  <a:srgbClr val="DCDCDC"/>
-                </a:solidFill>
-                <a:latin typeface="Consolas"/>
-              </a:rPr>
-              <a:t> </a:t>
-            </a:r>
-            <a:r>
-              <a:rPr sz="1600">
-                <a:solidFill>
-                  <a:srgbClr val="4EC9B0"/>
-                </a:solidFill>
-                <a:latin typeface="Consolas"/>
-              </a:rPr>
-              <a:t>Self</a:t>
-            </a:r>
-            <a:r>
-              <a:rPr sz="1600">
-                <a:solidFill>
-                  <a:srgbClr val="DCDCDC"/>
-                </a:solidFill>
-                <a:latin typeface="Consolas"/>
-              </a:rPr>
-              <a:t>::</a:t>
-            </a:r>
-            <a:r>
-              <a:rPr sz="1600">
-                <a:solidFill>
-                  <a:srgbClr val="DCDCDC"/>
-                </a:solidFill>
-                <a:latin typeface="Consolas"/>
-              </a:rPr>
-              <a:t>max_value</a:t>
-            </a:r>
-            <a:r>
-              <a:rPr sz="1600">
-                <a:solidFill>
-                  <a:srgbClr val="DCDCDC"/>
-                </a:solidFill>
-                <a:latin typeface="Consolas"/>
-              </a:rPr>
-              <a:t>(</a:t>
-            </a:r>
-            <a:r>
-              <a:rPr sz="1600">
-                <a:solidFill>
-                  <a:srgbClr val="DCDCDC"/>
-                </a:solidFill>
-                <a:latin typeface="Consolas"/>
-              </a:rPr>
-              <a:t>)</a:t>
-            </a:r>
-            <a:r>
-              <a:rPr sz="1600">
-                <a:solidFill>
-                  <a:srgbClr val="DCDCDC"/>
-                </a:solidFill>
-                <a:latin typeface="Consolas"/>
-              </a:rPr>
-              <a:t>,</a:t>
-            </a:r>
-            <a:r>
-              <a:rPr sz="1600">
-                <a:solidFill>
-                  <a:srgbClr val="DCDCDC"/>
-                </a:solidFill>
-                <a:latin typeface="Consolas"/>
-              </a:rPr>
-              <a:t> </a:t>
-            </a:r>
-            <a:r>
-              <a:rPr sz="1600">
-                <a:solidFill>
-                  <a:srgbClr val="CE9178"/>
-                </a:solidFill>
-                <a:latin typeface="Consolas"/>
-              </a:rPr>
-              <a:t>"</a:t>
-            </a:r>
-            <a:r>
-              <a:rPr sz="1600">
-                <a:solidFill>
-                  <a:srgbClr val="CE9178"/>
-                </a:solidFill>
-                <a:latin typeface="Consolas"/>
-              </a:rPr>
-              <a:t>Precondition</a:t>
-            </a:r>
-            <a:r>
-              <a:rPr sz="1600">
-                <a:solidFill>
-                  <a:srgbClr val="CE9178"/>
-                </a:solidFill>
-                <a:latin typeface="Consolas"/>
-              </a:rPr>
-              <a:t>"</a:t>
-            </a:r>
-            <a:r>
-              <a:rPr sz="1600">
-                <a:solidFill>
-                  <a:srgbClr val="DCDCDC"/>
-                </a:solidFill>
-                <a:latin typeface="Consolas"/>
-              </a:rPr>
-              <a:t>)</a:t>
-            </a:r>
-            <a:r>
-              <a:rPr sz="1600">
-                <a:solidFill>
-                  <a:srgbClr val="DCDCDC"/>
-                </a:solidFill>
-                <a:latin typeface="Consolas"/>
-              </a:rPr>
-              <a:t>;</a:t>
+                  <a:srgbClr val="BAC2DE"/>
+                </a:solidFill>
+                <a:latin typeface="Consolas"/>
+              </a:rPr>
+              <a:t>{</a:t>
             </a:r>
           </a:p>
           <a:p>
@@ -4393,7 +4195,7 @@
             <a:r>
               <a:rPr sz="1600">
                 <a:solidFill>
-                  <a:srgbClr val="DCDCDC"/>
+                  <a:srgbClr val="EEFFFF"/>
                 </a:solidFill>
                 <a:latin typeface="Consolas"/>
               </a:rPr>
@@ -4402,7 +4204,25 @@
             <a:r>
               <a:rPr sz="1600">
                 <a:solidFill>
-                  <a:srgbClr val="4EC9B0"/>
+                  <a:srgbClr val="82AAFF"/>
+                </a:solidFill>
+                <a:latin typeface="Consolas"/>
+              </a:rPr>
+              <a:t>debug_assert!</a:t>
+            </a:r>
+            <a:r>
+              <a:rPr sz="1600">
+                <a:solidFill>
+                  <a:srgbClr val="BAC2DE"/>
+                </a:solidFill>
+                <a:latin typeface="Consolas"/>
+              </a:rPr>
+              <a:t>(</a:t>
+            </a:r>
+            <a:r>
+              <a:rPr sz="1600">
+                <a:solidFill>
+                  <a:srgbClr val="89DDFF"/>
                 </a:solidFill>
                 <a:latin typeface="Consolas"/>
               </a:rPr>
@@ -4411,7 +4231,7 @@
             <a:r>
               <a:rPr sz="1600">
                 <a:solidFill>
-                  <a:srgbClr val="DCDCDC"/>
+                  <a:srgbClr val="BAC2DE"/>
                 </a:solidFill>
                 <a:latin typeface="Consolas"/>
               </a:rPr>
@@ -4420,7 +4240,79 @@
             <a:r>
               <a:rPr sz="1600">
                 <a:solidFill>
-                  <a:srgbClr val="DCDCDC"/>
+                  <a:srgbClr val="EEFFFF"/>
+                </a:solidFill>
+                <a:latin typeface="Consolas"/>
+              </a:rPr>
+              <a:t>min_value</a:t>
+            </a:r>
+            <a:r>
+              <a:rPr sz="1600">
+                <a:solidFill>
+                  <a:srgbClr val="BAC2DE"/>
+                </a:solidFill>
+                <a:latin typeface="Consolas"/>
+              </a:rPr>
+              <a:t>(</a:t>
+            </a:r>
+            <a:r>
+              <a:rPr sz="1600">
+                <a:solidFill>
+                  <a:srgbClr val="BAC2DE"/>
+                </a:solidFill>
+                <a:latin typeface="Consolas"/>
+              </a:rPr>
+              <a:t>)</a:t>
+            </a:r>
+            <a:r>
+              <a:rPr sz="1600">
+                <a:solidFill>
+                  <a:srgbClr val="EEFFFF"/>
+                </a:solidFill>
+                <a:latin typeface="Consolas"/>
+              </a:rPr>
+              <a:t> </a:t>
+            </a:r>
+            <a:r>
+              <a:rPr sz="1600">
+                <a:solidFill>
+                  <a:srgbClr val="89DDFF"/>
+                </a:solidFill>
+                <a:latin typeface="Consolas"/>
+              </a:rPr>
+              <a:t>&lt;</a:t>
+            </a:r>
+            <a:r>
+              <a:rPr sz="1600">
+                <a:solidFill>
+                  <a:srgbClr val="EEFFFF"/>
+                </a:solidFill>
+                <a:latin typeface="Consolas"/>
+              </a:rPr>
+              <a:t> </a:t>
+            </a:r>
+            <a:r>
+              <a:rPr sz="1600">
+                <a:solidFill>
+                  <a:srgbClr val="89DDFF"/>
+                </a:solidFill>
+                <a:latin typeface="Consolas"/>
+              </a:rPr>
+              <a:t>Self</a:t>
+            </a:r>
+            <a:r>
+              <a:rPr sz="1600">
+                <a:solidFill>
+                  <a:srgbClr val="BAC2DE"/>
+                </a:solidFill>
+                <a:latin typeface="Consolas"/>
+              </a:rPr>
+              <a:t>::</a:t>
+            </a:r>
+            <a:r>
+              <a:rPr sz="1600">
+                <a:solidFill>
+                  <a:srgbClr val="EEFFFF"/>
                 </a:solidFill>
                 <a:latin typeface="Consolas"/>
               </a:rPr>
@@ -4429,7 +4321,7 @@
             <a:r>
               <a:rPr sz="1600">
                 <a:solidFill>
-                  <a:srgbClr val="DCDCDC"/>
+                  <a:srgbClr val="BAC2DE"/>
                 </a:solidFill>
                 <a:latin typeface="Consolas"/>
               </a:rPr>
@@ -4438,7 +4330,7 @@
             <a:r>
               <a:rPr sz="1600">
                 <a:solidFill>
-                  <a:srgbClr val="DCDCDC"/>
+                  <a:srgbClr val="BAC2DE"/>
                 </a:solidFill>
                 <a:latin typeface="Consolas"/>
               </a:rPr>
@@ -4447,56 +4339,65 @@
             <a:r>
               <a:rPr sz="1600">
                 <a:solidFill>
-                  <a:srgbClr val="DCDCDC"/>
-                </a:solidFill>
-                <a:latin typeface="Consolas"/>
-              </a:rPr>
-              <a:t>..=</a:t>
-            </a:r>
-            <a:r>
-              <a:rPr sz="1600">
-                <a:solidFill>
-                  <a:srgbClr val="4EC9B0"/>
-                </a:solidFill>
-                <a:latin typeface="Consolas"/>
-              </a:rPr>
-              <a:t>Self</a:t>
-            </a:r>
-            <a:r>
-              <a:rPr sz="1600">
-                <a:solidFill>
-                  <a:srgbClr val="DCDCDC"/>
-                </a:solidFill>
-                <a:latin typeface="Consolas"/>
-              </a:rPr>
-              <a:t>::</a:t>
-            </a:r>
-            <a:r>
-              <a:rPr sz="1600">
-                <a:solidFill>
-                  <a:srgbClr val="DCDCDC"/>
-                </a:solidFill>
-                <a:latin typeface="Consolas"/>
-              </a:rPr>
-              <a:t>min_value</a:t>
-            </a:r>
-            <a:r>
-              <a:rPr sz="1600">
-                <a:solidFill>
-                  <a:srgbClr val="DCDCDC"/>
-                </a:solidFill>
-                <a:latin typeface="Consolas"/>
-              </a:rPr>
-              <a:t>(</a:t>
-            </a:r>
-            <a:r>
-              <a:rPr sz="1600">
-                <a:solidFill>
-                  <a:srgbClr val="DCDCDC"/>
+                  <a:srgbClr val="BAC2DE"/>
+                </a:solidFill>
+                <a:latin typeface="Consolas"/>
+              </a:rPr>
+              <a:t>,</a:t>
+            </a:r>
+            <a:r>
+              <a:rPr sz="1600">
+                <a:solidFill>
+                  <a:srgbClr val="EEFFFF"/>
+                </a:solidFill>
+                <a:latin typeface="Consolas"/>
+              </a:rPr>
+              <a:t> </a:t>
+            </a:r>
+            <a:r>
+              <a:rPr sz="1600">
+                <a:solidFill>
+                  <a:srgbClr val="C3E88D"/>
+                </a:solidFill>
+                <a:latin typeface="Consolas"/>
+              </a:rPr>
+              <a:t>"</a:t>
+            </a:r>
+            <a:r>
+              <a:rPr sz="1600">
+                <a:solidFill>
+                  <a:srgbClr val="C3E88D"/>
+                </a:solidFill>
+                <a:latin typeface="Consolas"/>
+              </a:rPr>
+              <a:t>Precondition</a:t>
+            </a:r>
+            <a:r>
+              <a:rPr sz="1600">
+                <a:solidFill>
+                  <a:srgbClr val="C3E88D"/>
+                </a:solidFill>
+                <a:latin typeface="Consolas"/>
+              </a:rPr>
+              <a:t>"</a:t>
+            </a:r>
+            <a:r>
+              <a:rPr sz="1600">
+                <a:solidFill>
+                  <a:srgbClr val="BAC2DE"/>
                 </a:solidFill>
                 <a:latin typeface="Consolas"/>
               </a:rPr>
               <a:t>)</a:t>
+            </a:r>
+            <a:r>
+              <a:rPr sz="1600">
+                <a:solidFill>
+                  <a:srgbClr val="BAC2DE"/>
+                </a:solidFill>
+                <a:latin typeface="Consolas"/>
+              </a:rPr>
+              <a:t>;</a:t>
             </a:r>
           </a:p>
           <a:p>
@@ -4514,20 +4415,110 @@
             <a:r>
               <a:rPr sz="1600">
                 <a:solidFill>
-                  <a:srgbClr val="DCDCDC"/>
-                </a:solidFill>
-                <a:latin typeface="Consolas"/>
-              </a:rPr>
-              <a:t>    </a:t>
-            </a:r>
-            <a:r>
-              <a:rPr sz="1600">
-                <a:solidFill>
-                  <a:srgbClr val="DCDCDC"/>
-                </a:solidFill>
-                <a:latin typeface="Consolas"/>
-              </a:rPr>
-              <a:t>}</a:t>
+                  <a:srgbClr val="EEFFFF"/>
+                </a:solidFill>
+                <a:latin typeface="Consolas"/>
+              </a:rPr>
+              <a:t>        </a:t>
+            </a:r>
+            <a:r>
+              <a:rPr sz="1600">
+                <a:solidFill>
+                  <a:srgbClr val="89DDFF"/>
+                </a:solidFill>
+                <a:latin typeface="Consolas"/>
+              </a:rPr>
+              <a:t>Self</a:t>
+            </a:r>
+            <a:r>
+              <a:rPr sz="1600">
+                <a:solidFill>
+                  <a:srgbClr val="BAC2DE"/>
+                </a:solidFill>
+                <a:latin typeface="Consolas"/>
+              </a:rPr>
+              <a:t>::</a:t>
+            </a:r>
+            <a:r>
+              <a:rPr sz="1600">
+                <a:solidFill>
+                  <a:srgbClr val="EEFFFF"/>
+                </a:solidFill>
+                <a:latin typeface="Consolas"/>
+              </a:rPr>
+              <a:t>max_value</a:t>
+            </a:r>
+            <a:r>
+              <a:rPr sz="1600">
+                <a:solidFill>
+                  <a:srgbClr val="BAC2DE"/>
+                </a:solidFill>
+                <a:latin typeface="Consolas"/>
+              </a:rPr>
+              <a:t>(</a:t>
+            </a:r>
+            <a:r>
+              <a:rPr sz="1600">
+                <a:solidFill>
+                  <a:srgbClr val="BAC2DE"/>
+                </a:solidFill>
+                <a:latin typeface="Consolas"/>
+              </a:rPr>
+              <a:t>)</a:t>
+            </a:r>
+            <a:r>
+              <a:rPr sz="1600">
+                <a:solidFill>
+                  <a:srgbClr val="89DDFF"/>
+                </a:solidFill>
+                <a:latin typeface="Consolas"/>
+              </a:rPr>
+              <a:t>..=</a:t>
+            </a:r>
+            <a:r>
+              <a:rPr sz="1600">
+                <a:solidFill>
+                  <a:srgbClr val="89DDFF"/>
+                </a:solidFill>
+                <a:latin typeface="Consolas"/>
+              </a:rPr>
+              <a:t>Self</a:t>
+            </a:r>
+            <a:r>
+              <a:rPr sz="1600">
+                <a:solidFill>
+                  <a:srgbClr val="BAC2DE"/>
+                </a:solidFill>
+                <a:latin typeface="Consolas"/>
+              </a:rPr>
+              <a:t>::</a:t>
+            </a:r>
+            <a:r>
+              <a:rPr sz="1600">
+                <a:solidFill>
+                  <a:srgbClr val="EEFFFF"/>
+                </a:solidFill>
+                <a:latin typeface="Consolas"/>
+              </a:rPr>
+              <a:t>min_value</a:t>
+            </a:r>
+            <a:r>
+              <a:rPr sz="1600">
+                <a:solidFill>
+                  <a:srgbClr val="BAC2DE"/>
+                </a:solidFill>
+                <a:latin typeface="Consolas"/>
+              </a:rPr>
+              <a:t>(</a:t>
+            </a:r>
+            <a:r>
+              <a:rPr sz="1600">
+                <a:solidFill>
+                  <a:srgbClr val="BAC2DE"/>
+                </a:solidFill>
+                <a:latin typeface="Consolas"/>
+              </a:rPr>
+              <a:t>)</a:t>
             </a:r>
           </a:p>
           <a:p>
@@ -4545,7 +4536,16 @@
             <a:r>
               <a:rPr sz="1600">
                 <a:solidFill>
-                  <a:srgbClr val="DCDCDC"/>
+                  <a:srgbClr val="EEFFFF"/>
+                </a:solidFill>
+                <a:latin typeface="Consolas"/>
+              </a:rPr>
+              <a:t>    </a:t>
+            </a:r>
+            <a:r>
+              <a:rPr sz="1600">
+                <a:solidFill>
+                  <a:srgbClr val="BAC2DE"/>
                 </a:solidFill>
                 <a:latin typeface="Consolas"/>
               </a:rPr>
@@ -4564,6 +4564,15 @@
                 <a:spcPts val="0"/>
               </a:spcAft>
             </a:pPr>
+            <a:r>
+              <a:rPr sz="1600">
+                <a:solidFill>
+                  <a:srgbClr val="BAC2DE"/>
+                </a:solidFill>
+                <a:latin typeface="Consolas"/>
+              </a:rPr>
+              <a:t>}</a:t>
+            </a:r>
           </a:p>
           <a:p>
             <a:pPr>
@@ -4577,87 +4586,6 @@
                 <a:spcPts val="0"/>
               </a:spcAft>
             </a:pPr>
-            <a:r>
-              <a:rPr sz="1600">
-                <a:solidFill>
-                  <a:srgbClr val="C586C0"/>
-                </a:solidFill>
-                <a:latin typeface="Consolas"/>
-              </a:rPr>
-              <a:t>impl</a:t>
-            </a:r>
-            <a:r>
-              <a:rPr sz="1600">
-                <a:solidFill>
-                  <a:srgbClr val="DCDCDC"/>
-                </a:solidFill>
-                <a:latin typeface="Consolas"/>
-              </a:rPr>
-              <a:t> </a:t>
-            </a:r>
-            <a:r>
-              <a:rPr sz="1600">
-                <a:solidFill>
-                  <a:srgbClr val="DCDCDC"/>
-                </a:solidFill>
-                <a:latin typeface="Consolas"/>
-              </a:rPr>
-              <a:t>Integer</a:t>
-            </a:r>
-            <a:r>
-              <a:rPr sz="1600">
-                <a:solidFill>
-                  <a:srgbClr val="DCDCDC"/>
-                </a:solidFill>
-                <a:latin typeface="Consolas"/>
-              </a:rPr>
-              <a:t> </a:t>
-            </a:r>
-            <a:r>
-              <a:rPr sz="1600">
-                <a:solidFill>
-                  <a:srgbClr val="C586C0"/>
-                </a:solidFill>
-                <a:latin typeface="Consolas"/>
-              </a:rPr>
-              <a:t>for</a:t>
-            </a:r>
-            <a:r>
-              <a:rPr sz="1600">
-                <a:solidFill>
-                  <a:srgbClr val="DCDCDC"/>
-                </a:solidFill>
-                <a:latin typeface="Consolas"/>
-              </a:rPr>
-              <a:t> </a:t>
-            </a:r>
-            <a:r>
-              <a:rPr sz="1600">
-                <a:solidFill>
-                  <a:srgbClr val="C586C0"/>
-                </a:solidFill>
-                <a:latin typeface="Consolas"/>
-              </a:rPr>
-              <a:t>u8</a:t>
-            </a:r>
-            <a:r>
-              <a:rPr sz="1600">
-                <a:solidFill>
-                  <a:srgbClr val="DCDCDC"/>
-                </a:solidFill>
-                <a:latin typeface="Consolas"/>
-              </a:rPr>
-              <a:t> </a:t>
-            </a:r>
-            <a:r>
-              <a:rPr sz="1600">
-                <a:solidFill>
-                  <a:srgbClr val="DCDCDC"/>
-                </a:solidFill>
-                <a:latin typeface="Consolas"/>
-              </a:rPr>
-              <a:t>{</a:t>
-            </a:r>
           </a:p>
           <a:p>
             <a:pPr>
@@ -4674,25 +4602,16 @@
             <a:r>
               <a:rPr sz="1600">
                 <a:solidFill>
-                  <a:srgbClr val="DCDCDC"/>
-                </a:solidFill>
-                <a:latin typeface="Consolas"/>
-              </a:rPr>
-              <a:t>    </a:t>
-            </a:r>
-            <a:r>
-              <a:rPr sz="1600">
-                <a:solidFill>
-                  <a:srgbClr val="C586C0"/>
-                </a:solidFill>
-                <a:latin typeface="Consolas"/>
-              </a:rPr>
-              <a:t>fn</a:t>
-            </a:r>
-            <a:r>
-              <a:rPr sz="1600">
-                <a:solidFill>
-                  <a:srgbClr val="DCDCDC"/>
+                  <a:srgbClr val="C792EA"/>
+                </a:solidFill>
+                <a:latin typeface="Consolas"/>
+              </a:rPr>
+              <a:t>impl</a:t>
+            </a:r>
+            <a:r>
+              <a:rPr sz="1600">
+                <a:solidFill>
+                  <a:srgbClr val="EEFFFF"/>
                 </a:solidFill>
                 <a:latin typeface="Consolas"/>
               </a:rPr>
@@ -4701,34 +4620,16 @@
             <a:r>
               <a:rPr sz="1600">
                 <a:solidFill>
-                  <a:srgbClr val="DCDCAA"/>
-                </a:solidFill>
-                <a:latin typeface="Consolas"/>
-              </a:rPr>
-              <a:t>min_value</a:t>
-            </a:r>
-            <a:r>
-              <a:rPr sz="1600">
-                <a:solidFill>
-                  <a:srgbClr val="DCDCDC"/>
-                </a:solidFill>
-                <a:latin typeface="Consolas"/>
-              </a:rPr>
-              <a:t>(</a:t>
-            </a:r>
-            <a:r>
-              <a:rPr sz="1600">
-                <a:solidFill>
-                  <a:srgbClr val="DCDCDC"/>
-                </a:solidFill>
-                <a:latin typeface="Consolas"/>
-              </a:rPr>
-              <a:t>)</a:t>
-            </a:r>
-            <a:r>
-              <a:rPr sz="1600">
-                <a:solidFill>
-                  <a:srgbClr val="DCDCDC"/>
+                  <a:srgbClr val="EEFFFF"/>
+                </a:solidFill>
+                <a:latin typeface="Consolas"/>
+              </a:rPr>
+              <a:t>Integer</a:t>
+            </a:r>
+            <a:r>
+              <a:rPr sz="1600">
+                <a:solidFill>
+                  <a:srgbClr val="EEFFFF"/>
                 </a:solidFill>
                 <a:latin typeface="Consolas"/>
               </a:rPr>
@@ -4737,16 +4638,16 @@
             <a:r>
               <a:rPr sz="1600">
                 <a:solidFill>
-                  <a:srgbClr val="DCDCDC"/>
-                </a:solidFill>
-                <a:latin typeface="Consolas"/>
-              </a:rPr>
-              <a:t>-&gt;</a:t>
-            </a:r>
-            <a:r>
-              <a:rPr sz="1600">
-                <a:solidFill>
-                  <a:srgbClr val="DCDCDC"/>
+                  <a:srgbClr val="C792EA"/>
+                </a:solidFill>
+                <a:latin typeface="Consolas"/>
+              </a:rPr>
+              <a:t>for</a:t>
+            </a:r>
+            <a:r>
+              <a:rPr sz="1600">
+                <a:solidFill>
+                  <a:srgbClr val="EEFFFF"/>
                 </a:solidFill>
                 <a:latin typeface="Consolas"/>
               </a:rPr>
@@ -4755,16 +4656,16 @@
             <a:r>
               <a:rPr sz="1600">
                 <a:solidFill>
-                  <a:srgbClr val="4EC9B0"/>
-                </a:solidFill>
-                <a:latin typeface="Consolas"/>
-              </a:rPr>
-              <a:t>Self</a:t>
-            </a:r>
-            <a:r>
-              <a:rPr sz="1600">
-                <a:solidFill>
-                  <a:srgbClr val="DCDCDC"/>
+                  <a:srgbClr val="C792EA"/>
+                </a:solidFill>
+                <a:latin typeface="Consolas"/>
+              </a:rPr>
+              <a:t>u8</a:t>
+            </a:r>
+            <a:r>
+              <a:rPr sz="1600">
+                <a:solidFill>
+                  <a:srgbClr val="EEFFFF"/>
                 </a:solidFill>
                 <a:latin typeface="Consolas"/>
               </a:rPr>
@@ -4773,7 +4674,7 @@
             <a:r>
               <a:rPr sz="1600">
                 <a:solidFill>
-                  <a:srgbClr val="DCDCDC"/>
+                  <a:srgbClr val="BAC2DE"/>
                 </a:solidFill>
                 <a:latin typeface="Consolas"/>
               </a:rPr>
@@ -4795,38 +4696,110 @@
             <a:r>
               <a:rPr sz="1600">
                 <a:solidFill>
-                  <a:srgbClr val="DCDCDC"/>
-                </a:solidFill>
-                <a:latin typeface="Consolas"/>
-              </a:rPr>
-              <a:t>        </a:t>
-            </a:r>
-            <a:r>
-              <a:rPr sz="1600">
-                <a:solidFill>
-                  <a:srgbClr val="C586C0"/>
-                </a:solidFill>
-                <a:latin typeface="Consolas"/>
-              </a:rPr>
-              <a:t>u8</a:t>
-            </a:r>
-            <a:r>
-              <a:rPr sz="1600">
-                <a:solidFill>
-                  <a:srgbClr val="DCDCDC"/>
-                </a:solidFill>
-                <a:latin typeface="Consolas"/>
-              </a:rPr>
-              <a:t>::</a:t>
-            </a:r>
-            <a:r>
-              <a:rPr sz="1600">
-                <a:solidFill>
-                  <a:srgbClr val="DCDCDC"/>
-                </a:solidFill>
-                <a:latin typeface="Consolas"/>
-              </a:rPr>
-              <a:t>MIN</a:t>
+                  <a:srgbClr val="EEFFFF"/>
+                </a:solidFill>
+                <a:latin typeface="Consolas"/>
+              </a:rPr>
+              <a:t>    </a:t>
+            </a:r>
+            <a:r>
+              <a:rPr sz="1600">
+                <a:solidFill>
+                  <a:srgbClr val="C792EA"/>
+                </a:solidFill>
+                <a:latin typeface="Consolas"/>
+              </a:rPr>
+              <a:t>fn</a:t>
+            </a:r>
+            <a:r>
+              <a:rPr sz="1600">
+                <a:solidFill>
+                  <a:srgbClr val="EEFFFF"/>
+                </a:solidFill>
+                <a:latin typeface="Consolas"/>
+              </a:rPr>
+              <a:t> </a:t>
+            </a:r>
+            <a:r>
+              <a:rPr sz="1600">
+                <a:solidFill>
+                  <a:srgbClr val="82AAFF"/>
+                </a:solidFill>
+                <a:latin typeface="Consolas"/>
+              </a:rPr>
+              <a:t>min_value</a:t>
+            </a:r>
+            <a:r>
+              <a:rPr sz="1600">
+                <a:solidFill>
+                  <a:srgbClr val="BAC2DE"/>
+                </a:solidFill>
+                <a:latin typeface="Consolas"/>
+              </a:rPr>
+              <a:t>(</a:t>
+            </a:r>
+            <a:r>
+              <a:rPr sz="1600">
+                <a:solidFill>
+                  <a:srgbClr val="BAC2DE"/>
+                </a:solidFill>
+                <a:latin typeface="Consolas"/>
+              </a:rPr>
+              <a:t>)</a:t>
+            </a:r>
+            <a:r>
+              <a:rPr sz="1600">
+                <a:solidFill>
+                  <a:srgbClr val="EEFFFF"/>
+                </a:solidFill>
+                <a:latin typeface="Consolas"/>
+              </a:rPr>
+              <a:t> </a:t>
+            </a:r>
+            <a:r>
+              <a:rPr sz="1600">
+                <a:solidFill>
+                  <a:srgbClr val="BAC2DE"/>
+                </a:solidFill>
+                <a:latin typeface="Consolas"/>
+              </a:rPr>
+              <a:t>-&gt;</a:t>
+            </a:r>
+            <a:r>
+              <a:rPr sz="1600">
+                <a:solidFill>
+                  <a:srgbClr val="EEFFFF"/>
+                </a:solidFill>
+                <a:latin typeface="Consolas"/>
+              </a:rPr>
+              <a:t> </a:t>
+            </a:r>
+            <a:r>
+              <a:rPr sz="1600">
+                <a:solidFill>
+                  <a:srgbClr val="FFCB6B"/>
+                </a:solidFill>
+                <a:latin typeface="Consolas"/>
+              </a:rPr>
+              <a:t>Self</a:t>
+            </a:r>
+            <a:r>
+              <a:rPr sz="1600">
+                <a:solidFill>
+                  <a:srgbClr val="EEFFFF"/>
+                </a:solidFill>
+                <a:latin typeface="Consolas"/>
+              </a:rPr>
+              <a:t> </a:t>
+            </a:r>
+            <a:r>
+              <a:rPr sz="1600">
+                <a:solidFill>
+                  <a:srgbClr val="BAC2DE"/>
+                </a:solidFill>
+                <a:latin typeface="Consolas"/>
+              </a:rPr>
+              <a:t>{</a:t>
             </a:r>
           </a:p>
           <a:p>
@@ -4844,20 +4817,38 @@
             <a:r>
               <a:rPr sz="1600">
                 <a:solidFill>
-                  <a:srgbClr val="DCDCDC"/>
-                </a:solidFill>
-                <a:latin typeface="Consolas"/>
-              </a:rPr>
-              <a:t>    </a:t>
-            </a:r>
-            <a:r>
-              <a:rPr sz="1600">
-                <a:solidFill>
-                  <a:srgbClr val="DCDCDC"/>
-                </a:solidFill>
-                <a:latin typeface="Consolas"/>
-              </a:rPr>
-              <a:t>}</a:t>
+                  <a:srgbClr val="EEFFFF"/>
+                </a:solidFill>
+                <a:latin typeface="Consolas"/>
+              </a:rPr>
+              <a:t>        </a:t>
+            </a:r>
+            <a:r>
+              <a:rPr sz="1600">
+                <a:solidFill>
+                  <a:srgbClr val="C792EA"/>
+                </a:solidFill>
+                <a:latin typeface="Consolas"/>
+              </a:rPr>
+              <a:t>u8</a:t>
+            </a:r>
+            <a:r>
+              <a:rPr sz="1600">
+                <a:solidFill>
+                  <a:srgbClr val="BAC2DE"/>
+                </a:solidFill>
+                <a:latin typeface="Consolas"/>
+              </a:rPr>
+              <a:t>::</a:t>
+            </a:r>
+            <a:r>
+              <a:rPr sz="1600">
+                <a:solidFill>
+                  <a:srgbClr val="EEFFFF"/>
+                </a:solidFill>
+                <a:latin typeface="Consolas"/>
+              </a:rPr>
+              <a:t>MIN</a:t>
             </a:r>
           </a:p>
           <a:p>
@@ -4872,6 +4863,24 @@
                 <a:spcPts val="0"/>
               </a:spcAft>
             </a:pPr>
+            <a:r>
+              <a:rPr sz="1600">
+                <a:solidFill>
+                  <a:srgbClr val="EEFFFF"/>
+                </a:solidFill>
+                <a:latin typeface="Consolas"/>
+              </a:rPr>
+              <a:t>    </a:t>
+            </a:r>
+            <a:r>
+              <a:rPr sz="1600">
+                <a:solidFill>
+                  <a:srgbClr val="BAC2DE"/>
+                </a:solidFill>
+                <a:latin typeface="Consolas"/>
+              </a:rPr>
+              <a:t>}</a:t>
+            </a:r>
           </a:p>
           <a:p>
             <a:pPr>
@@ -4885,114 +4894,6 @@
                 <a:spcPts val="0"/>
               </a:spcAft>
             </a:pPr>
-            <a:r>
-              <a:rPr sz="1600">
-                <a:solidFill>
-                  <a:srgbClr val="DCDCDC"/>
-                </a:solidFill>
-                <a:latin typeface="Consolas"/>
-              </a:rPr>
-              <a:t>    </a:t>
-            </a:r>
-            <a:r>
-              <a:rPr sz="1600">
-                <a:solidFill>
-                  <a:srgbClr val="C586C0"/>
-                </a:solidFill>
-                <a:latin typeface="Consolas"/>
-              </a:rPr>
-              <a:t>fn</a:t>
-            </a:r>
-            <a:r>
-              <a:rPr sz="1600">
-                <a:solidFill>
-                  <a:srgbClr val="DCDCDC"/>
-                </a:solidFill>
-                <a:latin typeface="Consolas"/>
-              </a:rPr>
-              <a:t> </a:t>
-            </a:r>
-            <a:r>
-              <a:rPr sz="1600">
-                <a:solidFill>
-                  <a:srgbClr val="DCDCAA"/>
-                </a:solidFill>
-                <a:latin typeface="Consolas"/>
-              </a:rPr>
-              <a:t>max_value</a:t>
-            </a:r>
-            <a:r>
-              <a:rPr sz="1600">
-                <a:solidFill>
-                  <a:srgbClr val="DCDCDC"/>
-                </a:solidFill>
-                <a:latin typeface="Consolas"/>
-              </a:rPr>
-              <a:t>(</a:t>
-            </a:r>
-            <a:r>
-              <a:rPr sz="1600">
-                <a:solidFill>
-                  <a:srgbClr val="DCDCDC"/>
-                </a:solidFill>
-                <a:latin typeface="Consolas"/>
-              </a:rPr>
-              <a:t>)</a:t>
-            </a:r>
-            <a:r>
-              <a:rPr sz="1600">
-                <a:solidFill>
-                  <a:srgbClr val="DCDCDC"/>
-                </a:solidFill>
-                <a:latin typeface="Consolas"/>
-              </a:rPr>
-              <a:t> </a:t>
-            </a:r>
-            <a:r>
-              <a:rPr sz="1600">
-                <a:solidFill>
-                  <a:srgbClr val="DCDCDC"/>
-                </a:solidFill>
-                <a:latin typeface="Consolas"/>
-              </a:rPr>
-              <a:t>-&gt;</a:t>
-            </a:r>
-            <a:r>
-              <a:rPr sz="1600">
-                <a:solidFill>
-                  <a:srgbClr val="DCDCDC"/>
-                </a:solidFill>
-                <a:latin typeface="Consolas"/>
-              </a:rPr>
-              <a:t> </a:t>
-            </a:r>
-            <a:r>
-              <a:rPr sz="1600">
-                <a:solidFill>
-                  <a:srgbClr val="4EC9B0"/>
-                </a:solidFill>
-                <a:latin typeface="Consolas"/>
-              </a:rPr>
-              <a:t>Self</a:t>
-            </a:r>
-            <a:r>
-              <a:rPr sz="1600">
-                <a:solidFill>
-                  <a:srgbClr val="DCDCDC"/>
-                </a:solidFill>
-                <a:latin typeface="Consolas"/>
-              </a:rPr>
-              <a:t> </a:t>
-            </a:r>
-            <a:r>
-              <a:rPr sz="1600">
-                <a:solidFill>
-                  <a:srgbClr val="DCDCDC"/>
-                </a:solidFill>
-                <a:latin typeface="Consolas"/>
-              </a:rPr>
-              <a:t>{</a:t>
-            </a:r>
           </a:p>
           <a:p>
             <a:pPr>
@@ -5009,38 +4910,110 @@
             <a:r>
               <a:rPr sz="1600">
                 <a:solidFill>
-                  <a:srgbClr val="DCDCDC"/>
-                </a:solidFill>
-                <a:latin typeface="Consolas"/>
-              </a:rPr>
-              <a:t>        </a:t>
-            </a:r>
-            <a:r>
-              <a:rPr sz="1600">
-                <a:solidFill>
-                  <a:srgbClr val="C586C0"/>
-                </a:solidFill>
-                <a:latin typeface="Consolas"/>
-              </a:rPr>
-              <a:t>u8</a:t>
-            </a:r>
-            <a:r>
-              <a:rPr sz="1600">
-                <a:solidFill>
-                  <a:srgbClr val="DCDCDC"/>
-                </a:solidFill>
-                <a:latin typeface="Consolas"/>
-              </a:rPr>
-              <a:t>::</a:t>
-            </a:r>
-            <a:r>
-              <a:rPr sz="1600">
-                <a:solidFill>
-                  <a:srgbClr val="DCDCDC"/>
-                </a:solidFill>
-                <a:latin typeface="Consolas"/>
-              </a:rPr>
-              <a:t>MAX</a:t>
+                  <a:srgbClr val="EEFFFF"/>
+                </a:solidFill>
+                <a:latin typeface="Consolas"/>
+              </a:rPr>
+              <a:t>    </a:t>
+            </a:r>
+            <a:r>
+              <a:rPr sz="1600">
+                <a:solidFill>
+                  <a:srgbClr val="C792EA"/>
+                </a:solidFill>
+                <a:latin typeface="Consolas"/>
+              </a:rPr>
+              <a:t>fn</a:t>
+            </a:r>
+            <a:r>
+              <a:rPr sz="1600">
+                <a:solidFill>
+                  <a:srgbClr val="EEFFFF"/>
+                </a:solidFill>
+                <a:latin typeface="Consolas"/>
+              </a:rPr>
+              <a:t> </a:t>
+            </a:r>
+            <a:r>
+              <a:rPr sz="1600">
+                <a:solidFill>
+                  <a:srgbClr val="82AAFF"/>
+                </a:solidFill>
+                <a:latin typeface="Consolas"/>
+              </a:rPr>
+              <a:t>max_value</a:t>
+            </a:r>
+            <a:r>
+              <a:rPr sz="1600">
+                <a:solidFill>
+                  <a:srgbClr val="BAC2DE"/>
+                </a:solidFill>
+                <a:latin typeface="Consolas"/>
+              </a:rPr>
+              <a:t>(</a:t>
+            </a:r>
+            <a:r>
+              <a:rPr sz="1600">
+                <a:solidFill>
+                  <a:srgbClr val="BAC2DE"/>
+                </a:solidFill>
+                <a:latin typeface="Consolas"/>
+              </a:rPr>
+              <a:t>)</a:t>
+            </a:r>
+            <a:r>
+              <a:rPr sz="1600">
+                <a:solidFill>
+                  <a:srgbClr val="EEFFFF"/>
+                </a:solidFill>
+                <a:latin typeface="Consolas"/>
+              </a:rPr>
+              <a:t> </a:t>
+            </a:r>
+            <a:r>
+              <a:rPr sz="1600">
+                <a:solidFill>
+                  <a:srgbClr val="BAC2DE"/>
+                </a:solidFill>
+                <a:latin typeface="Consolas"/>
+              </a:rPr>
+              <a:t>-&gt;</a:t>
+            </a:r>
+            <a:r>
+              <a:rPr sz="1600">
+                <a:solidFill>
+                  <a:srgbClr val="EEFFFF"/>
+                </a:solidFill>
+                <a:latin typeface="Consolas"/>
+              </a:rPr>
+              <a:t> </a:t>
+            </a:r>
+            <a:r>
+              <a:rPr sz="1600">
+                <a:solidFill>
+                  <a:srgbClr val="FFCB6B"/>
+                </a:solidFill>
+                <a:latin typeface="Consolas"/>
+              </a:rPr>
+              <a:t>Self</a:t>
+            </a:r>
+            <a:r>
+              <a:rPr sz="1600">
+                <a:solidFill>
+                  <a:srgbClr val="EEFFFF"/>
+                </a:solidFill>
+                <a:latin typeface="Consolas"/>
+              </a:rPr>
+              <a:t> </a:t>
+            </a:r>
+            <a:r>
+              <a:rPr sz="1600">
+                <a:solidFill>
+                  <a:srgbClr val="BAC2DE"/>
+                </a:solidFill>
+                <a:latin typeface="Consolas"/>
+              </a:rPr>
+              <a:t>{</a:t>
             </a:r>
           </a:p>
           <a:p>
@@ -5058,20 +5031,38 @@
             <a:r>
               <a:rPr sz="1600">
                 <a:solidFill>
-                  <a:srgbClr val="DCDCDC"/>
-                </a:solidFill>
-                <a:latin typeface="Consolas"/>
-              </a:rPr>
-              <a:t>    </a:t>
-            </a:r>
-            <a:r>
-              <a:rPr sz="1600">
-                <a:solidFill>
-                  <a:srgbClr val="DCDCDC"/>
-                </a:solidFill>
-                <a:latin typeface="Consolas"/>
-              </a:rPr>
-              <a:t>}</a:t>
+                  <a:srgbClr val="EEFFFF"/>
+                </a:solidFill>
+                <a:latin typeface="Consolas"/>
+              </a:rPr>
+              <a:t>        </a:t>
+            </a:r>
+            <a:r>
+              <a:rPr sz="1600">
+                <a:solidFill>
+                  <a:srgbClr val="C792EA"/>
+                </a:solidFill>
+                <a:latin typeface="Consolas"/>
+              </a:rPr>
+              <a:t>u8</a:t>
+            </a:r>
+            <a:r>
+              <a:rPr sz="1600">
+                <a:solidFill>
+                  <a:srgbClr val="BAC2DE"/>
+                </a:solidFill>
+                <a:latin typeface="Consolas"/>
+              </a:rPr>
+              <a:t>::</a:t>
+            </a:r>
+            <a:r>
+              <a:rPr sz="1600">
+                <a:solidFill>
+                  <a:srgbClr val="EEFFFF"/>
+                </a:solidFill>
+                <a:latin typeface="Consolas"/>
+              </a:rPr>
+              <a:t>MAX</a:t>
             </a:r>
           </a:p>
           <a:p>
@@ -5089,7 +5080,16 @@
             <a:r>
               <a:rPr sz="1600">
                 <a:solidFill>
-                  <a:srgbClr val="DCDCDC"/>
+                  <a:srgbClr val="EEFFFF"/>
+                </a:solidFill>
+                <a:latin typeface="Consolas"/>
+              </a:rPr>
+              <a:t>    </a:t>
+            </a:r>
+            <a:r>
+              <a:rPr sz="1600">
+                <a:solidFill>
+                  <a:srgbClr val="BAC2DE"/>
                 </a:solidFill>
                 <a:latin typeface="Consolas"/>
               </a:rPr>
@@ -5176,8 +5176,8 @@
           <a:noFill/>
         </p:spPr>
         <p:txBody>
-          <a:bodyPr wrap="none">
-            <a:spAutoFit/>
+          <a:bodyPr wrap="square">
+            <a:noAutofit/>
           </a:bodyPr>
           <a:lstStyle/>
           <a:p>
@@ -5192,6 +5192,15 @@
                 <a:spcPts val="0"/>
               </a:spcAft>
             </a:pPr>
+            <a:r>
+              <a:rPr sz="1600">
+                <a:solidFill>
+                  <a:srgbClr val="BAC2DE"/>
+                </a:solidFill>
+                <a:latin typeface="Consolas"/>
+              </a:rPr>
+              <a:t>}</a:t>
+            </a:r>
           </a:p>
           <a:p>
             <a:pPr>
@@ -5205,87 +5214,6 @@
                 <a:spcPts val="0"/>
               </a:spcAft>
             </a:pPr>
-            <a:r>
-              <a:rPr sz="1600">
-                <a:solidFill>
-                  <a:srgbClr val="C586C0"/>
-                </a:solidFill>
-                <a:latin typeface="Consolas"/>
-              </a:rPr>
-              <a:t>impl</a:t>
-            </a:r>
-            <a:r>
-              <a:rPr sz="1600">
-                <a:solidFill>
-                  <a:srgbClr val="DCDCDC"/>
-                </a:solidFill>
-                <a:latin typeface="Consolas"/>
-              </a:rPr>
-              <a:t> </a:t>
-            </a:r>
-            <a:r>
-              <a:rPr sz="1600">
-                <a:solidFill>
-                  <a:srgbClr val="DCDCDC"/>
-                </a:solidFill>
-                <a:latin typeface="Consolas"/>
-              </a:rPr>
-              <a:t>Integer</a:t>
-            </a:r>
-            <a:r>
-              <a:rPr sz="1600">
-                <a:solidFill>
-                  <a:srgbClr val="DCDCDC"/>
-                </a:solidFill>
-                <a:latin typeface="Consolas"/>
-              </a:rPr>
-              <a:t> </a:t>
-            </a:r>
-            <a:r>
-              <a:rPr sz="1600">
-                <a:solidFill>
-                  <a:srgbClr val="C586C0"/>
-                </a:solidFill>
-                <a:latin typeface="Consolas"/>
-              </a:rPr>
-              <a:t>for</a:t>
-            </a:r>
-            <a:r>
-              <a:rPr sz="1600">
-                <a:solidFill>
-                  <a:srgbClr val="DCDCDC"/>
-                </a:solidFill>
-                <a:latin typeface="Consolas"/>
-              </a:rPr>
-              <a:t> </a:t>
-            </a:r>
-            <a:r>
-              <a:rPr sz="1600">
-                <a:solidFill>
-                  <a:srgbClr val="C586C0"/>
-                </a:solidFill>
-                <a:latin typeface="Consolas"/>
-              </a:rPr>
-              <a:t>i16</a:t>
-            </a:r>
-            <a:r>
-              <a:rPr sz="1600">
-                <a:solidFill>
-                  <a:srgbClr val="DCDCDC"/>
-                </a:solidFill>
-                <a:latin typeface="Consolas"/>
-              </a:rPr>
-              <a:t> </a:t>
-            </a:r>
-            <a:r>
-              <a:rPr sz="1600">
-                <a:solidFill>
-                  <a:srgbClr val="DCDCDC"/>
-                </a:solidFill>
-                <a:latin typeface="Consolas"/>
-              </a:rPr>
-              <a:t>{</a:t>
-            </a:r>
           </a:p>
           <a:p>
             <a:pPr>
@@ -5302,25 +5230,16 @@
             <a:r>
               <a:rPr sz="1600">
                 <a:solidFill>
-                  <a:srgbClr val="DCDCDC"/>
-                </a:solidFill>
-                <a:latin typeface="Consolas"/>
-              </a:rPr>
-              <a:t>    </a:t>
-            </a:r>
-            <a:r>
-              <a:rPr sz="1600">
-                <a:solidFill>
-                  <a:srgbClr val="C586C0"/>
-                </a:solidFill>
-                <a:latin typeface="Consolas"/>
-              </a:rPr>
-              <a:t>fn</a:t>
-            </a:r>
-            <a:r>
-              <a:rPr sz="1600">
-                <a:solidFill>
-                  <a:srgbClr val="DCDCDC"/>
+                  <a:srgbClr val="C792EA"/>
+                </a:solidFill>
+                <a:latin typeface="Consolas"/>
+              </a:rPr>
+              <a:t>impl</a:t>
+            </a:r>
+            <a:r>
+              <a:rPr sz="1600">
+                <a:solidFill>
+                  <a:srgbClr val="EEFFFF"/>
                 </a:solidFill>
                 <a:latin typeface="Consolas"/>
               </a:rPr>
@@ -5329,34 +5248,16 @@
             <a:r>
               <a:rPr sz="1600">
                 <a:solidFill>
-                  <a:srgbClr val="DCDCAA"/>
-                </a:solidFill>
-                <a:latin typeface="Consolas"/>
-              </a:rPr>
-              <a:t>min_value</a:t>
-            </a:r>
-            <a:r>
-              <a:rPr sz="1600">
-                <a:solidFill>
-                  <a:srgbClr val="DCDCDC"/>
-                </a:solidFill>
-                <a:latin typeface="Consolas"/>
-              </a:rPr>
-              <a:t>(</a:t>
-            </a:r>
-            <a:r>
-              <a:rPr sz="1600">
-                <a:solidFill>
-                  <a:srgbClr val="DCDCDC"/>
-                </a:solidFill>
-                <a:latin typeface="Consolas"/>
-              </a:rPr>
-              <a:t>)</a:t>
-            </a:r>
-            <a:r>
-              <a:rPr sz="1600">
-                <a:solidFill>
-                  <a:srgbClr val="DCDCDC"/>
+                  <a:srgbClr val="EEFFFF"/>
+                </a:solidFill>
+                <a:latin typeface="Consolas"/>
+              </a:rPr>
+              <a:t>Integer</a:t>
+            </a:r>
+            <a:r>
+              <a:rPr sz="1600">
+                <a:solidFill>
+                  <a:srgbClr val="EEFFFF"/>
                 </a:solidFill>
                 <a:latin typeface="Consolas"/>
               </a:rPr>
@@ -5365,16 +5266,16 @@
             <a:r>
               <a:rPr sz="1600">
                 <a:solidFill>
-                  <a:srgbClr val="DCDCDC"/>
-                </a:solidFill>
-                <a:latin typeface="Consolas"/>
-              </a:rPr>
-              <a:t>-&gt;</a:t>
-            </a:r>
-            <a:r>
-              <a:rPr sz="1600">
-                <a:solidFill>
-                  <a:srgbClr val="DCDCDC"/>
+                  <a:srgbClr val="C792EA"/>
+                </a:solidFill>
+                <a:latin typeface="Consolas"/>
+              </a:rPr>
+              <a:t>for</a:t>
+            </a:r>
+            <a:r>
+              <a:rPr sz="1600">
+                <a:solidFill>
+                  <a:srgbClr val="EEFFFF"/>
                 </a:solidFill>
                 <a:latin typeface="Consolas"/>
               </a:rPr>
@@ -5383,16 +5284,16 @@
             <a:r>
               <a:rPr sz="1600">
                 <a:solidFill>
-                  <a:srgbClr val="4EC9B0"/>
-                </a:solidFill>
-                <a:latin typeface="Consolas"/>
-              </a:rPr>
-              <a:t>Self</a:t>
-            </a:r>
-            <a:r>
-              <a:rPr sz="1600">
-                <a:solidFill>
-                  <a:srgbClr val="DCDCDC"/>
+                  <a:srgbClr val="C792EA"/>
+                </a:solidFill>
+                <a:latin typeface="Consolas"/>
+              </a:rPr>
+              <a:t>i16</a:t>
+            </a:r>
+            <a:r>
+              <a:rPr sz="1600">
+                <a:solidFill>
+                  <a:srgbClr val="EEFFFF"/>
                 </a:solidFill>
                 <a:latin typeface="Consolas"/>
               </a:rPr>
@@ -5401,7 +5302,7 @@
             <a:r>
               <a:rPr sz="1600">
                 <a:solidFill>
-                  <a:srgbClr val="DCDCDC"/>
+                  <a:srgbClr val="BAC2DE"/>
                 </a:solidFill>
                 <a:latin typeface="Consolas"/>
               </a:rPr>
@@ -5423,38 +5324,110 @@
             <a:r>
               <a:rPr sz="1600">
                 <a:solidFill>
-                  <a:srgbClr val="DCDCDC"/>
-                </a:solidFill>
-                <a:latin typeface="Consolas"/>
-              </a:rPr>
-              <a:t>        </a:t>
-            </a:r>
-            <a:r>
-              <a:rPr sz="1600">
-                <a:solidFill>
-                  <a:srgbClr val="C586C0"/>
-                </a:solidFill>
-                <a:latin typeface="Consolas"/>
-              </a:rPr>
-              <a:t>i16</a:t>
-            </a:r>
-            <a:r>
-              <a:rPr sz="1600">
-                <a:solidFill>
-                  <a:srgbClr val="DCDCDC"/>
-                </a:solidFill>
-                <a:latin typeface="Consolas"/>
-              </a:rPr>
-              <a:t>::</a:t>
-            </a:r>
-            <a:r>
-              <a:rPr sz="1600">
-                <a:solidFill>
-                  <a:srgbClr val="DCDCDC"/>
-                </a:solidFill>
-                <a:latin typeface="Consolas"/>
-              </a:rPr>
-              <a:t>MIN</a:t>
+                  <a:srgbClr val="EEFFFF"/>
+                </a:solidFill>
+                <a:latin typeface="Consolas"/>
+              </a:rPr>
+              <a:t>    </a:t>
+            </a:r>
+            <a:r>
+              <a:rPr sz="1600">
+                <a:solidFill>
+                  <a:srgbClr val="C792EA"/>
+                </a:solidFill>
+                <a:latin typeface="Consolas"/>
+              </a:rPr>
+              <a:t>fn</a:t>
+            </a:r>
+            <a:r>
+              <a:rPr sz="1600">
+                <a:solidFill>
+                  <a:srgbClr val="EEFFFF"/>
+                </a:solidFill>
+                <a:latin typeface="Consolas"/>
+              </a:rPr>
+              <a:t> </a:t>
+            </a:r>
+            <a:r>
+              <a:rPr sz="1600">
+                <a:solidFill>
+                  <a:srgbClr val="82AAFF"/>
+                </a:solidFill>
+                <a:latin typeface="Consolas"/>
+              </a:rPr>
+              <a:t>min_value</a:t>
+            </a:r>
+            <a:r>
+              <a:rPr sz="1600">
+                <a:solidFill>
+                  <a:srgbClr val="BAC2DE"/>
+                </a:solidFill>
+                <a:latin typeface="Consolas"/>
+              </a:rPr>
+              <a:t>(</a:t>
+            </a:r>
+            <a:r>
+              <a:rPr sz="1600">
+                <a:solidFill>
+                  <a:srgbClr val="BAC2DE"/>
+                </a:solidFill>
+                <a:latin typeface="Consolas"/>
+              </a:rPr>
+              <a:t>)</a:t>
+            </a:r>
+            <a:r>
+              <a:rPr sz="1600">
+                <a:solidFill>
+                  <a:srgbClr val="EEFFFF"/>
+                </a:solidFill>
+                <a:latin typeface="Consolas"/>
+              </a:rPr>
+              <a:t> </a:t>
+            </a:r>
+            <a:r>
+              <a:rPr sz="1600">
+                <a:solidFill>
+                  <a:srgbClr val="BAC2DE"/>
+                </a:solidFill>
+                <a:latin typeface="Consolas"/>
+              </a:rPr>
+              <a:t>-&gt;</a:t>
+            </a:r>
+            <a:r>
+              <a:rPr sz="1600">
+                <a:solidFill>
+                  <a:srgbClr val="EEFFFF"/>
+                </a:solidFill>
+                <a:latin typeface="Consolas"/>
+              </a:rPr>
+              <a:t> </a:t>
+            </a:r>
+            <a:r>
+              <a:rPr sz="1600">
+                <a:solidFill>
+                  <a:srgbClr val="FFCB6B"/>
+                </a:solidFill>
+                <a:latin typeface="Consolas"/>
+              </a:rPr>
+              <a:t>Self</a:t>
+            </a:r>
+            <a:r>
+              <a:rPr sz="1600">
+                <a:solidFill>
+                  <a:srgbClr val="EEFFFF"/>
+                </a:solidFill>
+                <a:latin typeface="Consolas"/>
+              </a:rPr>
+              <a:t> </a:t>
+            </a:r>
+            <a:r>
+              <a:rPr sz="1600">
+                <a:solidFill>
+                  <a:srgbClr val="BAC2DE"/>
+                </a:solidFill>
+                <a:latin typeface="Consolas"/>
+              </a:rPr>
+              <a:t>{</a:t>
             </a:r>
           </a:p>
           <a:p>
@@ -5472,20 +5445,38 @@
             <a:r>
               <a:rPr sz="1600">
                 <a:solidFill>
-                  <a:srgbClr val="DCDCDC"/>
-                </a:solidFill>
-                <a:latin typeface="Consolas"/>
-              </a:rPr>
-              <a:t>    </a:t>
-            </a:r>
-            <a:r>
-              <a:rPr sz="1600">
-                <a:solidFill>
-                  <a:srgbClr val="DCDCDC"/>
-                </a:solidFill>
-                <a:latin typeface="Consolas"/>
-              </a:rPr>
-              <a:t>}</a:t>
+                  <a:srgbClr val="EEFFFF"/>
+                </a:solidFill>
+                <a:latin typeface="Consolas"/>
+              </a:rPr>
+              <a:t>        </a:t>
+            </a:r>
+            <a:r>
+              <a:rPr sz="1600">
+                <a:solidFill>
+                  <a:srgbClr val="C792EA"/>
+                </a:solidFill>
+                <a:latin typeface="Consolas"/>
+              </a:rPr>
+              <a:t>i16</a:t>
+            </a:r>
+            <a:r>
+              <a:rPr sz="1600">
+                <a:solidFill>
+                  <a:srgbClr val="BAC2DE"/>
+                </a:solidFill>
+                <a:latin typeface="Consolas"/>
+              </a:rPr>
+              <a:t>::</a:t>
+            </a:r>
+            <a:r>
+              <a:rPr sz="1600">
+                <a:solidFill>
+                  <a:srgbClr val="EEFFFF"/>
+                </a:solidFill>
+                <a:latin typeface="Consolas"/>
+              </a:rPr>
+              <a:t>MIN</a:t>
             </a:r>
           </a:p>
           <a:p>
@@ -5500,6 +5491,24 @@
                 <a:spcPts val="0"/>
               </a:spcAft>
             </a:pPr>
+            <a:r>
+              <a:rPr sz="1600">
+                <a:solidFill>
+                  <a:srgbClr val="EEFFFF"/>
+                </a:solidFill>
+                <a:latin typeface="Consolas"/>
+              </a:rPr>
+              <a:t>    </a:t>
+            </a:r>
+            <a:r>
+              <a:rPr sz="1600">
+                <a:solidFill>
+                  <a:srgbClr val="BAC2DE"/>
+                </a:solidFill>
+                <a:latin typeface="Consolas"/>
+              </a:rPr>
+              <a:t>}</a:t>
+            </a:r>
           </a:p>
           <a:p>
             <a:pPr>
@@ -5513,114 +5522,6 @@
                 <a:spcPts val="0"/>
               </a:spcAft>
             </a:pPr>
-            <a:r>
-              <a:rPr sz="1600">
-                <a:solidFill>
-                  <a:srgbClr val="DCDCDC"/>
-                </a:solidFill>
-                <a:latin typeface="Consolas"/>
-              </a:rPr>
-              <a:t>    </a:t>
-            </a:r>
-            <a:r>
-              <a:rPr sz="1600">
-                <a:solidFill>
-                  <a:srgbClr val="C586C0"/>
-                </a:solidFill>
-                <a:latin typeface="Consolas"/>
-              </a:rPr>
-              <a:t>fn</a:t>
-            </a:r>
-            <a:r>
-              <a:rPr sz="1600">
-                <a:solidFill>
-                  <a:srgbClr val="DCDCDC"/>
-                </a:solidFill>
-                <a:latin typeface="Consolas"/>
-              </a:rPr>
-              <a:t> </a:t>
-            </a:r>
-            <a:r>
-              <a:rPr sz="1600">
-                <a:solidFill>
-                  <a:srgbClr val="DCDCAA"/>
-                </a:solidFill>
-                <a:latin typeface="Consolas"/>
-              </a:rPr>
-              <a:t>max_value</a:t>
-            </a:r>
-            <a:r>
-              <a:rPr sz="1600">
-                <a:solidFill>
-                  <a:srgbClr val="DCDCDC"/>
-                </a:solidFill>
-                <a:latin typeface="Consolas"/>
-              </a:rPr>
-              <a:t>(</a:t>
-            </a:r>
-            <a:r>
-              <a:rPr sz="1600">
-                <a:solidFill>
-                  <a:srgbClr val="DCDCDC"/>
-                </a:solidFill>
-                <a:latin typeface="Consolas"/>
-              </a:rPr>
-              <a:t>)</a:t>
-            </a:r>
-            <a:r>
-              <a:rPr sz="1600">
-                <a:solidFill>
-                  <a:srgbClr val="DCDCDC"/>
-                </a:solidFill>
-                <a:latin typeface="Consolas"/>
-              </a:rPr>
-              <a:t> </a:t>
-            </a:r>
-            <a:r>
-              <a:rPr sz="1600">
-                <a:solidFill>
-                  <a:srgbClr val="DCDCDC"/>
-                </a:solidFill>
-                <a:latin typeface="Consolas"/>
-              </a:rPr>
-              <a:t>-&gt;</a:t>
-            </a:r>
-            <a:r>
-              <a:rPr sz="1600">
-                <a:solidFill>
-                  <a:srgbClr val="DCDCDC"/>
-                </a:solidFill>
-                <a:latin typeface="Consolas"/>
-              </a:rPr>
-              <a:t> </a:t>
-            </a:r>
-            <a:r>
-              <a:rPr sz="1600">
-                <a:solidFill>
-                  <a:srgbClr val="4EC9B0"/>
-                </a:solidFill>
-                <a:latin typeface="Consolas"/>
-              </a:rPr>
-              <a:t>Self</a:t>
-            </a:r>
-            <a:r>
-              <a:rPr sz="1600">
-                <a:solidFill>
-                  <a:srgbClr val="DCDCDC"/>
-                </a:solidFill>
-                <a:latin typeface="Consolas"/>
-              </a:rPr>
-              <a:t> </a:t>
-            </a:r>
-            <a:r>
-              <a:rPr sz="1600">
-                <a:solidFill>
-                  <a:srgbClr val="DCDCDC"/>
-                </a:solidFill>
-                <a:latin typeface="Consolas"/>
-              </a:rPr>
-              <a:t>{</a:t>
-            </a:r>
           </a:p>
           <a:p>
             <a:pPr>
@@ -5637,38 +5538,110 @@
             <a:r>
               <a:rPr sz="1600">
                 <a:solidFill>
-                  <a:srgbClr val="DCDCDC"/>
-                </a:solidFill>
-                <a:latin typeface="Consolas"/>
-              </a:rPr>
-              <a:t>        </a:t>
-            </a:r>
-            <a:r>
-              <a:rPr sz="1600">
-                <a:solidFill>
-                  <a:srgbClr val="C586C0"/>
-                </a:solidFill>
-                <a:latin typeface="Consolas"/>
-              </a:rPr>
-              <a:t>i16</a:t>
-            </a:r>
-            <a:r>
-              <a:rPr sz="1600">
-                <a:solidFill>
-                  <a:srgbClr val="DCDCDC"/>
-                </a:solidFill>
-                <a:latin typeface="Consolas"/>
-              </a:rPr>
-              <a:t>::</a:t>
-            </a:r>
-            <a:r>
-              <a:rPr sz="1600">
-                <a:solidFill>
-                  <a:srgbClr val="DCDCDC"/>
-                </a:solidFill>
-                <a:latin typeface="Consolas"/>
-              </a:rPr>
-              <a:t>MAX</a:t>
+                  <a:srgbClr val="EEFFFF"/>
+                </a:solidFill>
+                <a:latin typeface="Consolas"/>
+              </a:rPr>
+              <a:t>    </a:t>
+            </a:r>
+            <a:r>
+              <a:rPr sz="1600">
+                <a:solidFill>
+                  <a:srgbClr val="C792EA"/>
+                </a:solidFill>
+                <a:latin typeface="Consolas"/>
+              </a:rPr>
+              <a:t>fn</a:t>
+            </a:r>
+            <a:r>
+              <a:rPr sz="1600">
+                <a:solidFill>
+                  <a:srgbClr val="EEFFFF"/>
+                </a:solidFill>
+                <a:latin typeface="Consolas"/>
+              </a:rPr>
+              <a:t> </a:t>
+            </a:r>
+            <a:r>
+              <a:rPr sz="1600">
+                <a:solidFill>
+                  <a:srgbClr val="82AAFF"/>
+                </a:solidFill>
+                <a:latin typeface="Consolas"/>
+              </a:rPr>
+              <a:t>max_value</a:t>
+            </a:r>
+            <a:r>
+              <a:rPr sz="1600">
+                <a:solidFill>
+                  <a:srgbClr val="BAC2DE"/>
+                </a:solidFill>
+                <a:latin typeface="Consolas"/>
+              </a:rPr>
+              <a:t>(</a:t>
+            </a:r>
+            <a:r>
+              <a:rPr sz="1600">
+                <a:solidFill>
+                  <a:srgbClr val="BAC2DE"/>
+                </a:solidFill>
+                <a:latin typeface="Consolas"/>
+              </a:rPr>
+              <a:t>)</a:t>
+            </a:r>
+            <a:r>
+              <a:rPr sz="1600">
+                <a:solidFill>
+                  <a:srgbClr val="EEFFFF"/>
+                </a:solidFill>
+                <a:latin typeface="Consolas"/>
+              </a:rPr>
+              <a:t> </a:t>
+            </a:r>
+            <a:r>
+              <a:rPr sz="1600">
+                <a:solidFill>
+                  <a:srgbClr val="BAC2DE"/>
+                </a:solidFill>
+                <a:latin typeface="Consolas"/>
+              </a:rPr>
+              <a:t>-&gt;</a:t>
+            </a:r>
+            <a:r>
+              <a:rPr sz="1600">
+                <a:solidFill>
+                  <a:srgbClr val="EEFFFF"/>
+                </a:solidFill>
+                <a:latin typeface="Consolas"/>
+              </a:rPr>
+              <a:t> </a:t>
+            </a:r>
+            <a:r>
+              <a:rPr sz="1600">
+                <a:solidFill>
+                  <a:srgbClr val="FFCB6B"/>
+                </a:solidFill>
+                <a:latin typeface="Consolas"/>
+              </a:rPr>
+              <a:t>Self</a:t>
+            </a:r>
+            <a:r>
+              <a:rPr sz="1600">
+                <a:solidFill>
+                  <a:srgbClr val="EEFFFF"/>
+                </a:solidFill>
+                <a:latin typeface="Consolas"/>
+              </a:rPr>
+              <a:t> </a:t>
+            </a:r>
+            <a:r>
+              <a:rPr sz="1600">
+                <a:solidFill>
+                  <a:srgbClr val="BAC2DE"/>
+                </a:solidFill>
+                <a:latin typeface="Consolas"/>
+              </a:rPr>
+              <a:t>{</a:t>
             </a:r>
           </a:p>
           <a:p>
@@ -5686,20 +5659,38 @@
             <a:r>
               <a:rPr sz="1600">
                 <a:solidFill>
-                  <a:srgbClr val="DCDCDC"/>
-                </a:solidFill>
-                <a:latin typeface="Consolas"/>
-              </a:rPr>
-              <a:t>    </a:t>
-            </a:r>
-            <a:r>
-              <a:rPr sz="1600">
-                <a:solidFill>
-                  <a:srgbClr val="DCDCDC"/>
-                </a:solidFill>
-                <a:latin typeface="Consolas"/>
-              </a:rPr>
-              <a:t>}</a:t>
+                  <a:srgbClr val="EEFFFF"/>
+                </a:solidFill>
+                <a:latin typeface="Consolas"/>
+              </a:rPr>
+              <a:t>        </a:t>
+            </a:r>
+            <a:r>
+              <a:rPr sz="1600">
+                <a:solidFill>
+                  <a:srgbClr val="C792EA"/>
+                </a:solidFill>
+                <a:latin typeface="Consolas"/>
+              </a:rPr>
+              <a:t>i16</a:t>
+            </a:r>
+            <a:r>
+              <a:rPr sz="1600">
+                <a:solidFill>
+                  <a:srgbClr val="BAC2DE"/>
+                </a:solidFill>
+                <a:latin typeface="Consolas"/>
+              </a:rPr>
+              <a:t>::</a:t>
+            </a:r>
+            <a:r>
+              <a:rPr sz="1600">
+                <a:solidFill>
+                  <a:srgbClr val="EEFFFF"/>
+                </a:solidFill>
+                <a:latin typeface="Consolas"/>
+              </a:rPr>
+              <a:t>MAX</a:t>
             </a:r>
           </a:p>
           <a:p>
@@ -5717,7 +5708,16 @@
             <a:r>
               <a:rPr sz="1600">
                 <a:solidFill>
-                  <a:srgbClr val="DCDCDC"/>
+                  <a:srgbClr val="EEFFFF"/>
+                </a:solidFill>
+                <a:latin typeface="Consolas"/>
+              </a:rPr>
+              <a:t>    </a:t>
+            </a:r>
+            <a:r>
+              <a:rPr sz="1600">
+                <a:solidFill>
+                  <a:srgbClr val="BAC2DE"/>
                 </a:solidFill>
                 <a:latin typeface="Consolas"/>
               </a:rPr>
@@ -5736,6 +5736,15 @@
                 <a:spcPts val="0"/>
               </a:spcAft>
             </a:pPr>
+            <a:r>
+              <a:rPr sz="1600">
+                <a:solidFill>
+                  <a:srgbClr val="BAC2DE"/>
+                </a:solidFill>
+                <a:latin typeface="Consolas"/>
+              </a:rPr>
+              <a:t>}</a:t>
+            </a:r>
           </a:p>
           <a:p>
             <a:pPr>
@@ -5749,69 +5758,6 @@
                 <a:spcPts val="0"/>
               </a:spcAft>
             </a:pPr>
-            <a:r>
-              <a:rPr sz="1600">
-                <a:solidFill>
-                  <a:srgbClr val="C586C0"/>
-                </a:solidFill>
-                <a:latin typeface="Consolas"/>
-              </a:rPr>
-              <a:t>fn</a:t>
-            </a:r>
-            <a:r>
-              <a:rPr sz="1600">
-                <a:solidFill>
-                  <a:srgbClr val="DCDCDC"/>
-                </a:solidFill>
-                <a:latin typeface="Consolas"/>
-              </a:rPr>
-              <a:t> </a:t>
-            </a:r>
-            <a:r>
-              <a:rPr sz="1600">
-                <a:solidFill>
-                  <a:srgbClr val="DCDCAA"/>
-                </a:solidFill>
-                <a:latin typeface="Consolas"/>
-              </a:rPr>
-              <a:t>main</a:t>
-            </a:r>
-            <a:r>
-              <a:rPr sz="1600">
-                <a:solidFill>
-                  <a:srgbClr val="DCDCDC"/>
-                </a:solidFill>
-                <a:latin typeface="Consolas"/>
-              </a:rPr>
-              <a:t>(</a:t>
-            </a:r>
-            <a:r>
-              <a:rPr sz="1600">
-                <a:solidFill>
-                  <a:srgbClr val="DCDCDC"/>
-                </a:solidFill>
-                <a:latin typeface="Consolas"/>
-              </a:rPr>
-              <a:t>)</a:t>
-            </a:r>
-            <a:r>
-              <a:rPr sz="1600">
-                <a:solidFill>
-                  <a:srgbClr val="DCDCDC"/>
-                </a:solidFill>
-                <a:latin typeface="Consolas"/>
-              </a:rPr>
-              <a:t> </a:t>
-            </a:r>
-            <a:r>
-              <a:rPr sz="1600">
-                <a:solidFill>
-                  <a:srgbClr val="DCDCDC"/>
-                </a:solidFill>
-                <a:latin typeface="Consolas"/>
-              </a:rPr>
-              <a:t>{</a:t>
-            </a:r>
           </a:p>
           <a:p>
             <a:pPr>
@@ -5828,25 +5774,16 @@
             <a:r>
               <a:rPr sz="1600">
                 <a:solidFill>
-                  <a:srgbClr val="DCDCDC"/>
-                </a:solidFill>
-                <a:latin typeface="Consolas"/>
-              </a:rPr>
-              <a:t>    </a:t>
-            </a:r>
-            <a:r>
-              <a:rPr sz="1600">
-                <a:solidFill>
-                  <a:srgbClr val="C586C0"/>
-                </a:solidFill>
-                <a:latin typeface="Consolas"/>
-              </a:rPr>
-              <a:t>let</a:t>
-            </a:r>
-            <a:r>
-              <a:rPr sz="1600">
-                <a:solidFill>
-                  <a:srgbClr val="DCDCDC"/>
+                  <a:srgbClr val="C792EA"/>
+                </a:solidFill>
+                <a:latin typeface="Consolas"/>
+              </a:rPr>
+              <a:t>fn</a:t>
+            </a:r>
+            <a:r>
+              <a:rPr sz="1600">
+                <a:solidFill>
+                  <a:srgbClr val="EEFFFF"/>
                 </a:solidFill>
                 <a:latin typeface="Consolas"/>
               </a:rPr>
@@ -5855,16 +5792,34 @@
             <a:r>
               <a:rPr sz="1600">
                 <a:solidFill>
-                  <a:srgbClr val="DCDCDC"/>
-                </a:solidFill>
-                <a:latin typeface="Consolas"/>
-              </a:rPr>
-              <a:t>r1</a:t>
-            </a:r>
-            <a:r>
-              <a:rPr sz="1600">
-                <a:solidFill>
-                  <a:srgbClr val="DCDCDC"/>
+                  <a:srgbClr val="82AAFF"/>
+                </a:solidFill>
+                <a:latin typeface="Consolas"/>
+              </a:rPr>
+              <a:t>main</a:t>
+            </a:r>
+            <a:r>
+              <a:rPr sz="1600">
+                <a:solidFill>
+                  <a:srgbClr val="BAC2DE"/>
+                </a:solidFill>
+                <a:latin typeface="Consolas"/>
+              </a:rPr>
+              <a:t>(</a:t>
+            </a:r>
+            <a:r>
+              <a:rPr sz="1600">
+                <a:solidFill>
+                  <a:srgbClr val="BAC2DE"/>
+                </a:solidFill>
+                <a:latin typeface="Consolas"/>
+              </a:rPr>
+              <a:t>)</a:t>
+            </a:r>
+            <a:r>
+              <a:rPr sz="1600">
+                <a:solidFill>
+                  <a:srgbClr val="EEFFFF"/>
                 </a:solidFill>
                 <a:latin typeface="Consolas"/>
               </a:rPr>
@@ -5873,74 +5828,11 @@
             <a:r>
               <a:rPr sz="1600">
                 <a:solidFill>
-                  <a:srgbClr val="DCDCDC"/>
-                </a:solidFill>
-                <a:latin typeface="Consolas"/>
-              </a:rPr>
-              <a:t>=</a:t>
-            </a:r>
-            <a:r>
-              <a:rPr sz="1600">
-                <a:solidFill>
-                  <a:srgbClr val="DCDCDC"/>
-                </a:solidFill>
-                <a:latin typeface="Consolas"/>
-              </a:rPr>
-              <a:t> </a:t>
-            </a:r>
-            <a:r>
-              <a:rPr sz="1600">
-                <a:solidFill>
-                  <a:srgbClr val="C586C0"/>
-                </a:solidFill>
-                <a:latin typeface="Consolas"/>
-              </a:rPr>
-              <a:t>u8</a:t>
-            </a:r>
-            <a:r>
-              <a:rPr sz="1600">
-                <a:solidFill>
-                  <a:srgbClr val="DCDCDC"/>
-                </a:solidFill>
-                <a:latin typeface="Consolas"/>
-              </a:rPr>
-              <a:t>::</a:t>
-            </a:r>
-            <a:r>
-              <a:rPr sz="1600">
-                <a:solidFill>
-                  <a:srgbClr val="DCDCDC"/>
-                </a:solidFill>
-                <a:latin typeface="Consolas"/>
-              </a:rPr>
-              <a:t>exhausted_range</a:t>
-            </a:r>
-            <a:r>
-              <a:rPr sz="1600">
-                <a:solidFill>
-                  <a:srgbClr val="DCDCDC"/>
-                </a:solidFill>
-                <a:latin typeface="Consolas"/>
-              </a:rPr>
-              <a:t>(</a:t>
-            </a:r>
-            <a:r>
-              <a:rPr sz="1600">
-                <a:solidFill>
-                  <a:srgbClr val="DCDCDC"/>
-                </a:solidFill>
-                <a:latin typeface="Consolas"/>
-              </a:rPr>
-              <a:t>)</a:t>
-            </a:r>
-            <a:r>
-              <a:rPr sz="1600">
-                <a:solidFill>
-                  <a:srgbClr val="DCDCDC"/>
-                </a:solidFill>
-                <a:latin typeface="Consolas"/>
-              </a:rPr>
-              <a:t>;</a:t>
+                  <a:srgbClr val="BAC2DE"/>
+                </a:solidFill>
+                <a:latin typeface="Consolas"/>
+              </a:rPr>
+              <a:t>{</a:t>
             </a:r>
           </a:p>
           <a:p>
@@ -5958,7 +5850,7 @@
             <a:r>
               <a:rPr sz="1600">
                 <a:solidFill>
-                  <a:srgbClr val="DCDCDC"/>
+                  <a:srgbClr val="EEFFFF"/>
                 </a:solidFill>
                 <a:latin typeface="Consolas"/>
               </a:rPr>
@@ -5967,7 +5859,7 @@
             <a:r>
               <a:rPr sz="1600">
                 <a:solidFill>
-                  <a:srgbClr val="C586C0"/>
+                  <a:srgbClr val="C792EA"/>
                 </a:solidFill>
                 <a:latin typeface="Consolas"/>
               </a:rPr>
@@ -5976,7 +5868,7 @@
             <a:r>
               <a:rPr sz="1600">
                 <a:solidFill>
-                  <a:srgbClr val="DCDCDC"/>
+                  <a:srgbClr val="EEFFFF"/>
                 </a:solidFill>
                 <a:latin typeface="Consolas"/>
               </a:rPr>
@@ -5985,16 +5877,16 @@
             <a:r>
               <a:rPr sz="1600">
                 <a:solidFill>
-                  <a:srgbClr val="DCDCDC"/>
-                </a:solidFill>
-                <a:latin typeface="Consolas"/>
-              </a:rPr>
-              <a:t>r2</a:t>
-            </a:r>
-            <a:r>
-              <a:rPr sz="1600">
-                <a:solidFill>
-                  <a:srgbClr val="DCDCDC"/>
+                  <a:srgbClr val="EEFFFF"/>
+                </a:solidFill>
+                <a:latin typeface="Consolas"/>
+              </a:rPr>
+              <a:t>r1</a:t>
+            </a:r>
+            <a:r>
+              <a:rPr sz="1600">
+                <a:solidFill>
+                  <a:srgbClr val="EEFFFF"/>
                 </a:solidFill>
                 <a:latin typeface="Consolas"/>
               </a:rPr>
@@ -6003,7 +5895,7 @@
             <a:r>
               <a:rPr sz="1600">
                 <a:solidFill>
-                  <a:srgbClr val="DCDCDC"/>
+                  <a:srgbClr val="89DDFF"/>
                 </a:solidFill>
                 <a:latin typeface="Consolas"/>
               </a:rPr>
@@ -6012,7 +5904,7 @@
             <a:r>
               <a:rPr sz="1600">
                 <a:solidFill>
-                  <a:srgbClr val="DCDCDC"/>
+                  <a:srgbClr val="EEFFFF"/>
                 </a:solidFill>
                 <a:latin typeface="Consolas"/>
               </a:rPr>
@@ -6021,16 +5913,16 @@
             <a:r>
               <a:rPr sz="1600">
                 <a:solidFill>
-                  <a:srgbClr val="C586C0"/>
-                </a:solidFill>
-                <a:latin typeface="Consolas"/>
-              </a:rPr>
-              <a:t>i16</a:t>
-            </a:r>
-            <a:r>
-              <a:rPr sz="1600">
-                <a:solidFill>
-                  <a:srgbClr val="DCDCDC"/>
+                  <a:srgbClr val="C792EA"/>
+                </a:solidFill>
+                <a:latin typeface="Consolas"/>
+              </a:rPr>
+              <a:t>u8</a:t>
+            </a:r>
+            <a:r>
+              <a:rPr sz="1600">
+                <a:solidFill>
+                  <a:srgbClr val="BAC2DE"/>
                 </a:solidFill>
                 <a:latin typeface="Consolas"/>
               </a:rPr>
@@ -6039,7 +5931,7 @@
             <a:r>
               <a:rPr sz="1600">
                 <a:solidFill>
-                  <a:srgbClr val="DCDCDC"/>
+                  <a:srgbClr val="EEFFFF"/>
                 </a:solidFill>
                 <a:latin typeface="Consolas"/>
               </a:rPr>
@@ -6048,7 +5940,7 @@
             <a:r>
               <a:rPr sz="1600">
                 <a:solidFill>
-                  <a:srgbClr val="DCDCDC"/>
+                  <a:srgbClr val="BAC2DE"/>
                 </a:solidFill>
                 <a:latin typeface="Consolas"/>
               </a:rPr>
@@ -6057,7 +5949,7 @@
             <a:r>
               <a:rPr sz="1600">
                 <a:solidFill>
-                  <a:srgbClr val="DCDCDC"/>
+                  <a:srgbClr val="BAC2DE"/>
                 </a:solidFill>
                 <a:latin typeface="Consolas"/>
               </a:rPr>
@@ -6066,7 +5958,7 @@
             <a:r>
               <a:rPr sz="1600">
                 <a:solidFill>
-                  <a:srgbClr val="DCDCDC"/>
+                  <a:srgbClr val="BAC2DE"/>
                 </a:solidFill>
                 <a:latin typeface="Consolas"/>
               </a:rPr>
@@ -6085,6 +5977,123 @@
                 <a:spcPts val="0"/>
               </a:spcAft>
             </a:pPr>
+            <a:r>
+              <a:rPr sz="1600">
+                <a:solidFill>
+                  <a:srgbClr val="EEFFFF"/>
+                </a:solidFill>
+                <a:latin typeface="Consolas"/>
+              </a:rPr>
+              <a:t>    </a:t>
+            </a:r>
+            <a:r>
+              <a:rPr sz="1600">
+                <a:solidFill>
+                  <a:srgbClr val="C792EA"/>
+                </a:solidFill>
+                <a:latin typeface="Consolas"/>
+              </a:rPr>
+              <a:t>let</a:t>
+            </a:r>
+            <a:r>
+              <a:rPr sz="1600">
+                <a:solidFill>
+                  <a:srgbClr val="EEFFFF"/>
+                </a:solidFill>
+                <a:latin typeface="Consolas"/>
+              </a:rPr>
+              <a:t> </a:t>
+            </a:r>
+            <a:r>
+              <a:rPr sz="1600">
+                <a:solidFill>
+                  <a:srgbClr val="EEFFFF"/>
+                </a:solidFill>
+                <a:latin typeface="Consolas"/>
+              </a:rPr>
+              <a:t>r2</a:t>
+            </a:r>
+            <a:r>
+              <a:rPr sz="1600">
+                <a:solidFill>
+                  <a:srgbClr val="EEFFFF"/>
+                </a:solidFill>
+                <a:latin typeface="Consolas"/>
+              </a:rPr>
+              <a:t> </a:t>
+            </a:r>
+            <a:r>
+              <a:rPr sz="1600">
+                <a:solidFill>
+                  <a:srgbClr val="89DDFF"/>
+                </a:solidFill>
+                <a:latin typeface="Consolas"/>
+              </a:rPr>
+              <a:t>=</a:t>
+            </a:r>
+            <a:r>
+              <a:rPr sz="1600">
+                <a:solidFill>
+                  <a:srgbClr val="EEFFFF"/>
+                </a:solidFill>
+                <a:latin typeface="Consolas"/>
+              </a:rPr>
+              <a:t> </a:t>
+            </a:r>
+            <a:r>
+              <a:rPr sz="1600">
+                <a:solidFill>
+                  <a:srgbClr val="C792EA"/>
+                </a:solidFill>
+                <a:latin typeface="Consolas"/>
+              </a:rPr>
+              <a:t>i16</a:t>
+            </a:r>
+            <a:r>
+              <a:rPr sz="1600">
+                <a:solidFill>
+                  <a:srgbClr val="BAC2DE"/>
+                </a:solidFill>
+                <a:latin typeface="Consolas"/>
+              </a:rPr>
+              <a:t>::</a:t>
+            </a:r>
+            <a:r>
+              <a:rPr sz="1600">
+                <a:solidFill>
+                  <a:srgbClr val="EEFFFF"/>
+                </a:solidFill>
+                <a:latin typeface="Consolas"/>
+              </a:rPr>
+              <a:t>exhausted_range</a:t>
+            </a:r>
+            <a:r>
+              <a:rPr sz="1600">
+                <a:solidFill>
+                  <a:srgbClr val="BAC2DE"/>
+                </a:solidFill>
+                <a:latin typeface="Consolas"/>
+              </a:rPr>
+              <a:t>(</a:t>
+            </a:r>
+            <a:r>
+              <a:rPr sz="1600">
+                <a:solidFill>
+                  <a:srgbClr val="BAC2DE"/>
+                </a:solidFill>
+                <a:latin typeface="Consolas"/>
+              </a:rPr>
+              <a:t>)</a:t>
+            </a:r>
+            <a:r>
+              <a:rPr sz="1600">
+                <a:solidFill>
+                  <a:srgbClr val="BAC2DE"/>
+                </a:solidFill>
+                <a:latin typeface="Consolas"/>
+              </a:rPr>
+              <a:t>;</a:t>
+            </a:r>
           </a:p>
           <a:p>
             <a:pPr>
@@ -6098,96 +6107,6 @@
                 <a:spcPts val="0"/>
               </a:spcAft>
             </a:pPr>
-            <a:r>
-              <a:rPr sz="1600">
-                <a:solidFill>
-                  <a:srgbClr val="DCDCDC"/>
-                </a:solidFill>
-                <a:latin typeface="Consolas"/>
-              </a:rPr>
-              <a:t>    </a:t>
-            </a:r>
-            <a:r>
-              <a:rPr sz="1600">
-                <a:solidFill>
-                  <a:srgbClr val="DCDCAA"/>
-                </a:solidFill>
-                <a:latin typeface="Consolas"/>
-              </a:rPr>
-              <a:t>assert!</a:t>
-            </a:r>
-            <a:r>
-              <a:rPr sz="1600">
-                <a:solidFill>
-                  <a:srgbClr val="DCDCDC"/>
-                </a:solidFill>
-                <a:latin typeface="Consolas"/>
-              </a:rPr>
-              <a:t>(</a:t>
-            </a:r>
-            <a:r>
-              <a:rPr sz="1600">
-                <a:solidFill>
-                  <a:srgbClr val="DCDCDC"/>
-                </a:solidFill>
-                <a:latin typeface="Consolas"/>
-              </a:rPr>
-              <a:t>r1</a:t>
-            </a:r>
-            <a:r>
-              <a:rPr sz="1600">
-                <a:solidFill>
-                  <a:srgbClr val="DCDCDC"/>
-                </a:solidFill>
-                <a:latin typeface="Consolas"/>
-              </a:rPr>
-              <a:t>.</a:t>
-            </a:r>
-            <a:r>
-              <a:rPr sz="1600">
-                <a:solidFill>
-                  <a:srgbClr val="DCDCDC"/>
-                </a:solidFill>
-                <a:latin typeface="Consolas"/>
-              </a:rPr>
-              <a:t>is_empty</a:t>
-            </a:r>
-            <a:r>
-              <a:rPr sz="1600">
-                <a:solidFill>
-                  <a:srgbClr val="DCDCDC"/>
-                </a:solidFill>
-                <a:latin typeface="Consolas"/>
-              </a:rPr>
-              <a:t>(</a:t>
-            </a:r>
-            <a:r>
-              <a:rPr sz="1600">
-                <a:solidFill>
-                  <a:srgbClr val="DCDCDC"/>
-                </a:solidFill>
-                <a:latin typeface="Consolas"/>
-              </a:rPr>
-              <a:t>)</a:t>
-            </a:r>
-            <a:r>
-              <a:rPr sz="1600">
-                <a:solidFill>
-                  <a:srgbClr val="DCDCDC"/>
-                </a:solidFill>
-                <a:latin typeface="Consolas"/>
-              </a:rPr>
-              <a:t>)</a:t>
-            </a:r>
-            <a:r>
-              <a:rPr sz="1600">
-                <a:solidFill>
-                  <a:srgbClr val="DCDCDC"/>
-                </a:solidFill>
-                <a:latin typeface="Consolas"/>
-              </a:rPr>
-              <a:t>;</a:t>
-            </a:r>
           </a:p>
           <a:p>
             <a:pPr>
@@ -6204,7 +6123,7 @@
             <a:r>
               <a:rPr sz="1600">
                 <a:solidFill>
-                  <a:srgbClr val="DCDCDC"/>
+                  <a:srgbClr val="EEFFFF"/>
                 </a:solidFill>
                 <a:latin typeface="Consolas"/>
               </a:rPr>
@@ -6213,7 +6132,7 @@
             <a:r>
               <a:rPr sz="1600">
                 <a:solidFill>
-                  <a:srgbClr val="DCDCAA"/>
+                  <a:srgbClr val="82AAFF"/>
                 </a:solidFill>
                 <a:latin typeface="Consolas"/>
               </a:rPr>
@@ -6222,7 +6141,7 @@
             <a:r>
               <a:rPr sz="1600">
                 <a:solidFill>
-                  <a:srgbClr val="DCDCDC"/>
+                  <a:srgbClr val="BAC2DE"/>
                 </a:solidFill>
                 <a:latin typeface="Consolas"/>
               </a:rPr>
@@ -6231,16 +6150,16 @@
             <a:r>
               <a:rPr sz="1600">
                 <a:solidFill>
-                  <a:srgbClr val="DCDCDC"/>
-                </a:solidFill>
-                <a:latin typeface="Consolas"/>
-              </a:rPr>
-              <a:t>r2</a:t>
-            </a:r>
-            <a:r>
-              <a:rPr sz="1600">
-                <a:solidFill>
-                  <a:srgbClr val="DCDCDC"/>
+                  <a:srgbClr val="EEFFFF"/>
+                </a:solidFill>
+                <a:latin typeface="Consolas"/>
+              </a:rPr>
+              <a:t>r1</a:t>
+            </a:r>
+            <a:r>
+              <a:rPr sz="1600">
+                <a:solidFill>
+                  <a:srgbClr val="BAC2DE"/>
                 </a:solidFill>
                 <a:latin typeface="Consolas"/>
               </a:rPr>
@@ -6249,7 +6168,7 @@
             <a:r>
               <a:rPr sz="1600">
                 <a:solidFill>
-                  <a:srgbClr val="DCDCDC"/>
+                  <a:srgbClr val="EEFFFF"/>
                 </a:solidFill>
                 <a:latin typeface="Consolas"/>
               </a:rPr>
@@ -6258,7 +6177,7 @@
             <a:r>
               <a:rPr sz="1600">
                 <a:solidFill>
-                  <a:srgbClr val="DCDCDC"/>
+                  <a:srgbClr val="BAC2DE"/>
                 </a:solidFill>
                 <a:latin typeface="Consolas"/>
               </a:rPr>
@@ -6267,7 +6186,7 @@
             <a:r>
               <a:rPr sz="1600">
                 <a:solidFill>
-                  <a:srgbClr val="DCDCDC"/>
+                  <a:srgbClr val="BAC2DE"/>
                 </a:solidFill>
                 <a:latin typeface="Consolas"/>
               </a:rPr>
@@ -6276,7 +6195,7 @@
             <a:r>
               <a:rPr sz="1600">
                 <a:solidFill>
-                  <a:srgbClr val="DCDCDC"/>
+                  <a:srgbClr val="BAC2DE"/>
                 </a:solidFill>
                 <a:latin typeface="Consolas"/>
               </a:rPr>
@@ -6285,7 +6204,7 @@
             <a:r>
               <a:rPr sz="1600">
                 <a:solidFill>
-                  <a:srgbClr val="DCDCDC"/>
+                  <a:srgbClr val="BAC2DE"/>
                 </a:solidFill>
                 <a:latin typeface="Consolas"/>
               </a:rPr>
@@ -6307,7 +6226,110 @@
             <a:r>
               <a:rPr sz="1600">
                 <a:solidFill>
-                  <a:srgbClr val="DCDCDC"/>
+                  <a:srgbClr val="EEFFFF"/>
+                </a:solidFill>
+                <a:latin typeface="Consolas"/>
+              </a:rPr>
+              <a:t>    </a:t>
+            </a:r>
+            <a:r>
+              <a:rPr sz="1600">
+                <a:solidFill>
+                  <a:srgbClr val="82AAFF"/>
+                </a:solidFill>
+                <a:latin typeface="Consolas"/>
+              </a:rPr>
+              <a:t>assert!</a:t>
+            </a:r>
+            <a:r>
+              <a:rPr sz="1600">
+                <a:solidFill>
+                  <a:srgbClr val="BAC2DE"/>
+                </a:solidFill>
+                <a:latin typeface="Consolas"/>
+              </a:rPr>
+              <a:t>(</a:t>
+            </a:r>
+            <a:r>
+              <a:rPr sz="1600">
+                <a:solidFill>
+                  <a:srgbClr val="EEFFFF"/>
+                </a:solidFill>
+                <a:latin typeface="Consolas"/>
+              </a:rPr>
+              <a:t>r2</a:t>
+            </a:r>
+            <a:r>
+              <a:rPr sz="1600">
+                <a:solidFill>
+                  <a:srgbClr val="BAC2DE"/>
+                </a:solidFill>
+                <a:latin typeface="Consolas"/>
+              </a:rPr>
+              <a:t>.</a:t>
+            </a:r>
+            <a:r>
+              <a:rPr sz="1600">
+                <a:solidFill>
+                  <a:srgbClr val="EEFFFF"/>
+                </a:solidFill>
+                <a:latin typeface="Consolas"/>
+              </a:rPr>
+              <a:t>is_empty</a:t>
+            </a:r>
+            <a:r>
+              <a:rPr sz="1600">
+                <a:solidFill>
+                  <a:srgbClr val="BAC2DE"/>
+                </a:solidFill>
+                <a:latin typeface="Consolas"/>
+              </a:rPr>
+              <a:t>(</a:t>
+            </a:r>
+            <a:r>
+              <a:rPr sz="1600">
+                <a:solidFill>
+                  <a:srgbClr val="BAC2DE"/>
+                </a:solidFill>
+                <a:latin typeface="Consolas"/>
+              </a:rPr>
+              <a:t>)</a:t>
+            </a:r>
+            <a:r>
+              <a:rPr sz="1600">
+                <a:solidFill>
+                  <a:srgbClr val="BAC2DE"/>
+                </a:solidFill>
+                <a:latin typeface="Consolas"/>
+              </a:rPr>
+              <a:t>)</a:t>
+            </a:r>
+            <a:r>
+              <a:rPr sz="1600">
+                <a:solidFill>
+                  <a:srgbClr val="BAC2DE"/>
+                </a:solidFill>
+                <a:latin typeface="Consolas"/>
+              </a:rPr>
+              <a:t>;</a:t>
+            </a:r>
+          </a:p>
+          <a:p>
+            <a:pPr>
+              <a:lnSpc>
+                <a:spcPct val="95000"/>
+              </a:lnSpc>
+              <a:spcBef>
+                <a:spcPts val="0"/>
+              </a:spcBef>
+              <a:spcAft>
+                <a:spcPts val="0"/>
+              </a:spcAft>
+            </a:pPr>
+            <a:r>
+              <a:rPr sz="1600">
+                <a:solidFill>
+                  <a:srgbClr val="BAC2DE"/>
                 </a:solidFill>
                 <a:latin typeface="Consolas"/>
               </a:rPr>

--- a/docs/example1_walkthrough.pptx
+++ b/docs/example1_walkthrough.pptx
@@ -9,7 +9,7 @@
     <p:sldId id="257" r:id="rId8"/>
     <p:sldId id="258" r:id="rId9"/>
   </p:sldIdLst>
-  <p:sldSz cx="9144000" cy="6858000" type="screen4x3"/>
+  <p:sldSz cx="12192000" cy="6858000" type="screen4x3"/>
   <p:notesSz cx="6858000" cy="9144000"/>
   <p:defaultTextStyle>
     <a:defPPr>
@@ -3099,7 +3099,7 @@
         <p:spPr>
           <a:xfrm>
             <a:off x="0" y="0"/>
-            <a:ext cx="9144000" cy="6858000"/>
+            <a:ext cx="12192000" cy="6858000"/>
           </a:xfrm>
           <a:prstGeom prst="rect">
             <a:avLst/>
@@ -3141,7 +3141,7 @@
         </p:nvSpPr>
         <p:spPr>
           <a:xfrm>
-            <a:off x="7543800" y="0"/>
+            <a:off x="10591800" y="0"/>
             <a:ext cx="1600200" cy="6858000"/>
           </a:xfrm>
           <a:prstGeom prst="rect">
@@ -3186,7 +3186,7 @@
         </p:nvSpPr>
         <p:spPr>
           <a:xfrm rot="16200000">
-            <a:off x="7616952" y="274320"/>
+            <a:off x="10664952" y="274320"/>
             <a:ext cx="1453896" cy="6309360"/>
           </a:xfrm>
           <a:prstGeom prst="rect">
@@ -3223,7 +3223,7 @@
         <p:spPr>
           <a:xfrm>
             <a:off x="731520" y="502920"/>
-            <a:ext cx="6446520" cy="1051560"/>
+            <a:ext cx="9494520" cy="1051560"/>
           </a:xfrm>
           <a:prstGeom prst="rect">
             <a:avLst/>
@@ -3336,7 +3336,7 @@
         </p:blipFill>
         <p:spPr>
           <a:xfrm>
-            <a:off x="1259576" y="1691640"/>
+            <a:off x="2783576" y="1691640"/>
             <a:ext cx="5024647" cy="4846320"/>
           </a:xfrm>
           <a:prstGeom prst="rect">
@@ -3371,7 +3371,7 @@
         <p:spPr>
           <a:xfrm>
             <a:off x="0" y="0"/>
-            <a:ext cx="9144000" cy="6858000"/>
+            <a:ext cx="12192000" cy="6858000"/>
           </a:xfrm>
           <a:prstGeom prst="rect">
             <a:avLst/>
@@ -3414,7 +3414,7 @@
         <p:spPr>
           <a:xfrm>
             <a:off x="164592" y="109728"/>
-            <a:ext cx="8814816" cy="6638544"/>
+            <a:ext cx="11862816" cy="6638544"/>
           </a:xfrm>
           <a:prstGeom prst="rect">
             <a:avLst/>
@@ -5125,7 +5125,7 @@
         <p:spPr>
           <a:xfrm>
             <a:off x="0" y="0"/>
-            <a:ext cx="9144000" cy="6858000"/>
+            <a:ext cx="12192000" cy="6858000"/>
           </a:xfrm>
           <a:prstGeom prst="rect">
             <a:avLst/>
@@ -5168,7 +5168,7 @@
         <p:spPr>
           <a:xfrm>
             <a:off x="164592" y="109728"/>
-            <a:ext cx="8814816" cy="6638544"/>
+            <a:ext cx="11862816" cy="6638544"/>
           </a:xfrm>
           <a:prstGeom prst="rect">
             <a:avLst/>
